--- a/Docs/First_Review_Sample_Presentation.pptx
+++ b/Docs/First_Review_Sample_Presentation.pptx
@@ -146,6 +146,62 @@
 </p1510:revInfo>
 </file>
 
+<file path=ppt/ink/ink1.xml><?xml version="1.0" encoding="utf-8"?>
+<inkml:ink xmlns:inkml="http://www.w3.org/2003/InkML">
+  <inkml:definitions>
+    <inkml:context xml:id="ctx0">
+      <inkml:inkSource xml:id="inkSrc0">
+        <inkml:traceFormat>
+          <inkml:channel name="X" type="integer" min="-2.14748E9" max="2.14748E9" units="cm"/>
+          <inkml:channel name="Y" type="integer" min="-2.14748E9" max="2.14748E9" units="cm"/>
+          <inkml:channel name="F" type="integer" max="32767" units="dev"/>
+        </inkml:traceFormat>
+        <inkml:channelProperties>
+          <inkml:channelProperty channel="X" name="resolution" value="1000" units="1/cm"/>
+          <inkml:channelProperty channel="Y" name="resolution" value="1000" units="1/cm"/>
+          <inkml:channelProperty channel="F" name="resolution" value="0" units="1/dev"/>
+        </inkml:channelProperties>
+      </inkml:inkSource>
+      <inkml:timestamp xml:id="ts0" timeString="2026-09-18T04:02:18.222"/>
+    </inkml:context>
+    <inkml:brush xml:id="br0">
+      <inkml:brushProperty name="width" value="0.35" units="cm"/>
+      <inkml:brushProperty name="height" value="0.35" units="cm"/>
+      <inkml:brushProperty name="color" value="#FFFFFF"/>
+    </inkml:brush>
+  </inkml:definitions>
+  <inkml:trace contextRef="#ctx0" brushRef="#br0">727 1255 24575,'108'-19'0,"115"-29"0,893-238-2932,-373 90 1524,-631 171 1523,-102 23 194,-28 4 397,-12 1 245,-399 44 1361,150-12-2529,-508 11 152,-11-42 279,605-5-199,189 1-15,-1 0 0,1 1 0,0-1 0,-1 1 0,1 0 0,0 0 0,-5 2 0,8-3 0,1 0 0,0 0 0,0 0 0,0 0 0,0 0 0,-1 0 0,1 0 0,0 1 0,0-1 0,0 0 0,0 0 0,-1 0 0,1 0 0,0 0 0,0 0 0,0 1 0,0-1 0,0 0 0,0 0 0,0 0 0,-1 0 0,1 1 0,0-1 0,0 0 0,0 0 0,0 0 0,0 1 0,0-1 0,0 0 0,0 0 0,0 0 0,0 1 0,0-1 0,0 0 0,0 0 0,0 0 0,0 0 0,0 1 0,0-1 0,1 0 0,-1 0 0,0 0 0,0 1 0,0-1 0,0 0 0,0 0 0,0 0 0,0 0 0,1 0 0,-1 1 0,24 9 0,213 46 0,-57-16 0,77 30 0,130 31 0,-370-97 0,-12-4 0,1 1 0,-1 0 0,0 0 0,0 0 0,-1 1 0,1-1 0,0 1 0,0 1 0,-1-1 0,1 1 0,6 4 0,-10-6 0,-1 0 0,1-1 0,-1 1 0,0 0 0,1-1 0,-1 1 0,0 0 0,1-1 0,-1 1 0,0 0 0,0 0 0,0-1 0,0 1 0,0 0 0,0 0 0,0-1 0,0 1 0,0 0 0,0 0 0,0 0 0,0-1 0,0 1 0,0 0 0,-1-1 0,1 1 0,0 0 0,-1 0 0,1-1 0,-1 1 0,1 0 0,0-1 0,-1 1 0,1-1 0,-1 1 0,0-1 0,1 1 0,-1-1 0,0 1 0,-29 16 0,-57 16 0,-2-4 0,-1-3 0,-96 13 0,104-27 0,-1-4 0,-154-5 0,222-2 0,-1 0 0,1 1 0,-25 6 0,22-4 0,0 0 0,-23 0 0,19-4 0,-1-1 0,0-2 0,1 0 0,0-1 0,-23-8 0,-104-42 0,81 22 0,63 29 0,-1 0 0,1 0 0,0-1 0,0 0 0,0 0 0,0 0 0,1-1 0,0 0 0,-6-7 0,10 11 0,-1 0 0,1 0 0,-1-1 0,1 1 0,-1 0 0,1-1 0,0 1 0,-1-1 0,1 1 0,0 0 0,0-1 0,0 1 0,0 0 0,0-1 0,1 1 0,-1-1 0,0 1 0,1 0 0,-1-1 0,0 1 0,1 0 0,0-1 0,-1 1 0,1 0 0,0 0 0,0 0 0,-1 0 0,1 0 0,0 0 0,0 0 0,3-2 0,1-2 0,2 1 0,-1-1 0,1 1 0,11-5 0,247-103 0,-2 2 0,-262 109 0,0 1 0,0 0 0,-1 0 0,1-1 0,0 1 0,0-1 0,-1 1 0,1 0 0,0-1 0,0 0 0,-1 1 0,1-1 0,0 1 0,-1-1 0,1 0 0,-1 1 0,1-1 0,-1 0 0,1 0 0,-1 0 0,0 0 0,0 1 0,-1-1 0,1 1 0,0-1 0,-1 1 0,1 0 0,0-1 0,-1 1 0,1-1 0,-1 1 0,1 0 0,-1 0 0,1-1 0,-1 1 0,1 0 0,-1 0 0,1-1 0,-1 1 0,0 0 0,1 0 0,-1 0 0,0 0 0,-53-5 0,36 4 0,-123-19 0,-185-51 0,317 69 0,-20-5 0,0-1 0,1-2 0,-50-23 0,76 32 0,0 0 0,1 0 0,-1 0 0,1 0 0,-1 0 0,1 0 0,-1-1 0,1 1 0,0 0 0,-1-1 0,1 1 0,0-1 0,0 0 0,0 1 0,0-1 0,0-3 0,0 4 0,1 0 0,0-1 0,0 1 0,0 0 0,0-1 0,0 1 0,0 0 0,1-1 0,-1 1 0,0 0 0,1 0 0,-1-1 0,1 1 0,-1 0 0,1 0 0,0 0 0,-1-1 0,3 0 0,0-2 0,0 1 0,1 0 0,0-1 0,0 2 0,0-1 0,0 0 0,0 1 0,0 0 0,1-1 0,-1 2 0,8-3 0,419-124 0,-403 121 0,0 2 0,1 0 0,0 2 0,-1 2 0,33 1 0,-230-17 0,94 11 0,242 6 0,0 7 0,0 8 0,179 40 0,-336-53 0,96 24 0,-94-22 0,-1 1 0,1-1 0,-1 2 0,0-1 0,0 2 0,16 11 0,-26-17 0,0 0 0,0 0 0,1 0 0,-1 0 0,0 0 0,0 1 0,0-1 0,0 0 0,0 0 0,0 1 0,-1-1 0,1 1 0,0-1 0,-1 1 0,1-1 0,-1 1 0,1-1 0,-1 1 0,0-1 0,0 1 0,0 0 0,0-1 0,0 1 0,0-1 0,0 1 0,0 0 0,0-1 0,-1 1 0,1-1 0,-1 1 0,1-1 0,-1 1 0,0-1 0,1 0 0,-1 1 0,0-1 0,0 0 0,-2 3 0,-5 4 0,0 0 0,0-1 0,0 0 0,-18 11 0,11-7 0,-54 36 0,-1-4 0,-2-2 0,-2-3 0,-2-4 0,-1-3 0,-1-4 0,-127 28 0,204-55 0,-1 0 0,0 1 0,0-1 0,1 0 0,-1 1 0,0 0 0,0-1 0,1 1 0,-1 0 0,1 0 0,-1 0 0,1 0 0,-3 2 0,4-2 0,-1-1 0,1 1 0,0-1 0,0 1 0,0-1 0,0 1 0,0-1 0,0 0 0,0 1 0,0-1 0,0 1 0,0-1 0,0 1 0,0-1 0,0 1 0,0-1 0,0 1 0,0-1 0,0 1 0,1-1 0,-1 0 0,0 1 0,0-1 0,1 1 0,-1-1 0,0 0 0,0 1 0,1-1 0,-1 0 0,0 1 0,1-1 0,0 1 0,3 2 0,1 0 0,0 0 0,0 0 0,0-1 0,1 0 0,-1 0 0,0 0 0,7 1 0,260 41 0,-169-31 0,747 93-639,4-45 0,-616-61 639,-219 4 200,-19-4-190,0 0 0,1 0 0,-1 0 0,0 0 0,0 0 0,0 0 0,0 0 0,0 0 0,1 0 0,-1 0 0,0 1 0,0-1 0,0 0 0,0 0 0,0 0 0,0 0 0,1 0 0,-1 0 0,0 1-1,0-1 1,0 0 0,0 0 0,0 0 0,0 0 0,0 1 0,0-1 0,0 0 0,0 0 0,0 0 0,0 1 0,0-1 0,0 0 0,0 0 0,0 0 0,0 0 0,0 1 0,0-1 0,0 0 0,0 0 0,0 0 0,0 0 0,0 1 0,-1-1 0,-1 2 48,0 0 0,0-1 0,-1 1 1,1-1-1,-1 1 0,1-1 0,-1 0 0,1 0 0,-1 0 0,-4 1 0,-60 14-58,-130 13 0,96-17 0,-395 49 0,-8-34 0,464-27 0,49-1 0,76-1 0,186 1-92,432-6-619,1-39 222,-646 38 489,62-3 0,-108 12 76,-14 4 123,-24 10 392,-63 26-407,-119 38 0,-103 16-126,298-92-58,-303 79 0,222-63 0,-133 9 0,192-27 0,26-1 0,-1 0 0,1 0 0,-1 1 0,1 1 0,-1-1 0,1 2 0,0-1 0,-12 5 0,-127 43 0,146-50 0,98-31 0,-2-4 0,126-66 0,-188 85 0,-24 13 0,-4 1 0,0 0 0,1 0 0,-1 0 0,0 0 0,0 0 0,0-1 0,0 0 0,-1 0 0,1 0 0,-1 0 0,0-1 0,6-6 0,-9 9 0,0 1 0,0-1 0,0 0 0,0 1 0,1-1 0,-1 0 0,0 1 0,0-1 0,-1 0 0,1 1 0,0-1 0,0 0 0,0 1 0,0-1 0,0 0 0,-1 1 0,1-1 0,0 1 0,-1-1 0,1 0 0,0 1 0,-1-1 0,1 1 0,-1-1 0,1 1 0,-1-1 0,1 1 0,-1-1 0,1 1 0,-1 0 0,1-1 0,-1 1 0,0 0 0,1-1 0,-2 1 0,-27-9 0,28 9 0,-60-8 0,-1 2 0,0 3 0,-78 6 0,60-1 0,51 0 0,-29 0 0,55-2 0,0 0 0,-1-1 0,1 1 0,0-1 0,0 0 0,0 0 0,-1 0 0,1 0 0,0 0 0,0-1 0,0 1 0,1-1 0,-4-2 0,5 4 0,1-1 0,-1 1 0,1-1 0,-1 1 0,1-1 0,-1 1 0,1-1 0,0 1 0,-1-1 0,1 0 0,0 1 0,-1-1 0,1 0 0,0 1 0,0-1 0,0 0 0,0 1 0,0-1 0,-1 0 0,1 1 0,0-1 0,1 0 0,-1 0 0,0 1 0,0-1 0,0 0 0,0 0 0,16-17 0,33-11 0,26-5-92,2 3 1,105-27-1,170-24-496,-77 25 394,292-20 1,-545 75 193,-14 0 0,1 1 0,-1 1 0,1-1 0,-1 2 0,0-1 0,1 1 0,10 2 0,-17 1 0,-11 1 0,-23 9 264,-44 12-1,15-5 74,-444 164-473,-42 15-450,526-193 586,-12 5 0,-1-1 0,-56 10 0,77-20 3,20-3 218,27-6 395,546-77-336,-340 55-292,-174 21 12,336-59 0,-390 64 0,-11 2 0,-26-1 0,-176 6 0,177-2 0,-288 12-218,-808 22-1285,1091-34 1503,21 0 0,-1 0 0,0-1 0,1 0 0,-1-1 0,1 0 0,-1 0 0,-8-3 0,17 4 0,0 0 0,0 0 0,0 0 0,-1-1 0,1 1 0,0 0 0,0 0 0,0 0 0,-1 0 0,1 0 0,0 0 0,0 0 0,0-1 0,0 1 0,-1 0 0,1 0 0,0 0 0,0 0 0,0-1 0,0 1 0,0 0 0,0 0 0,0 0 0,-1-1 0,1 1 0,0 0 0,0 0 0,0 0 0,0-1 0,0 1 0,0 0 0,0 0 0,0-1 0,0 1 0,0 0 0,0 0 0,0 0 0,0-1 0,0 1 0,0 0 0,1 0 0,-1 0 0,0-1 0,0 1 0,0 0 0,0 0 0,0 0 0,0-1 0,1 1 0,-1 0 0,0 0 0,0 0 0,0 0 0,0 0 0,1-1 0,-1 1 0,0 0 0,0 0 0,0 0 0,1 0 0,-1 0 0,0 0 0,0 0 0,0 0 0,1 0 0,-1 0 0,10-5 69,-1 0 1,1 1-1,0 1 1,1-1-1,-1 2 1,0-1-1,16 0 0,11-4 310,964-138 408,-948 141-787,-22 2 0,-70 2 0,-73 6 0,-200 35 0,-110 52 0,291-62 0,274-51 0,516-63-948,-5 2-62,-394 34 954,-242 40 124,-23 3 123,-37 2 480,-193 9 352,-2 6-962,-88 6-225,-1951 214-3487,2275-233 3651,-42 6-41,29-4 82,17-3 122,151-30 1984,-68 11-1528,237-45 193,254-57-2162,-200 22 1230,-10-31 48,-348 122 86,-11 7 3,0-1-1,-1 0 1,1-1 0,-1 0 0,0 0-1,0-1 1,0 0 0,10-10-1,-16 15 5,-1-1 1,1 0-1,0 0 0,-1 0 0,1 0 1,0 1-1,-1-1 0,1 0 0,-1 0 0,0 0 1,1 0-1,-1 0 0,0 0 0,0 0 1,1 0-1,-1 0 0,0 0 0,0 0 0,0 0 1,0 0-1,0-1 0,-1 1 0,1 0 1,0 0-1,0 0 0,-1 0 0,1 0 0,0 0 1,-1 1-1,1-1 0,-1 0 0,1 0 1,-1 0-1,0 0 0,1 0 0,-1 1 0,0-1 1,0 0-1,-1 0 0,-1-2 46,-1 0 0,0 1 0,0 0 0,0 0 0,-1 0 0,1 0 0,0 1 0,-6-2 0,-35-3-67,0 1 0,0 2 0,0 3 0,-56 5 0,47-2 0,-93 7 0,-185 36 0,314-43 0,13-1 0,0-1 0,0 1 0,0-2 0,0 1 0,0 0 0,0-1 0,0 0 0,-1 0 0,1-1 0,-9-1 0,14 2 0,0 0 0,-1 0 0,1 0 0,-1-1 0,1 1 0,0 0 0,-1 0 0,1-1 0,-1 1 0,1 0 0,0 0 0,-1-1 0,1 1 0,0 0 0,0-1 0,-1 1 0,1-1 0,0 1 0,0 0 0,-1-1 0,1 1 0,0-1 0,0 1 0,0 0 0,0-1 0,0 1 0,0-1 0,0 1 0,0-1 0,0 1 0,0 0 0,0-1 0,0 0 0,9-17 0,3 5 0,0 0 0,1 1 0,1 1 0,0 0 0,0 0 0,27-13 0,-40 23 0,163-92-361,225-92 0,-292 142 100,1138-438-1193,-1184 465 1435,76-22-27,-112 35 72,-1 0 0,0 1 0,1 1 0,-1 0 0,1 1 0,23 3 0,-35-2 16,0 0 1,0 0 0,0 0-1,-1 0 1,1 0 0,0 0-1,-1 1 1,1-1 0,-1 1 0,1 0-1,-1 0 1,0 0 0,1 0-1,-1 0 1,0 0 0,2 4-1,3 5 301,-1-1-1,9 23 0,-11-23-200,1 0 0,0 1 0,11 14 0,-2-8-142,1-1 0,1-1 0,34 27 0,63 32 0,-103-68 0,103 60-249,138 57 0,129 30-255,-345-140 503,222 81-2,-177-69 3,103 18 1,-147-40-40,6 3 241,-63 4 636,-28-1-837,-1-3 0,1-1 0,-57-3 0,55-1-1,-389-1 0,315-6 0,-193-34 0,314 40 0,1-1 0,-1 0 0,1 0 0,-1 0 0,1 0 0,0-1 0,0 1 0,-1-1 0,1 0 0,0 0 0,1 0 0,-1 0 0,0-1 0,-3-3 0,6 5 0,-1 1 0,1-1 0,-1 0 0,1 0 0,-1 0 0,1 0 0,-1-1 0,1 1 0,0 0 0,0 0 0,0 0 0,-1 0 0,1 0 0,0 0 0,0 0 0,0 0 0,1 0 0,-1-1 0,1 0 0,-1-1 0,2 1 0,-1 0 0,0 0 0,0-1 0,1 1 0,-1 0 0,1 0 0,0 1 0,0-1 0,0 0 0,4-3 0,17-10 0,1 1 0,1 0 0,1 2 0,33-12 0,-47 19 0,239-88-383,2 12 1,5 10-1,295-40 0,-525 106 378,46-7-12,1 3 0,83 1 1,-116 12 16,-41-4-1,-1 0 0,1 0 0,-1 0 0,1 0-1,-1 0 1,1 0 0,-1 0 0,1 0 0,-1 0 0,1 0 0,-1 0 0,1 0 0,-1 0 0,1 1 0,-1-1 0,0 0 0,1 0 0,-1 1 0,1-1 0,-1 0 0,0 1 0,1-1 0,-1 0 0,0 1-1,1-1 1,-1 0 0,0 1 0,1-1 0,-1 1 0,0-1 0,0 1 0,0-1 0,1 1 0,-1-1 0,0 1 0,0-1 0,0 1 0,0 0 0,-1 0 19,0 1 1,-1-1 0,1 1-1,-1-1 1,1 1-1,-1-1 1,1 0 0,-1 0-1,0 0 1,-2 2 0,-35 17 362,0-1 0,-44 14 1,24-10-264,-193 70-193,-100 23-744,-1531 431-4096,1562-464 3429,288-75 1432,23-5 241,-1 0 0,1-1 1,-1 0-1,-21-5 964,32 3-1132,16-8 404,1 0 1,1 1-1,-1 1 0,1 1 0,33-6 1,-17 3-15,160-34 538,211-54 747,-383 90-1694,38-16 0,-60 22 0,0 0 0,-1 0 0,1 0 0,0 0 0,0 0 0,0 0 0,-1-1 0,1 1 0,0 0 0,0 0 0,0 0 0,-1 0 0,1 0 0,0-1 0,0 1 0,0 0 0,0 0 0,-1 0 0,1 0 0,0-1 0,0 1 0,0 0 0,0 0 0,0 0 0,0-1 0,0 1 0,0 0 0,0 0 0,0-1 0,0 1 0,-1 0 0,1 0 0,0-1 0,1 1 0,-1 0 0,0 0 0,0 0 0,0-1 0,0 1 0,0 0 0,0 0 0,0-1 0,0 1 0,0 0 0,0 0 0,0 0 0,1-1 0,-1 1 0,0 0 0,0 0 0,0 0 0,0 0 0,1-1 0,-1 1 0,0 0 0,0 0 0,0 0 0,1 0 0,-1 0 0,-30-4 0,-36 4 15,-125 17 0,-72 28-82,176-29-21,-218 44-514,-121 21 577,406-77 25,19-3 0,16-3 0,621-93-55,-1-50 737,-580 126-557,-43 11-125,-19 3 0,-28 3 0,-68 10-16,-154 33-1,196-30-56,-319 69-289,39-7 196,333-71 166,-12 2 0,1 0 0,-1-1 0,0-2 0,-30 0 0,50-1 2,0 0 1,0 0-1,-1 1 1,1-1-1,0 0 1,0 0-1,-1 0 1,1 0-1,0 0 1,0 0-1,-1 0 1,1 0 0,0-1-1,0 1 1,-1 0-1,1 0 1,0 0-1,0 0 1,-1 0-1,1 0 1,0 0-1,0 0 1,-1-1 0,1 1-1,0 0 1,0 0-1,0 0 1,0-1-1,-1 1 1,1 0-1,0 0 1,0 0-1,0-1 1,0 1 0,0 0-1,0 0 1,-1-1-1,1 1 1,9-8 215,16-5 99,-23 12-317,13-5 0,-1 0 0,0-1 0,18-12 0,-32 19 0,1-1 0,0 1 0,0-1 0,0 0 0,-1 1 0,1-1 0,0 0 0,-1 1 0,1-1 0,-1 0 0,1 1 0,-1-1 0,1 0 0,-1 0 0,0 0 0,1 0 0,-1 0 0,1-1 0,-1 2 0,-1-1 0,1 0 0,0 1 0,0-1 0,0 1 0,-1-1 0,1 1 0,0-1 0,0 1 0,-1 0 0,1-1 0,0 1 0,-1-1 0,1 1 0,-1 0 0,1-1 0,-1 1 0,1 0 0,0-1 0,-1 1 0,1 0 0,-1 0 0,0-1 0,-5-1 0,1 1 0,-1-1 0,0 1 0,1 0 0,-1 0 0,-6 1 0,-76 1 0,0 5 0,-97 17 0,130-15 0,-322 58 0,83-13 0,280-51 0,5 0 0,-1-1 0,1 1 0,0-2 0,0 1 0,-19-3 0,27 2 0,1 0 0,-1 0 0,1 1 0,-1-1 0,1 0 0,-1-1 0,1 1 0,-1 0 0,1 0 0,-1 0 0,1 0 0,-1 0 0,0 0 0,1-1 0,-1 1 0,1 0 0,0 0 0,-1-1 0,1 1 0,-1 0 0,1-1 0,-1 1 0,1-1 0,0 1 0,-1 0 0,1-1 0,0 1 0,-1-1 0,1 1 0,0-1 0,0 1 0,-1-1 0,1 1 0,0-1 0,0 1 0,0-1 0,0 1 0,0-1 0,0 0 0,0 1 0,0-1 0,0 1 0,0-1 0,0 1 0,0-1 0,0 1 0,0-1 0,0 1 0,1-1 0,-1 1 0,0-1 0,0 1 0,1-1 0,-1 1 0,0-1 0,1 1 0,-1-1 0,0 1 0,1 0 0,0-1 0,32-27 0,13-2 0,2 3 0,59-25 0,-103 51 0,500-202-835,15 35-1,-168 70 824,-3 31-97,-327 65 109,-9 0 0,-1 1 0,1 0 0,-1 0 0,19 3 0,-84 13 932,38-11-713,-4 0-5,0 1 0,-34 13-1,46-11-213,12-3 0,30 0 0,170 2 0,-87-4 0,187 7-164,1384 113-2676,-1403-80 2622,-270-40 218,-7-1 0,-1 0 0,1 1 0,-1-1 0,1 1 0,-1 1 0,0-1 0,0 1 0,0 1 0,0-1 0,8 7 0,-14-10 0,-1 1 0,1-1 0,-1 1-1,1-1 1,-1 1 0,1-1 0,-1 1 0,0-1 0,1 1 0,-1-1 0,0 1 0,0-1 0,1 1 0,-1 0 0,0-1 0,0 1 0,0-1 0,0 1 0,0 0 0,0-1 0,0 1 0,0 0 0,0-1 0,0 1 0,0 0 0,0-1 0,0 1 0,0-1 0,-1 1 0,1 0 0,0-1 0,-1 1 0,1-1 0,0 1 0,-1-1 0,1 1 0,0-1 0,-1 1 0,-25 17 164,-11 0 397,-1-2-1,-68 18 1,87-28-446,-1105 270 3,1093-270-118,5-1 0,0 0 0,-1-2 0,1-1 0,-43-2 0,69 0 9,0 0-1,0-1 1,0 1-1,1 0 0,-1 0 1,0 0-1,0 0 1,0-1-1,0 1 1,0 0-1,0 0 0,1 0 1,-1 0-1,0-1 1,0 1-1,0 0 1,0 0-1,0-1 0,0 1 1,0 0-1,0 0 1,0 0-1,0-1 1,0 1-1,0 0 0,0 0 1,0 0-1,0-1 1,0 1-1,0 0 1,-1 0-1,1 0 0,0-1 1,0 1-1,0 0 1,0 0-1,0 0 1,0 0-1,-1-1 0,1 1 1,0 0-1,0 0 1,0 0-1,0 0 1,-1 0-1,1 0 0,0-1 1,0 1-1,0 0 1,-1 0-1,1 0 1,0 0-1,0 0 0,0 0 1,-1 0-1,1 0 1,22-11 601,-20 10-584,151-55 7,-56 23-39,-50 17 6,-30 12 0,-1-2 0,0 0 0,-1 0 0,28-17 0,-42 23 0,-1-1 0,1 1 0,0-1 0,0 1 0,-1-1 0,1 0 0,0 1 0,-1-1 0,1 0 0,-1 1 0,1-1 0,-1 0 0,1 0 0,-1 1 0,0-1 0,1 0 0,-1-1 0,0 2 0,0-1 0,0 1 0,0-1 0,0 1 0,0-1 0,0 1 0,0 0 0,-1-1 0,1 1 0,0 0 0,0-1 0,-1 1 0,1-1 0,0 1 0,0 0 0,-1-1 0,1 1 0,0 0 0,-1 0 0,1-1 0,0 1 0,-1 0 0,1 0 0,-1-1 0,-3 0 0,0-1 0,0 1 0,0 0 0,0 1 0,0-1 0,0 1 0,-4-1 0,-26 2 0,-1 1 0,1 2 0,1 1 0,-37 11 0,-136 46 0,167-49 0,-544 204 0,567-210 0,9-4 0,-1 0 0,1 1 0,0 0 0,0 0 0,-7 6 0,28-9 0,9-4 0,6-1 0,-22 4 0,1-1 0,0 0 0,0 0 0,-1-1 0,12-4 0,-58 2 0,48-4 0,9 0 0,0 1 0,26-8 0,-13 5 0,918-245 0,-912 248 0,76-6 0,-112 13 0,-1 0 0,1 0 0,-1 0 0,1 0 0,-1 0 0,0 0 0,1-1 0,-1 1 0,1 1 0,-1-1 0,1 0 0,-1 0 0,1 0 0,-1 0 0,0 0 0,1 0 0,-1 0 0,1 1 0,-1-1 0,0 0 0,1 0 0,-1 1 0,0-1 0,1 0 0,-1 0 0,0 1 0,1-1 0,-1 0 0,0 1 0,1-1 0,-1 1 0,-7 13 0,-30 18 0,28-25 0,-209 161 0,215-165 0,-30 24 0,32-26 0,1-1 0,-1 0 0,1 1 0,0-1 0,0 1 0,-1-1 0,1 1 0,0-1 0,0 1 0,-1-1 0,1 1 0,0-1 0,0 1 0,0-1 0,0 1 0,0-1 0,0 1 0,0-1 0,0 1 0,0-1 0,0 1 0,0-1 0,0 1 0,0-1 0,1 1 0,-1 0 0,1 0 0,0 0 0,0 0 0,0-1 0,0 1 0,0-1 0,0 1 0,0 0 0,0-1 0,0 0 0,0 1 0,0-1 0,0 0 0,0 1 0,0-1 0,0 0 0,2 0 0,39 4 0,0-2 0,71-5 0,-31-1 0,-56 3 0,1-2 0,-1-1 0,0-1 0,33-11 0,97-41 0,11-18 0,268-162 0,-284 142 0,-145 92 0,0-1 0,0 2 0,0-1 0,0 0 0,0 1 0,1 1 0,-1-1 0,1 1 0,10-1 0,64 2 0,-48 1 0,30-2 0,-1-3 0,93-18 0,-80 10 0,124-29 0,-154 28 0,1 3 0,82-9 0,-106 16 0,-1-1 0,36-12 0,-36 10 0,1 0 0,35-4 0,-21 7 0,62 3 0,-83 5 0,-16-4 0,1 0 0,-1-1 0,0 1 0,0 0 0,0 0 0,0 0 0,0-1 0,0 1 0,0 0 0,0-1 0,0 1 0,0-1 0,-1 1 0,1-1 0,0 1 0,-2-1 0,-277 88 0,190-63 0,-27 8-35,-762 189-828,877-222 863,-30 6 0,1-1 0,-51 1 0,70-8 449,33-2 0,397-60-431,-218 30-166,-6 2-2,258-37-191,0 39 180,-447 30 158,17 1-26,-22 3 67,-13 3 86,-180 59 528,-686 274-1518,842-324 866,23-11 0,-1 1 0,1 0 0,0 1 0,1 1 0,-18 12 0,31-20 0,-1 1 0,1-1 0,0 0 0,0 0 0,-1 0 0,1 0 0,0 1 0,-1-1 0,1 0 0,0 0 0,0 0 0,0 1 0,-1-1 0,1 0 0,0 0 0,0 1 0,0-1 0,-1 0 0,1 1 0,0-1 0,0 0 0,0 0 0,0 1 0,0-1 0,0 0 0,0 1 0,0-1 0,0 0 0,0 1 0,0-1 0,0 0 0,0 1 0,0-1 0,0 0 0,0 1 0,0-1 0,0 0 0,0 1 0,0-1 0,1 0 0,-1 0 0,0 1 0,0-1 0,0 0 0,0 0 0,1 1 0,-1-1 0,0 0 0,0 0 0,1 1 0,-1-1 0,0 0 0,0 0 0,1 0 0,-1 0 0,0 1 0,1-1 0,-1 0 0,0 0 0,1 0 0,-1 0 0,13 3 0,0-1 0,0 0 0,0 0 0,0-2 0,1 0 0,13-1 0,5 0 0,476-24 753,-359 15-640,-120 10-113,-68 5 0,-219 22 0,-162 12 0,410-38 0,-23-2 0,32 0 0,0 1 0,0 0 0,0-1 0,0 1 0,1-1 0,-1 1 0,0-1 0,0 0 0,0 1 0,1-1 0,-1 0 0,0 1 0,1-1 0,-1 0 0,1 0 0,-1 0 0,1 0 0,-1 0 0,1 0 0,-1 1 0,1-1 0,0 0 0,0 0 0,-1 0 0,1 0 0,0 0 0,0 0 0,0-2 0,0 1 0,0 1 0,0-1 0,-1 1 0,1 0 0,-1-1 0,1 1 0,-1-1 0,1 1 0,-1 0 0,0 0 0,0-1 0,1 1 0,-1 0 0,0 0 0,0 0 0,0 0 0,-1 0 0,1 0 0,0 0 0,-2-1 0,-32-13 0,-3 7 0,-1 0 0,1 3 0,-1 1 0,-52 2 0,39 0 0,-647 21-380,-1 49-16,679-65 395,-45 1 390,-67-3-1,116 0-388,0 1 0,0 1 0,0 1 0,0 0 0,1 1 0,-21 10 0,6-4 0,-37 11 0,-1-3 0,-80 11 0,-144 1 0,215-21 0,48-5 0,-42 1 0,56-8 0,16 2 0,-1 0 0,1-1 0,0 1 0,0 0 0,0 0 0,0 0 0,0 0 0,-1 0 0,1 0 0,0 0 0,0 0 0,0 0 0,0 0 0,0 0 0,0-1 0,0 1 0,-1 0 0,1 0 0,0 0 0,0 0 0,0 0 0,0 0 0,0-1 0,0 1 0,0 0 0,0 0 0,0 0 0,0 0 0,0 0 0,0-1 0,0 1 0,0 0 0,0 0 0,0 0 0,0 0 0,0-1 0,0 1 0,0 0 0,0 0 0,0 0 0,0 0 0,0 0 0,0-1 0,0 1 0,2-2 0,1 1 0,-1-1 0,0 0 0,0 1 0,1 0 0,-1-1 0,1 1 0,-1 0 0,1 0 0,4 0 0,225-53 0,-204 48 0,271-48-164,128-13-655,2025-225-4096,-2129 262 3932,85-4-690,-247 26 3136,-330 19 503,-29 14-983,-89 25-153,-90 23-624,-960 242-2177,662-149 21,73-30 1703,541-127 1738,-1-2-1,0-2 0,-118-9 1,35 1-179,-433 3-1312,409 12 0,24 0 0,21-13 0,-51 3 0,77 9 0,-52 2 0,101-13 0,29-1 0,1 1 0,-1 0 0,1 1 0,0 1 0,0 1 0,0 1 0,-26 9 0,68-10 0,120-4 0,34-7 0,116-9-164,136-10-655,107-8-164,2747-128-3993,-2735 139 4054,204-3-497,695-39-1815,-283-67 8005,-492-33 2831,-613 151-7443,-40 11-162,-1-1 1,0-1-1,0 0 1,0-1 0,18-12-1,15-5 3,-51 24 0,0 0 0,1-1 0,-1 1 0,0 0 0,0 0 0,0 0 0,0-1 0,0 1 0,0 0 0,0 0 0,-1 0 0,1-1 0,0 1 0,0 0 0,0 0 0,0 0 0,0-1 0,0 1 0,0 0 0,0 0 0,0 0 0,0 0 0,-1-1 0,1 1 0,0 0 0,0 0 0,0 0 0,0 0 0,-1 0 0,1 0 0,0-1 0,0 1 0,0 0 0,0 0 0,-1 0 0,1 0 0,0 0 0,0 0 0,0 0 0,-1 0 0,1 0 0,0 0 0,0 0 0,-1 0 0,1 0 0,0 0 0,-1 0 0,-15-4 0,-307-40 0,219 31 0,-853-82-1283,-3 24-491,660 50 1611,-40-9 243,-252-12 385,571 43 7,17 0-300,1-1-1,-1 0 1,0 1-1,1-1 1,-1-1-1,0 1 1,0 0-1,1-1 1,-1 0-1,0 0 1,-4-2-1,8 3-167,-1 0-1,1 0 1,0 0-1,0-1 1,0 1-1,0 0 1,0 0-1,-1-1 1,1 1-1,0 0 1,0 0-1,0 0 1,0-1-1,0 1 1,0 0-1,0-1 1,0 1-1,0 0 0,0 0 1,0-1-1,0 1 1,0 0-1,0 0 1,0-1-1,0 1 1,0 0-1,0 0 1,0-1-1,0 1 1,1 0-1,-1 0 1,0 0-1,0-1 1,0 1-1,0 0 1,1 0-1,-1 0 1,0-1-1,0 1 1,0 0-1,1 0 1,-1 0-1,0 0 1,0-1-1,0 1 1,1 0-1,-1 0 1,0 0-1,0 0 1,1 0-1,-1 0 0,19-8-39,39-4 36,0 2 0,70-4 0,-82 11 0,953-32 0,-1084 48 0,-337 57-164,57 3-655,-542 123-1320,-33 7-1252,807-180 3432,119-21 924,23-4-127,28-2 144,443-3 2246,-1 29-3869,-247-9-20,-70-5 620,677 22-525,-814-31 549,-9 0 83,-27 3 852,-464 43 483,259-43-1401,223-2 0,0 0 0,0-1 0,0-1 0,-1 1 0,13-5 0,18-4 0,169-51 0,156-53-164,119-41-655,-91 33 86,464-152-877,-9-30-518,-683 237 1810,-146 59 305,1 0 0,29-20 1,-35 14 12,-11 14 0,0 0 0,0-1 0,-1 1 0,1 0 0,0-1 0,0 1 0,0 0 0,0-1 0,0 1 0,0 0 0,-1-1 0,1 1 0,0 0 0,0-1 0,-1 1 0,1 0 0,0 0 0,0-1 0,-1 1 0,1 0 0,0 0 0,-1-1 0,1 1 0,0 0 0,-1 0 0,1 0 0,0 0 0,-1 0 0,1 0 0,0-1 0,-1 1 0,0 0 0,-9-1 0,0 1 0,0 0 0,0 0 0,0 1 0,-14 2 0,-90 18 81,-175 55 1,-34 33 738,-1250 565-2074,1554-665 1213,-31 14 11,2 3-1,-52 36 0,94-58 70,0 0 1,1 0-1,-1 1 0,1 0 1,-7 9-1,12-13-1,-1 0 0,0 0 0,1 0 0,-1 0 0,1 0 0,-1 0 0,1 0 0,0 0 0,-1 0-1,1 0 1,0 0 0,0 0 0,0 0 0,-1 0 0,1 0 0,0 0 0,1 0 0,-1 0 0,0 1 0,0-1-1,0 0 1,1 0 0,-1 0 0,0 0 0,1 0 0,-1 0 0,1 0 0,-1 0 0,1 0 0,0-1 0,-1 1-1,1 0 1,0 0 0,-1 0 0,1-1 0,0 1 0,0 0 0,0-1 0,0 1 0,0-1 0,0 1 0,0-1 0,0 1-1,1-1 1,18 9 215,-1-2 0,1-1-1,0 0 1,0-2 0,0 0-1,36 1 1,-24-1-60,228 18 666,141-6-697,125-8-940,2197-33-5121,-2478 12 5899,-322 25 1480,19 0-994,-126 20 498,-968 194 1603,990-195-2998,-200 29 155,381-62 256,218-25 0,37-16-44,1204-283-53,-1443 316 114,17-4-13,74-31 0,-123 44-7,0 0 0,-1 0 1,1-1-1,0 1 1,-1-1-1,1 1 1,0-1-1,-1 0 1,0 0-1,1 0 0,-1 0 1,0 0-1,0-1 1,0 1-1,1-4 1,-2 5 3,-1 0 1,0 1 0,0-1-1,0 0 1,0 1 0,0-1 0,0 0-1,0 0 1,0 1 0,-1-1-1,1 0 1,0 1 0,0-1 0,0 0-1,-1 1 1,1-1 0,0 1-1,-1-1 1,1 0 0,-1 1-1,1-1 1,-1 1 0,0-1 0,-26-15 161,-7 4 350,-1 2-1,-58-8 1,58 11-326,-936-121 165,673 95-369,288 32 17,0 0 0,1 0 0,-1-1 0,1-1 0,-1 1 0,-9-6 0,18 8 6,1 0 1,-1 0-1,1 0 0,0 0 0,-1 0 0,1 0 0,-1 0 0,1 0 0,0 0 0,-1-1 0,1 1 0,-1 0 0,1 0 0,0-1 0,-1 1 0,1 0 0,0 0 0,-1-1 0,1 1 0,0 0 1,0-1-1,-1 1 0,1 0 0,0-1 0,0 1 0,0-1 0,-1 1 0,1 0 0,0-1 0,0 1 0,0-1 0,0 1 0,0 0 0,0-1 0,0 1 0,0-1 0,0 1 0,0 0 0,0-1 0,0 1 1,0-1-1,0 1 0,0-1 0,1 1 0,-1 0 0,0-1 0,0 1 0,0 0 0,1-1 0,-1 1 0,0 0 0,0-1 0,1 1 0,-1 0 0,0-1 0,1 1 0,-1 0 0,0 0 0,1-1 0,-1 1 1,0 0-1,1 0 0,-1 0 0,1-1 0,33-11 538,-26 10-493,-5 1-51,53-20 0,-53 19 0,1 1 0,-1-1 0,0 0 0,1 0 0,-1 0 0,0-1 0,0 1 0,0-1 0,-1 1 0,1-1 0,0 0 0,2-4 0,-5 7 0,0-1 0,0 1 0,0 0 0,0 0 0,0 0 0,0-1 0,0 1 0,1 0 0,-1 0 0,0 0 0,0 0 0,0-1 0,0 1 0,0 0 0,0 0 0,0 0 0,0-1 0,-1 1 0,1 0 0,0 0 0,0 0 0,0-1 0,0 1 0,0 0 0,0 0 0,0 0 0,0 0 0,0 0 0,-1-1 0,1 1 0,0 0 0,0 0 0,0 0 0,0 0 0,0 0 0,-1 0 0,1-1 0,0 1 0,0 0 0,0 0 0,0 0 0,-1 0 0,1 0 0,0 0 0,0 0 0,0 0 0,-1 0 0,-15 0 0,-14 6 0,12 0 0,-40 11 0,-73 35 0,130-52 0,1 0 0,0 0 0,0 0 0,0 0 0,-1 0 0,1 0 0,0 0 0,0 0 0,0 0 0,-1 0 0,1 0 0,0 0 0,0 0 0,0 0 0,0 0 0,-1 0 0,1 0 0,0 0 0,0 1 0,0-1 0,0 0 0,-1 0 0,1 0 0,0 0 0,0 0 0,0 0 0,0 1 0,0-1 0,0 0 0,0 0 0,-1 0 0,1 0 0,0 1 0,0-1 0,0 0 0,0 0 0,0 0 0,0 1 0,0-1 0,0 0 0,0 0 0,0 0 0,0 1 0,0-1 0,0 0 0,0 0 0,0 0 0,0 0 0,0 1 0,0-1 0,0 0 0,1 0 0,12 3 0,22-5 0,-27 1 0,0-1 0,0-1 0,0 0 0,-1 0 0,9-4 0,-15 6 0,1 0 0,0 0 0,-1 0 0,1-1 0,-1 1 0,1 0 0,-1 0 0,0-1 0,1 1 0,-1-1 0,0 0 0,2-2 0,-3 3 0,0 0 0,0 0 0,1 0 0,-1 0 0,0-1 0,0 1 0,0 0 0,0 0 0,-1 0 0,1 0 0,0 0 0,0 0 0,-1 0 0,1 0 0,0 0 0,-1 0 0,1 0 0,-1 0 0,1 0 0,-1 1 0,1-1 0,-1 0 0,0 0 0,0 0 0,-1 0 0,-3-4 0,0 1 0,0 0 0,0 0 0,-1 1 0,0 0 0,0 0 0,0 0 0,-9-2 0,-56-14 0,48 14 0,-278-49 0,93 21 0,201 32 0,0-1 0,0 1 0,0-1 0,0-1 0,1 1 0,-1-1 0,0 0 0,-9-6 0,13 6 0,0 0 0,1 0 0,-1 0 0,1 0 0,-1 0 0,1 0 0,0 0 0,0-1 0,0 1 0,1-1 0,-1 0 0,1 1 0,0-1 0,0 0 0,0 0 0,0-7 0,-2 0 0,1 1 0,-1-1 0,-1 1 0,0 0 0,-1 0 0,0 0 0,0 0 0,-1 1 0,0 0 0,-1 0 0,1 1 0,-2 0 0,1 0 0,-18-13 0,-1 1 0,0 1 0,-2 1 0,-56-26 0,20 16-86,0 2 0,-114-27 1,-150-8-593,101 34 79,-1 9 0,-1 11-1,-1 10 1,-305 42 0,192 9 284,2 15-1,-394 135 1,695-192 321,21-7 47,0 2-1,-27 12 1,94-25 1271,653-102 2065,-656 102-3389,-7 0 0,0 2 0,0 1 0,0 2 0,46 4 0,-82-2 0,-1-1 0,1 1 0,0-1 0,0 1 0,0 0 0,0 0 0,-1 0 0,1 0 0,0 0 0,-1 0 0,1 0 0,-1 1 0,1-1 0,-1 1 0,0-1 0,1 1 0,-1-1 0,0 1 0,0 0 0,0-1 0,0 1 0,1 3 0,-2-3 0,1 0 0,0 0 0,0 0 0,0 0 0,0-1 0,0 1 0,0 0 0,0-1 0,1 1 0,-1-1 0,1 0 0,-1 1 0,1-1 0,-1 0 0,1 0 0,0 0 0,-1 0 0,1 0 0,0 0 0,0 0 0,0-1 0,0 1 0,0 0 0,3-1 0,16 0 0,-1 0 0,0-2 0,0-1 0,0 0 0,0-2 0,0 0 0,33-14 0,-24 9 0,1148-406-981,-1146 402 981,-31 14 0,0 0 0,-1 0 0,1 0 0,0 0 0,0 0 0,0 0 0,0 0 0,0 0 0,-1 0 0,1 0 0,0 0 0,0 0 0,0 0 0,0 0 0,0 0 0,-1 0 0,1 0 0,0 0 0,0-1 0,0 1 0,0 0 0,0 0 0,0 0 0,0 0 0,-1 0 0,1 0 0,0 0 0,0-1 0,0 1 0,0 0 0,0 0 0,0 0 0,0 0 0,0 0 0,0-1 0,0 1 0,0 0 0,0 0 0,0 0 0,0 0 0,0-1 0,0 1 0,0 0 0,0 0 0,0 0 0,0 0 0,0 0 0,0-1 0,0 1 0,0 0 0,0 0 0,0 0 0,1 0 0,-1 0 0,0 0 0,0-1 0,0 1 0,0 0 0,0 0 0,0 0 0,0 0 0,1 0 0,-10-1 70,1 0-1,0 1 0,0 1 1,0-1-1,0 1 0,0 1 1,-1-1-1,-7 4 0,-4-1 125,-648 173-31,646-168-163,21-9 0,1 0 0,0 0 0,0 0 0,0 0 0,0 0 0,0 0 0,0 0 0,-1 0 0,1 0 0,0 0 0,0 0 0,0 0 0,0 0 0,0 1 0,0-1 0,0 0 0,-1 0 0,1 0 0,0 0 0,0 0 0,0 0 0,0 0 0,0 0 0,0 1 0,0-1 0,0 0 0,0 0 0,0 0 0,0 0 0,0 0 0,0 0 0,0 1 0,0-1 0,0 0 0,0 0 0,0 0 0,0 0 0,0 0 0,0 0 0,0 1 0,0-1 0,0 0 0,0 0 0,0 0 0,0 0 0,0 0 0,0 0 0,0 1 0,0-1 0,0 0 0,0 0 0,1 0 0,-1 0 0,0 0 0,0 0 0,0 0 0,0 0 0,0 0 0,0 0 0,1 1 0,41 3 0,756-24-591,-650 11 551,1-6 1,250-59 0,-945 269-433,373-128 255,-67 23-18,-239 94 35,447-171 200,-52 29 0,84-42 3,-1 0-1,1 0 0,-1 1 1,1-1-1,-1 0 0,1 0 0,-1 1 1,1-1-1,-1 0 0,1 1 0,0-1 1,-1 0-1,1 1 0,-1-1 0,1 0 1,0 1-1,0-1 0,-1 1 0,1-1 1,0 1-1,-1-1 0,1 1 0,0-1 1,0 1-1,0-1 0,0 1 0,0-1 1,0 1-1,0-1 0,-1 2 0,16 3 190,32-3 443,-47-2-624,69-5 315,128-26 0,66-36-53,-251 64-273,0-1 0,-1 0 0,1-1 0,-1 0 0,20-12 0,-30 16 0,-1 1 0,1 0 0,-1 0 0,1-1 0,-1 1 0,1-1 0,-1 1 0,1 0 0,-1-1 0,0 1 0,1-1 0,-1 1 0,0-1 0,1 1 0,-1-1 0,0 0 0,0 1 0,1-1 0,-1 1 0,0-1 0,0 0 0,0 1 0,0-1 0,0 1 0,0-1 0,0 0 0,0 1 0,0-1 0,0 1 0,0-1 0,0 0 0,0 0 0,-1 0 0,0-1 0,0 1 0,0 0 0,-1 0 0,1 0 0,0 0 0,0 0 0,-1 0 0,1 0 0,0 1 0,-1-1 0,-1-1 0,-49-12 0,-13 4 0,-114-3 0,-70 15 0,201 0 0,35-2 0,26 1 0,35-1 0,1634 0-1636,-1659 0 1636,-10-1 0,1 1 0,-1 1 0,24 4 0,-35-5 12,-1 0 1,0 1-1,0-1 0,1 0 0,-1 1 1,0-1-1,0 0 0,0 1 0,0 0 1,0-1-1,1 1 0,-1 0 1,0-1-1,0 1 0,-1 0 0,1 0 1,0 0-1,0 0 0,0 0 0,-1 0 1,1 0-1,0 0 0,-1 0 0,1 0 1,-1 1-1,1-1 0,-1 0 1,0 0-1,1 0 0,-1 1 0,0-1 1,0 0-1,0 0 0,0 1 0,0-1 1,0 0-1,0 0 0,0 1 1,-1-1-1,0 2 0,-1 5 157,-1-1 0,-1 0 0,1 1 0,-1-1 0,-6 7 0,8-10-159,-215 274 117,120-162-145,93-112 18,1 1 0,-1 0 0,1 0 0,0 0 0,0 0 0,0 1 0,1-1 0,0 1 0,0-1 0,0 1 0,1 0 0,-1 7 0,2-10 0,0 0 0,0 0 0,1 0 0,-1 0 0,1-1 0,0 1 0,-1 0 0,2 0 0,-1-1 0,0 1 0,0 0 0,1-1 0,0 1 0,-1-1 0,1 0 0,0 0 0,0 1 0,0-1 0,0-1 0,1 1 0,-1 0 0,0 0 0,1-1 0,-1 1 0,1-1 0,5 2 0,17 7 0,0-1 0,0-1 0,1-2 0,0 0 0,45 3 0,135-4 0,-173-6 0,-15-1 0,0 2 0,22 1 0,-37-1 0,1 1 0,-1-1 0,0 1 0,1-1 0,-1 1 0,0 0 0,0 1 0,0-1 0,0 0 0,0 1 0,0 0 0,0-1 0,0 1 0,0 0 0,-1 1 0,1-1 0,3 5 0,-5-6 0,-1-1 0,1 1 0,0 0 0,-1 0 0,1 1 0,-1-1 0,1 0 0,-1 0 0,0 0 0,1 0 0,-1 0 0,0 0 0,0 1 0,0-1 0,1 0 0,-1 0 0,-1 0 0,1 0 0,0 1 0,0-1 0,0 0 0,-1 0 0,1 0 0,-1 2 0,-1-1 0,1 0 0,-1 0 0,1 0 0,-1-1 0,0 1 0,0-1 0,1 1 0,-1-1 0,0 1 0,0-1 0,-4 2 0,-6 1 0,-1 0 0,1 0 0,-20 3 0,28-7 0,-12 3 0,1 1 0,0 0 0,-23 10 0,34-12 0,0 0 0,0 0 0,0 1 0,0-1 0,0 1 0,1 0 0,-5 5 0,6-7 0,1 1 0,0 0 0,0-1 0,0 1 0,0 0 0,0-1 0,0 1 0,1 0 0,-1 0 0,1 0 0,-1 0 0,1-1 0,-1 1 0,1 0 0,0 0 0,0 0 0,0 0 0,0 2 0,1-2 0,-1-1 0,1 1 0,0-1 0,-1 0 0,1 1 0,0-1 0,0 0 0,-1 0 0,1 1 0,0-1 0,0 0 0,1 0 0,-1 0 0,0 0 0,0 0 0,0 0 0,1 0 0,-1-1 0,0 1 0,1 0 0,-1-1 0,1 1 0,-1-1 0,1 0 0,-1 1 0,1-1 0,-1 0 0,1 0 0,2 0 0,5 1 0,0-1 0,1-1 0,15-2 0,28-9 0,0-2 0,-1-3 0,70-32 0,-68 27 0,753-339 0,-805 360 0,27-15 0,-21 7 0,-8 9 0,0 0 0,0-1 0,0 1 0,0 0 0,0 0 0,0-1 0,-1 1 0,1 0 0,0 0 0,0 0 0,0-1 0,0 1 0,-1 0 0,1 0 0,0 0 0,0 0 0,0-1 0,-1 1 0,1 0 0,0 0 0,0 0 0,-1 0 0,1 0 0,0 0 0,0 0 0,-1 0 0,1 0 0,0 0 0,0 0 0,-1 0 0,1 0 0,0 0 0,0 0 0,-1 0 0,1 0 0,0 0 0,0 0 0,-1 0 0,-21 0 0,0 2 0,0 0 0,-38 9 0,-71 25 0,71-18 0,-437 148 0,458-140 0,-1 0 0,39-25 0,-1 0 0,0 0 0,0 0 0,0-1 0,0 1 0,-1 0 0,1-1 0,0 1 0,0-1 0,0 0 0,0 0 0,-1 0 0,1 0 0,0 0 0,-4-1 0,5 0 0,-1 0 0,0 0 0,1 0 0,-1 0 0,1 0 0,-1 0 0,1 0 0,0-1 0,-1 1 0,1-1 0,0 1 0,0-1 0,0 1 0,0-1 0,0 0 0,0 1 0,1-1 0,-1 0 0,0 0 0,1 1 0,0-1 0,-1 0 0,1 0 0,0 0 0,0 0 0,0 0 0,0 0 0,0 0 0,0 1 0,1-1 0,0-2 0,0-2 0,0 0 0,0 0 0,1 0 0,-1 1 0,2-1 0,-1 0 0,0 1 0,1 0 0,5-8 0,16-13 0,2 0 0,0 2 0,2 0 0,41-26 0,-39 28 0,810-527 0,-826 540 0,-11 6 0,0 1 0,1-1 0,-1 1 0,1 0 0,-1 0 0,1 0 0,0 0 0,0 1 0,0-1 0,0 1 0,0 0 0,7 0 0,-11 1 0,0 0 0,0 0 0,0 0 0,1 0 0,-1 0 0,0 0 0,0 0 0,0 1 0,0-1 0,0 0 0,1 0 0,-1 0 0,0 0 0,0 0 0,0 1 0,0-1 0,0 0 0,0 0 0,0 0 0,0 1 0,0-1 0,0 0 0,1 0 0,-1 0 0,0 1 0,0-1 0,0 0 0,0 0 0,0 0 0,0 0 0,-1 1 0,1-1 0,0 0 0,0 0 0,0 0 0,0 1 0,0-1 0,0 0 0,0 0 0,0 0 0,0 0 0,0 1 0,-1-1 0,1 0 0,0 0 0,0 0 0,0 0 0,0 0 0,0 1 0,-1-1 0,-5 11 0,-1-1 0,0 1 0,-1-1 0,-13 13 0,-1 2 0,-123 142-143,-349 413-865,143-150 819,342-418 301,-1 0-1,2 0 1,-1 1 0,2 0-1,-10 21 1,16-30-85,0 0 0,0 0-1,0 0 1,0 0 0,0 0 0,1 0 0,0 0 0,0 1-1,0-1 1,0 0 0,1 0 0,0 0 0,0 0-1,0 0 1,0 0 0,0 0 0,1 0 0,0 0-1,0 0 1,0-1 0,0 1 0,1-1 0,-1 0-1,4 4 1,7 7-27,0-2 0,1 1 0,0-2 0,1 0 0,1-1 0,-1 0 0,31 12 0,-34-16 0,0-2 0,0 0 0,0 0 0,0-1 0,0-1 0,1 0 0,0 0 0,-1-1 0,1-1 0,0 0 0,-1-1 0,18-3 0,-20 1 0,-1-1 0,1 0 0,0 0 0,-1 0 0,0-2 0,0 1 0,-1-1 0,1 0 0,11-12 0,8-10 0,29-38 0,-27 30 0,-4 3 0,-18 22 0,0 0 0,20-18 0,-28 29 0,-1 0 0,1 0 0,0 0 0,0 1 0,0-1 0,0 0 0,0 0 0,0 0 0,0 0 0,0 1 0,0-1 0,0 0 0,0 0 0,0 0 0,0 0 0,0 0 0,0 1 0,0-1 0,0 0 0,0 0 0,0 0 0,1 0 0,-1 1 0,0-1 0,0 0 0,0 0 0,0 0 0,0 0 0,0 0 0,0 0 0,0 1 0,1-1 0,-1 0 0,0 0 0,0 0 0,0 0 0,0 0 0,0 0 0,1 0 0,-1 0 0,0 0 0,0 0 0,0 0 0,0 0 0,0 0 0,1 0 0,-1 0 0,0 0 0,0 0 0,0 0 0,0 0 0,1 0 0,-1 0 0,0 0 0,0 0 0,0 0 0,0 0 0,0 0 0,1 0 0,-1 0 0,0 0 0,0 0 0,0 0 0,0-1 0,1 1 0,-2 11 0,0 1 0,0-1 0,-1 0 0,-1 0 0,0-1 0,-7 20 0,-6 16 0,-13 51-29,-294 1007-1490,322-1101 1516,-45 183-23,46-184 26,-1 0 0,1 0 0,-1 1 0,1-1 0,0 0 0,0 1 0,0-1 0,0 0 0,0 1 0,1-1 0,0 4 0,-1-6 0,0 0 0,1 0 0,-1 0 0,0 1 0,1-1 0,-1 0 0,1 0 0,-1 0 0,0 0 0,1 0 0,-1 0 0,1 0 0,-1 0 0,0 0 0,1 0 0,-1 0 0,0 0 0,1 0 0,-1 0 0,1 0 0,-1 0 0,0-1 0,1 1 0,-1 0 0,0 0 0,1 0 0,-1-1 0,0 1 0,1 0 0,-1 0 0,0-1 0,1 1 0,-1 0 0,0 0 0,0-1 0,0 1 0,1 0 0,-1-1 0,12-13 0,-1 1 0,10-18 0,70-111 0,42-89-164,29-78-535,14-67 195,411-1259-3129,-523 1407 2019</inkml:trace>
+</inkml:ink>
+</file>
+
+<file path=ppt/ink/ink2.xml><?xml version="1.0" encoding="utf-8"?>
+<inkml:ink xmlns:inkml="http://www.w3.org/2003/InkML">
+  <inkml:definitions>
+    <inkml:context xml:id="ctx0">
+      <inkml:inkSource xml:id="inkSrc0">
+        <inkml:traceFormat>
+          <inkml:channel name="X" type="integer" min="-2.14748E9" max="2.14748E9" units="cm"/>
+          <inkml:channel name="Y" type="integer" min="-2.14748E9" max="2.14748E9" units="cm"/>
+          <inkml:channel name="F" type="integer" max="32767" units="dev"/>
+        </inkml:traceFormat>
+        <inkml:channelProperties>
+          <inkml:channelProperty channel="X" name="resolution" value="1000" units="1/cm"/>
+          <inkml:channelProperty channel="Y" name="resolution" value="1000" units="1/cm"/>
+          <inkml:channelProperty channel="F" name="resolution" value="0" units="1/dev"/>
+        </inkml:channelProperties>
+      </inkml:inkSource>
+      <inkml:timestamp xml:id="ts0" timeString="2026-09-18T04:02:25.983"/>
+    </inkml:context>
+    <inkml:brush xml:id="br0">
+      <inkml:brushProperty name="width" value="0.35" units="cm"/>
+      <inkml:brushProperty name="height" value="0.35" units="cm"/>
+      <inkml:brushProperty name="color" value="#FFFFFF"/>
+    </inkml:brush>
+  </inkml:definitions>
+  <inkml:trace contextRef="#ctx0" brushRef="#br0">1 209 24575,'55'62'0,"-42"-45"0,0-1 0,2 0 0,0-1 0,21 16 0,-18-17 0,1-2 0,0 0 0,1 0 0,1-2 0,-1-1 0,1 0 0,1-1 0,26 5 0,32 2 0,121 8 0,-150-20 0,1-3 0,-1-3 0,79-13 0,-102 9 0,0-1 0,-1-2 0,34-16 0,24-9 0,-49 20 0,0-1 0,-2-2 0,35-24 0,-28 16 0,51-23 0,-161 44 0,-395 17 0,1 30 0,304-20 0,157-21 0,0-1 0,0 0 0,-1 1 0,1 0 0,0-1 0,0 1 0,0 0 0,0 0 0,-1 1 0,2-1 0,-1 0 0,0 1 0,0-1 0,0 1 0,1-1 0,-1 1 0,0 0 0,-1 3 0,2-4 0,1 1 0,0-1 0,-1 0 0,1 0 0,0 1 0,0-1 0,0 0 0,0 0 0,0 1 0,0-1 0,1 0 0,-1 0 0,0 0 0,1 1 0,-1-1 0,1 0 0,-1 0 0,1 0 0,-1 0 0,1 0 0,0 0 0,0 0 0,-1 0 0,1 0 0,0 0 0,0 0 0,0 0 0,0-1 0,0 1 0,0 0 0,0-1 0,0 1 0,0 0 0,1-1 0,1 1 0,12 6 0,0-1 0,1 0 0,0-1 0,0-1 0,20 3 0,89 7 0,-100-12 0,484 9 0,-501-11 0,0 0 0,0 0 0,0 1 0,10 2 0,-17-3 0,0 1 0,0-1 0,0 0 0,0 0 0,-1 1 0,1-1 0,0 1 0,0-1 0,0 1 0,-1-1 0,1 1 0,0-1 0,-1 1 0,1 0 0,0-1 0,-1 1 0,1 0 0,-1-1 0,1 3 0,0-2 0,-1 0 0,0 0 0,-1 0 0,1 0 0,0 0 0,0 0 0,0 0 0,-1 0 0,1 0 0,0 0 0,-1 0 0,1 0 0,-1 0 0,1 0 0,-1 0 0,1 0 0,-1 0 0,0 0 0,0-1 0,1 1 0,-2 1 0,-24 23 0,-35 27 0,-20 19 0,57-47 0,2 1 0,1 1 0,0 1 0,3 1 0,0 0 0,1 2 0,2 0 0,2 0 0,-13 39 0,23-58 0,1 1 0,1-1 0,-1 1 0,2 0 0,0 0 0,0-1 0,1 1 0,0 0 0,1-1 0,1 1 0,0-1 0,0 0 0,1 1 0,0-2 0,1 1 0,0 0 0,12 16 0,-11-18 0,1 0 0,0-1 0,0 0 0,1 0 0,-1-1 0,2 0 0,-1 0 0,1-1 0,0 0 0,0-1 0,1 1 0,-1-2 0,1 0 0,0 0 0,1 0 0,-1-2 0,0 1 0,1-1 0,19 1 0,-21-3 0,0-1 0,0 0 0,0 0 0,0-1 0,0 0 0,-1-1 0,1 0 0,-1 0 0,1-1 0,-1 0 0,0 0 0,-1-1 0,1 0 0,-1 0 0,7-7 0,9-9 0,-1-2 0,-1 0 0,22-32 0,235-371-296,-33-25 0,-225 414 296,53-118 0,-68 136-25,-14 41 148,-11 34-68,4 1 0,2 1 0,2 0 0,3 1 0,3 0 0,2 0 0,2 1-1,10 80 1,-6-120-55,2 0 0,0 0 0,2 0 0,0-1 0,1 0 0,1 0 0,0 0 0,2-1 0,0-1 0,23 31 0,-21-35 0,0 0 0,0 0 0,1-1 0,1-1 0,0 0 0,1-1 0,0-1 0,0 0 0,1-1 0,0 0 0,0-2 0,30 9 0,-26-10 0,1-1 0,0-1 0,0-1 0,0-1 0,0-1 0,0-1 0,0 0 0,0-2 0,0 0 0,0-2 0,-1 0 0,0-1 0,33-15 0,-36 13 0,0-1 0,-1 0 0,0-2 0,0 0 0,-2-1 0,1 0 0,-1-1 0,-1 0 0,0-1 0,-1-1 0,-1 0 0,0-1 0,-1 0 0,-1 0 0,11-28 0,-13 26 0,-1 0 0,-1 0 0,-1-1 0,-1 0 0,0 0 0,-1 0 0,-1 0 0,-1 0 0,-1 0 0,-1 0 0,0 0 0,-9-34 0,4 30 0,-1 0 0,-1 1 0,-1 0 0,-1 1 0,-1 0 0,-1 1 0,0 0 0,-2 1 0,-29-31 0,1 11 0,-2 2 0,-1 2 0,-51-29 0,42 28 0,65 33 0,8 3 0,26 1 0,-4-1 0,0 2 0,0 1 0,70 16 0,-100-17 0,0 1 0,-1 0 0,1 1 0,-1 0 0,0 0 0,0 1 0,0 0 0,0 1 0,-1 0 0,0 0 0,-1 1 0,1 0 0,-1 1 0,0-1 0,-1 1 0,0 0 0,0 1 0,-1 0 0,0-1 0,5 13 0,-3 0 0,-1-1 0,-1 1 0,-1 0 0,-1 0 0,-1 0 0,0 41 0,-21 130 0,9-113 0,-21 119 0,19-142 155,-21 64 0,21-83-490,1 0 0,2 2 0,1-1 0,-3 69 0</inkml:trace>
+</inkml:ink>
+</file>
+
 <file path=ppt/slideLayouts/slideLayout1.xml><?xml version="1.0" encoding="utf-8"?>
 <p:sldLayout xmlns:a="http://schemas.openxmlformats.org/drawingml/2006/main" xmlns:r="http://schemas.openxmlformats.org/officeDocument/2006/relationships" xmlns:p="http://schemas.openxmlformats.org/presentationml/2006/main" type="title" preserve="1">
   <p:cSld name="Title Slide">
@@ -325,7 +381,7 @@
           <a:p>
             <a:fld id="{5BCAD085-E8A6-8845-BD4E-CB4CCA059FC4}" type="datetimeFigureOut">
               <a:rPr lang="en-US" smtClean="0"/>
-              <a:t>9/17/2026</a:t>
+              <a:t>9/18/2026</a:t>
             </a:fld>
             <a:endParaRPr lang="en-US"/>
           </a:p>
@@ -493,7 +549,7 @@
           <a:p>
             <a:fld id="{5BCAD085-E8A6-8845-BD4E-CB4CCA059FC4}" type="datetimeFigureOut">
               <a:rPr lang="en-US" smtClean="0"/>
-              <a:t>9/17/2026</a:t>
+              <a:t>9/18/2026</a:t>
             </a:fld>
             <a:endParaRPr lang="en-US"/>
           </a:p>
@@ -671,7 +727,7 @@
           <a:p>
             <a:fld id="{5BCAD085-E8A6-8845-BD4E-CB4CCA059FC4}" type="datetimeFigureOut">
               <a:rPr lang="en-US" smtClean="0"/>
-              <a:t>9/17/2026</a:t>
+              <a:t>9/18/2026</a:t>
             </a:fld>
             <a:endParaRPr lang="en-US"/>
           </a:p>
@@ -839,7 +895,7 @@
           <a:p>
             <a:fld id="{5BCAD085-E8A6-8845-BD4E-CB4CCA059FC4}" type="datetimeFigureOut">
               <a:rPr lang="en-US" smtClean="0"/>
-              <a:t>9/17/2026</a:t>
+              <a:t>9/18/2026</a:t>
             </a:fld>
             <a:endParaRPr lang="en-US"/>
           </a:p>
@@ -1084,7 +1140,7 @@
           <a:p>
             <a:fld id="{5BCAD085-E8A6-8845-BD4E-CB4CCA059FC4}" type="datetimeFigureOut">
               <a:rPr lang="en-US" smtClean="0"/>
-              <a:t>9/17/2026</a:t>
+              <a:t>9/18/2026</a:t>
             </a:fld>
             <a:endParaRPr lang="en-US"/>
           </a:p>
@@ -1369,7 +1425,7 @@
           <a:p>
             <a:fld id="{5BCAD085-E8A6-8845-BD4E-CB4CCA059FC4}" type="datetimeFigureOut">
               <a:rPr lang="en-US" smtClean="0"/>
-              <a:t>9/17/2026</a:t>
+              <a:t>9/18/2026</a:t>
             </a:fld>
             <a:endParaRPr lang="en-US"/>
           </a:p>
@@ -1788,7 +1844,7 @@
           <a:p>
             <a:fld id="{5BCAD085-E8A6-8845-BD4E-CB4CCA059FC4}" type="datetimeFigureOut">
               <a:rPr lang="en-US" smtClean="0"/>
-              <a:t>9/17/2026</a:t>
+              <a:t>9/18/2026</a:t>
             </a:fld>
             <a:endParaRPr lang="en-US"/>
           </a:p>
@@ -1905,7 +1961,7 @@
           <a:p>
             <a:fld id="{5BCAD085-E8A6-8845-BD4E-CB4CCA059FC4}" type="datetimeFigureOut">
               <a:rPr lang="en-US" smtClean="0"/>
-              <a:t>9/17/2026</a:t>
+              <a:t>9/18/2026</a:t>
             </a:fld>
             <a:endParaRPr lang="en-US"/>
           </a:p>
@@ -2000,7 +2056,7 @@
           <a:p>
             <a:fld id="{5BCAD085-E8A6-8845-BD4E-CB4CCA059FC4}" type="datetimeFigureOut">
               <a:rPr lang="en-US" smtClean="0"/>
-              <a:t>9/17/2026</a:t>
+              <a:t>9/18/2026</a:t>
             </a:fld>
             <a:endParaRPr lang="en-US"/>
           </a:p>
@@ -2275,7 +2331,7 @@
           <a:p>
             <a:fld id="{5BCAD085-E8A6-8845-BD4E-CB4CCA059FC4}" type="datetimeFigureOut">
               <a:rPr lang="en-US" smtClean="0"/>
-              <a:t>9/17/2026</a:t>
+              <a:t>9/18/2026</a:t>
             </a:fld>
             <a:endParaRPr lang="en-US"/>
           </a:p>
@@ -2527,7 +2583,7 @@
           <a:p>
             <a:fld id="{5BCAD085-E8A6-8845-BD4E-CB4CCA059FC4}" type="datetimeFigureOut">
               <a:rPr lang="en-US" smtClean="0"/>
-              <a:t>9/17/2026</a:t>
+              <a:t>9/18/2026</a:t>
             </a:fld>
             <a:endParaRPr lang="en-US"/>
           </a:p>
@@ -2738,7 +2794,7 @@
           <a:p>
             <a:fld id="{5BCAD085-E8A6-8845-BD4E-CB4CCA059FC4}" type="datetimeFigureOut">
               <a:rPr lang="en-US" smtClean="0"/>
-              <a:t>9/17/2026</a:t>
+              <a:t>9/18/2026</a:t>
             </a:fld>
             <a:endParaRPr lang="en-US"/>
           </a:p>
@@ -3123,19 +3179,43 @@
             <p:ph type="ctrTitle"/>
           </p:nvPr>
         </p:nvSpPr>
-        <p:spPr/>
+        <p:spPr>
+          <a:xfrm>
+            <a:off x="868680" y="2069250"/>
+            <a:ext cx="7772400" cy="1470025"/>
+          </a:xfrm>
+        </p:spPr>
         <p:txBody>
-          <a:bodyPr/>
+          <a:bodyPr>
+            <a:normAutofit/>
+          </a:bodyPr>
           <a:lstStyle/>
           <a:p>
             <a:r>
-              <a:rPr lang="en-IN" dirty="0"/>
-              <a:t>Project </a:t>
-            </a:r>
-            <a:r>
-              <a:rPr dirty="0"/>
-              <a:t>Title</a:t>
-            </a:r>
+              <a:rPr lang="en-GB" sz="4000" dirty="0">
+                <a:latin typeface="Times New Roman" panose="02020603050405020304" pitchFamily="18" charset="0"/>
+                <a:cs typeface="Times New Roman" panose="02020603050405020304" pitchFamily="18" charset="0"/>
+              </a:rPr>
+              <a:t>Agentic </a:t>
+            </a:r>
+            <a:r>
+              <a:rPr lang="en-GB" sz="4000" dirty="0" err="1">
+                <a:latin typeface="Times New Roman" panose="02020603050405020304" pitchFamily="18" charset="0"/>
+                <a:cs typeface="Times New Roman" panose="02020603050405020304" pitchFamily="18" charset="0"/>
+              </a:rPr>
+              <a:t>GrahRAG</a:t>
+            </a:r>
+            <a:r>
+              <a:rPr lang="en-GB" sz="4000" dirty="0">
+                <a:latin typeface="Times New Roman" panose="02020603050405020304" pitchFamily="18" charset="0"/>
+                <a:cs typeface="Times New Roman" panose="02020603050405020304" pitchFamily="18" charset="0"/>
+              </a:rPr>
+              <a:t> for Financial Question Answering</a:t>
+            </a:r>
+            <a:endParaRPr sz="4000" dirty="0">
+              <a:latin typeface="Times New Roman" panose="02020603050405020304" pitchFamily="18" charset="0"/>
+              <a:cs typeface="Times New Roman" panose="02020603050405020304" pitchFamily="18" charset="0"/>
+            </a:endParaRPr>
           </a:p>
         </p:txBody>
       </p:sp>
@@ -3151,7 +3231,7 @@
         </p:nvSpPr>
         <p:spPr>
           <a:xfrm>
-            <a:off x="457200" y="3886200"/>
+            <a:off x="704088" y="3815861"/>
             <a:ext cx="7936992" cy="2240280"/>
           </a:xfrm>
         </p:spPr>
@@ -3165,48 +3245,85 @@
           </a:p>
           <a:p>
             <a:r>
-              <a:rPr dirty="0"/>
+              <a:rPr dirty="0">
+                <a:latin typeface="Times New Roman" panose="02020603050405020304" pitchFamily="18" charset="0"/>
+                <a:cs typeface="Times New Roman" panose="02020603050405020304" pitchFamily="18" charset="0"/>
+              </a:rPr>
               <a:t>Student Details:</a:t>
             </a:r>
           </a:p>
           <a:p>
             <a:r>
-              <a:rPr dirty="0"/>
-              <a:t>1. Name – Reg No.</a:t>
-            </a:r>
-          </a:p>
-          <a:p>
-            <a:r>
-              <a:rPr dirty="0"/>
-              <a:t>2. Name – Reg No.</a:t>
-            </a:r>
-          </a:p>
-          <a:p>
-            <a:r>
-              <a:rPr dirty="0"/>
-              <a:t>3. Name – Reg No.</a:t>
-            </a:r>
-          </a:p>
-          <a:p>
-            <a:r>
-              <a:rPr dirty="0"/>
-              <a:t>4. Name – Reg No.</a:t>
-            </a:r>
-            <a:endParaRPr lang="en-IN" dirty="0"/>
-          </a:p>
-          <a:p>
-            <a:endParaRPr lang="en-IN" dirty="0"/>
-          </a:p>
-          <a:p>
-            <a:r>
-              <a:rPr lang="en-IN" dirty="0"/>
-              <a:t>Team Number: ______</a:t>
-            </a:r>
-          </a:p>
-          <a:p>
-            <a:r>
-              <a:rPr lang="en-IN" dirty="0"/>
-              <a:t>Supervisor: ______</a:t>
+              <a:rPr lang="en-GB" dirty="0">
+                <a:latin typeface="Times New Roman" panose="02020603050405020304" pitchFamily="18" charset="0"/>
+                <a:cs typeface="Times New Roman" panose="02020603050405020304" pitchFamily="18" charset="0"/>
+              </a:rPr>
+              <a:t>1. C Vishnuvardhan Chowdary – CB.SC.U4AIE23219</a:t>
+            </a:r>
+          </a:p>
+          <a:p>
+            <a:r>
+              <a:rPr lang="en-GB" dirty="0">
+                <a:latin typeface="Times New Roman" panose="02020603050405020304" pitchFamily="18" charset="0"/>
+                <a:cs typeface="Times New Roman" panose="02020603050405020304" pitchFamily="18" charset="0"/>
+              </a:rPr>
+              <a:t>2. CB Harsha Vardhan – CB.SC.U4AIE23220</a:t>
+            </a:r>
+          </a:p>
+          <a:p>
+            <a:r>
+              <a:rPr lang="en-GB" dirty="0">
+                <a:latin typeface="Times New Roman" panose="02020603050405020304" pitchFamily="18" charset="0"/>
+                <a:cs typeface="Times New Roman" panose="02020603050405020304" pitchFamily="18" charset="0"/>
+              </a:rPr>
+              <a:t>3. I Charuhas Reddy – CB.SC.U4AIE23233</a:t>
+            </a:r>
+          </a:p>
+          <a:p>
+            <a:r>
+              <a:rPr lang="en-GB" dirty="0">
+                <a:latin typeface="Times New Roman" panose="02020603050405020304" pitchFamily="18" charset="0"/>
+                <a:cs typeface="Times New Roman" panose="02020603050405020304" pitchFamily="18" charset="0"/>
+              </a:rPr>
+              <a:t>4. Y </a:t>
+            </a:r>
+            <a:r>
+              <a:rPr lang="en-GB" dirty="0" err="1">
+                <a:latin typeface="Times New Roman" panose="02020603050405020304" pitchFamily="18" charset="0"/>
+                <a:cs typeface="Times New Roman" panose="02020603050405020304" pitchFamily="18" charset="0"/>
+              </a:rPr>
+              <a:t>Bhasith</a:t>
+            </a:r>
+            <a:r>
+              <a:rPr lang="en-GB" dirty="0">
+                <a:latin typeface="Times New Roman" panose="02020603050405020304" pitchFamily="18" charset="0"/>
+                <a:cs typeface="Times New Roman" panose="02020603050405020304" pitchFamily="18" charset="0"/>
+              </a:rPr>
+              <a:t> Sai Reddy – CB.SC.U4AIE23264</a:t>
+            </a:r>
+          </a:p>
+          <a:p>
+            <a:endParaRPr lang="en-GB" dirty="0">
+              <a:latin typeface="Times New Roman" panose="02020603050405020304" pitchFamily="18" charset="0"/>
+              <a:cs typeface="Times New Roman" panose="02020603050405020304" pitchFamily="18" charset="0"/>
+            </a:endParaRPr>
+          </a:p>
+          <a:p>
+            <a:r>
+              <a:rPr lang="en-GB" dirty="0">
+                <a:latin typeface="Times New Roman" panose="02020603050405020304" pitchFamily="18" charset="0"/>
+                <a:cs typeface="Times New Roman" panose="02020603050405020304" pitchFamily="18" charset="0"/>
+              </a:rPr>
+              <a:t>Team Number: C09</a:t>
+            </a:r>
+          </a:p>
+          <a:p>
+            <a:r>
+              <a:rPr lang="en-GB" dirty="0">
+                <a:latin typeface="Times New Roman" panose="02020603050405020304" pitchFamily="18" charset="0"/>
+                <a:cs typeface="Times New Roman" panose="02020603050405020304" pitchFamily="18" charset="0"/>
+              </a:rPr>
+              <a:t>Supervisor: Dr. Ardra P.S</a:t>
             </a:r>
           </a:p>
           <a:p>
@@ -3230,7 +3347,7 @@
         </p:blipFill>
         <p:spPr>
           <a:xfrm>
-            <a:off x="1905611" y="91440"/>
+            <a:off x="1905611" y="167685"/>
             <a:ext cx="5332778" cy="932688"/>
           </a:xfrm>
           <a:prstGeom prst="rect">
@@ -3246,8 +3363,8 @@
         </p:nvSpPr>
         <p:spPr>
           <a:xfrm>
-            <a:off x="-365760" y="1377760"/>
-            <a:ext cx="10241280" cy="731520"/>
+            <a:off x="-365760" y="1238666"/>
+            <a:ext cx="10241280" cy="553998"/>
           </a:xfrm>
           <a:prstGeom prst="rect">
             <a:avLst/>
@@ -3262,100 +3379,11 @@
           <a:p>
             <a:pPr algn="ctr"/>
             <a:r>
-              <a:rPr sz="3000" b="1" dirty="0"/>
+              <a:rPr sz="3000" b="1" dirty="0">
+                <a:latin typeface="Times New Roman" panose="02020603050405020304" pitchFamily="18" charset="0"/>
+                <a:cs typeface="Times New Roman" panose="02020603050405020304" pitchFamily="18" charset="0"/>
+              </a:rPr>
               <a:t>FIRST REVIEW – B.TECH PROJECT</a:t>
-            </a:r>
-          </a:p>
-        </p:txBody>
-      </p:sp>
-      <p:sp>
-        <p:nvSpPr>
-          <p:cNvPr id="7" name="TextBox 6"/>
-          <p:cNvSpPr txBox="1"/>
-          <p:nvPr/>
-        </p:nvSpPr>
-        <p:spPr>
-          <a:xfrm>
-            <a:off x="-365760" y="3112389"/>
-            <a:ext cx="9875520" cy="1188720"/>
-          </a:xfrm>
-          <a:prstGeom prst="rect">
-            <a:avLst/>
-          </a:prstGeom>
-          <a:noFill/>
-        </p:spPr>
-        <p:txBody>
-          <a:bodyPr wrap="square">
-            <a:spAutoFit/>
-          </a:bodyPr>
-          <a:lstStyle/>
-          <a:p>
-            <a:pPr algn="ctr"/>
-            <a:r>
-              <a:rPr sz="1700" b="0" dirty="0"/>
-              <a:t>Team No.: 07
-Student 1 – Reg. No. | Student 2 – Reg. No.
-Student 3 – Reg. No. | Student 4 – Reg. No.</a:t>
-            </a:r>
-          </a:p>
-        </p:txBody>
-      </p:sp>
-      <p:sp>
-        <p:nvSpPr>
-          <p:cNvPr id="8" name="TextBox 7"/>
-          <p:cNvSpPr txBox="1"/>
-          <p:nvPr/>
-        </p:nvSpPr>
-        <p:spPr>
-          <a:xfrm>
-            <a:off x="2423160" y="4869180"/>
-            <a:ext cx="9875520" cy="411480"/>
-          </a:xfrm>
-          <a:prstGeom prst="rect">
-            <a:avLst/>
-          </a:prstGeom>
-          <a:noFill/>
-        </p:spPr>
-        <p:txBody>
-          <a:bodyPr wrap="square">
-            <a:spAutoFit/>
-          </a:bodyPr>
-          <a:lstStyle/>
-          <a:p>
-            <a:pPr algn="ctr"/>
-            <a:r>
-              <a:rPr sz="1800" b="0" dirty="0"/>
-              <a:t>Supervisor: Dr. XXXXX</a:t>
-            </a:r>
-          </a:p>
-        </p:txBody>
-      </p:sp>
-      <p:sp>
-        <p:nvSpPr>
-          <p:cNvPr id="9" name="TextBox 8"/>
-          <p:cNvSpPr txBox="1"/>
-          <p:nvPr/>
-        </p:nvSpPr>
-        <p:spPr>
-          <a:xfrm>
-            <a:off x="502920" y="6446520"/>
-            <a:ext cx="10972800" cy="201168"/>
-          </a:xfrm>
-          <a:prstGeom prst="rect">
-            <a:avLst/>
-          </a:prstGeom>
-          <a:noFill/>
-        </p:spPr>
-        <p:txBody>
-          <a:bodyPr wrap="square">
-            <a:spAutoFit/>
-          </a:bodyPr>
-          <a:lstStyle/>
-          <a:p>
-            <a:pPr algn="l"/>
-            <a:r>
-              <a:rPr sz="900" b="0"/>
-              <a:t>FIRST REVIEW • SAMPLE FORMAT • Slide 1</a:t>
             </a:r>
           </a:p>
         </p:txBody>
@@ -3415,36 +3443,6 @@
           </a:p>
         </p:txBody>
       </p:sp>
-      <p:sp>
-        <p:nvSpPr>
-          <p:cNvPr id="4" name="TextBox 3"/>
-          <p:cNvSpPr txBox="1"/>
-          <p:nvPr/>
-        </p:nvSpPr>
-        <p:spPr>
-          <a:xfrm>
-            <a:off x="502920" y="6446520"/>
-            <a:ext cx="10972800" cy="201168"/>
-          </a:xfrm>
-          <a:prstGeom prst="rect">
-            <a:avLst/>
-          </a:prstGeom>
-          <a:noFill/>
-        </p:spPr>
-        <p:txBody>
-          <a:bodyPr wrap="square">
-            <a:spAutoFit/>
-          </a:bodyPr>
-          <a:lstStyle/>
-          <a:p>
-            <a:pPr algn="l"/>
-            <a:r>
-              <a:rPr sz="900" b="0"/>
-              <a:t>FIRST REVIEW • SAMPLE FORMAT • Slide 10</a:t>
-            </a:r>
-          </a:p>
-        </p:txBody>
-      </p:sp>
     </p:spTree>
   </p:cSld>
   <p:clrMapOvr>
@@ -3494,7 +3492,10 @@
           <a:p>
             <a:pPr algn="l"/>
             <a:r>
-              <a:rPr sz="2700" b="1"/>
+              <a:rPr sz="2700" b="1" dirty="0">
+                <a:latin typeface="Times New Roman" panose="02020603050405020304" pitchFamily="18" charset="0"/>
+                <a:cs typeface="Times New Roman" panose="02020603050405020304" pitchFamily="18" charset="0"/>
+              </a:rPr>
               <a:t>10 | Current Limitations &amp; Technical Challenges</a:t>
             </a:r>
           </a:p>
@@ -3502,14 +3503,20 @@
       </p:sp>
       <p:sp>
         <p:nvSpPr>
-          <p:cNvPr id="4" name="TextBox 3"/>
+          <p:cNvPr id="3" name="TextBox 2">
+            <a:extLst>
+              <a:ext uri="{FF2B5EF4-FFF2-40B4-BE49-F238E27FC236}">
+                <a16:creationId xmlns:a16="http://schemas.microsoft.com/office/drawing/2014/main" id="{17D1DDA3-BDB3-DC43-1021-80577B989D0A}"/>
+              </a:ext>
+            </a:extLst>
+          </p:cNvPr>
           <p:cNvSpPr txBox="1"/>
           <p:nvPr/>
         </p:nvSpPr>
         <p:spPr>
           <a:xfrm>
-            <a:off x="502920" y="6446520"/>
-            <a:ext cx="10972800" cy="201168"/>
+            <a:off x="502920" y="1049912"/>
+            <a:ext cx="8423030" cy="4613058"/>
           </a:xfrm>
           <a:prstGeom prst="rect">
             <a:avLst/>
@@ -3517,15 +3524,188 @@
           <a:noFill/>
         </p:spPr>
         <p:txBody>
-          <a:bodyPr wrap="square">
+          <a:bodyPr wrap="square" rtlCol="0">
             <a:spAutoFit/>
           </a:bodyPr>
           <a:lstStyle/>
           <a:p>
-            <a:pPr algn="l"/>
-            <a:r>
-              <a:rPr sz="900" b="0"/>
-              <a:t>FIRST REVIEW • SAMPLE FORMAT • Slide 11</a:t>
+            <a:pPr marL="285750" lvl="0" indent="-285750" algn="just">
+              <a:lnSpc>
+                <a:spcPct val="150000"/>
+              </a:lnSpc>
+              <a:buFont typeface="Arial" panose="020B0604020202020204" pitchFamily="34" charset="0"/>
+              <a:buChar char="•"/>
+            </a:pPr>
+            <a:r>
+              <a:rPr lang="en-GB" b="1" dirty="0">
+                <a:latin typeface="Times New Roman" panose="02020603050405020304" pitchFamily="18" charset="0"/>
+                <a:cs typeface="Times New Roman" panose="02020603050405020304" pitchFamily="18" charset="0"/>
+              </a:rPr>
+              <a:t>Neo4j </a:t>
+            </a:r>
+            <a:r>
+              <a:rPr lang="en-GB" b="1" dirty="0" err="1">
+                <a:latin typeface="Times New Roman" panose="02020603050405020304" pitchFamily="18" charset="0"/>
+                <a:cs typeface="Times New Roman" panose="02020603050405020304" pitchFamily="18" charset="0"/>
+              </a:rPr>
+              <a:t>AuraDB</a:t>
+            </a:r>
+            <a:r>
+              <a:rPr lang="en-GB" b="1" dirty="0">
+                <a:latin typeface="Times New Roman" panose="02020603050405020304" pitchFamily="18" charset="0"/>
+                <a:cs typeface="Times New Roman" panose="02020603050405020304" pitchFamily="18" charset="0"/>
+              </a:rPr>
+              <a:t> Free-Tier Constraints:</a:t>
+            </a:r>
+            <a:r>
+              <a:rPr lang="en-GB" dirty="0">
+                <a:latin typeface="Times New Roman" panose="02020603050405020304" pitchFamily="18" charset="0"/>
+                <a:cs typeface="Times New Roman" panose="02020603050405020304" pitchFamily="18" charset="0"/>
+              </a:rPr>
+              <a:t> Instance restricts heavy in-memory GDS projections, requiring local </a:t>
+            </a:r>
+            <a:r>
+              <a:rPr lang="en-GB" dirty="0" err="1">
+                <a:latin typeface="Times New Roman" panose="02020603050405020304" pitchFamily="18" charset="0"/>
+                <a:cs typeface="Times New Roman" panose="02020603050405020304" pitchFamily="18" charset="0"/>
+              </a:rPr>
+              <a:t>NetworkX</a:t>
+            </a:r>
+            <a:r>
+              <a:rPr lang="en-GB" dirty="0">
+                <a:latin typeface="Times New Roman" panose="02020603050405020304" pitchFamily="18" charset="0"/>
+                <a:cs typeface="Times New Roman" panose="02020603050405020304" pitchFamily="18" charset="0"/>
+              </a:rPr>
+              <a:t> graph snapshot fallback</a:t>
+            </a:r>
+          </a:p>
+          <a:p>
+            <a:pPr marL="285750" lvl="0" indent="-285750" algn="just">
+              <a:lnSpc>
+                <a:spcPct val="150000"/>
+              </a:lnSpc>
+              <a:buFont typeface="Arial" panose="020B0604020202020204" pitchFamily="34" charset="0"/>
+              <a:buChar char="•"/>
+            </a:pPr>
+            <a:endParaRPr lang="en-GB" dirty="0">
+              <a:latin typeface="Times New Roman" panose="02020603050405020304" pitchFamily="18" charset="0"/>
+              <a:cs typeface="Times New Roman" panose="02020603050405020304" pitchFamily="18" charset="0"/>
+            </a:endParaRPr>
+          </a:p>
+          <a:p>
+            <a:pPr marL="285750" lvl="0" indent="-285750" algn="just">
+              <a:lnSpc>
+                <a:spcPct val="150000"/>
+              </a:lnSpc>
+              <a:buFont typeface="Arial" panose="020B0604020202020204" pitchFamily="34" charset="0"/>
+              <a:buChar char="•"/>
+            </a:pPr>
+            <a:r>
+              <a:rPr lang="en-GB" b="1" dirty="0" err="1">
+                <a:latin typeface="Times New Roman" panose="02020603050405020304" pitchFamily="18" charset="0"/>
+                <a:cs typeface="Times New Roman" panose="02020603050405020304" pitchFamily="18" charset="0"/>
+              </a:rPr>
+              <a:t>FinReflectKG</a:t>
+            </a:r>
+            <a:r>
+              <a:rPr lang="en-GB" b="1" dirty="0">
+                <a:latin typeface="Times New Roman" panose="02020603050405020304" pitchFamily="18" charset="0"/>
+                <a:cs typeface="Times New Roman" panose="02020603050405020304" pitchFamily="18" charset="0"/>
+              </a:rPr>
+              <a:t> Dataset Coverage Gaps:</a:t>
+            </a:r>
+            <a:r>
+              <a:rPr lang="en-GB" dirty="0">
+                <a:latin typeface="Times New Roman" panose="02020603050405020304" pitchFamily="18" charset="0"/>
+                <a:cs typeface="Times New Roman" panose="02020603050405020304" pitchFamily="18" charset="0"/>
+              </a:rPr>
+              <a:t> Cross-entity ownership queries return empty subgraphs, </a:t>
+            </a:r>
+            <a:r>
+              <a:rPr lang="en-GB" dirty="0" err="1">
+                <a:latin typeface="Times New Roman" panose="02020603050405020304" pitchFamily="18" charset="0"/>
+                <a:cs typeface="Times New Roman" panose="02020603050405020304" pitchFamily="18" charset="0"/>
+              </a:rPr>
+              <a:t>has_stake_in</a:t>
+            </a:r>
+            <a:r>
+              <a:rPr lang="en-GB" dirty="0">
+                <a:latin typeface="Times New Roman" panose="02020603050405020304" pitchFamily="18" charset="0"/>
+                <a:cs typeface="Times New Roman" panose="02020603050405020304" pitchFamily="18" charset="0"/>
+              </a:rPr>
+              <a:t> relationship is sparse for MSFT in the dataset</a:t>
+            </a:r>
+          </a:p>
+          <a:p>
+            <a:pPr marL="285750" lvl="0" indent="-285750" algn="just">
+              <a:lnSpc>
+                <a:spcPct val="150000"/>
+              </a:lnSpc>
+              <a:buFont typeface="Arial" panose="020B0604020202020204" pitchFamily="34" charset="0"/>
+              <a:buChar char="•"/>
+            </a:pPr>
+            <a:endParaRPr lang="en-GB" dirty="0">
+              <a:latin typeface="Times New Roman" panose="02020603050405020304" pitchFamily="18" charset="0"/>
+              <a:cs typeface="Times New Roman" panose="02020603050405020304" pitchFamily="18" charset="0"/>
+            </a:endParaRPr>
+          </a:p>
+          <a:p>
+            <a:pPr marL="285750" lvl="0" indent="-285750" algn="just">
+              <a:lnSpc>
+                <a:spcPct val="150000"/>
+              </a:lnSpc>
+              <a:buFont typeface="Arial" panose="020B0604020202020204" pitchFamily="34" charset="0"/>
+              <a:buChar char="•"/>
+            </a:pPr>
+            <a:r>
+              <a:rPr lang="en-GB" b="1" dirty="0">
+                <a:latin typeface="Times New Roman" panose="02020603050405020304" pitchFamily="18" charset="0"/>
+                <a:cs typeface="Times New Roman" panose="02020603050405020304" pitchFamily="18" charset="0"/>
+              </a:rPr>
+              <a:t>Complex Multi-Step Table Traversal:</a:t>
+            </a:r>
+            <a:r>
+              <a:rPr lang="en-GB" dirty="0">
+                <a:latin typeface="Times New Roman" panose="02020603050405020304" pitchFamily="18" charset="0"/>
+                <a:cs typeface="Times New Roman" panose="02020603050405020304" pitchFamily="18" charset="0"/>
+              </a:rPr>
+              <a:t> Deeply nested tabular accounting footnotes require cell-to-node linking beyond current 2-hop triplet traversal</a:t>
+            </a:r>
+          </a:p>
+          <a:p>
+            <a:pPr marL="285750" lvl="0" indent="-285750" algn="just">
+              <a:lnSpc>
+                <a:spcPct val="150000"/>
+              </a:lnSpc>
+              <a:buFont typeface="Arial" panose="020B0604020202020204" pitchFamily="34" charset="0"/>
+              <a:buChar char="•"/>
+            </a:pPr>
+            <a:endParaRPr lang="en-GB" dirty="0">
+              <a:latin typeface="Times New Roman" panose="02020603050405020304" pitchFamily="18" charset="0"/>
+              <a:cs typeface="Times New Roman" panose="02020603050405020304" pitchFamily="18" charset="0"/>
+            </a:endParaRPr>
+          </a:p>
+          <a:p>
+            <a:pPr marL="285750" lvl="0" indent="-285750" algn="just">
+              <a:lnSpc>
+                <a:spcPct val="150000"/>
+              </a:lnSpc>
+              <a:buFont typeface="Arial" panose="020B0604020202020204" pitchFamily="34" charset="0"/>
+              <a:buChar char="•"/>
+            </a:pPr>
+            <a:r>
+              <a:rPr lang="en-GB" b="1" dirty="0">
+                <a:latin typeface="Times New Roman" panose="02020603050405020304" pitchFamily="18" charset="0"/>
+                <a:cs typeface="Times New Roman" panose="02020603050405020304" pitchFamily="18" charset="0"/>
+              </a:rPr>
+              <a:t>Provenance Scoring Calibration:</a:t>
+            </a:r>
+            <a:r>
+              <a:rPr lang="en-GB" dirty="0">
+                <a:latin typeface="Times New Roman" panose="02020603050405020304" pitchFamily="18" charset="0"/>
+                <a:cs typeface="Times New Roman" panose="02020603050405020304" pitchFamily="18" charset="0"/>
+              </a:rPr>
+              <a:t> Preliminary claim-level faithfulness scoring requires tighter grounding thresholds</a:t>
             </a:r>
           </a:p>
         </p:txBody>
@@ -3564,7 +3744,7 @@
         <p:spPr>
           <a:xfrm>
             <a:off x="502920" y="228600"/>
-            <a:ext cx="11064240" cy="502920"/>
+            <a:ext cx="11064240" cy="923330"/>
           </a:xfrm>
           <a:prstGeom prst="rect">
             <a:avLst/>
@@ -3579,42 +3759,5052 @@
           <a:p>
             <a:pPr algn="l"/>
             <a:r>
-              <a:rPr sz="2700" b="1"/>
+              <a:rPr sz="2700" b="1" dirty="0">
+                <a:latin typeface="Times New Roman" panose="02020603050405020304" pitchFamily="18" charset="0"/>
+                <a:cs typeface="Times New Roman" panose="02020603050405020304" pitchFamily="18" charset="0"/>
+              </a:rPr>
               <a:t>11 | Remaining Work &amp; Completion Plan</a:t>
             </a:r>
+            <a:endParaRPr lang="en-GB" sz="2700" b="1" dirty="0">
+              <a:latin typeface="Times New Roman" panose="02020603050405020304" pitchFamily="18" charset="0"/>
+              <a:cs typeface="Times New Roman" panose="02020603050405020304" pitchFamily="18" charset="0"/>
+            </a:endParaRPr>
+          </a:p>
+          <a:p>
+            <a:pPr algn="l"/>
+            <a:endParaRPr sz="2700" b="1" dirty="0">
+              <a:latin typeface="Times New Roman" panose="02020603050405020304" pitchFamily="18" charset="0"/>
+              <a:cs typeface="Times New Roman" panose="02020603050405020304" pitchFamily="18" charset="0"/>
+            </a:endParaRPr>
           </a:p>
         </p:txBody>
       </p:sp>
-      <p:sp>
-        <p:nvSpPr>
-          <p:cNvPr id="4" name="TextBox 3"/>
-          <p:cNvSpPr txBox="1"/>
-          <p:nvPr/>
-        </p:nvSpPr>
-        <p:spPr>
-          <a:xfrm>
-            <a:off x="502920" y="6446520"/>
-            <a:ext cx="10972800" cy="201168"/>
-          </a:xfrm>
-          <a:prstGeom prst="rect">
-            <a:avLst/>
-          </a:prstGeom>
-          <a:noFill/>
-        </p:spPr>
-        <p:txBody>
-          <a:bodyPr wrap="square">
-            <a:spAutoFit/>
-          </a:bodyPr>
-          <a:lstStyle/>
-          <a:p>
-            <a:pPr algn="l"/>
-            <a:r>
-              <a:rPr sz="900" b="0"/>
-              <a:t>FIRST REVIEW • SAMPLE FORMAT • Slide 12</a:t>
-            </a:r>
-          </a:p>
-        </p:txBody>
-      </p:sp>
+      <p:graphicFrame>
+        <p:nvGraphicFramePr>
+          <p:cNvPr id="3" name="Content Placeholder 5">
+            <a:extLst>
+              <a:ext uri="{FF2B5EF4-FFF2-40B4-BE49-F238E27FC236}">
+                <a16:creationId xmlns:a16="http://schemas.microsoft.com/office/drawing/2014/main" id="{E3776E58-19D4-C26A-4021-F23A820974DE}"/>
+              </a:ext>
+            </a:extLst>
+          </p:cNvPr>
+          <p:cNvGraphicFramePr>
+            <a:graphicFrameLocks/>
+          </p:cNvGraphicFramePr>
+          <p:nvPr>
+            <p:extLst>
+              <p:ext uri="{D42A27DB-BD31-4B8C-83A1-F6EECF244321}">
+                <p14:modId xmlns:p14="http://schemas.microsoft.com/office/powerpoint/2010/main" val="1118193827"/>
+              </p:ext>
+            </p:extLst>
+          </p:nvPr>
+        </p:nvGraphicFramePr>
+        <p:xfrm>
+          <a:off x="594703" y="683492"/>
+          <a:ext cx="8013584" cy="5874112"/>
+        </p:xfrm>
+        <a:graphic>
+          <a:graphicData uri="http://schemas.openxmlformats.org/drawingml/2006/table">
+            <a:tbl>
+              <a:tblPr firstRow="1" firstCol="1" bandRow="1"/>
+              <a:tblGrid>
+                <a:gridCol w="2824040">
+                  <a:extLst>
+                    <a:ext uri="{9D8B030D-6E8A-4147-A177-3AD203B41FA5}">
+                      <a16:colId xmlns:a16="http://schemas.microsoft.com/office/drawing/2014/main" val="218121791"/>
+                    </a:ext>
+                  </a:extLst>
+                </a:gridCol>
+                <a:gridCol w="576616">
+                  <a:extLst>
+                    <a:ext uri="{9D8B030D-6E8A-4147-A177-3AD203B41FA5}">
+                      <a16:colId xmlns:a16="http://schemas.microsoft.com/office/drawing/2014/main" val="2928743028"/>
+                    </a:ext>
+                  </a:extLst>
+                </a:gridCol>
+                <a:gridCol w="576616">
+                  <a:extLst>
+                    <a:ext uri="{9D8B030D-6E8A-4147-A177-3AD203B41FA5}">
+                      <a16:colId xmlns:a16="http://schemas.microsoft.com/office/drawing/2014/main" val="1724497368"/>
+                    </a:ext>
+                  </a:extLst>
+                </a:gridCol>
+                <a:gridCol w="576616">
+                  <a:extLst>
+                    <a:ext uri="{9D8B030D-6E8A-4147-A177-3AD203B41FA5}">
+                      <a16:colId xmlns:a16="http://schemas.microsoft.com/office/drawing/2014/main" val="3924981907"/>
+                    </a:ext>
+                  </a:extLst>
+                </a:gridCol>
+                <a:gridCol w="576616">
+                  <a:extLst>
+                    <a:ext uri="{9D8B030D-6E8A-4147-A177-3AD203B41FA5}">
+                      <a16:colId xmlns:a16="http://schemas.microsoft.com/office/drawing/2014/main" val="2318839503"/>
+                    </a:ext>
+                  </a:extLst>
+                </a:gridCol>
+                <a:gridCol w="576616">
+                  <a:extLst>
+                    <a:ext uri="{9D8B030D-6E8A-4147-A177-3AD203B41FA5}">
+                      <a16:colId xmlns:a16="http://schemas.microsoft.com/office/drawing/2014/main" val="811972187"/>
+                    </a:ext>
+                  </a:extLst>
+                </a:gridCol>
+                <a:gridCol w="576616">
+                  <a:extLst>
+                    <a:ext uri="{9D8B030D-6E8A-4147-A177-3AD203B41FA5}">
+                      <a16:colId xmlns:a16="http://schemas.microsoft.com/office/drawing/2014/main" val="531620366"/>
+                    </a:ext>
+                  </a:extLst>
+                </a:gridCol>
+                <a:gridCol w="576616">
+                  <a:extLst>
+                    <a:ext uri="{9D8B030D-6E8A-4147-A177-3AD203B41FA5}">
+                      <a16:colId xmlns:a16="http://schemas.microsoft.com/office/drawing/2014/main" val="4168274267"/>
+                    </a:ext>
+                  </a:extLst>
+                </a:gridCol>
+                <a:gridCol w="576616">
+                  <a:extLst>
+                    <a:ext uri="{9D8B030D-6E8A-4147-A177-3AD203B41FA5}">
+                      <a16:colId xmlns:a16="http://schemas.microsoft.com/office/drawing/2014/main" val="1445427091"/>
+                    </a:ext>
+                  </a:extLst>
+                </a:gridCol>
+                <a:gridCol w="576616">
+                  <a:extLst>
+                    <a:ext uri="{9D8B030D-6E8A-4147-A177-3AD203B41FA5}">
+                      <a16:colId xmlns:a16="http://schemas.microsoft.com/office/drawing/2014/main" val="3127001081"/>
+                    </a:ext>
+                  </a:extLst>
+                </a:gridCol>
+              </a:tblGrid>
+              <a:tr h="146030">
+                <a:tc>
+                  <a:txBody>
+                    <a:bodyPr/>
+                    <a:lstStyle/>
+                    <a:p>
+                      <a:pPr algn="r">
+                        <a:lnSpc>
+                          <a:spcPct val="107000"/>
+                        </a:lnSpc>
+                        <a:spcAft>
+                          <a:spcPts val="800"/>
+                        </a:spcAft>
+                        <a:buNone/>
+                      </a:pPr>
+                      <a:r>
+                        <a:rPr lang="en-IN" sz="700" kern="100" dirty="0">
+                          <a:effectLst/>
+                        </a:rPr>
+                        <a:t> </a:t>
+                      </a:r>
+                      <a:endParaRPr lang="en-IN" sz="900" kern="100" dirty="0">
+                        <a:effectLst/>
+                        <a:latin typeface="Calibri" panose="020F0502020204030204" pitchFamily="34" charset="0"/>
+                        <a:ea typeface="Calibri" panose="020F0502020204030204" pitchFamily="34" charset="0"/>
+                        <a:cs typeface="Times New Roman" panose="02020603050405020304" pitchFamily="18" charset="0"/>
+                      </a:endParaRPr>
+                    </a:p>
+                  </a:txBody>
+                  <a:tcPr marL="56848" marR="56848" marT="0" marB="0">
+                    <a:lnL w="12700" cmpd="sng">
+                      <a:noFill/>
+                      <a:prstDash val="solid"/>
+                    </a:lnL>
+                    <a:lnR w="12700" cmpd="sng">
+                      <a:noFill/>
+                      <a:prstDash val="solid"/>
+                    </a:lnR>
+                    <a:lnT w="12700" cmpd="sng">
+                      <a:noFill/>
+                      <a:prstDash val="solid"/>
+                    </a:lnT>
+                    <a:lnB w="12700" cap="flat" cmpd="sng" algn="ctr">
+                      <a:noFill/>
+                      <a:prstDash val="solid"/>
+                      <a:round/>
+                      <a:headEnd type="none" w="med" len="med"/>
+                      <a:tailEnd type="none" w="med" len="med"/>
+                    </a:lnB>
+                    <a:lnTlToBr w="12700" cmpd="sng">
+                      <a:noFill/>
+                      <a:prstDash val="solid"/>
+                    </a:lnTlToBr>
+                    <a:lnBlToTr w="12700" cmpd="sng">
+                      <a:noFill/>
+                      <a:prstDash val="solid"/>
+                    </a:lnBlToTr>
+                  </a:tcPr>
+                </a:tc>
+                <a:tc>
+                  <a:txBody>
+                    <a:bodyPr/>
+                    <a:lstStyle/>
+                    <a:p>
+                      <a:pPr>
+                        <a:lnSpc>
+                          <a:spcPct val="107000"/>
+                        </a:lnSpc>
+                        <a:spcAft>
+                          <a:spcPts val="800"/>
+                        </a:spcAft>
+                        <a:buNone/>
+                      </a:pPr>
+                      <a:r>
+                        <a:rPr lang="en-IN" sz="1050" b="1" kern="100" dirty="0">
+                          <a:effectLst/>
+                        </a:rPr>
+                        <a:t> </a:t>
+                      </a:r>
+                      <a:endParaRPr lang="en-IN" sz="1200" b="1" kern="100" dirty="0">
+                        <a:effectLst/>
+                        <a:latin typeface="Calibri" panose="020F0502020204030204" pitchFamily="34" charset="0"/>
+                        <a:ea typeface="Calibri" panose="020F0502020204030204" pitchFamily="34" charset="0"/>
+                        <a:cs typeface="Times New Roman" panose="02020603050405020304" pitchFamily="18" charset="0"/>
+                      </a:endParaRPr>
+                    </a:p>
+                  </a:txBody>
+                  <a:tcPr marL="56848" marR="56848" marT="0" marB="0">
+                    <a:lnL w="12700" cmpd="sng">
+                      <a:noFill/>
+                      <a:prstDash val="solid"/>
+                    </a:lnL>
+                    <a:lnR w="12700" cmpd="sng">
+                      <a:noFill/>
+                      <a:prstDash val="solid"/>
+                    </a:lnR>
+                    <a:lnT w="12700" cmpd="sng">
+                      <a:noFill/>
+                      <a:prstDash val="solid"/>
+                    </a:lnT>
+                    <a:lnB w="12700" cmpd="sng">
+                      <a:noFill/>
+                      <a:prstDash val="solid"/>
+                    </a:lnB>
+                    <a:lnTlToBr w="12700" cmpd="sng">
+                      <a:noFill/>
+                      <a:prstDash val="solid"/>
+                    </a:lnTlToBr>
+                    <a:lnBlToTr w="12700" cmpd="sng">
+                      <a:noFill/>
+                      <a:prstDash val="solid"/>
+                    </a:lnBlToTr>
+                    <a:solidFill>
+                      <a:srgbClr val="FFFF00"/>
+                    </a:solidFill>
+                  </a:tcPr>
+                </a:tc>
+                <a:tc>
+                  <a:txBody>
+                    <a:bodyPr/>
+                    <a:lstStyle/>
+                    <a:p>
+                      <a:pPr>
+                        <a:lnSpc>
+                          <a:spcPct val="107000"/>
+                        </a:lnSpc>
+                        <a:spcAft>
+                          <a:spcPts val="800"/>
+                        </a:spcAft>
+                        <a:buNone/>
+                      </a:pPr>
+                      <a:r>
+                        <a:rPr lang="en-IN" sz="1050" b="1" kern="100" dirty="0">
+                          <a:effectLst/>
+                        </a:rPr>
+                        <a:t> </a:t>
+                      </a:r>
+                      <a:endParaRPr lang="en-IN" sz="1200" b="1" kern="100" dirty="0">
+                        <a:effectLst/>
+                        <a:latin typeface="Calibri" panose="020F0502020204030204" pitchFamily="34" charset="0"/>
+                        <a:ea typeface="Calibri" panose="020F0502020204030204" pitchFamily="34" charset="0"/>
+                        <a:cs typeface="Times New Roman" panose="02020603050405020304" pitchFamily="18" charset="0"/>
+                      </a:endParaRPr>
+                    </a:p>
+                  </a:txBody>
+                  <a:tcPr marL="56848" marR="56848" marT="0" marB="0">
+                    <a:lnL w="12700" cmpd="sng">
+                      <a:noFill/>
+                      <a:prstDash val="solid"/>
+                    </a:lnL>
+                    <a:lnR w="12700" cmpd="sng">
+                      <a:noFill/>
+                      <a:prstDash val="solid"/>
+                    </a:lnR>
+                    <a:lnT w="12700" cmpd="sng">
+                      <a:noFill/>
+                      <a:prstDash val="solid"/>
+                    </a:lnT>
+                    <a:lnB w="12700" cmpd="sng">
+                      <a:noFill/>
+                      <a:prstDash val="solid"/>
+                    </a:lnB>
+                    <a:lnTlToBr w="12700" cmpd="sng">
+                      <a:noFill/>
+                      <a:prstDash val="solid"/>
+                    </a:lnTlToBr>
+                    <a:lnBlToTr w="12700" cmpd="sng">
+                      <a:noFill/>
+                      <a:prstDash val="solid"/>
+                    </a:lnBlToTr>
+                    <a:solidFill>
+                      <a:srgbClr val="FFFF00"/>
+                    </a:solidFill>
+                  </a:tcPr>
+                </a:tc>
+                <a:tc>
+                  <a:txBody>
+                    <a:bodyPr/>
+                    <a:lstStyle/>
+                    <a:p>
+                      <a:pPr>
+                        <a:lnSpc>
+                          <a:spcPct val="107000"/>
+                        </a:lnSpc>
+                        <a:spcAft>
+                          <a:spcPts val="800"/>
+                        </a:spcAft>
+                        <a:buNone/>
+                      </a:pPr>
+                      <a:r>
+                        <a:rPr lang="en-IN" sz="1050" b="1" kern="100">
+                          <a:effectLst/>
+                        </a:rPr>
+                        <a:t>‘26</a:t>
+                      </a:r>
+                      <a:endParaRPr lang="en-IN" sz="1200" b="1" kern="100">
+                        <a:effectLst/>
+                        <a:latin typeface="Calibri" panose="020F0502020204030204" pitchFamily="34" charset="0"/>
+                        <a:ea typeface="Calibri" panose="020F0502020204030204" pitchFamily="34" charset="0"/>
+                        <a:cs typeface="Times New Roman" panose="02020603050405020304" pitchFamily="18" charset="0"/>
+                      </a:endParaRPr>
+                    </a:p>
+                  </a:txBody>
+                  <a:tcPr marL="56848" marR="56848" marT="0" marB="0">
+                    <a:lnL w="12700" cmpd="sng">
+                      <a:noFill/>
+                      <a:prstDash val="solid"/>
+                    </a:lnL>
+                    <a:lnR w="12700" cmpd="sng">
+                      <a:noFill/>
+                      <a:prstDash val="solid"/>
+                    </a:lnR>
+                    <a:lnT w="12700" cmpd="sng">
+                      <a:noFill/>
+                      <a:prstDash val="solid"/>
+                    </a:lnT>
+                    <a:lnB w="12700" cmpd="sng">
+                      <a:noFill/>
+                      <a:prstDash val="solid"/>
+                    </a:lnB>
+                    <a:lnTlToBr w="12700" cmpd="sng">
+                      <a:noFill/>
+                      <a:prstDash val="solid"/>
+                    </a:lnTlToBr>
+                    <a:lnBlToTr w="12700" cmpd="sng">
+                      <a:noFill/>
+                      <a:prstDash val="solid"/>
+                    </a:lnBlToTr>
+                    <a:solidFill>
+                      <a:srgbClr val="FFFF00"/>
+                    </a:solidFill>
+                  </a:tcPr>
+                </a:tc>
+                <a:tc>
+                  <a:txBody>
+                    <a:bodyPr/>
+                    <a:lstStyle/>
+                    <a:p>
+                      <a:pPr>
+                        <a:lnSpc>
+                          <a:spcPct val="107000"/>
+                        </a:lnSpc>
+                        <a:spcAft>
+                          <a:spcPts val="800"/>
+                        </a:spcAft>
+                        <a:buNone/>
+                      </a:pPr>
+                      <a:r>
+                        <a:rPr lang="en-IN" sz="1050" b="1" kern="100" dirty="0">
+                          <a:effectLst/>
+                        </a:rPr>
+                        <a:t> </a:t>
+                      </a:r>
+                      <a:endParaRPr lang="en-IN" sz="1200" b="1" kern="100" dirty="0">
+                        <a:effectLst/>
+                        <a:latin typeface="Calibri" panose="020F0502020204030204" pitchFamily="34" charset="0"/>
+                        <a:ea typeface="Calibri" panose="020F0502020204030204" pitchFamily="34" charset="0"/>
+                        <a:cs typeface="Times New Roman" panose="02020603050405020304" pitchFamily="18" charset="0"/>
+                      </a:endParaRPr>
+                    </a:p>
+                  </a:txBody>
+                  <a:tcPr marL="56848" marR="56848" marT="0" marB="0">
+                    <a:lnL w="12700" cmpd="sng">
+                      <a:noFill/>
+                      <a:prstDash val="solid"/>
+                    </a:lnL>
+                    <a:lnR w="12700" cmpd="sng">
+                      <a:noFill/>
+                      <a:prstDash val="solid"/>
+                    </a:lnR>
+                    <a:lnT w="12700" cmpd="sng">
+                      <a:noFill/>
+                      <a:prstDash val="solid"/>
+                    </a:lnT>
+                    <a:lnB w="12700" cmpd="sng">
+                      <a:noFill/>
+                      <a:prstDash val="solid"/>
+                    </a:lnB>
+                    <a:lnTlToBr w="12700" cmpd="sng">
+                      <a:noFill/>
+                      <a:prstDash val="solid"/>
+                    </a:lnTlToBr>
+                    <a:lnBlToTr w="12700" cmpd="sng">
+                      <a:noFill/>
+                      <a:prstDash val="solid"/>
+                    </a:lnBlToTr>
+                    <a:solidFill>
+                      <a:srgbClr val="FFFF00"/>
+                    </a:solidFill>
+                  </a:tcPr>
+                </a:tc>
+                <a:tc>
+                  <a:txBody>
+                    <a:bodyPr/>
+                    <a:lstStyle/>
+                    <a:p>
+                      <a:pPr>
+                        <a:lnSpc>
+                          <a:spcPct val="107000"/>
+                        </a:lnSpc>
+                        <a:spcAft>
+                          <a:spcPts val="800"/>
+                        </a:spcAft>
+                        <a:buNone/>
+                      </a:pPr>
+                      <a:r>
+                        <a:rPr lang="en-IN" sz="1050" b="1" kern="100" dirty="0">
+                          <a:effectLst/>
+                        </a:rPr>
+                        <a:t> </a:t>
+                      </a:r>
+                      <a:endParaRPr lang="en-IN" sz="1200" b="1" kern="100" dirty="0">
+                        <a:effectLst/>
+                        <a:latin typeface="Calibri" panose="020F0502020204030204" pitchFamily="34" charset="0"/>
+                        <a:ea typeface="Calibri" panose="020F0502020204030204" pitchFamily="34" charset="0"/>
+                        <a:cs typeface="Times New Roman" panose="02020603050405020304" pitchFamily="18" charset="0"/>
+                      </a:endParaRPr>
+                    </a:p>
+                  </a:txBody>
+                  <a:tcPr marL="56848" marR="56848" marT="0" marB="0">
+                    <a:lnL w="12700" cmpd="sng">
+                      <a:noFill/>
+                      <a:prstDash val="solid"/>
+                    </a:lnL>
+                    <a:lnR w="12700" cmpd="sng">
+                      <a:noFill/>
+                      <a:prstDash val="solid"/>
+                    </a:lnR>
+                    <a:lnT w="12700" cmpd="sng">
+                      <a:noFill/>
+                      <a:prstDash val="solid"/>
+                    </a:lnT>
+                    <a:lnB w="12700" cmpd="sng">
+                      <a:noFill/>
+                      <a:prstDash val="solid"/>
+                    </a:lnB>
+                    <a:lnTlToBr w="12700" cmpd="sng">
+                      <a:noFill/>
+                      <a:prstDash val="solid"/>
+                    </a:lnTlToBr>
+                    <a:lnBlToTr w="12700" cmpd="sng">
+                      <a:noFill/>
+                      <a:prstDash val="solid"/>
+                    </a:lnBlToTr>
+                    <a:solidFill>
+                      <a:srgbClr val="FFFF00"/>
+                    </a:solidFill>
+                  </a:tcPr>
+                </a:tc>
+                <a:tc>
+                  <a:txBody>
+                    <a:bodyPr/>
+                    <a:lstStyle/>
+                    <a:p>
+                      <a:pPr>
+                        <a:lnSpc>
+                          <a:spcPct val="107000"/>
+                        </a:lnSpc>
+                        <a:spcAft>
+                          <a:spcPts val="800"/>
+                        </a:spcAft>
+                        <a:buNone/>
+                      </a:pPr>
+                      <a:r>
+                        <a:rPr lang="en-IN" sz="1050" b="1" kern="100" dirty="0">
+                          <a:effectLst/>
+                        </a:rPr>
+                        <a:t> </a:t>
+                      </a:r>
+                      <a:endParaRPr lang="en-IN" sz="1200" b="1" kern="100" dirty="0">
+                        <a:effectLst/>
+                        <a:latin typeface="Calibri" panose="020F0502020204030204" pitchFamily="34" charset="0"/>
+                        <a:ea typeface="Calibri" panose="020F0502020204030204" pitchFamily="34" charset="0"/>
+                        <a:cs typeface="Times New Roman" panose="02020603050405020304" pitchFamily="18" charset="0"/>
+                      </a:endParaRPr>
+                    </a:p>
+                  </a:txBody>
+                  <a:tcPr marL="56848" marR="56848" marT="0" marB="0">
+                    <a:lnL w="12700" cmpd="sng">
+                      <a:noFill/>
+                      <a:prstDash val="solid"/>
+                    </a:lnL>
+                    <a:lnR w="12700" cmpd="sng">
+                      <a:noFill/>
+                      <a:prstDash val="solid"/>
+                    </a:lnR>
+                    <a:lnT w="12700" cmpd="sng">
+                      <a:noFill/>
+                      <a:prstDash val="solid"/>
+                    </a:lnT>
+                    <a:lnB w="12700" cmpd="sng">
+                      <a:noFill/>
+                      <a:prstDash val="solid"/>
+                    </a:lnB>
+                    <a:lnTlToBr w="12700" cmpd="sng">
+                      <a:noFill/>
+                      <a:prstDash val="solid"/>
+                    </a:lnTlToBr>
+                    <a:lnBlToTr w="12700" cmpd="sng">
+                      <a:noFill/>
+                      <a:prstDash val="solid"/>
+                    </a:lnBlToTr>
+                    <a:solidFill>
+                      <a:srgbClr val="FFFF00"/>
+                    </a:solidFill>
+                  </a:tcPr>
+                </a:tc>
+                <a:tc>
+                  <a:txBody>
+                    <a:bodyPr/>
+                    <a:lstStyle/>
+                    <a:p>
+                      <a:pPr>
+                        <a:lnSpc>
+                          <a:spcPct val="107000"/>
+                        </a:lnSpc>
+                        <a:spcAft>
+                          <a:spcPts val="800"/>
+                        </a:spcAft>
+                        <a:buNone/>
+                      </a:pPr>
+                      <a:r>
+                        <a:rPr lang="en-IN" sz="1050" b="1" kern="100" dirty="0">
+                          <a:effectLst/>
+                        </a:rPr>
+                        <a:t> </a:t>
+                      </a:r>
+                      <a:endParaRPr lang="en-IN" sz="1200" b="1" kern="100" dirty="0">
+                        <a:effectLst/>
+                        <a:latin typeface="Calibri" panose="020F0502020204030204" pitchFamily="34" charset="0"/>
+                        <a:ea typeface="Calibri" panose="020F0502020204030204" pitchFamily="34" charset="0"/>
+                        <a:cs typeface="Times New Roman" panose="02020603050405020304" pitchFamily="18" charset="0"/>
+                      </a:endParaRPr>
+                    </a:p>
+                  </a:txBody>
+                  <a:tcPr marL="56848" marR="56848" marT="0" marB="0">
+                    <a:lnL w="12700" cmpd="sng">
+                      <a:noFill/>
+                      <a:prstDash val="solid"/>
+                    </a:lnL>
+                    <a:lnR w="12700" cmpd="sng">
+                      <a:noFill/>
+                      <a:prstDash val="solid"/>
+                    </a:lnR>
+                    <a:lnT w="12700" cmpd="sng">
+                      <a:noFill/>
+                      <a:prstDash val="solid"/>
+                    </a:lnT>
+                    <a:lnB w="12700" cmpd="sng">
+                      <a:noFill/>
+                      <a:prstDash val="solid"/>
+                    </a:lnB>
+                    <a:lnTlToBr w="12700" cmpd="sng">
+                      <a:noFill/>
+                      <a:prstDash val="solid"/>
+                    </a:lnTlToBr>
+                    <a:lnBlToTr w="12700" cmpd="sng">
+                      <a:noFill/>
+                      <a:prstDash val="solid"/>
+                    </a:lnBlToTr>
+                    <a:solidFill>
+                      <a:schemeClr val="accent1">
+                        <a:lumMod val="40000"/>
+                        <a:lumOff val="60000"/>
+                      </a:schemeClr>
+                    </a:solidFill>
+                  </a:tcPr>
+                </a:tc>
+                <a:tc>
+                  <a:txBody>
+                    <a:bodyPr/>
+                    <a:lstStyle/>
+                    <a:p>
+                      <a:pPr>
+                        <a:lnSpc>
+                          <a:spcPct val="107000"/>
+                        </a:lnSpc>
+                        <a:spcAft>
+                          <a:spcPts val="800"/>
+                        </a:spcAft>
+                        <a:buNone/>
+                      </a:pPr>
+                      <a:r>
+                        <a:rPr lang="en-IN" sz="1050" b="1" kern="100" dirty="0">
+                          <a:effectLst/>
+                        </a:rPr>
+                        <a:t>‘27 </a:t>
+                      </a:r>
+                      <a:endParaRPr lang="en-IN" sz="1200" b="1" kern="100" dirty="0">
+                        <a:effectLst/>
+                        <a:latin typeface="Calibri" panose="020F0502020204030204" pitchFamily="34" charset="0"/>
+                        <a:ea typeface="Calibri" panose="020F0502020204030204" pitchFamily="34" charset="0"/>
+                        <a:cs typeface="Times New Roman" panose="02020603050405020304" pitchFamily="18" charset="0"/>
+                      </a:endParaRPr>
+                    </a:p>
+                  </a:txBody>
+                  <a:tcPr marL="56848" marR="56848" marT="0" marB="0">
+                    <a:lnL w="12700" cmpd="sng">
+                      <a:noFill/>
+                      <a:prstDash val="solid"/>
+                    </a:lnL>
+                    <a:lnR w="12700" cmpd="sng">
+                      <a:noFill/>
+                      <a:prstDash val="solid"/>
+                    </a:lnR>
+                    <a:lnT w="12700" cmpd="sng">
+                      <a:noFill/>
+                      <a:prstDash val="solid"/>
+                    </a:lnT>
+                    <a:lnB w="12700" cmpd="sng">
+                      <a:noFill/>
+                      <a:prstDash val="solid"/>
+                    </a:lnB>
+                    <a:lnTlToBr w="12700" cmpd="sng">
+                      <a:noFill/>
+                      <a:prstDash val="solid"/>
+                    </a:lnTlToBr>
+                    <a:lnBlToTr w="12700" cmpd="sng">
+                      <a:noFill/>
+                      <a:prstDash val="solid"/>
+                    </a:lnBlToTr>
+                    <a:solidFill>
+                      <a:schemeClr val="accent1">
+                        <a:lumMod val="40000"/>
+                        <a:lumOff val="60000"/>
+                      </a:schemeClr>
+                    </a:solidFill>
+                  </a:tcPr>
+                </a:tc>
+                <a:tc>
+                  <a:txBody>
+                    <a:bodyPr/>
+                    <a:lstStyle/>
+                    <a:p>
+                      <a:pPr>
+                        <a:lnSpc>
+                          <a:spcPct val="107000"/>
+                        </a:lnSpc>
+                        <a:spcAft>
+                          <a:spcPts val="800"/>
+                        </a:spcAft>
+                        <a:buNone/>
+                      </a:pPr>
+                      <a:endParaRPr lang="en-IN" sz="900" kern="100" dirty="0">
+                        <a:effectLst/>
+                        <a:latin typeface="Calibri" panose="020F0502020204030204" pitchFamily="34" charset="0"/>
+                        <a:ea typeface="Calibri" panose="020F0502020204030204" pitchFamily="34" charset="0"/>
+                        <a:cs typeface="Times New Roman" panose="02020603050405020304" pitchFamily="18" charset="0"/>
+                      </a:endParaRPr>
+                    </a:p>
+                  </a:txBody>
+                  <a:tcPr marL="56848" marR="56848" marT="0" marB="0">
+                    <a:lnL w="12700" cmpd="sng">
+                      <a:noFill/>
+                      <a:prstDash val="solid"/>
+                    </a:lnL>
+                    <a:lnR w="12700" cmpd="sng">
+                      <a:noFill/>
+                      <a:prstDash val="solid"/>
+                    </a:lnR>
+                    <a:lnT w="12700" cmpd="sng">
+                      <a:noFill/>
+                      <a:prstDash val="solid"/>
+                    </a:lnT>
+                    <a:lnB w="12700" cmpd="sng">
+                      <a:noFill/>
+                      <a:prstDash val="solid"/>
+                    </a:lnB>
+                    <a:lnTlToBr w="12700" cmpd="sng">
+                      <a:noFill/>
+                      <a:prstDash val="solid"/>
+                    </a:lnTlToBr>
+                    <a:lnBlToTr w="12700" cmpd="sng">
+                      <a:noFill/>
+                      <a:prstDash val="solid"/>
+                    </a:lnBlToTr>
+                    <a:solidFill>
+                      <a:schemeClr val="accent1">
+                        <a:lumMod val="40000"/>
+                        <a:lumOff val="60000"/>
+                      </a:schemeClr>
+                    </a:solidFill>
+                  </a:tcPr>
+                </a:tc>
+                <a:extLst>
+                  <a:ext uri="{0D108BD9-81ED-4DB2-BD59-A6C34878D82A}">
+                    <a16:rowId xmlns:a16="http://schemas.microsoft.com/office/drawing/2014/main" val="3730747126"/>
+                  </a:ext>
+                </a:extLst>
+              </a:tr>
+              <a:tr h="439272">
+                <a:tc>
+                  <a:txBody>
+                    <a:bodyPr/>
+                    <a:lstStyle/>
+                    <a:p>
+                      <a:pPr algn="r">
+                        <a:lnSpc>
+                          <a:spcPct val="107000"/>
+                        </a:lnSpc>
+                        <a:spcAft>
+                          <a:spcPts val="800"/>
+                        </a:spcAft>
+                        <a:buNone/>
+                      </a:pPr>
+                      <a:r>
+                        <a:rPr lang="en-IN" sz="700" kern="100" dirty="0">
+                          <a:effectLst/>
+                        </a:rPr>
+                        <a:t> </a:t>
+                      </a:r>
+                      <a:endParaRPr lang="en-IN" sz="900" kern="100" dirty="0">
+                        <a:effectLst/>
+                        <a:latin typeface="Calibri" panose="020F0502020204030204" pitchFamily="34" charset="0"/>
+                        <a:ea typeface="Calibri" panose="020F0502020204030204" pitchFamily="34" charset="0"/>
+                        <a:cs typeface="Times New Roman" panose="02020603050405020304" pitchFamily="18" charset="0"/>
+                      </a:endParaRPr>
+                    </a:p>
+                  </a:txBody>
+                  <a:tcPr marL="56848" marR="56848" marT="0" marB="0">
+                    <a:lnL w="12700" cmpd="sng">
+                      <a:noFill/>
+                      <a:prstDash val="solid"/>
+                    </a:lnL>
+                    <a:lnR w="12700" cmpd="sng">
+                      <a:noFill/>
+                      <a:prstDash val="solid"/>
+                    </a:lnR>
+                    <a:lnT w="12700" cap="flat" cmpd="sng" algn="ctr">
+                      <a:noFill/>
+                      <a:prstDash val="solid"/>
+                      <a:round/>
+                      <a:headEnd type="none" w="med" len="med"/>
+                      <a:tailEnd type="none" w="med" len="med"/>
+                    </a:lnT>
+                    <a:lnB w="12700" cap="flat" cmpd="sng" algn="ctr">
+                      <a:solidFill>
+                        <a:schemeClr val="tx1"/>
+                      </a:solidFill>
+                      <a:prstDash val="solid"/>
+                      <a:round/>
+                      <a:headEnd type="none" w="med" len="med"/>
+                      <a:tailEnd type="none" w="med" len="med"/>
+                    </a:lnB>
+                    <a:lnTlToBr w="12700" cmpd="sng">
+                      <a:noFill/>
+                      <a:prstDash val="solid"/>
+                    </a:lnTlToBr>
+                    <a:lnBlToTr w="12700" cmpd="sng">
+                      <a:noFill/>
+                      <a:prstDash val="solid"/>
+                    </a:lnBlToTr>
+                  </a:tcPr>
+                </a:tc>
+                <a:tc>
+                  <a:txBody>
+                    <a:bodyPr/>
+                    <a:lstStyle/>
+                    <a:p>
+                      <a:pPr>
+                        <a:lnSpc>
+                          <a:spcPct val="107000"/>
+                        </a:lnSpc>
+                        <a:spcAft>
+                          <a:spcPts val="800"/>
+                        </a:spcAft>
+                        <a:buNone/>
+                      </a:pPr>
+                      <a:r>
+                        <a:rPr lang="en-IN" sz="1600" b="1" kern="100" dirty="0">
+                          <a:effectLst/>
+                        </a:rPr>
+                        <a:t>July</a:t>
+                      </a:r>
+                      <a:endParaRPr lang="en-IN" sz="2000" b="1" kern="100" dirty="0">
+                        <a:effectLst/>
+                        <a:latin typeface="Calibri" panose="020F0502020204030204" pitchFamily="34" charset="0"/>
+                        <a:ea typeface="Calibri" panose="020F0502020204030204" pitchFamily="34" charset="0"/>
+                        <a:cs typeface="Times New Roman" panose="02020603050405020304" pitchFamily="18" charset="0"/>
+                      </a:endParaRPr>
+                    </a:p>
+                  </a:txBody>
+                  <a:tcPr marL="56848" marR="56848" marT="0" marB="0">
+                    <a:lnL w="12700" cmpd="sng">
+                      <a:noFill/>
+                      <a:prstDash val="solid"/>
+                    </a:lnL>
+                    <a:lnT w="12700" cmpd="sng">
+                      <a:noFill/>
+                      <a:prstDash val="solid"/>
+                    </a:lnT>
+                  </a:tcPr>
+                </a:tc>
+                <a:tc>
+                  <a:txBody>
+                    <a:bodyPr/>
+                    <a:lstStyle/>
+                    <a:p>
+                      <a:pPr>
+                        <a:lnSpc>
+                          <a:spcPct val="107000"/>
+                        </a:lnSpc>
+                        <a:spcAft>
+                          <a:spcPts val="800"/>
+                        </a:spcAft>
+                        <a:buNone/>
+                      </a:pPr>
+                      <a:r>
+                        <a:rPr lang="en-IN" sz="1600" b="1" kern="100" dirty="0">
+                          <a:effectLst/>
+                        </a:rPr>
+                        <a:t>Aug</a:t>
+                      </a:r>
+                      <a:endParaRPr lang="en-IN" sz="2000" b="1" kern="100" dirty="0">
+                        <a:effectLst/>
+                        <a:latin typeface="Calibri" panose="020F0502020204030204" pitchFamily="34" charset="0"/>
+                        <a:ea typeface="Calibri" panose="020F0502020204030204" pitchFamily="34" charset="0"/>
+                        <a:cs typeface="Times New Roman" panose="02020603050405020304" pitchFamily="18" charset="0"/>
+                      </a:endParaRPr>
+                    </a:p>
+                  </a:txBody>
+                  <a:tcPr marL="56848" marR="56848" marT="0" marB="0">
+                    <a:lnT w="12700" cmpd="sng">
+                      <a:noFill/>
+                      <a:prstDash val="solid"/>
+                    </a:lnT>
+                  </a:tcPr>
+                </a:tc>
+                <a:tc>
+                  <a:txBody>
+                    <a:bodyPr/>
+                    <a:lstStyle/>
+                    <a:p>
+                      <a:pPr>
+                        <a:lnSpc>
+                          <a:spcPct val="107000"/>
+                        </a:lnSpc>
+                        <a:spcAft>
+                          <a:spcPts val="800"/>
+                        </a:spcAft>
+                        <a:buNone/>
+                      </a:pPr>
+                      <a:r>
+                        <a:rPr lang="en-IN" sz="1600" b="1" kern="100" dirty="0">
+                          <a:effectLst/>
+                        </a:rPr>
+                        <a:t>Sep</a:t>
+                      </a:r>
+                      <a:endParaRPr lang="en-IN" sz="2000" b="1" kern="100" dirty="0">
+                        <a:effectLst/>
+                        <a:latin typeface="Calibri" panose="020F0502020204030204" pitchFamily="34" charset="0"/>
+                        <a:ea typeface="Calibri" panose="020F0502020204030204" pitchFamily="34" charset="0"/>
+                        <a:cs typeface="Times New Roman" panose="02020603050405020304" pitchFamily="18" charset="0"/>
+                      </a:endParaRPr>
+                    </a:p>
+                  </a:txBody>
+                  <a:tcPr marL="56848" marR="56848" marT="0" marB="0">
+                    <a:lnT w="12700" cmpd="sng">
+                      <a:noFill/>
+                      <a:prstDash val="solid"/>
+                    </a:lnT>
+                  </a:tcPr>
+                </a:tc>
+                <a:tc>
+                  <a:txBody>
+                    <a:bodyPr/>
+                    <a:lstStyle/>
+                    <a:p>
+                      <a:pPr>
+                        <a:lnSpc>
+                          <a:spcPct val="107000"/>
+                        </a:lnSpc>
+                        <a:spcAft>
+                          <a:spcPts val="800"/>
+                        </a:spcAft>
+                        <a:buNone/>
+                      </a:pPr>
+                      <a:r>
+                        <a:rPr lang="en-IN" sz="1600" b="1" kern="100" dirty="0">
+                          <a:effectLst/>
+                        </a:rPr>
+                        <a:t>Oct</a:t>
+                      </a:r>
+                      <a:endParaRPr lang="en-IN" sz="2000" b="1" kern="100" dirty="0">
+                        <a:effectLst/>
+                        <a:latin typeface="Calibri" panose="020F0502020204030204" pitchFamily="34" charset="0"/>
+                        <a:ea typeface="Calibri" panose="020F0502020204030204" pitchFamily="34" charset="0"/>
+                        <a:cs typeface="Times New Roman" panose="02020603050405020304" pitchFamily="18" charset="0"/>
+                      </a:endParaRPr>
+                    </a:p>
+                  </a:txBody>
+                  <a:tcPr marL="56848" marR="56848" marT="0" marB="0">
+                    <a:lnT w="12700" cmpd="sng">
+                      <a:noFill/>
+                      <a:prstDash val="solid"/>
+                    </a:lnT>
+                  </a:tcPr>
+                </a:tc>
+                <a:tc>
+                  <a:txBody>
+                    <a:bodyPr/>
+                    <a:lstStyle/>
+                    <a:p>
+                      <a:pPr>
+                        <a:lnSpc>
+                          <a:spcPct val="107000"/>
+                        </a:lnSpc>
+                        <a:spcAft>
+                          <a:spcPts val="800"/>
+                        </a:spcAft>
+                        <a:buNone/>
+                      </a:pPr>
+                      <a:r>
+                        <a:rPr lang="en-IN" sz="1600" b="1" kern="100" dirty="0">
+                          <a:effectLst/>
+                        </a:rPr>
+                        <a:t>Nov</a:t>
+                      </a:r>
+                      <a:endParaRPr lang="en-IN" sz="2000" b="1" kern="100" dirty="0">
+                        <a:effectLst/>
+                        <a:latin typeface="Calibri" panose="020F0502020204030204" pitchFamily="34" charset="0"/>
+                        <a:ea typeface="Calibri" panose="020F0502020204030204" pitchFamily="34" charset="0"/>
+                        <a:cs typeface="Times New Roman" panose="02020603050405020304" pitchFamily="18" charset="0"/>
+                      </a:endParaRPr>
+                    </a:p>
+                  </a:txBody>
+                  <a:tcPr marL="56848" marR="56848" marT="0" marB="0">
+                    <a:lnT w="12700" cmpd="sng">
+                      <a:noFill/>
+                      <a:prstDash val="solid"/>
+                    </a:lnT>
+                  </a:tcPr>
+                </a:tc>
+                <a:tc>
+                  <a:txBody>
+                    <a:bodyPr/>
+                    <a:lstStyle/>
+                    <a:p>
+                      <a:pPr>
+                        <a:lnSpc>
+                          <a:spcPct val="107000"/>
+                        </a:lnSpc>
+                        <a:spcAft>
+                          <a:spcPts val="800"/>
+                        </a:spcAft>
+                        <a:buNone/>
+                      </a:pPr>
+                      <a:r>
+                        <a:rPr lang="en-IN" sz="1600" b="1" kern="100" dirty="0">
+                          <a:effectLst/>
+                        </a:rPr>
+                        <a:t>Dec</a:t>
+                      </a:r>
+                      <a:endParaRPr lang="en-IN" sz="2000" b="1" kern="100" dirty="0">
+                        <a:effectLst/>
+                        <a:latin typeface="Calibri" panose="020F0502020204030204" pitchFamily="34" charset="0"/>
+                        <a:ea typeface="Calibri" panose="020F0502020204030204" pitchFamily="34" charset="0"/>
+                        <a:cs typeface="Times New Roman" panose="02020603050405020304" pitchFamily="18" charset="0"/>
+                      </a:endParaRPr>
+                    </a:p>
+                  </a:txBody>
+                  <a:tcPr marL="56848" marR="56848" marT="0" marB="0">
+                    <a:lnT w="12700" cmpd="sng">
+                      <a:noFill/>
+                      <a:prstDash val="solid"/>
+                    </a:lnT>
+                  </a:tcPr>
+                </a:tc>
+                <a:tc>
+                  <a:txBody>
+                    <a:bodyPr/>
+                    <a:lstStyle/>
+                    <a:p>
+                      <a:pPr>
+                        <a:lnSpc>
+                          <a:spcPct val="107000"/>
+                        </a:lnSpc>
+                        <a:spcAft>
+                          <a:spcPts val="800"/>
+                        </a:spcAft>
+                        <a:buNone/>
+                      </a:pPr>
+                      <a:r>
+                        <a:rPr lang="en-IN" sz="1600" b="1" kern="100" dirty="0">
+                          <a:effectLst/>
+                        </a:rPr>
+                        <a:t>Jan</a:t>
+                      </a:r>
+                      <a:endParaRPr lang="en-IN" sz="2000" b="1" kern="100" dirty="0">
+                        <a:effectLst/>
+                        <a:latin typeface="Calibri" panose="020F0502020204030204" pitchFamily="34" charset="0"/>
+                        <a:ea typeface="Calibri" panose="020F0502020204030204" pitchFamily="34" charset="0"/>
+                        <a:cs typeface="Times New Roman" panose="02020603050405020304" pitchFamily="18" charset="0"/>
+                      </a:endParaRPr>
+                    </a:p>
+                  </a:txBody>
+                  <a:tcPr marL="56848" marR="56848" marT="0" marB="0">
+                    <a:lnT w="12700" cmpd="sng">
+                      <a:noFill/>
+                      <a:prstDash val="solid"/>
+                    </a:lnT>
+                  </a:tcPr>
+                </a:tc>
+                <a:tc>
+                  <a:txBody>
+                    <a:bodyPr/>
+                    <a:lstStyle/>
+                    <a:p>
+                      <a:pPr>
+                        <a:lnSpc>
+                          <a:spcPct val="107000"/>
+                        </a:lnSpc>
+                        <a:spcAft>
+                          <a:spcPts val="800"/>
+                        </a:spcAft>
+                        <a:buNone/>
+                      </a:pPr>
+                      <a:r>
+                        <a:rPr lang="en-IN" sz="1600" b="1" kern="100" dirty="0">
+                          <a:effectLst/>
+                        </a:rPr>
+                        <a:t>Feb</a:t>
+                      </a:r>
+                      <a:endParaRPr lang="en-IN" sz="2000" b="1" kern="100" dirty="0">
+                        <a:effectLst/>
+                        <a:latin typeface="Calibri" panose="020F0502020204030204" pitchFamily="34" charset="0"/>
+                        <a:ea typeface="Calibri" panose="020F0502020204030204" pitchFamily="34" charset="0"/>
+                        <a:cs typeface="Times New Roman" panose="02020603050405020304" pitchFamily="18" charset="0"/>
+                      </a:endParaRPr>
+                    </a:p>
+                  </a:txBody>
+                  <a:tcPr marL="56848" marR="56848" marT="0" marB="0">
+                    <a:lnT w="12700" cmpd="sng">
+                      <a:noFill/>
+                      <a:prstDash val="solid"/>
+                    </a:lnT>
+                  </a:tcPr>
+                </a:tc>
+                <a:tc>
+                  <a:txBody>
+                    <a:bodyPr/>
+                    <a:lstStyle/>
+                    <a:p>
+                      <a:pPr>
+                        <a:lnSpc>
+                          <a:spcPct val="107000"/>
+                        </a:lnSpc>
+                        <a:spcAft>
+                          <a:spcPts val="800"/>
+                        </a:spcAft>
+                        <a:buNone/>
+                      </a:pPr>
+                      <a:r>
+                        <a:rPr lang="en-IN" sz="1600" b="1" kern="100" dirty="0">
+                          <a:effectLst/>
+                        </a:rPr>
+                        <a:t>Mar</a:t>
+                      </a:r>
+                      <a:endParaRPr lang="en-IN" sz="2000" b="1" kern="100" dirty="0">
+                        <a:effectLst/>
+                        <a:latin typeface="Calibri" panose="020F0502020204030204" pitchFamily="34" charset="0"/>
+                        <a:ea typeface="Calibri" panose="020F0502020204030204" pitchFamily="34" charset="0"/>
+                        <a:cs typeface="Times New Roman" panose="02020603050405020304" pitchFamily="18" charset="0"/>
+                      </a:endParaRPr>
+                    </a:p>
+                  </a:txBody>
+                  <a:tcPr marL="56848" marR="56848" marT="0" marB="0">
+                    <a:lnT w="12700" cmpd="sng">
+                      <a:noFill/>
+                      <a:prstDash val="solid"/>
+                    </a:lnT>
+                  </a:tcPr>
+                </a:tc>
+                <a:extLst>
+                  <a:ext uri="{0D108BD9-81ED-4DB2-BD59-A6C34878D82A}">
+                    <a16:rowId xmlns:a16="http://schemas.microsoft.com/office/drawing/2014/main" val="1503387088"/>
+                  </a:ext>
+                </a:extLst>
+              </a:tr>
+              <a:tr h="439272">
+                <a:tc>
+                  <a:txBody>
+                    <a:bodyPr/>
+                    <a:lstStyle/>
+                    <a:p>
+                      <a:pPr marL="0" lvl="0" indent="0" algn="l">
+                        <a:lnSpc>
+                          <a:spcPct val="107000"/>
+                        </a:lnSpc>
+                        <a:spcAft>
+                          <a:spcPts val="800"/>
+                        </a:spcAft>
+                        <a:buFont typeface="Arial" panose="020B0604020202020204" pitchFamily="34" charset="0"/>
+                        <a:buNone/>
+                      </a:pPr>
+                      <a:r>
+                        <a:rPr lang="en-IN" sz="1300" b="1" kern="100" dirty="0">
+                          <a:effectLst/>
+                          <a:latin typeface="Times New Roman" panose="02020603050405020304" pitchFamily="18" charset="0"/>
+                          <a:cs typeface="Times New Roman" panose="02020603050405020304" pitchFamily="18" charset="0"/>
+                        </a:rPr>
+                        <a:t>Literature review &amp; dataset exploration</a:t>
+                      </a:r>
+                      <a:endParaRPr lang="en-IN" sz="1300" b="1" kern="100" dirty="0">
+                        <a:effectLst/>
+                        <a:latin typeface="Times New Roman" panose="02020603050405020304" pitchFamily="18" charset="0"/>
+                        <a:ea typeface="Calibri" panose="020F0502020204030204" pitchFamily="34" charset="0"/>
+                        <a:cs typeface="Times New Roman" panose="02020603050405020304" pitchFamily="18" charset="0"/>
+                      </a:endParaRPr>
+                    </a:p>
+                  </a:txBody>
+                  <a:tcPr marL="56848" marR="56848" marT="0" marB="0" anchor="ctr">
+                    <a:lnT w="12700" cap="flat" cmpd="sng" algn="ctr">
+                      <a:solidFill>
+                        <a:schemeClr val="tx1"/>
+                      </a:solidFill>
+                      <a:prstDash val="solid"/>
+                      <a:round/>
+                      <a:headEnd type="none" w="med" len="med"/>
+                      <a:tailEnd type="none" w="med" len="med"/>
+                    </a:lnT>
+                  </a:tcPr>
+                </a:tc>
+                <a:tc>
+                  <a:txBody>
+                    <a:bodyPr/>
+                    <a:lstStyle/>
+                    <a:p>
+                      <a:pPr>
+                        <a:lnSpc>
+                          <a:spcPct val="107000"/>
+                        </a:lnSpc>
+                        <a:spcAft>
+                          <a:spcPts val="800"/>
+                        </a:spcAft>
+                        <a:buNone/>
+                      </a:pPr>
+                      <a:r>
+                        <a:rPr lang="en-IN" sz="700" kern="100" dirty="0">
+                          <a:effectLst/>
+                          <a:highlight>
+                            <a:srgbClr val="FFFF00"/>
+                          </a:highlight>
+                        </a:rPr>
+                        <a:t> </a:t>
+                      </a:r>
+                      <a:endParaRPr lang="en-IN" sz="900" kern="100" dirty="0">
+                        <a:effectLst/>
+                        <a:latin typeface="Calibri" panose="020F0502020204030204" pitchFamily="34" charset="0"/>
+                        <a:ea typeface="Calibri" panose="020F0502020204030204" pitchFamily="34" charset="0"/>
+                        <a:cs typeface="Times New Roman" panose="02020603050405020304" pitchFamily="18" charset="0"/>
+                      </a:endParaRPr>
+                    </a:p>
+                  </a:txBody>
+                  <a:tcPr marL="56848" marR="56848" marT="0" marB="0">
+                    <a:solidFill>
+                      <a:srgbClr val="92D050"/>
+                    </a:solidFill>
+                  </a:tcPr>
+                </a:tc>
+                <a:tc>
+                  <a:txBody>
+                    <a:bodyPr/>
+                    <a:lstStyle/>
+                    <a:p>
+                      <a:pPr>
+                        <a:lnSpc>
+                          <a:spcPct val="107000"/>
+                        </a:lnSpc>
+                        <a:spcAft>
+                          <a:spcPts val="800"/>
+                        </a:spcAft>
+                        <a:buNone/>
+                      </a:pPr>
+                      <a:r>
+                        <a:rPr lang="en-IN" sz="700" kern="100">
+                          <a:effectLst/>
+                        </a:rPr>
+                        <a:t> </a:t>
+                      </a:r>
+                      <a:endParaRPr lang="en-IN" sz="900" kern="100">
+                        <a:effectLst/>
+                        <a:latin typeface="Calibri" panose="020F0502020204030204" pitchFamily="34" charset="0"/>
+                        <a:ea typeface="Calibri" panose="020F0502020204030204" pitchFamily="34" charset="0"/>
+                        <a:cs typeface="Times New Roman" panose="02020603050405020304" pitchFamily="18" charset="0"/>
+                      </a:endParaRPr>
+                    </a:p>
+                  </a:txBody>
+                  <a:tcPr marL="56848" marR="56848" marT="0" marB="0"/>
+                </a:tc>
+                <a:tc>
+                  <a:txBody>
+                    <a:bodyPr/>
+                    <a:lstStyle/>
+                    <a:p>
+                      <a:pPr>
+                        <a:lnSpc>
+                          <a:spcPct val="107000"/>
+                        </a:lnSpc>
+                        <a:spcAft>
+                          <a:spcPts val="800"/>
+                        </a:spcAft>
+                        <a:buNone/>
+                      </a:pPr>
+                      <a:r>
+                        <a:rPr lang="en-IN" sz="700" kern="100">
+                          <a:effectLst/>
+                        </a:rPr>
+                        <a:t> </a:t>
+                      </a:r>
+                      <a:endParaRPr lang="en-IN" sz="900" kern="100">
+                        <a:effectLst/>
+                        <a:latin typeface="Calibri" panose="020F0502020204030204" pitchFamily="34" charset="0"/>
+                        <a:ea typeface="Calibri" panose="020F0502020204030204" pitchFamily="34" charset="0"/>
+                        <a:cs typeface="Times New Roman" panose="02020603050405020304" pitchFamily="18" charset="0"/>
+                      </a:endParaRPr>
+                    </a:p>
+                  </a:txBody>
+                  <a:tcPr marL="56848" marR="56848" marT="0" marB="0"/>
+                </a:tc>
+                <a:tc>
+                  <a:txBody>
+                    <a:bodyPr/>
+                    <a:lstStyle/>
+                    <a:p>
+                      <a:pPr>
+                        <a:lnSpc>
+                          <a:spcPct val="107000"/>
+                        </a:lnSpc>
+                        <a:spcAft>
+                          <a:spcPts val="800"/>
+                        </a:spcAft>
+                        <a:buNone/>
+                      </a:pPr>
+                      <a:r>
+                        <a:rPr lang="en-IN" sz="700" kern="100">
+                          <a:effectLst/>
+                        </a:rPr>
+                        <a:t> </a:t>
+                      </a:r>
+                      <a:endParaRPr lang="en-IN" sz="900" kern="100">
+                        <a:effectLst/>
+                        <a:latin typeface="Calibri" panose="020F0502020204030204" pitchFamily="34" charset="0"/>
+                        <a:ea typeface="Calibri" panose="020F0502020204030204" pitchFamily="34" charset="0"/>
+                        <a:cs typeface="Times New Roman" panose="02020603050405020304" pitchFamily="18" charset="0"/>
+                      </a:endParaRPr>
+                    </a:p>
+                  </a:txBody>
+                  <a:tcPr marL="56848" marR="56848" marT="0" marB="0"/>
+                </a:tc>
+                <a:tc>
+                  <a:txBody>
+                    <a:bodyPr/>
+                    <a:lstStyle/>
+                    <a:p>
+                      <a:pPr>
+                        <a:lnSpc>
+                          <a:spcPct val="107000"/>
+                        </a:lnSpc>
+                        <a:spcAft>
+                          <a:spcPts val="800"/>
+                        </a:spcAft>
+                        <a:buNone/>
+                      </a:pPr>
+                      <a:r>
+                        <a:rPr lang="en-IN" sz="700" kern="100">
+                          <a:effectLst/>
+                        </a:rPr>
+                        <a:t> </a:t>
+                      </a:r>
+                      <a:endParaRPr lang="en-IN" sz="900" kern="100">
+                        <a:effectLst/>
+                        <a:latin typeface="Calibri" panose="020F0502020204030204" pitchFamily="34" charset="0"/>
+                        <a:ea typeface="Calibri" panose="020F0502020204030204" pitchFamily="34" charset="0"/>
+                        <a:cs typeface="Times New Roman" panose="02020603050405020304" pitchFamily="18" charset="0"/>
+                      </a:endParaRPr>
+                    </a:p>
+                  </a:txBody>
+                  <a:tcPr marL="56848" marR="56848" marT="0" marB="0"/>
+                </a:tc>
+                <a:tc>
+                  <a:txBody>
+                    <a:bodyPr/>
+                    <a:lstStyle/>
+                    <a:p>
+                      <a:pPr>
+                        <a:lnSpc>
+                          <a:spcPct val="107000"/>
+                        </a:lnSpc>
+                        <a:spcAft>
+                          <a:spcPts val="800"/>
+                        </a:spcAft>
+                        <a:buNone/>
+                      </a:pPr>
+                      <a:r>
+                        <a:rPr lang="en-IN" sz="700" kern="100">
+                          <a:effectLst/>
+                        </a:rPr>
+                        <a:t> </a:t>
+                      </a:r>
+                      <a:endParaRPr lang="en-IN" sz="900" kern="100">
+                        <a:effectLst/>
+                        <a:latin typeface="Calibri" panose="020F0502020204030204" pitchFamily="34" charset="0"/>
+                        <a:ea typeface="Calibri" panose="020F0502020204030204" pitchFamily="34" charset="0"/>
+                        <a:cs typeface="Times New Roman" panose="02020603050405020304" pitchFamily="18" charset="0"/>
+                      </a:endParaRPr>
+                    </a:p>
+                  </a:txBody>
+                  <a:tcPr marL="56848" marR="56848" marT="0" marB="0"/>
+                </a:tc>
+                <a:tc>
+                  <a:txBody>
+                    <a:bodyPr/>
+                    <a:lstStyle/>
+                    <a:p>
+                      <a:pPr>
+                        <a:lnSpc>
+                          <a:spcPct val="107000"/>
+                        </a:lnSpc>
+                        <a:spcAft>
+                          <a:spcPts val="800"/>
+                        </a:spcAft>
+                        <a:buNone/>
+                      </a:pPr>
+                      <a:r>
+                        <a:rPr lang="en-IN" sz="700" kern="100">
+                          <a:effectLst/>
+                        </a:rPr>
+                        <a:t> </a:t>
+                      </a:r>
+                      <a:endParaRPr lang="en-IN" sz="900" kern="100">
+                        <a:effectLst/>
+                        <a:latin typeface="Calibri" panose="020F0502020204030204" pitchFamily="34" charset="0"/>
+                        <a:ea typeface="Calibri" panose="020F0502020204030204" pitchFamily="34" charset="0"/>
+                        <a:cs typeface="Times New Roman" panose="02020603050405020304" pitchFamily="18" charset="0"/>
+                      </a:endParaRPr>
+                    </a:p>
+                  </a:txBody>
+                  <a:tcPr marL="56848" marR="56848" marT="0" marB="0"/>
+                </a:tc>
+                <a:tc>
+                  <a:txBody>
+                    <a:bodyPr/>
+                    <a:lstStyle/>
+                    <a:p>
+                      <a:pPr>
+                        <a:lnSpc>
+                          <a:spcPct val="107000"/>
+                        </a:lnSpc>
+                        <a:spcAft>
+                          <a:spcPts val="800"/>
+                        </a:spcAft>
+                        <a:buNone/>
+                      </a:pPr>
+                      <a:r>
+                        <a:rPr lang="en-IN" sz="700" kern="100" dirty="0">
+                          <a:effectLst/>
+                        </a:rPr>
+                        <a:t> </a:t>
+                      </a:r>
+                      <a:endParaRPr lang="en-IN" sz="900" kern="100" dirty="0">
+                        <a:effectLst/>
+                        <a:latin typeface="Calibri" panose="020F0502020204030204" pitchFamily="34" charset="0"/>
+                        <a:ea typeface="Calibri" panose="020F0502020204030204" pitchFamily="34" charset="0"/>
+                        <a:cs typeface="Times New Roman" panose="02020603050405020304" pitchFamily="18" charset="0"/>
+                      </a:endParaRPr>
+                    </a:p>
+                  </a:txBody>
+                  <a:tcPr marL="56848" marR="56848" marT="0" marB="0"/>
+                </a:tc>
+                <a:tc>
+                  <a:txBody>
+                    <a:bodyPr/>
+                    <a:lstStyle/>
+                    <a:p>
+                      <a:pPr>
+                        <a:lnSpc>
+                          <a:spcPct val="107000"/>
+                        </a:lnSpc>
+                        <a:spcAft>
+                          <a:spcPts val="800"/>
+                        </a:spcAft>
+                        <a:buNone/>
+                      </a:pPr>
+                      <a:r>
+                        <a:rPr lang="en-IN" sz="700" kern="100">
+                          <a:effectLst/>
+                        </a:rPr>
+                        <a:t> </a:t>
+                      </a:r>
+                      <a:endParaRPr lang="en-IN" sz="900" kern="100">
+                        <a:effectLst/>
+                        <a:latin typeface="Calibri" panose="020F0502020204030204" pitchFamily="34" charset="0"/>
+                        <a:ea typeface="Calibri" panose="020F0502020204030204" pitchFamily="34" charset="0"/>
+                        <a:cs typeface="Times New Roman" panose="02020603050405020304" pitchFamily="18" charset="0"/>
+                      </a:endParaRPr>
+                    </a:p>
+                  </a:txBody>
+                  <a:tcPr marL="56848" marR="56848" marT="0" marB="0"/>
+                </a:tc>
+                <a:extLst>
+                  <a:ext uri="{0D108BD9-81ED-4DB2-BD59-A6C34878D82A}">
+                    <a16:rowId xmlns:a16="http://schemas.microsoft.com/office/drawing/2014/main" val="3452543591"/>
+                  </a:ext>
+                </a:extLst>
+              </a:tr>
+              <a:tr h="439272">
+                <a:tc>
+                  <a:txBody>
+                    <a:bodyPr/>
+                    <a:lstStyle/>
+                    <a:p>
+                      <a:pPr marL="0" lvl="0" indent="0" algn="l">
+                        <a:lnSpc>
+                          <a:spcPct val="107000"/>
+                        </a:lnSpc>
+                        <a:spcAft>
+                          <a:spcPts val="800"/>
+                        </a:spcAft>
+                        <a:buFont typeface="Arial" panose="020B0604020202020204" pitchFamily="34" charset="0"/>
+                        <a:buNone/>
+                      </a:pPr>
+                      <a:r>
+                        <a:rPr lang="en-IN" sz="1300" b="1" kern="100" dirty="0">
+                          <a:effectLst/>
+                          <a:latin typeface="Times New Roman" panose="02020603050405020304" pitchFamily="18" charset="0"/>
+                          <a:cs typeface="Times New Roman" panose="02020603050405020304" pitchFamily="18" charset="0"/>
+                        </a:rPr>
+                        <a:t>KG  &amp;  Neo4j setup</a:t>
+                      </a:r>
+                      <a:endParaRPr lang="en-IN" sz="1300" b="1" kern="100" dirty="0">
+                        <a:effectLst/>
+                        <a:latin typeface="Times New Roman" panose="02020603050405020304" pitchFamily="18" charset="0"/>
+                        <a:ea typeface="Calibri" panose="020F0502020204030204" pitchFamily="34" charset="0"/>
+                        <a:cs typeface="Times New Roman" panose="02020603050405020304" pitchFamily="18" charset="0"/>
+                      </a:endParaRPr>
+                    </a:p>
+                  </a:txBody>
+                  <a:tcPr marL="56848" marR="56848" marT="0" marB="0" anchor="ctr"/>
+                </a:tc>
+                <a:tc>
+                  <a:txBody>
+                    <a:bodyPr/>
+                    <a:lstStyle/>
+                    <a:p>
+                      <a:pPr>
+                        <a:lnSpc>
+                          <a:spcPct val="107000"/>
+                        </a:lnSpc>
+                        <a:spcAft>
+                          <a:spcPts val="800"/>
+                        </a:spcAft>
+                        <a:buNone/>
+                      </a:pPr>
+                      <a:r>
+                        <a:rPr lang="en-IN" sz="700" kern="100" dirty="0">
+                          <a:effectLst/>
+                        </a:rPr>
+                        <a:t> </a:t>
+                      </a:r>
+                      <a:endParaRPr lang="en-IN" sz="900" kern="100" dirty="0">
+                        <a:effectLst/>
+                        <a:latin typeface="Calibri" panose="020F0502020204030204" pitchFamily="34" charset="0"/>
+                        <a:ea typeface="Calibri" panose="020F0502020204030204" pitchFamily="34" charset="0"/>
+                        <a:cs typeface="Times New Roman" panose="02020603050405020304" pitchFamily="18" charset="0"/>
+                      </a:endParaRPr>
+                    </a:p>
+                  </a:txBody>
+                  <a:tcPr marL="56848" marR="56848" marT="0" marB="0"/>
+                </a:tc>
+                <a:tc>
+                  <a:txBody>
+                    <a:bodyPr/>
+                    <a:lstStyle/>
+                    <a:p>
+                      <a:pPr>
+                        <a:lnSpc>
+                          <a:spcPct val="107000"/>
+                        </a:lnSpc>
+                        <a:spcAft>
+                          <a:spcPts val="800"/>
+                        </a:spcAft>
+                        <a:buNone/>
+                      </a:pPr>
+                      <a:r>
+                        <a:rPr lang="en-IN" sz="700" kern="100" dirty="0">
+                          <a:effectLst/>
+                        </a:rPr>
+                        <a:t> </a:t>
+                      </a:r>
+                      <a:endParaRPr lang="en-IN" sz="900" kern="100" dirty="0">
+                        <a:effectLst/>
+                        <a:latin typeface="Calibri" panose="020F0502020204030204" pitchFamily="34" charset="0"/>
+                        <a:ea typeface="Calibri" panose="020F0502020204030204" pitchFamily="34" charset="0"/>
+                        <a:cs typeface="Times New Roman" panose="02020603050405020304" pitchFamily="18" charset="0"/>
+                      </a:endParaRPr>
+                    </a:p>
+                  </a:txBody>
+                  <a:tcPr marL="56848" marR="56848" marT="0" marB="0">
+                    <a:solidFill>
+                      <a:srgbClr val="92D050"/>
+                    </a:solidFill>
+                  </a:tcPr>
+                </a:tc>
+                <a:tc>
+                  <a:txBody>
+                    <a:bodyPr/>
+                    <a:lstStyle/>
+                    <a:p>
+                      <a:pPr>
+                        <a:lnSpc>
+                          <a:spcPct val="107000"/>
+                        </a:lnSpc>
+                        <a:spcAft>
+                          <a:spcPts val="800"/>
+                        </a:spcAft>
+                        <a:buNone/>
+                      </a:pPr>
+                      <a:r>
+                        <a:rPr lang="en-IN" sz="700" kern="100">
+                          <a:effectLst/>
+                        </a:rPr>
+                        <a:t> </a:t>
+                      </a:r>
+                      <a:endParaRPr lang="en-IN" sz="900" kern="100">
+                        <a:effectLst/>
+                        <a:latin typeface="Calibri" panose="020F0502020204030204" pitchFamily="34" charset="0"/>
+                        <a:ea typeface="Calibri" panose="020F0502020204030204" pitchFamily="34" charset="0"/>
+                        <a:cs typeface="Times New Roman" panose="02020603050405020304" pitchFamily="18" charset="0"/>
+                      </a:endParaRPr>
+                    </a:p>
+                  </a:txBody>
+                  <a:tcPr marL="56848" marR="56848" marT="0" marB="0"/>
+                </a:tc>
+                <a:tc>
+                  <a:txBody>
+                    <a:bodyPr/>
+                    <a:lstStyle/>
+                    <a:p>
+                      <a:pPr>
+                        <a:lnSpc>
+                          <a:spcPct val="107000"/>
+                        </a:lnSpc>
+                        <a:spcAft>
+                          <a:spcPts val="800"/>
+                        </a:spcAft>
+                        <a:buNone/>
+                      </a:pPr>
+                      <a:r>
+                        <a:rPr lang="en-IN" sz="700" kern="100">
+                          <a:effectLst/>
+                        </a:rPr>
+                        <a:t> </a:t>
+                      </a:r>
+                      <a:endParaRPr lang="en-IN" sz="900" kern="100">
+                        <a:effectLst/>
+                        <a:latin typeface="Calibri" panose="020F0502020204030204" pitchFamily="34" charset="0"/>
+                        <a:ea typeface="Calibri" panose="020F0502020204030204" pitchFamily="34" charset="0"/>
+                        <a:cs typeface="Times New Roman" panose="02020603050405020304" pitchFamily="18" charset="0"/>
+                      </a:endParaRPr>
+                    </a:p>
+                  </a:txBody>
+                  <a:tcPr marL="56848" marR="56848" marT="0" marB="0"/>
+                </a:tc>
+                <a:tc>
+                  <a:txBody>
+                    <a:bodyPr/>
+                    <a:lstStyle/>
+                    <a:p>
+                      <a:pPr>
+                        <a:lnSpc>
+                          <a:spcPct val="107000"/>
+                        </a:lnSpc>
+                        <a:spcAft>
+                          <a:spcPts val="800"/>
+                        </a:spcAft>
+                        <a:buNone/>
+                      </a:pPr>
+                      <a:r>
+                        <a:rPr lang="en-IN" sz="700" kern="100" dirty="0">
+                          <a:effectLst/>
+                        </a:rPr>
+                        <a:t> </a:t>
+                      </a:r>
+                      <a:endParaRPr lang="en-IN" sz="900" kern="100" dirty="0">
+                        <a:effectLst/>
+                        <a:latin typeface="Calibri" panose="020F0502020204030204" pitchFamily="34" charset="0"/>
+                        <a:ea typeface="Calibri" panose="020F0502020204030204" pitchFamily="34" charset="0"/>
+                        <a:cs typeface="Times New Roman" panose="02020603050405020304" pitchFamily="18" charset="0"/>
+                      </a:endParaRPr>
+                    </a:p>
+                  </a:txBody>
+                  <a:tcPr marL="56848" marR="56848" marT="0" marB="0"/>
+                </a:tc>
+                <a:tc>
+                  <a:txBody>
+                    <a:bodyPr/>
+                    <a:lstStyle/>
+                    <a:p>
+                      <a:pPr>
+                        <a:lnSpc>
+                          <a:spcPct val="107000"/>
+                        </a:lnSpc>
+                        <a:spcAft>
+                          <a:spcPts val="800"/>
+                        </a:spcAft>
+                        <a:buNone/>
+                      </a:pPr>
+                      <a:r>
+                        <a:rPr lang="en-IN" sz="700" kern="100">
+                          <a:effectLst/>
+                        </a:rPr>
+                        <a:t> </a:t>
+                      </a:r>
+                      <a:endParaRPr lang="en-IN" sz="900" kern="100">
+                        <a:effectLst/>
+                        <a:latin typeface="Calibri" panose="020F0502020204030204" pitchFamily="34" charset="0"/>
+                        <a:ea typeface="Calibri" panose="020F0502020204030204" pitchFamily="34" charset="0"/>
+                        <a:cs typeface="Times New Roman" panose="02020603050405020304" pitchFamily="18" charset="0"/>
+                      </a:endParaRPr>
+                    </a:p>
+                  </a:txBody>
+                  <a:tcPr marL="56848" marR="56848" marT="0" marB="0"/>
+                </a:tc>
+                <a:tc>
+                  <a:txBody>
+                    <a:bodyPr/>
+                    <a:lstStyle/>
+                    <a:p>
+                      <a:pPr>
+                        <a:lnSpc>
+                          <a:spcPct val="107000"/>
+                        </a:lnSpc>
+                        <a:spcAft>
+                          <a:spcPts val="800"/>
+                        </a:spcAft>
+                        <a:buNone/>
+                      </a:pPr>
+                      <a:r>
+                        <a:rPr lang="en-IN" sz="700" kern="100">
+                          <a:effectLst/>
+                        </a:rPr>
+                        <a:t> </a:t>
+                      </a:r>
+                      <a:endParaRPr lang="en-IN" sz="900" kern="100">
+                        <a:effectLst/>
+                        <a:latin typeface="Calibri" panose="020F0502020204030204" pitchFamily="34" charset="0"/>
+                        <a:ea typeface="Calibri" panose="020F0502020204030204" pitchFamily="34" charset="0"/>
+                        <a:cs typeface="Times New Roman" panose="02020603050405020304" pitchFamily="18" charset="0"/>
+                      </a:endParaRPr>
+                    </a:p>
+                  </a:txBody>
+                  <a:tcPr marL="56848" marR="56848" marT="0" marB="0"/>
+                </a:tc>
+                <a:tc>
+                  <a:txBody>
+                    <a:bodyPr/>
+                    <a:lstStyle/>
+                    <a:p>
+                      <a:pPr>
+                        <a:lnSpc>
+                          <a:spcPct val="107000"/>
+                        </a:lnSpc>
+                        <a:spcAft>
+                          <a:spcPts val="800"/>
+                        </a:spcAft>
+                        <a:buNone/>
+                      </a:pPr>
+                      <a:r>
+                        <a:rPr lang="en-IN" sz="700" kern="100">
+                          <a:effectLst/>
+                        </a:rPr>
+                        <a:t> </a:t>
+                      </a:r>
+                      <a:endParaRPr lang="en-IN" sz="900" kern="100">
+                        <a:effectLst/>
+                        <a:latin typeface="Calibri" panose="020F0502020204030204" pitchFamily="34" charset="0"/>
+                        <a:ea typeface="Calibri" panose="020F0502020204030204" pitchFamily="34" charset="0"/>
+                        <a:cs typeface="Times New Roman" panose="02020603050405020304" pitchFamily="18" charset="0"/>
+                      </a:endParaRPr>
+                    </a:p>
+                  </a:txBody>
+                  <a:tcPr marL="56848" marR="56848" marT="0" marB="0"/>
+                </a:tc>
+                <a:tc>
+                  <a:txBody>
+                    <a:bodyPr/>
+                    <a:lstStyle/>
+                    <a:p>
+                      <a:pPr>
+                        <a:lnSpc>
+                          <a:spcPct val="107000"/>
+                        </a:lnSpc>
+                        <a:spcAft>
+                          <a:spcPts val="800"/>
+                        </a:spcAft>
+                        <a:buNone/>
+                      </a:pPr>
+                      <a:r>
+                        <a:rPr lang="en-IN" sz="700" kern="100" dirty="0">
+                          <a:effectLst/>
+                        </a:rPr>
+                        <a:t> </a:t>
+                      </a:r>
+                      <a:endParaRPr lang="en-IN" sz="900" kern="100" dirty="0">
+                        <a:effectLst/>
+                        <a:latin typeface="Calibri" panose="020F0502020204030204" pitchFamily="34" charset="0"/>
+                        <a:ea typeface="Calibri" panose="020F0502020204030204" pitchFamily="34" charset="0"/>
+                        <a:cs typeface="Times New Roman" panose="02020603050405020304" pitchFamily="18" charset="0"/>
+                      </a:endParaRPr>
+                    </a:p>
+                  </a:txBody>
+                  <a:tcPr marL="56848" marR="56848" marT="0" marB="0"/>
+                </a:tc>
+                <a:extLst>
+                  <a:ext uri="{0D108BD9-81ED-4DB2-BD59-A6C34878D82A}">
+                    <a16:rowId xmlns:a16="http://schemas.microsoft.com/office/drawing/2014/main" val="670128608"/>
+                  </a:ext>
+                </a:extLst>
+              </a:tr>
+              <a:tr h="439272">
+                <a:tc>
+                  <a:txBody>
+                    <a:bodyPr/>
+                    <a:lstStyle/>
+                    <a:p>
+                      <a:pPr marL="0" lvl="0" indent="0" algn="l">
+                        <a:lnSpc>
+                          <a:spcPct val="107000"/>
+                        </a:lnSpc>
+                        <a:spcAft>
+                          <a:spcPts val="800"/>
+                        </a:spcAft>
+                        <a:buFont typeface="Arial" panose="020B0604020202020204" pitchFamily="34" charset="0"/>
+                        <a:buNone/>
+                      </a:pPr>
+                      <a:r>
+                        <a:rPr lang="en-IN" sz="1300" b="1" kern="100" dirty="0">
+                          <a:effectLst/>
+                          <a:latin typeface="Times New Roman" panose="02020603050405020304" pitchFamily="18" charset="0"/>
+                          <a:cs typeface="Times New Roman" panose="02020603050405020304" pitchFamily="18" charset="0"/>
+                        </a:rPr>
+                        <a:t>Baseline retrieval (Vector RAG)</a:t>
+                      </a:r>
+                      <a:endParaRPr lang="en-IN" sz="1300" b="1" kern="100" dirty="0">
+                        <a:effectLst/>
+                        <a:latin typeface="Times New Roman" panose="02020603050405020304" pitchFamily="18" charset="0"/>
+                        <a:ea typeface="Calibri" panose="020F0502020204030204" pitchFamily="34" charset="0"/>
+                        <a:cs typeface="Times New Roman" panose="02020603050405020304" pitchFamily="18" charset="0"/>
+                      </a:endParaRPr>
+                    </a:p>
+                  </a:txBody>
+                  <a:tcPr marL="56848" marR="56848" marT="0" marB="0" anchor="ctr"/>
+                </a:tc>
+                <a:tc>
+                  <a:txBody>
+                    <a:bodyPr/>
+                    <a:lstStyle/>
+                    <a:p>
+                      <a:pPr>
+                        <a:lnSpc>
+                          <a:spcPct val="107000"/>
+                        </a:lnSpc>
+                        <a:spcAft>
+                          <a:spcPts val="800"/>
+                        </a:spcAft>
+                        <a:buNone/>
+                      </a:pPr>
+                      <a:r>
+                        <a:rPr lang="en-IN" sz="700" kern="100">
+                          <a:effectLst/>
+                        </a:rPr>
+                        <a:t> </a:t>
+                      </a:r>
+                      <a:endParaRPr lang="en-IN" sz="900" kern="100">
+                        <a:effectLst/>
+                        <a:latin typeface="Calibri" panose="020F0502020204030204" pitchFamily="34" charset="0"/>
+                        <a:ea typeface="Calibri" panose="020F0502020204030204" pitchFamily="34" charset="0"/>
+                        <a:cs typeface="Times New Roman" panose="02020603050405020304" pitchFamily="18" charset="0"/>
+                      </a:endParaRPr>
+                    </a:p>
+                  </a:txBody>
+                  <a:tcPr marL="56848" marR="56848" marT="0" marB="0"/>
+                </a:tc>
+                <a:tc>
+                  <a:txBody>
+                    <a:bodyPr/>
+                    <a:lstStyle/>
+                    <a:p>
+                      <a:pPr>
+                        <a:lnSpc>
+                          <a:spcPct val="107000"/>
+                        </a:lnSpc>
+                        <a:spcAft>
+                          <a:spcPts val="800"/>
+                        </a:spcAft>
+                        <a:buNone/>
+                      </a:pPr>
+                      <a:r>
+                        <a:rPr lang="en-IN" sz="700" kern="100">
+                          <a:effectLst/>
+                        </a:rPr>
+                        <a:t> </a:t>
+                      </a:r>
+                      <a:endParaRPr lang="en-IN" sz="900" kern="100">
+                        <a:effectLst/>
+                        <a:latin typeface="Calibri" panose="020F0502020204030204" pitchFamily="34" charset="0"/>
+                        <a:ea typeface="Calibri" panose="020F0502020204030204" pitchFamily="34" charset="0"/>
+                        <a:cs typeface="Times New Roman" panose="02020603050405020304" pitchFamily="18" charset="0"/>
+                      </a:endParaRPr>
+                    </a:p>
+                  </a:txBody>
+                  <a:tcPr marL="56848" marR="56848" marT="0" marB="0"/>
+                </a:tc>
+                <a:tc>
+                  <a:txBody>
+                    <a:bodyPr/>
+                    <a:lstStyle/>
+                    <a:p>
+                      <a:pPr>
+                        <a:lnSpc>
+                          <a:spcPct val="107000"/>
+                        </a:lnSpc>
+                        <a:spcAft>
+                          <a:spcPts val="800"/>
+                        </a:spcAft>
+                        <a:buNone/>
+                      </a:pPr>
+                      <a:r>
+                        <a:rPr lang="en-IN" sz="700" kern="100" dirty="0">
+                          <a:effectLst/>
+                        </a:rPr>
+                        <a:t> </a:t>
+                      </a:r>
+                      <a:endParaRPr lang="en-IN" sz="900" kern="100" dirty="0">
+                        <a:effectLst/>
+                      </a:endParaRPr>
+                    </a:p>
+                    <a:p>
+                      <a:pPr>
+                        <a:lnSpc>
+                          <a:spcPct val="107000"/>
+                        </a:lnSpc>
+                        <a:spcAft>
+                          <a:spcPts val="800"/>
+                        </a:spcAft>
+                        <a:buNone/>
+                      </a:pPr>
+                      <a:r>
+                        <a:rPr lang="en-IN" sz="700" kern="100" dirty="0">
+                          <a:effectLst/>
+                        </a:rPr>
+                        <a:t> </a:t>
+                      </a:r>
+                      <a:endParaRPr lang="en-IN" sz="900" kern="100" dirty="0">
+                        <a:effectLst/>
+                        <a:latin typeface="Calibri" panose="020F0502020204030204" pitchFamily="34" charset="0"/>
+                        <a:ea typeface="Calibri" panose="020F0502020204030204" pitchFamily="34" charset="0"/>
+                        <a:cs typeface="Times New Roman" panose="02020603050405020304" pitchFamily="18" charset="0"/>
+                      </a:endParaRPr>
+                    </a:p>
+                  </a:txBody>
+                  <a:tcPr marL="56848" marR="56848" marT="0" marB="0">
+                    <a:solidFill>
+                      <a:schemeClr val="accent3"/>
+                    </a:solidFill>
+                  </a:tcPr>
+                </a:tc>
+                <a:tc>
+                  <a:txBody>
+                    <a:bodyPr/>
+                    <a:lstStyle/>
+                    <a:p>
+                      <a:pPr>
+                        <a:lnSpc>
+                          <a:spcPct val="107000"/>
+                        </a:lnSpc>
+                        <a:spcAft>
+                          <a:spcPts val="800"/>
+                        </a:spcAft>
+                        <a:buNone/>
+                      </a:pPr>
+                      <a:r>
+                        <a:rPr lang="en-IN" sz="700" kern="100" dirty="0">
+                          <a:effectLst/>
+                        </a:rPr>
+                        <a:t> </a:t>
+                      </a:r>
+                      <a:endParaRPr lang="en-IN" sz="900" kern="100" dirty="0">
+                        <a:effectLst/>
+                        <a:latin typeface="Calibri" panose="020F0502020204030204" pitchFamily="34" charset="0"/>
+                        <a:ea typeface="Calibri" panose="020F0502020204030204" pitchFamily="34" charset="0"/>
+                        <a:cs typeface="Times New Roman" panose="02020603050405020304" pitchFamily="18" charset="0"/>
+                      </a:endParaRPr>
+                    </a:p>
+                  </a:txBody>
+                  <a:tcPr marL="56848" marR="56848" marT="0" marB="0">
+                    <a:noFill/>
+                  </a:tcPr>
+                </a:tc>
+                <a:tc>
+                  <a:txBody>
+                    <a:bodyPr/>
+                    <a:lstStyle/>
+                    <a:p>
+                      <a:pPr>
+                        <a:lnSpc>
+                          <a:spcPct val="107000"/>
+                        </a:lnSpc>
+                        <a:spcAft>
+                          <a:spcPts val="800"/>
+                        </a:spcAft>
+                        <a:buNone/>
+                      </a:pPr>
+                      <a:r>
+                        <a:rPr lang="en-IN" sz="700" kern="100">
+                          <a:effectLst/>
+                        </a:rPr>
+                        <a:t> </a:t>
+                      </a:r>
+                      <a:endParaRPr lang="en-IN" sz="900" kern="100">
+                        <a:effectLst/>
+                        <a:latin typeface="Calibri" panose="020F0502020204030204" pitchFamily="34" charset="0"/>
+                        <a:ea typeface="Calibri" panose="020F0502020204030204" pitchFamily="34" charset="0"/>
+                        <a:cs typeface="Times New Roman" panose="02020603050405020304" pitchFamily="18" charset="0"/>
+                      </a:endParaRPr>
+                    </a:p>
+                  </a:txBody>
+                  <a:tcPr marL="56848" marR="56848" marT="0" marB="0"/>
+                </a:tc>
+                <a:tc>
+                  <a:txBody>
+                    <a:bodyPr/>
+                    <a:lstStyle/>
+                    <a:p>
+                      <a:pPr>
+                        <a:lnSpc>
+                          <a:spcPct val="107000"/>
+                        </a:lnSpc>
+                        <a:spcAft>
+                          <a:spcPts val="800"/>
+                        </a:spcAft>
+                        <a:buNone/>
+                      </a:pPr>
+                      <a:r>
+                        <a:rPr lang="en-IN" sz="700" kern="100">
+                          <a:effectLst/>
+                        </a:rPr>
+                        <a:t> </a:t>
+                      </a:r>
+                      <a:endParaRPr lang="en-IN" sz="900" kern="100">
+                        <a:effectLst/>
+                        <a:latin typeface="Calibri" panose="020F0502020204030204" pitchFamily="34" charset="0"/>
+                        <a:ea typeface="Calibri" panose="020F0502020204030204" pitchFamily="34" charset="0"/>
+                        <a:cs typeface="Times New Roman" panose="02020603050405020304" pitchFamily="18" charset="0"/>
+                      </a:endParaRPr>
+                    </a:p>
+                  </a:txBody>
+                  <a:tcPr marL="56848" marR="56848" marT="0" marB="0"/>
+                </a:tc>
+                <a:tc>
+                  <a:txBody>
+                    <a:bodyPr/>
+                    <a:lstStyle/>
+                    <a:p>
+                      <a:pPr>
+                        <a:lnSpc>
+                          <a:spcPct val="107000"/>
+                        </a:lnSpc>
+                        <a:spcAft>
+                          <a:spcPts val="800"/>
+                        </a:spcAft>
+                        <a:buNone/>
+                      </a:pPr>
+                      <a:r>
+                        <a:rPr lang="en-IN" sz="700" kern="100">
+                          <a:effectLst/>
+                        </a:rPr>
+                        <a:t> </a:t>
+                      </a:r>
+                      <a:endParaRPr lang="en-IN" sz="900" kern="100">
+                        <a:effectLst/>
+                        <a:latin typeface="Calibri" panose="020F0502020204030204" pitchFamily="34" charset="0"/>
+                        <a:ea typeface="Calibri" panose="020F0502020204030204" pitchFamily="34" charset="0"/>
+                        <a:cs typeface="Times New Roman" panose="02020603050405020304" pitchFamily="18" charset="0"/>
+                      </a:endParaRPr>
+                    </a:p>
+                  </a:txBody>
+                  <a:tcPr marL="56848" marR="56848" marT="0" marB="0"/>
+                </a:tc>
+                <a:tc>
+                  <a:txBody>
+                    <a:bodyPr/>
+                    <a:lstStyle/>
+                    <a:p>
+                      <a:pPr>
+                        <a:lnSpc>
+                          <a:spcPct val="107000"/>
+                        </a:lnSpc>
+                        <a:spcAft>
+                          <a:spcPts val="800"/>
+                        </a:spcAft>
+                        <a:buNone/>
+                      </a:pPr>
+                      <a:r>
+                        <a:rPr lang="en-IN" sz="700" kern="100">
+                          <a:effectLst/>
+                        </a:rPr>
+                        <a:t> </a:t>
+                      </a:r>
+                      <a:endParaRPr lang="en-IN" sz="900" kern="100">
+                        <a:effectLst/>
+                        <a:latin typeface="Calibri" panose="020F0502020204030204" pitchFamily="34" charset="0"/>
+                        <a:ea typeface="Calibri" panose="020F0502020204030204" pitchFamily="34" charset="0"/>
+                        <a:cs typeface="Times New Roman" panose="02020603050405020304" pitchFamily="18" charset="0"/>
+                      </a:endParaRPr>
+                    </a:p>
+                  </a:txBody>
+                  <a:tcPr marL="56848" marR="56848" marT="0" marB="0"/>
+                </a:tc>
+                <a:tc>
+                  <a:txBody>
+                    <a:bodyPr/>
+                    <a:lstStyle/>
+                    <a:p>
+                      <a:pPr>
+                        <a:lnSpc>
+                          <a:spcPct val="107000"/>
+                        </a:lnSpc>
+                        <a:spcAft>
+                          <a:spcPts val="800"/>
+                        </a:spcAft>
+                        <a:buNone/>
+                      </a:pPr>
+                      <a:r>
+                        <a:rPr lang="en-IN" sz="700" kern="100">
+                          <a:effectLst/>
+                        </a:rPr>
+                        <a:t> </a:t>
+                      </a:r>
+                      <a:endParaRPr lang="en-IN" sz="900" kern="100">
+                        <a:effectLst/>
+                        <a:latin typeface="Calibri" panose="020F0502020204030204" pitchFamily="34" charset="0"/>
+                        <a:ea typeface="Calibri" panose="020F0502020204030204" pitchFamily="34" charset="0"/>
+                        <a:cs typeface="Times New Roman" panose="02020603050405020304" pitchFamily="18" charset="0"/>
+                      </a:endParaRPr>
+                    </a:p>
+                  </a:txBody>
+                  <a:tcPr marL="56848" marR="56848" marT="0" marB="0"/>
+                </a:tc>
+                <a:extLst>
+                  <a:ext uri="{0D108BD9-81ED-4DB2-BD59-A6C34878D82A}">
+                    <a16:rowId xmlns:a16="http://schemas.microsoft.com/office/drawing/2014/main" val="6453884"/>
+                  </a:ext>
+                </a:extLst>
+              </a:tr>
+              <a:tr h="439272">
+                <a:tc>
+                  <a:txBody>
+                    <a:bodyPr/>
+                    <a:lstStyle/>
+                    <a:p>
+                      <a:pPr marL="0" lvl="0" indent="0" algn="l">
+                        <a:lnSpc>
+                          <a:spcPct val="107000"/>
+                        </a:lnSpc>
+                        <a:spcAft>
+                          <a:spcPts val="800"/>
+                        </a:spcAft>
+                        <a:buFont typeface="Arial" panose="020B0604020202020204" pitchFamily="34" charset="0"/>
+                        <a:buNone/>
+                      </a:pPr>
+                      <a:r>
+                        <a:rPr lang="en-IN" sz="1300" b="1" kern="100" dirty="0">
+                          <a:effectLst/>
+                          <a:latin typeface="Times New Roman" panose="02020603050405020304" pitchFamily="18" charset="0"/>
+                          <a:cs typeface="Times New Roman" panose="02020603050405020304" pitchFamily="18" charset="0"/>
+                        </a:rPr>
+                        <a:t>Adaptive Routing (PPR, Confidence Signal) and Entity extraction</a:t>
+                      </a:r>
+                      <a:endParaRPr lang="en-IN" sz="1300" b="1" kern="100" dirty="0">
+                        <a:effectLst/>
+                        <a:latin typeface="Times New Roman" panose="02020603050405020304" pitchFamily="18" charset="0"/>
+                        <a:ea typeface="Calibri" panose="020F0502020204030204" pitchFamily="34" charset="0"/>
+                        <a:cs typeface="Times New Roman" panose="02020603050405020304" pitchFamily="18" charset="0"/>
+                      </a:endParaRPr>
+                    </a:p>
+                  </a:txBody>
+                  <a:tcPr marL="56848" marR="56848" marT="0" marB="0" anchor="ctr"/>
+                </a:tc>
+                <a:tc>
+                  <a:txBody>
+                    <a:bodyPr/>
+                    <a:lstStyle/>
+                    <a:p>
+                      <a:pPr>
+                        <a:lnSpc>
+                          <a:spcPct val="107000"/>
+                        </a:lnSpc>
+                        <a:spcAft>
+                          <a:spcPts val="800"/>
+                        </a:spcAft>
+                        <a:buNone/>
+                      </a:pPr>
+                      <a:r>
+                        <a:rPr lang="en-IN" sz="700" kern="100">
+                          <a:effectLst/>
+                        </a:rPr>
+                        <a:t> </a:t>
+                      </a:r>
+                      <a:endParaRPr lang="en-IN" sz="900" kern="100">
+                        <a:effectLst/>
+                        <a:latin typeface="Calibri" panose="020F0502020204030204" pitchFamily="34" charset="0"/>
+                        <a:ea typeface="Calibri" panose="020F0502020204030204" pitchFamily="34" charset="0"/>
+                        <a:cs typeface="Times New Roman" panose="02020603050405020304" pitchFamily="18" charset="0"/>
+                      </a:endParaRPr>
+                    </a:p>
+                  </a:txBody>
+                  <a:tcPr marL="56848" marR="56848" marT="0" marB="0"/>
+                </a:tc>
+                <a:tc>
+                  <a:txBody>
+                    <a:bodyPr/>
+                    <a:lstStyle/>
+                    <a:p>
+                      <a:pPr>
+                        <a:lnSpc>
+                          <a:spcPct val="107000"/>
+                        </a:lnSpc>
+                        <a:spcAft>
+                          <a:spcPts val="800"/>
+                        </a:spcAft>
+                        <a:buNone/>
+                      </a:pPr>
+                      <a:r>
+                        <a:rPr lang="en-IN" sz="700" kern="100">
+                          <a:effectLst/>
+                        </a:rPr>
+                        <a:t> </a:t>
+                      </a:r>
+                      <a:endParaRPr lang="en-IN" sz="900" kern="100">
+                        <a:effectLst/>
+                        <a:latin typeface="Calibri" panose="020F0502020204030204" pitchFamily="34" charset="0"/>
+                        <a:ea typeface="Calibri" panose="020F0502020204030204" pitchFamily="34" charset="0"/>
+                        <a:cs typeface="Times New Roman" panose="02020603050405020304" pitchFamily="18" charset="0"/>
+                      </a:endParaRPr>
+                    </a:p>
+                  </a:txBody>
+                  <a:tcPr marL="56848" marR="56848" marT="0" marB="0"/>
+                </a:tc>
+                <a:tc>
+                  <a:txBody>
+                    <a:bodyPr/>
+                    <a:lstStyle/>
+                    <a:p>
+                      <a:pPr>
+                        <a:lnSpc>
+                          <a:spcPct val="107000"/>
+                        </a:lnSpc>
+                        <a:spcAft>
+                          <a:spcPts val="800"/>
+                        </a:spcAft>
+                        <a:buNone/>
+                      </a:pPr>
+                      <a:r>
+                        <a:rPr lang="en-IN" sz="700" kern="100" dirty="0">
+                          <a:effectLst/>
+                        </a:rPr>
+                        <a:t> </a:t>
+                      </a:r>
+                      <a:endParaRPr lang="en-IN" sz="900" kern="100" dirty="0">
+                        <a:effectLst/>
+                        <a:latin typeface="Calibri" panose="020F0502020204030204" pitchFamily="34" charset="0"/>
+                        <a:ea typeface="Calibri" panose="020F0502020204030204" pitchFamily="34" charset="0"/>
+                        <a:cs typeface="Times New Roman" panose="02020603050405020304" pitchFamily="18" charset="0"/>
+                      </a:endParaRPr>
+                    </a:p>
+                  </a:txBody>
+                  <a:tcPr marL="56848" marR="56848" marT="0" marB="0">
+                    <a:solidFill>
+                      <a:schemeClr val="accent3"/>
+                    </a:solidFill>
+                  </a:tcPr>
+                </a:tc>
+                <a:tc>
+                  <a:txBody>
+                    <a:bodyPr/>
+                    <a:lstStyle/>
+                    <a:p>
+                      <a:pPr>
+                        <a:lnSpc>
+                          <a:spcPct val="107000"/>
+                        </a:lnSpc>
+                        <a:spcAft>
+                          <a:spcPts val="800"/>
+                        </a:spcAft>
+                        <a:buNone/>
+                      </a:pPr>
+                      <a:r>
+                        <a:rPr lang="en-IN" sz="700" kern="100" dirty="0">
+                          <a:effectLst/>
+                        </a:rPr>
+                        <a:t> </a:t>
+                      </a:r>
+                      <a:endParaRPr lang="en-IN" sz="900" kern="100" dirty="0">
+                        <a:effectLst/>
+                        <a:latin typeface="Calibri" panose="020F0502020204030204" pitchFamily="34" charset="0"/>
+                        <a:ea typeface="Calibri" panose="020F0502020204030204" pitchFamily="34" charset="0"/>
+                        <a:cs typeface="Times New Roman" panose="02020603050405020304" pitchFamily="18" charset="0"/>
+                      </a:endParaRPr>
+                    </a:p>
+                  </a:txBody>
+                  <a:tcPr marL="56848" marR="56848" marT="0" marB="0">
+                    <a:solidFill>
+                      <a:schemeClr val="accent3"/>
+                    </a:solidFill>
+                  </a:tcPr>
+                </a:tc>
+                <a:tc>
+                  <a:txBody>
+                    <a:bodyPr/>
+                    <a:lstStyle/>
+                    <a:p>
+                      <a:pPr>
+                        <a:lnSpc>
+                          <a:spcPct val="107000"/>
+                        </a:lnSpc>
+                        <a:spcAft>
+                          <a:spcPts val="800"/>
+                        </a:spcAft>
+                        <a:buNone/>
+                      </a:pPr>
+                      <a:r>
+                        <a:rPr lang="en-IN" sz="700" kern="100">
+                          <a:effectLst/>
+                        </a:rPr>
+                        <a:t> </a:t>
+                      </a:r>
+                      <a:endParaRPr lang="en-IN" sz="900" kern="100">
+                        <a:effectLst/>
+                        <a:latin typeface="Calibri" panose="020F0502020204030204" pitchFamily="34" charset="0"/>
+                        <a:ea typeface="Calibri" panose="020F0502020204030204" pitchFamily="34" charset="0"/>
+                        <a:cs typeface="Times New Roman" panose="02020603050405020304" pitchFamily="18" charset="0"/>
+                      </a:endParaRPr>
+                    </a:p>
+                  </a:txBody>
+                  <a:tcPr marL="56848" marR="56848" marT="0" marB="0"/>
+                </a:tc>
+                <a:tc>
+                  <a:txBody>
+                    <a:bodyPr/>
+                    <a:lstStyle/>
+                    <a:p>
+                      <a:pPr>
+                        <a:lnSpc>
+                          <a:spcPct val="107000"/>
+                        </a:lnSpc>
+                        <a:spcAft>
+                          <a:spcPts val="800"/>
+                        </a:spcAft>
+                        <a:buNone/>
+                      </a:pPr>
+                      <a:r>
+                        <a:rPr lang="en-IN" sz="700" kern="100">
+                          <a:effectLst/>
+                        </a:rPr>
+                        <a:t> </a:t>
+                      </a:r>
+                      <a:endParaRPr lang="en-IN" sz="900" kern="100">
+                        <a:effectLst/>
+                        <a:latin typeface="Calibri" panose="020F0502020204030204" pitchFamily="34" charset="0"/>
+                        <a:ea typeface="Calibri" panose="020F0502020204030204" pitchFamily="34" charset="0"/>
+                        <a:cs typeface="Times New Roman" panose="02020603050405020304" pitchFamily="18" charset="0"/>
+                      </a:endParaRPr>
+                    </a:p>
+                  </a:txBody>
+                  <a:tcPr marL="56848" marR="56848" marT="0" marB="0"/>
+                </a:tc>
+                <a:tc>
+                  <a:txBody>
+                    <a:bodyPr/>
+                    <a:lstStyle/>
+                    <a:p>
+                      <a:pPr>
+                        <a:lnSpc>
+                          <a:spcPct val="107000"/>
+                        </a:lnSpc>
+                        <a:spcAft>
+                          <a:spcPts val="800"/>
+                        </a:spcAft>
+                        <a:buNone/>
+                      </a:pPr>
+                      <a:r>
+                        <a:rPr lang="en-IN" sz="700" kern="100">
+                          <a:effectLst/>
+                        </a:rPr>
+                        <a:t> </a:t>
+                      </a:r>
+                      <a:endParaRPr lang="en-IN" sz="900" kern="100">
+                        <a:effectLst/>
+                        <a:latin typeface="Calibri" panose="020F0502020204030204" pitchFamily="34" charset="0"/>
+                        <a:ea typeface="Calibri" panose="020F0502020204030204" pitchFamily="34" charset="0"/>
+                        <a:cs typeface="Times New Roman" panose="02020603050405020304" pitchFamily="18" charset="0"/>
+                      </a:endParaRPr>
+                    </a:p>
+                  </a:txBody>
+                  <a:tcPr marL="56848" marR="56848" marT="0" marB="0"/>
+                </a:tc>
+                <a:tc>
+                  <a:txBody>
+                    <a:bodyPr/>
+                    <a:lstStyle/>
+                    <a:p>
+                      <a:pPr>
+                        <a:lnSpc>
+                          <a:spcPct val="107000"/>
+                        </a:lnSpc>
+                        <a:spcAft>
+                          <a:spcPts val="800"/>
+                        </a:spcAft>
+                        <a:buNone/>
+                      </a:pPr>
+                      <a:r>
+                        <a:rPr lang="en-IN" sz="700" kern="100">
+                          <a:effectLst/>
+                        </a:rPr>
+                        <a:t> </a:t>
+                      </a:r>
+                      <a:endParaRPr lang="en-IN" sz="900" kern="100">
+                        <a:effectLst/>
+                        <a:latin typeface="Calibri" panose="020F0502020204030204" pitchFamily="34" charset="0"/>
+                        <a:ea typeface="Calibri" panose="020F0502020204030204" pitchFamily="34" charset="0"/>
+                        <a:cs typeface="Times New Roman" panose="02020603050405020304" pitchFamily="18" charset="0"/>
+                      </a:endParaRPr>
+                    </a:p>
+                  </a:txBody>
+                  <a:tcPr marL="56848" marR="56848" marT="0" marB="0"/>
+                </a:tc>
+                <a:tc>
+                  <a:txBody>
+                    <a:bodyPr/>
+                    <a:lstStyle/>
+                    <a:p>
+                      <a:pPr>
+                        <a:lnSpc>
+                          <a:spcPct val="107000"/>
+                        </a:lnSpc>
+                        <a:spcAft>
+                          <a:spcPts val="800"/>
+                        </a:spcAft>
+                        <a:buNone/>
+                      </a:pPr>
+                      <a:r>
+                        <a:rPr lang="en-IN" sz="700" kern="100">
+                          <a:effectLst/>
+                        </a:rPr>
+                        <a:t> </a:t>
+                      </a:r>
+                      <a:endParaRPr lang="en-IN" sz="900" kern="100">
+                        <a:effectLst/>
+                        <a:latin typeface="Calibri" panose="020F0502020204030204" pitchFamily="34" charset="0"/>
+                        <a:ea typeface="Calibri" panose="020F0502020204030204" pitchFamily="34" charset="0"/>
+                        <a:cs typeface="Times New Roman" panose="02020603050405020304" pitchFamily="18" charset="0"/>
+                      </a:endParaRPr>
+                    </a:p>
+                  </a:txBody>
+                  <a:tcPr marL="56848" marR="56848" marT="0" marB="0"/>
+                </a:tc>
+                <a:extLst>
+                  <a:ext uri="{0D108BD9-81ED-4DB2-BD59-A6C34878D82A}">
+                    <a16:rowId xmlns:a16="http://schemas.microsoft.com/office/drawing/2014/main" val="1003456462"/>
+                  </a:ext>
+                </a:extLst>
+              </a:tr>
+              <a:tr h="439272">
+                <a:tc>
+                  <a:txBody>
+                    <a:bodyPr/>
+                    <a:lstStyle/>
+                    <a:p>
+                      <a:pPr marL="0" lvl="0" indent="0" algn="l">
+                        <a:lnSpc>
+                          <a:spcPct val="107000"/>
+                        </a:lnSpc>
+                        <a:spcAft>
+                          <a:spcPts val="800"/>
+                        </a:spcAft>
+                        <a:buFont typeface="Arial" panose="020B0604020202020204" pitchFamily="34" charset="0"/>
+                        <a:buNone/>
+                      </a:pPr>
+                      <a:r>
+                        <a:rPr lang="en-US" sz="1300" b="1" kern="100" dirty="0">
+                          <a:effectLst/>
+                          <a:latin typeface="Times New Roman" panose="02020603050405020304" pitchFamily="18" charset="0"/>
+                          <a:ea typeface="Calibri" panose="020F0502020204030204" pitchFamily="34" charset="0"/>
+                          <a:cs typeface="Times New Roman" panose="02020603050405020304" pitchFamily="18" charset="0"/>
+                        </a:rPr>
+                        <a:t>Hybrid Retrieval</a:t>
+                      </a:r>
+                      <a:endParaRPr lang="en-IN" sz="1300" b="1" kern="100" dirty="0">
+                        <a:effectLst/>
+                        <a:latin typeface="Times New Roman" panose="02020603050405020304" pitchFamily="18" charset="0"/>
+                        <a:ea typeface="Calibri" panose="020F0502020204030204" pitchFamily="34" charset="0"/>
+                        <a:cs typeface="Times New Roman" panose="02020603050405020304" pitchFamily="18" charset="0"/>
+                      </a:endParaRPr>
+                    </a:p>
+                  </a:txBody>
+                  <a:tcPr marL="56848" marR="56848" marT="0" marB="0" anchor="ctr"/>
+                </a:tc>
+                <a:tc>
+                  <a:txBody>
+                    <a:bodyPr/>
+                    <a:lstStyle/>
+                    <a:p>
+                      <a:pPr>
+                        <a:lnSpc>
+                          <a:spcPct val="107000"/>
+                        </a:lnSpc>
+                        <a:spcAft>
+                          <a:spcPts val="800"/>
+                        </a:spcAft>
+                        <a:buNone/>
+                      </a:pPr>
+                      <a:r>
+                        <a:rPr lang="en-IN" sz="700" kern="100">
+                          <a:effectLst/>
+                        </a:rPr>
+                        <a:t> </a:t>
+                      </a:r>
+                      <a:endParaRPr lang="en-IN" sz="900" kern="100">
+                        <a:effectLst/>
+                        <a:latin typeface="Calibri" panose="020F0502020204030204" pitchFamily="34" charset="0"/>
+                        <a:ea typeface="Calibri" panose="020F0502020204030204" pitchFamily="34" charset="0"/>
+                        <a:cs typeface="Times New Roman" panose="02020603050405020304" pitchFamily="18" charset="0"/>
+                      </a:endParaRPr>
+                    </a:p>
+                  </a:txBody>
+                  <a:tcPr marL="56848" marR="56848" marT="0" marB="0"/>
+                </a:tc>
+                <a:tc>
+                  <a:txBody>
+                    <a:bodyPr/>
+                    <a:lstStyle/>
+                    <a:p>
+                      <a:pPr>
+                        <a:lnSpc>
+                          <a:spcPct val="107000"/>
+                        </a:lnSpc>
+                        <a:spcAft>
+                          <a:spcPts val="800"/>
+                        </a:spcAft>
+                        <a:buNone/>
+                      </a:pPr>
+                      <a:r>
+                        <a:rPr lang="en-IN" sz="700" kern="100">
+                          <a:effectLst/>
+                        </a:rPr>
+                        <a:t> </a:t>
+                      </a:r>
+                      <a:endParaRPr lang="en-IN" sz="900" kern="100">
+                        <a:effectLst/>
+                        <a:latin typeface="Calibri" panose="020F0502020204030204" pitchFamily="34" charset="0"/>
+                        <a:ea typeface="Calibri" panose="020F0502020204030204" pitchFamily="34" charset="0"/>
+                        <a:cs typeface="Times New Roman" panose="02020603050405020304" pitchFamily="18" charset="0"/>
+                      </a:endParaRPr>
+                    </a:p>
+                  </a:txBody>
+                  <a:tcPr marL="56848" marR="56848" marT="0" marB="0"/>
+                </a:tc>
+                <a:tc>
+                  <a:txBody>
+                    <a:bodyPr/>
+                    <a:lstStyle/>
+                    <a:p>
+                      <a:pPr>
+                        <a:lnSpc>
+                          <a:spcPct val="107000"/>
+                        </a:lnSpc>
+                        <a:spcAft>
+                          <a:spcPts val="800"/>
+                        </a:spcAft>
+                        <a:buNone/>
+                      </a:pPr>
+                      <a:r>
+                        <a:rPr lang="en-IN" sz="700" kern="100">
+                          <a:effectLst/>
+                        </a:rPr>
+                        <a:t> </a:t>
+                      </a:r>
+                      <a:endParaRPr lang="en-IN" sz="900" kern="100">
+                        <a:effectLst/>
+                        <a:latin typeface="Calibri" panose="020F0502020204030204" pitchFamily="34" charset="0"/>
+                        <a:ea typeface="Calibri" panose="020F0502020204030204" pitchFamily="34" charset="0"/>
+                        <a:cs typeface="Times New Roman" panose="02020603050405020304" pitchFamily="18" charset="0"/>
+                      </a:endParaRPr>
+                    </a:p>
+                  </a:txBody>
+                  <a:tcPr marL="56848" marR="56848" marT="0" marB="0"/>
+                </a:tc>
+                <a:tc>
+                  <a:txBody>
+                    <a:bodyPr/>
+                    <a:lstStyle/>
+                    <a:p>
+                      <a:pPr>
+                        <a:lnSpc>
+                          <a:spcPct val="107000"/>
+                        </a:lnSpc>
+                        <a:spcAft>
+                          <a:spcPts val="800"/>
+                        </a:spcAft>
+                        <a:buNone/>
+                      </a:pPr>
+                      <a:r>
+                        <a:rPr lang="en-IN" sz="700" kern="100" dirty="0">
+                          <a:effectLst/>
+                        </a:rPr>
+                        <a:t> </a:t>
+                      </a:r>
+                      <a:endParaRPr lang="en-IN" sz="900" kern="100" dirty="0">
+                        <a:effectLst/>
+                        <a:latin typeface="Calibri" panose="020F0502020204030204" pitchFamily="34" charset="0"/>
+                        <a:ea typeface="Calibri" panose="020F0502020204030204" pitchFamily="34" charset="0"/>
+                        <a:cs typeface="Times New Roman" panose="02020603050405020304" pitchFamily="18" charset="0"/>
+                      </a:endParaRPr>
+                    </a:p>
+                  </a:txBody>
+                  <a:tcPr marL="56848" marR="56848" marT="0" marB="0">
+                    <a:solidFill>
+                      <a:schemeClr val="accent3"/>
+                    </a:solidFill>
+                  </a:tcPr>
+                </a:tc>
+                <a:tc>
+                  <a:txBody>
+                    <a:bodyPr/>
+                    <a:lstStyle/>
+                    <a:p>
+                      <a:pPr>
+                        <a:lnSpc>
+                          <a:spcPct val="107000"/>
+                        </a:lnSpc>
+                        <a:spcAft>
+                          <a:spcPts val="800"/>
+                        </a:spcAft>
+                        <a:buNone/>
+                      </a:pPr>
+                      <a:r>
+                        <a:rPr lang="en-IN" sz="700" kern="100" dirty="0">
+                          <a:effectLst/>
+                        </a:rPr>
+                        <a:t> </a:t>
+                      </a:r>
+                      <a:endParaRPr lang="en-IN" sz="900" kern="100" dirty="0">
+                        <a:effectLst/>
+                        <a:latin typeface="Calibri" panose="020F0502020204030204" pitchFamily="34" charset="0"/>
+                        <a:ea typeface="Calibri" panose="020F0502020204030204" pitchFamily="34" charset="0"/>
+                        <a:cs typeface="Times New Roman" panose="02020603050405020304" pitchFamily="18" charset="0"/>
+                      </a:endParaRPr>
+                    </a:p>
+                  </a:txBody>
+                  <a:tcPr marL="56848" marR="56848" marT="0" marB="0">
+                    <a:noFill/>
+                  </a:tcPr>
+                </a:tc>
+                <a:tc>
+                  <a:txBody>
+                    <a:bodyPr/>
+                    <a:lstStyle/>
+                    <a:p>
+                      <a:pPr>
+                        <a:lnSpc>
+                          <a:spcPct val="107000"/>
+                        </a:lnSpc>
+                        <a:spcAft>
+                          <a:spcPts val="800"/>
+                        </a:spcAft>
+                        <a:buNone/>
+                      </a:pPr>
+                      <a:r>
+                        <a:rPr lang="en-IN" sz="700" kern="100" dirty="0">
+                          <a:effectLst/>
+                        </a:rPr>
+                        <a:t> </a:t>
+                      </a:r>
+                      <a:endParaRPr lang="en-IN" sz="900" kern="100" dirty="0">
+                        <a:effectLst/>
+                        <a:latin typeface="Calibri" panose="020F0502020204030204" pitchFamily="34" charset="0"/>
+                        <a:ea typeface="Calibri" panose="020F0502020204030204" pitchFamily="34" charset="0"/>
+                        <a:cs typeface="Times New Roman" panose="02020603050405020304" pitchFamily="18" charset="0"/>
+                      </a:endParaRPr>
+                    </a:p>
+                  </a:txBody>
+                  <a:tcPr marL="56848" marR="56848" marT="0" marB="0">
+                    <a:noFill/>
+                  </a:tcPr>
+                </a:tc>
+                <a:tc>
+                  <a:txBody>
+                    <a:bodyPr/>
+                    <a:lstStyle/>
+                    <a:p>
+                      <a:pPr>
+                        <a:lnSpc>
+                          <a:spcPct val="107000"/>
+                        </a:lnSpc>
+                        <a:spcAft>
+                          <a:spcPts val="800"/>
+                        </a:spcAft>
+                        <a:buNone/>
+                      </a:pPr>
+                      <a:r>
+                        <a:rPr lang="en-IN" sz="700" kern="100">
+                          <a:effectLst/>
+                        </a:rPr>
+                        <a:t> </a:t>
+                      </a:r>
+                      <a:endParaRPr lang="en-IN" sz="900" kern="100">
+                        <a:effectLst/>
+                        <a:latin typeface="Calibri" panose="020F0502020204030204" pitchFamily="34" charset="0"/>
+                        <a:ea typeface="Calibri" panose="020F0502020204030204" pitchFamily="34" charset="0"/>
+                        <a:cs typeface="Times New Roman" panose="02020603050405020304" pitchFamily="18" charset="0"/>
+                      </a:endParaRPr>
+                    </a:p>
+                  </a:txBody>
+                  <a:tcPr marL="56848" marR="56848" marT="0" marB="0"/>
+                </a:tc>
+                <a:tc>
+                  <a:txBody>
+                    <a:bodyPr/>
+                    <a:lstStyle/>
+                    <a:p>
+                      <a:pPr>
+                        <a:lnSpc>
+                          <a:spcPct val="107000"/>
+                        </a:lnSpc>
+                        <a:spcAft>
+                          <a:spcPts val="800"/>
+                        </a:spcAft>
+                        <a:buNone/>
+                      </a:pPr>
+                      <a:r>
+                        <a:rPr lang="en-IN" sz="700" kern="100">
+                          <a:effectLst/>
+                        </a:rPr>
+                        <a:t> </a:t>
+                      </a:r>
+                      <a:endParaRPr lang="en-IN" sz="900" kern="100">
+                        <a:effectLst/>
+                        <a:latin typeface="Calibri" panose="020F0502020204030204" pitchFamily="34" charset="0"/>
+                        <a:ea typeface="Calibri" panose="020F0502020204030204" pitchFamily="34" charset="0"/>
+                        <a:cs typeface="Times New Roman" panose="02020603050405020304" pitchFamily="18" charset="0"/>
+                      </a:endParaRPr>
+                    </a:p>
+                  </a:txBody>
+                  <a:tcPr marL="56848" marR="56848" marT="0" marB="0"/>
+                </a:tc>
+                <a:tc>
+                  <a:txBody>
+                    <a:bodyPr/>
+                    <a:lstStyle/>
+                    <a:p>
+                      <a:pPr>
+                        <a:lnSpc>
+                          <a:spcPct val="107000"/>
+                        </a:lnSpc>
+                        <a:spcAft>
+                          <a:spcPts val="800"/>
+                        </a:spcAft>
+                        <a:buNone/>
+                      </a:pPr>
+                      <a:r>
+                        <a:rPr lang="en-IN" sz="700" kern="100" dirty="0">
+                          <a:effectLst/>
+                        </a:rPr>
+                        <a:t> </a:t>
+                      </a:r>
+                      <a:endParaRPr lang="en-IN" sz="900" kern="100" dirty="0">
+                        <a:effectLst/>
+                        <a:latin typeface="Calibri" panose="020F0502020204030204" pitchFamily="34" charset="0"/>
+                        <a:ea typeface="Calibri" panose="020F0502020204030204" pitchFamily="34" charset="0"/>
+                        <a:cs typeface="Times New Roman" panose="02020603050405020304" pitchFamily="18" charset="0"/>
+                      </a:endParaRPr>
+                    </a:p>
+                  </a:txBody>
+                  <a:tcPr marL="56848" marR="56848" marT="0" marB="0"/>
+                </a:tc>
+                <a:extLst>
+                  <a:ext uri="{0D108BD9-81ED-4DB2-BD59-A6C34878D82A}">
+                    <a16:rowId xmlns:a16="http://schemas.microsoft.com/office/drawing/2014/main" val="3410732702"/>
+                  </a:ext>
+                </a:extLst>
+              </a:tr>
+              <a:tr h="439272">
+                <a:tc>
+                  <a:txBody>
+                    <a:bodyPr/>
+                    <a:lstStyle/>
+                    <a:p>
+                      <a:pPr marL="0" lvl="0" indent="0" algn="l">
+                        <a:lnSpc>
+                          <a:spcPct val="107000"/>
+                        </a:lnSpc>
+                        <a:spcAft>
+                          <a:spcPts val="800"/>
+                        </a:spcAft>
+                        <a:buFont typeface="Arial" panose="020B0604020202020204" pitchFamily="34" charset="0"/>
+                        <a:buNone/>
+                      </a:pPr>
+                      <a:r>
+                        <a:rPr lang="en-US" sz="1300" b="1" kern="100" dirty="0">
+                          <a:effectLst/>
+                          <a:latin typeface="Times New Roman" panose="02020603050405020304" pitchFamily="18" charset="0"/>
+                          <a:ea typeface="Calibri" panose="020F0502020204030204" pitchFamily="34" charset="0"/>
+                          <a:cs typeface="Times New Roman" panose="02020603050405020304" pitchFamily="18" charset="0"/>
+                        </a:rPr>
+                        <a:t>Mid Project Review and Retrieval refinement</a:t>
+                      </a:r>
+                      <a:endParaRPr lang="en-IN" sz="1300" b="1" kern="100" dirty="0">
+                        <a:effectLst/>
+                        <a:latin typeface="Times New Roman" panose="02020603050405020304" pitchFamily="18" charset="0"/>
+                        <a:ea typeface="Calibri" panose="020F0502020204030204" pitchFamily="34" charset="0"/>
+                        <a:cs typeface="Times New Roman" panose="02020603050405020304" pitchFamily="18" charset="0"/>
+                      </a:endParaRPr>
+                    </a:p>
+                  </a:txBody>
+                  <a:tcPr marL="56848" marR="56848" marT="0" marB="0" anchor="ctr"/>
+                </a:tc>
+                <a:tc>
+                  <a:txBody>
+                    <a:bodyPr/>
+                    <a:lstStyle/>
+                    <a:p>
+                      <a:pPr>
+                        <a:lnSpc>
+                          <a:spcPct val="107000"/>
+                        </a:lnSpc>
+                        <a:spcAft>
+                          <a:spcPts val="800"/>
+                        </a:spcAft>
+                        <a:buNone/>
+                      </a:pPr>
+                      <a:r>
+                        <a:rPr lang="en-IN" sz="700" kern="100">
+                          <a:effectLst/>
+                        </a:rPr>
+                        <a:t> </a:t>
+                      </a:r>
+                      <a:endParaRPr lang="en-IN" sz="900" kern="100">
+                        <a:effectLst/>
+                        <a:latin typeface="Calibri" panose="020F0502020204030204" pitchFamily="34" charset="0"/>
+                        <a:ea typeface="Calibri" panose="020F0502020204030204" pitchFamily="34" charset="0"/>
+                        <a:cs typeface="Times New Roman" panose="02020603050405020304" pitchFamily="18" charset="0"/>
+                      </a:endParaRPr>
+                    </a:p>
+                  </a:txBody>
+                  <a:tcPr marL="56848" marR="56848" marT="0" marB="0"/>
+                </a:tc>
+                <a:tc>
+                  <a:txBody>
+                    <a:bodyPr/>
+                    <a:lstStyle/>
+                    <a:p>
+                      <a:pPr>
+                        <a:lnSpc>
+                          <a:spcPct val="107000"/>
+                        </a:lnSpc>
+                        <a:spcAft>
+                          <a:spcPts val="800"/>
+                        </a:spcAft>
+                        <a:buNone/>
+                      </a:pPr>
+                      <a:r>
+                        <a:rPr lang="en-IN" sz="700" kern="100">
+                          <a:effectLst/>
+                        </a:rPr>
+                        <a:t> </a:t>
+                      </a:r>
+                      <a:endParaRPr lang="en-IN" sz="900" kern="100">
+                        <a:effectLst/>
+                        <a:latin typeface="Calibri" panose="020F0502020204030204" pitchFamily="34" charset="0"/>
+                        <a:ea typeface="Calibri" panose="020F0502020204030204" pitchFamily="34" charset="0"/>
+                        <a:cs typeface="Times New Roman" panose="02020603050405020304" pitchFamily="18" charset="0"/>
+                      </a:endParaRPr>
+                    </a:p>
+                  </a:txBody>
+                  <a:tcPr marL="56848" marR="56848" marT="0" marB="0"/>
+                </a:tc>
+                <a:tc>
+                  <a:txBody>
+                    <a:bodyPr/>
+                    <a:lstStyle/>
+                    <a:p>
+                      <a:pPr>
+                        <a:lnSpc>
+                          <a:spcPct val="107000"/>
+                        </a:lnSpc>
+                        <a:spcAft>
+                          <a:spcPts val="800"/>
+                        </a:spcAft>
+                        <a:buNone/>
+                      </a:pPr>
+                      <a:r>
+                        <a:rPr lang="en-IN" sz="700" kern="100">
+                          <a:effectLst/>
+                        </a:rPr>
+                        <a:t> </a:t>
+                      </a:r>
+                      <a:endParaRPr lang="en-IN" sz="900" kern="100">
+                        <a:effectLst/>
+                        <a:latin typeface="Calibri" panose="020F0502020204030204" pitchFamily="34" charset="0"/>
+                        <a:ea typeface="Calibri" panose="020F0502020204030204" pitchFamily="34" charset="0"/>
+                        <a:cs typeface="Times New Roman" panose="02020603050405020304" pitchFamily="18" charset="0"/>
+                      </a:endParaRPr>
+                    </a:p>
+                  </a:txBody>
+                  <a:tcPr marL="56848" marR="56848" marT="0" marB="0"/>
+                </a:tc>
+                <a:tc>
+                  <a:txBody>
+                    <a:bodyPr/>
+                    <a:lstStyle/>
+                    <a:p>
+                      <a:pPr>
+                        <a:lnSpc>
+                          <a:spcPct val="107000"/>
+                        </a:lnSpc>
+                        <a:spcAft>
+                          <a:spcPts val="800"/>
+                        </a:spcAft>
+                        <a:buNone/>
+                      </a:pPr>
+                      <a:r>
+                        <a:rPr lang="en-IN" sz="700" kern="100" dirty="0">
+                          <a:effectLst/>
+                        </a:rPr>
+                        <a:t> </a:t>
+                      </a:r>
+                      <a:endParaRPr lang="en-IN" sz="900" kern="100" dirty="0">
+                        <a:effectLst/>
+                        <a:latin typeface="Calibri" panose="020F0502020204030204" pitchFamily="34" charset="0"/>
+                        <a:ea typeface="Calibri" panose="020F0502020204030204" pitchFamily="34" charset="0"/>
+                        <a:cs typeface="Times New Roman" panose="02020603050405020304" pitchFamily="18" charset="0"/>
+                      </a:endParaRPr>
+                    </a:p>
+                  </a:txBody>
+                  <a:tcPr marL="56848" marR="56848" marT="0" marB="0">
+                    <a:solidFill>
+                      <a:schemeClr val="accent6">
+                        <a:lumMod val="75000"/>
+                      </a:schemeClr>
+                    </a:solidFill>
+                  </a:tcPr>
+                </a:tc>
+                <a:tc>
+                  <a:txBody>
+                    <a:bodyPr/>
+                    <a:lstStyle/>
+                    <a:p>
+                      <a:pPr>
+                        <a:lnSpc>
+                          <a:spcPct val="107000"/>
+                        </a:lnSpc>
+                        <a:spcAft>
+                          <a:spcPts val="800"/>
+                        </a:spcAft>
+                        <a:buNone/>
+                      </a:pPr>
+                      <a:r>
+                        <a:rPr lang="en-IN" sz="700" kern="100" dirty="0">
+                          <a:effectLst/>
+                        </a:rPr>
+                        <a:t> </a:t>
+                      </a:r>
+                      <a:endParaRPr lang="en-IN" sz="900" kern="100" dirty="0">
+                        <a:effectLst/>
+                        <a:latin typeface="Calibri" panose="020F0502020204030204" pitchFamily="34" charset="0"/>
+                        <a:ea typeface="Calibri" panose="020F0502020204030204" pitchFamily="34" charset="0"/>
+                        <a:cs typeface="Times New Roman" panose="02020603050405020304" pitchFamily="18" charset="0"/>
+                      </a:endParaRPr>
+                    </a:p>
+                  </a:txBody>
+                  <a:tcPr marL="56848" marR="56848" marT="0" marB="0">
+                    <a:noFill/>
+                  </a:tcPr>
+                </a:tc>
+                <a:tc>
+                  <a:txBody>
+                    <a:bodyPr/>
+                    <a:lstStyle/>
+                    <a:p>
+                      <a:pPr>
+                        <a:lnSpc>
+                          <a:spcPct val="107000"/>
+                        </a:lnSpc>
+                        <a:spcAft>
+                          <a:spcPts val="800"/>
+                        </a:spcAft>
+                        <a:buNone/>
+                      </a:pPr>
+                      <a:r>
+                        <a:rPr lang="en-IN" sz="700" kern="100" dirty="0">
+                          <a:effectLst/>
+                        </a:rPr>
+                        <a:t> </a:t>
+                      </a:r>
+                      <a:endParaRPr lang="en-IN" sz="900" kern="100" dirty="0">
+                        <a:effectLst/>
+                        <a:latin typeface="Calibri" panose="020F0502020204030204" pitchFamily="34" charset="0"/>
+                        <a:ea typeface="Calibri" panose="020F0502020204030204" pitchFamily="34" charset="0"/>
+                        <a:cs typeface="Times New Roman" panose="02020603050405020304" pitchFamily="18" charset="0"/>
+                      </a:endParaRPr>
+                    </a:p>
+                  </a:txBody>
+                  <a:tcPr marL="56848" marR="56848" marT="0" marB="0">
+                    <a:noFill/>
+                  </a:tcPr>
+                </a:tc>
+                <a:tc>
+                  <a:txBody>
+                    <a:bodyPr/>
+                    <a:lstStyle/>
+                    <a:p>
+                      <a:pPr>
+                        <a:lnSpc>
+                          <a:spcPct val="107000"/>
+                        </a:lnSpc>
+                        <a:spcAft>
+                          <a:spcPts val="800"/>
+                        </a:spcAft>
+                        <a:buNone/>
+                      </a:pPr>
+                      <a:r>
+                        <a:rPr lang="en-IN" sz="700" kern="100">
+                          <a:effectLst/>
+                        </a:rPr>
+                        <a:t> </a:t>
+                      </a:r>
+                      <a:endParaRPr lang="en-IN" sz="900" kern="100">
+                        <a:effectLst/>
+                        <a:latin typeface="Calibri" panose="020F0502020204030204" pitchFamily="34" charset="0"/>
+                        <a:ea typeface="Calibri" panose="020F0502020204030204" pitchFamily="34" charset="0"/>
+                        <a:cs typeface="Times New Roman" panose="02020603050405020304" pitchFamily="18" charset="0"/>
+                      </a:endParaRPr>
+                    </a:p>
+                  </a:txBody>
+                  <a:tcPr marL="56848" marR="56848" marT="0" marB="0"/>
+                </a:tc>
+                <a:tc>
+                  <a:txBody>
+                    <a:bodyPr/>
+                    <a:lstStyle/>
+                    <a:p>
+                      <a:pPr>
+                        <a:lnSpc>
+                          <a:spcPct val="107000"/>
+                        </a:lnSpc>
+                        <a:spcAft>
+                          <a:spcPts val="800"/>
+                        </a:spcAft>
+                        <a:buNone/>
+                      </a:pPr>
+                      <a:r>
+                        <a:rPr lang="en-IN" sz="700" kern="100">
+                          <a:effectLst/>
+                        </a:rPr>
+                        <a:t> </a:t>
+                      </a:r>
+                      <a:endParaRPr lang="en-IN" sz="900" kern="100">
+                        <a:effectLst/>
+                        <a:latin typeface="Calibri" panose="020F0502020204030204" pitchFamily="34" charset="0"/>
+                        <a:ea typeface="Calibri" panose="020F0502020204030204" pitchFamily="34" charset="0"/>
+                        <a:cs typeface="Times New Roman" panose="02020603050405020304" pitchFamily="18" charset="0"/>
+                      </a:endParaRPr>
+                    </a:p>
+                  </a:txBody>
+                  <a:tcPr marL="56848" marR="56848" marT="0" marB="0"/>
+                </a:tc>
+                <a:tc>
+                  <a:txBody>
+                    <a:bodyPr/>
+                    <a:lstStyle/>
+                    <a:p>
+                      <a:pPr>
+                        <a:lnSpc>
+                          <a:spcPct val="107000"/>
+                        </a:lnSpc>
+                        <a:spcAft>
+                          <a:spcPts val="800"/>
+                        </a:spcAft>
+                        <a:buNone/>
+                      </a:pPr>
+                      <a:r>
+                        <a:rPr lang="en-IN" sz="700" kern="100">
+                          <a:effectLst/>
+                        </a:rPr>
+                        <a:t> </a:t>
+                      </a:r>
+                      <a:endParaRPr lang="en-IN" sz="900" kern="100">
+                        <a:effectLst/>
+                        <a:latin typeface="Calibri" panose="020F0502020204030204" pitchFamily="34" charset="0"/>
+                        <a:ea typeface="Calibri" panose="020F0502020204030204" pitchFamily="34" charset="0"/>
+                        <a:cs typeface="Times New Roman" panose="02020603050405020304" pitchFamily="18" charset="0"/>
+                      </a:endParaRPr>
+                    </a:p>
+                  </a:txBody>
+                  <a:tcPr marL="56848" marR="56848" marT="0" marB="0"/>
+                </a:tc>
+                <a:extLst>
+                  <a:ext uri="{0D108BD9-81ED-4DB2-BD59-A6C34878D82A}">
+                    <a16:rowId xmlns:a16="http://schemas.microsoft.com/office/drawing/2014/main" val="1560016466"/>
+                  </a:ext>
+                </a:extLst>
+              </a:tr>
+              <a:tr h="439272">
+                <a:tc>
+                  <a:txBody>
+                    <a:bodyPr/>
+                    <a:lstStyle/>
+                    <a:p>
+                      <a:pPr marL="0" lvl="0" indent="0" algn="l">
+                        <a:lnSpc>
+                          <a:spcPct val="107000"/>
+                        </a:lnSpc>
+                        <a:spcAft>
+                          <a:spcPts val="800"/>
+                        </a:spcAft>
+                        <a:buFont typeface="Arial" panose="020B0604020202020204" pitchFamily="34" charset="0"/>
+                        <a:buNone/>
+                      </a:pPr>
+                      <a:r>
+                        <a:rPr lang="en-IN" sz="1300" b="1" kern="100" dirty="0">
+                          <a:effectLst/>
+                          <a:latin typeface="Times New Roman" panose="02020603050405020304" pitchFamily="18" charset="0"/>
+                          <a:cs typeface="Times New Roman" panose="02020603050405020304" pitchFamily="18" charset="0"/>
+                        </a:rPr>
+                        <a:t>Structured Evidence Formatting</a:t>
+                      </a:r>
+                      <a:endParaRPr lang="en-IN" sz="1300" b="1" kern="100" dirty="0">
+                        <a:effectLst/>
+                        <a:latin typeface="Times New Roman" panose="02020603050405020304" pitchFamily="18" charset="0"/>
+                        <a:ea typeface="Calibri" panose="020F0502020204030204" pitchFamily="34" charset="0"/>
+                        <a:cs typeface="Times New Roman" panose="02020603050405020304" pitchFamily="18" charset="0"/>
+                      </a:endParaRPr>
+                    </a:p>
+                  </a:txBody>
+                  <a:tcPr marL="56848" marR="56848" marT="0" marB="0" anchor="ctr"/>
+                </a:tc>
+                <a:tc>
+                  <a:txBody>
+                    <a:bodyPr/>
+                    <a:lstStyle/>
+                    <a:p>
+                      <a:pPr>
+                        <a:lnSpc>
+                          <a:spcPct val="107000"/>
+                        </a:lnSpc>
+                        <a:spcAft>
+                          <a:spcPts val="800"/>
+                        </a:spcAft>
+                        <a:buNone/>
+                      </a:pPr>
+                      <a:r>
+                        <a:rPr lang="en-IN" sz="700" kern="100">
+                          <a:effectLst/>
+                        </a:rPr>
+                        <a:t> </a:t>
+                      </a:r>
+                      <a:endParaRPr lang="en-IN" sz="900" kern="100">
+                        <a:effectLst/>
+                        <a:latin typeface="Calibri" panose="020F0502020204030204" pitchFamily="34" charset="0"/>
+                        <a:ea typeface="Calibri" panose="020F0502020204030204" pitchFamily="34" charset="0"/>
+                        <a:cs typeface="Times New Roman" panose="02020603050405020304" pitchFamily="18" charset="0"/>
+                      </a:endParaRPr>
+                    </a:p>
+                  </a:txBody>
+                  <a:tcPr marL="56848" marR="56848" marT="0" marB="0"/>
+                </a:tc>
+                <a:tc>
+                  <a:txBody>
+                    <a:bodyPr/>
+                    <a:lstStyle/>
+                    <a:p>
+                      <a:pPr>
+                        <a:lnSpc>
+                          <a:spcPct val="107000"/>
+                        </a:lnSpc>
+                        <a:spcAft>
+                          <a:spcPts val="800"/>
+                        </a:spcAft>
+                        <a:buNone/>
+                      </a:pPr>
+                      <a:r>
+                        <a:rPr lang="en-IN" sz="700" kern="100">
+                          <a:effectLst/>
+                        </a:rPr>
+                        <a:t> </a:t>
+                      </a:r>
+                      <a:endParaRPr lang="en-IN" sz="900" kern="100">
+                        <a:effectLst/>
+                        <a:latin typeface="Calibri" panose="020F0502020204030204" pitchFamily="34" charset="0"/>
+                        <a:ea typeface="Calibri" panose="020F0502020204030204" pitchFamily="34" charset="0"/>
+                        <a:cs typeface="Times New Roman" panose="02020603050405020304" pitchFamily="18" charset="0"/>
+                      </a:endParaRPr>
+                    </a:p>
+                  </a:txBody>
+                  <a:tcPr marL="56848" marR="56848" marT="0" marB="0"/>
+                </a:tc>
+                <a:tc>
+                  <a:txBody>
+                    <a:bodyPr/>
+                    <a:lstStyle/>
+                    <a:p>
+                      <a:pPr>
+                        <a:lnSpc>
+                          <a:spcPct val="107000"/>
+                        </a:lnSpc>
+                        <a:spcAft>
+                          <a:spcPts val="800"/>
+                        </a:spcAft>
+                        <a:buNone/>
+                      </a:pPr>
+                      <a:r>
+                        <a:rPr lang="en-IN" sz="700" kern="100">
+                          <a:effectLst/>
+                        </a:rPr>
+                        <a:t> </a:t>
+                      </a:r>
+                      <a:endParaRPr lang="en-IN" sz="900" kern="100">
+                        <a:effectLst/>
+                        <a:latin typeface="Calibri" panose="020F0502020204030204" pitchFamily="34" charset="0"/>
+                        <a:ea typeface="Calibri" panose="020F0502020204030204" pitchFamily="34" charset="0"/>
+                        <a:cs typeface="Times New Roman" panose="02020603050405020304" pitchFamily="18" charset="0"/>
+                      </a:endParaRPr>
+                    </a:p>
+                  </a:txBody>
+                  <a:tcPr marL="56848" marR="56848" marT="0" marB="0"/>
+                </a:tc>
+                <a:tc>
+                  <a:txBody>
+                    <a:bodyPr/>
+                    <a:lstStyle/>
+                    <a:p>
+                      <a:pPr>
+                        <a:lnSpc>
+                          <a:spcPct val="107000"/>
+                        </a:lnSpc>
+                        <a:spcAft>
+                          <a:spcPts val="800"/>
+                        </a:spcAft>
+                        <a:buNone/>
+                      </a:pPr>
+                      <a:r>
+                        <a:rPr lang="en-IN" sz="700" kern="100">
+                          <a:effectLst/>
+                        </a:rPr>
+                        <a:t> </a:t>
+                      </a:r>
+                      <a:endParaRPr lang="en-IN" sz="900" kern="100">
+                        <a:effectLst/>
+                        <a:latin typeface="Calibri" panose="020F0502020204030204" pitchFamily="34" charset="0"/>
+                        <a:ea typeface="Calibri" panose="020F0502020204030204" pitchFamily="34" charset="0"/>
+                        <a:cs typeface="Times New Roman" panose="02020603050405020304" pitchFamily="18" charset="0"/>
+                      </a:endParaRPr>
+                    </a:p>
+                  </a:txBody>
+                  <a:tcPr marL="56848" marR="56848" marT="0" marB="0"/>
+                </a:tc>
+                <a:tc>
+                  <a:txBody>
+                    <a:bodyPr/>
+                    <a:lstStyle/>
+                    <a:p>
+                      <a:pPr>
+                        <a:lnSpc>
+                          <a:spcPct val="107000"/>
+                        </a:lnSpc>
+                        <a:spcAft>
+                          <a:spcPts val="800"/>
+                        </a:spcAft>
+                        <a:buNone/>
+                      </a:pPr>
+                      <a:r>
+                        <a:rPr lang="en-IN" sz="700" kern="100" dirty="0">
+                          <a:effectLst/>
+                        </a:rPr>
+                        <a:t> </a:t>
+                      </a:r>
+                      <a:endParaRPr lang="en-IN" sz="900" kern="100" dirty="0">
+                        <a:effectLst/>
+                        <a:latin typeface="Calibri" panose="020F0502020204030204" pitchFamily="34" charset="0"/>
+                        <a:ea typeface="Calibri" panose="020F0502020204030204" pitchFamily="34" charset="0"/>
+                        <a:cs typeface="Times New Roman" panose="02020603050405020304" pitchFamily="18" charset="0"/>
+                      </a:endParaRPr>
+                    </a:p>
+                  </a:txBody>
+                  <a:tcPr marL="56848" marR="56848" marT="0" marB="0">
+                    <a:solidFill>
+                      <a:schemeClr val="accent6">
+                        <a:lumMod val="75000"/>
+                      </a:schemeClr>
+                    </a:solidFill>
+                  </a:tcPr>
+                </a:tc>
+                <a:tc>
+                  <a:txBody>
+                    <a:bodyPr/>
+                    <a:lstStyle/>
+                    <a:p>
+                      <a:pPr>
+                        <a:lnSpc>
+                          <a:spcPct val="107000"/>
+                        </a:lnSpc>
+                        <a:spcAft>
+                          <a:spcPts val="800"/>
+                        </a:spcAft>
+                        <a:buNone/>
+                      </a:pPr>
+                      <a:r>
+                        <a:rPr lang="en-IN" sz="700" kern="100" dirty="0">
+                          <a:effectLst/>
+                        </a:rPr>
+                        <a:t> </a:t>
+                      </a:r>
+                      <a:endParaRPr lang="en-IN" sz="900" kern="100" dirty="0">
+                        <a:effectLst/>
+                        <a:latin typeface="Calibri" panose="020F0502020204030204" pitchFamily="34" charset="0"/>
+                        <a:ea typeface="Calibri" panose="020F0502020204030204" pitchFamily="34" charset="0"/>
+                        <a:cs typeface="Times New Roman" panose="02020603050405020304" pitchFamily="18" charset="0"/>
+                      </a:endParaRPr>
+                    </a:p>
+                  </a:txBody>
+                  <a:tcPr marL="56848" marR="56848" marT="0" marB="0">
+                    <a:solidFill>
+                      <a:schemeClr val="accent6">
+                        <a:lumMod val="75000"/>
+                      </a:schemeClr>
+                    </a:solidFill>
+                  </a:tcPr>
+                </a:tc>
+                <a:tc>
+                  <a:txBody>
+                    <a:bodyPr/>
+                    <a:lstStyle/>
+                    <a:p>
+                      <a:pPr>
+                        <a:lnSpc>
+                          <a:spcPct val="107000"/>
+                        </a:lnSpc>
+                        <a:spcAft>
+                          <a:spcPts val="800"/>
+                        </a:spcAft>
+                        <a:buNone/>
+                      </a:pPr>
+                      <a:r>
+                        <a:rPr lang="en-IN" sz="700" kern="100">
+                          <a:effectLst/>
+                        </a:rPr>
+                        <a:t> </a:t>
+                      </a:r>
+                      <a:endParaRPr lang="en-IN" sz="900" kern="100">
+                        <a:effectLst/>
+                        <a:latin typeface="Calibri" panose="020F0502020204030204" pitchFamily="34" charset="0"/>
+                        <a:ea typeface="Calibri" panose="020F0502020204030204" pitchFamily="34" charset="0"/>
+                        <a:cs typeface="Times New Roman" panose="02020603050405020304" pitchFamily="18" charset="0"/>
+                      </a:endParaRPr>
+                    </a:p>
+                  </a:txBody>
+                  <a:tcPr marL="56848" marR="56848" marT="0" marB="0"/>
+                </a:tc>
+                <a:tc>
+                  <a:txBody>
+                    <a:bodyPr/>
+                    <a:lstStyle/>
+                    <a:p>
+                      <a:pPr>
+                        <a:lnSpc>
+                          <a:spcPct val="107000"/>
+                        </a:lnSpc>
+                        <a:spcAft>
+                          <a:spcPts val="800"/>
+                        </a:spcAft>
+                        <a:buNone/>
+                      </a:pPr>
+                      <a:r>
+                        <a:rPr lang="en-IN" sz="700" kern="100">
+                          <a:effectLst/>
+                        </a:rPr>
+                        <a:t> </a:t>
+                      </a:r>
+                      <a:endParaRPr lang="en-IN" sz="900" kern="100">
+                        <a:effectLst/>
+                        <a:latin typeface="Calibri" panose="020F0502020204030204" pitchFamily="34" charset="0"/>
+                        <a:ea typeface="Calibri" panose="020F0502020204030204" pitchFamily="34" charset="0"/>
+                        <a:cs typeface="Times New Roman" panose="02020603050405020304" pitchFamily="18" charset="0"/>
+                      </a:endParaRPr>
+                    </a:p>
+                  </a:txBody>
+                  <a:tcPr marL="56848" marR="56848" marT="0" marB="0"/>
+                </a:tc>
+                <a:tc>
+                  <a:txBody>
+                    <a:bodyPr/>
+                    <a:lstStyle/>
+                    <a:p>
+                      <a:pPr>
+                        <a:lnSpc>
+                          <a:spcPct val="107000"/>
+                        </a:lnSpc>
+                        <a:spcAft>
+                          <a:spcPts val="800"/>
+                        </a:spcAft>
+                        <a:buNone/>
+                      </a:pPr>
+                      <a:r>
+                        <a:rPr lang="en-IN" sz="700" kern="100">
+                          <a:effectLst/>
+                        </a:rPr>
+                        <a:t> </a:t>
+                      </a:r>
+                      <a:endParaRPr lang="en-IN" sz="900" kern="100">
+                        <a:effectLst/>
+                        <a:latin typeface="Calibri" panose="020F0502020204030204" pitchFamily="34" charset="0"/>
+                        <a:ea typeface="Calibri" panose="020F0502020204030204" pitchFamily="34" charset="0"/>
+                        <a:cs typeface="Times New Roman" panose="02020603050405020304" pitchFamily="18" charset="0"/>
+                      </a:endParaRPr>
+                    </a:p>
+                  </a:txBody>
+                  <a:tcPr marL="56848" marR="56848" marT="0" marB="0"/>
+                </a:tc>
+                <a:extLst>
+                  <a:ext uri="{0D108BD9-81ED-4DB2-BD59-A6C34878D82A}">
+                    <a16:rowId xmlns:a16="http://schemas.microsoft.com/office/drawing/2014/main" val="207007599"/>
+                  </a:ext>
+                </a:extLst>
+              </a:tr>
+              <a:tr h="439272">
+                <a:tc>
+                  <a:txBody>
+                    <a:bodyPr/>
+                    <a:lstStyle/>
+                    <a:p>
+                      <a:pPr marL="0" lvl="0" indent="0" algn="l">
+                        <a:lnSpc>
+                          <a:spcPct val="107000"/>
+                        </a:lnSpc>
+                        <a:spcAft>
+                          <a:spcPts val="800"/>
+                        </a:spcAft>
+                        <a:buFont typeface="Arial" panose="020B0604020202020204" pitchFamily="34" charset="0"/>
+                        <a:buNone/>
+                      </a:pPr>
+                      <a:r>
+                        <a:rPr lang="en-IN" sz="1300" b="1" kern="100" dirty="0">
+                          <a:effectLst/>
+                          <a:latin typeface="Times New Roman" panose="02020603050405020304" pitchFamily="18" charset="0"/>
+                          <a:cs typeface="Times New Roman" panose="02020603050405020304" pitchFamily="18" charset="0"/>
+                        </a:rPr>
+                        <a:t>Symbolic Financial Computation</a:t>
+                      </a:r>
+                      <a:endParaRPr lang="en-IN" sz="1300" b="1" kern="100" dirty="0">
+                        <a:effectLst/>
+                        <a:latin typeface="Times New Roman" panose="02020603050405020304" pitchFamily="18" charset="0"/>
+                        <a:ea typeface="Calibri" panose="020F0502020204030204" pitchFamily="34" charset="0"/>
+                        <a:cs typeface="Times New Roman" panose="02020603050405020304" pitchFamily="18" charset="0"/>
+                      </a:endParaRPr>
+                    </a:p>
+                  </a:txBody>
+                  <a:tcPr marL="56848" marR="56848" marT="0" marB="0" anchor="ctr"/>
+                </a:tc>
+                <a:tc>
+                  <a:txBody>
+                    <a:bodyPr/>
+                    <a:lstStyle/>
+                    <a:p>
+                      <a:pPr>
+                        <a:lnSpc>
+                          <a:spcPct val="107000"/>
+                        </a:lnSpc>
+                        <a:spcAft>
+                          <a:spcPts val="800"/>
+                        </a:spcAft>
+                        <a:buNone/>
+                      </a:pPr>
+                      <a:r>
+                        <a:rPr lang="en-IN" sz="700" kern="100" dirty="0">
+                          <a:effectLst/>
+                        </a:rPr>
+                        <a:t> </a:t>
+                      </a:r>
+                      <a:endParaRPr lang="en-IN" sz="900" kern="100" dirty="0">
+                        <a:effectLst/>
+                        <a:latin typeface="Calibri" panose="020F0502020204030204" pitchFamily="34" charset="0"/>
+                        <a:ea typeface="Calibri" panose="020F0502020204030204" pitchFamily="34" charset="0"/>
+                        <a:cs typeface="Times New Roman" panose="02020603050405020304" pitchFamily="18" charset="0"/>
+                      </a:endParaRPr>
+                    </a:p>
+                  </a:txBody>
+                  <a:tcPr marL="56848" marR="56848" marT="0" marB="0"/>
+                </a:tc>
+                <a:tc>
+                  <a:txBody>
+                    <a:bodyPr/>
+                    <a:lstStyle/>
+                    <a:p>
+                      <a:pPr>
+                        <a:lnSpc>
+                          <a:spcPct val="107000"/>
+                        </a:lnSpc>
+                        <a:spcAft>
+                          <a:spcPts val="800"/>
+                        </a:spcAft>
+                        <a:buNone/>
+                      </a:pPr>
+                      <a:r>
+                        <a:rPr lang="en-IN" sz="700" kern="100">
+                          <a:effectLst/>
+                        </a:rPr>
+                        <a:t> </a:t>
+                      </a:r>
+                      <a:endParaRPr lang="en-IN" sz="900" kern="100">
+                        <a:effectLst/>
+                        <a:latin typeface="Calibri" panose="020F0502020204030204" pitchFamily="34" charset="0"/>
+                        <a:ea typeface="Calibri" panose="020F0502020204030204" pitchFamily="34" charset="0"/>
+                        <a:cs typeface="Times New Roman" panose="02020603050405020304" pitchFamily="18" charset="0"/>
+                      </a:endParaRPr>
+                    </a:p>
+                  </a:txBody>
+                  <a:tcPr marL="56848" marR="56848" marT="0" marB="0"/>
+                </a:tc>
+                <a:tc>
+                  <a:txBody>
+                    <a:bodyPr/>
+                    <a:lstStyle/>
+                    <a:p>
+                      <a:pPr>
+                        <a:lnSpc>
+                          <a:spcPct val="107000"/>
+                        </a:lnSpc>
+                        <a:spcAft>
+                          <a:spcPts val="800"/>
+                        </a:spcAft>
+                        <a:buNone/>
+                      </a:pPr>
+                      <a:r>
+                        <a:rPr lang="en-IN" sz="700" kern="100">
+                          <a:effectLst/>
+                        </a:rPr>
+                        <a:t> </a:t>
+                      </a:r>
+                      <a:endParaRPr lang="en-IN" sz="900" kern="100">
+                        <a:effectLst/>
+                        <a:latin typeface="Calibri" panose="020F0502020204030204" pitchFamily="34" charset="0"/>
+                        <a:ea typeface="Calibri" panose="020F0502020204030204" pitchFamily="34" charset="0"/>
+                        <a:cs typeface="Times New Roman" panose="02020603050405020304" pitchFamily="18" charset="0"/>
+                      </a:endParaRPr>
+                    </a:p>
+                  </a:txBody>
+                  <a:tcPr marL="56848" marR="56848" marT="0" marB="0"/>
+                </a:tc>
+                <a:tc>
+                  <a:txBody>
+                    <a:bodyPr/>
+                    <a:lstStyle/>
+                    <a:p>
+                      <a:pPr>
+                        <a:lnSpc>
+                          <a:spcPct val="107000"/>
+                        </a:lnSpc>
+                        <a:spcAft>
+                          <a:spcPts val="800"/>
+                        </a:spcAft>
+                        <a:buNone/>
+                      </a:pPr>
+                      <a:r>
+                        <a:rPr lang="en-IN" sz="700" kern="100">
+                          <a:effectLst/>
+                        </a:rPr>
+                        <a:t> </a:t>
+                      </a:r>
+                      <a:endParaRPr lang="en-IN" sz="900" kern="100">
+                        <a:effectLst/>
+                        <a:latin typeface="Calibri" panose="020F0502020204030204" pitchFamily="34" charset="0"/>
+                        <a:ea typeface="Calibri" panose="020F0502020204030204" pitchFamily="34" charset="0"/>
+                        <a:cs typeface="Times New Roman" panose="02020603050405020304" pitchFamily="18" charset="0"/>
+                      </a:endParaRPr>
+                    </a:p>
+                  </a:txBody>
+                  <a:tcPr marL="56848" marR="56848" marT="0" marB="0"/>
+                </a:tc>
+                <a:tc>
+                  <a:txBody>
+                    <a:bodyPr/>
+                    <a:lstStyle/>
+                    <a:p>
+                      <a:pPr>
+                        <a:lnSpc>
+                          <a:spcPct val="107000"/>
+                        </a:lnSpc>
+                        <a:spcAft>
+                          <a:spcPts val="800"/>
+                        </a:spcAft>
+                        <a:buNone/>
+                      </a:pPr>
+                      <a:r>
+                        <a:rPr lang="en-IN" sz="700" kern="100">
+                          <a:effectLst/>
+                        </a:rPr>
+                        <a:t> </a:t>
+                      </a:r>
+                      <a:endParaRPr lang="en-IN" sz="900" kern="100">
+                        <a:effectLst/>
+                        <a:latin typeface="Calibri" panose="020F0502020204030204" pitchFamily="34" charset="0"/>
+                        <a:ea typeface="Calibri" panose="020F0502020204030204" pitchFamily="34" charset="0"/>
+                        <a:cs typeface="Times New Roman" panose="02020603050405020304" pitchFamily="18" charset="0"/>
+                      </a:endParaRPr>
+                    </a:p>
+                  </a:txBody>
+                  <a:tcPr marL="56848" marR="56848" marT="0" marB="0"/>
+                </a:tc>
+                <a:tc>
+                  <a:txBody>
+                    <a:bodyPr/>
+                    <a:lstStyle/>
+                    <a:p>
+                      <a:pPr>
+                        <a:lnSpc>
+                          <a:spcPct val="107000"/>
+                        </a:lnSpc>
+                        <a:spcAft>
+                          <a:spcPts val="800"/>
+                        </a:spcAft>
+                        <a:buNone/>
+                      </a:pPr>
+                      <a:r>
+                        <a:rPr lang="en-IN" sz="700" kern="100" dirty="0">
+                          <a:effectLst/>
+                        </a:rPr>
+                        <a:t> </a:t>
+                      </a:r>
+                      <a:endParaRPr lang="en-IN" sz="900" kern="100" dirty="0">
+                        <a:effectLst/>
+                        <a:latin typeface="Calibri" panose="020F0502020204030204" pitchFamily="34" charset="0"/>
+                        <a:ea typeface="Calibri" panose="020F0502020204030204" pitchFamily="34" charset="0"/>
+                        <a:cs typeface="Times New Roman" panose="02020603050405020304" pitchFamily="18" charset="0"/>
+                      </a:endParaRPr>
+                    </a:p>
+                  </a:txBody>
+                  <a:tcPr marL="56848" marR="56848" marT="0" marB="0">
+                    <a:solidFill>
+                      <a:schemeClr val="accent6">
+                        <a:lumMod val="75000"/>
+                      </a:schemeClr>
+                    </a:solidFill>
+                  </a:tcPr>
+                </a:tc>
+                <a:tc>
+                  <a:txBody>
+                    <a:bodyPr/>
+                    <a:lstStyle/>
+                    <a:p>
+                      <a:pPr>
+                        <a:lnSpc>
+                          <a:spcPct val="107000"/>
+                        </a:lnSpc>
+                        <a:spcAft>
+                          <a:spcPts val="800"/>
+                        </a:spcAft>
+                        <a:buNone/>
+                      </a:pPr>
+                      <a:r>
+                        <a:rPr lang="en-IN" sz="700" kern="100" dirty="0">
+                          <a:effectLst/>
+                        </a:rPr>
+                        <a:t> </a:t>
+                      </a:r>
+                      <a:endParaRPr lang="en-IN" sz="900" kern="100" dirty="0">
+                        <a:effectLst/>
+                        <a:latin typeface="Calibri" panose="020F0502020204030204" pitchFamily="34" charset="0"/>
+                        <a:ea typeface="Calibri" panose="020F0502020204030204" pitchFamily="34" charset="0"/>
+                        <a:cs typeface="Times New Roman" panose="02020603050405020304" pitchFamily="18" charset="0"/>
+                      </a:endParaRPr>
+                    </a:p>
+                  </a:txBody>
+                  <a:tcPr marL="56848" marR="56848" marT="0" marB="0"/>
+                </a:tc>
+                <a:tc>
+                  <a:txBody>
+                    <a:bodyPr/>
+                    <a:lstStyle/>
+                    <a:p>
+                      <a:pPr>
+                        <a:lnSpc>
+                          <a:spcPct val="107000"/>
+                        </a:lnSpc>
+                        <a:spcAft>
+                          <a:spcPts val="800"/>
+                        </a:spcAft>
+                        <a:buNone/>
+                      </a:pPr>
+                      <a:r>
+                        <a:rPr lang="en-IN" sz="700" kern="100">
+                          <a:effectLst/>
+                        </a:rPr>
+                        <a:t> </a:t>
+                      </a:r>
+                      <a:endParaRPr lang="en-IN" sz="900" kern="100">
+                        <a:effectLst/>
+                        <a:latin typeface="Calibri" panose="020F0502020204030204" pitchFamily="34" charset="0"/>
+                        <a:ea typeface="Calibri" panose="020F0502020204030204" pitchFamily="34" charset="0"/>
+                        <a:cs typeface="Times New Roman" panose="02020603050405020304" pitchFamily="18" charset="0"/>
+                      </a:endParaRPr>
+                    </a:p>
+                  </a:txBody>
+                  <a:tcPr marL="56848" marR="56848" marT="0" marB="0"/>
+                </a:tc>
+                <a:tc>
+                  <a:txBody>
+                    <a:bodyPr/>
+                    <a:lstStyle/>
+                    <a:p>
+                      <a:pPr>
+                        <a:lnSpc>
+                          <a:spcPct val="107000"/>
+                        </a:lnSpc>
+                        <a:spcAft>
+                          <a:spcPts val="800"/>
+                        </a:spcAft>
+                        <a:buNone/>
+                      </a:pPr>
+                      <a:r>
+                        <a:rPr lang="en-IN" sz="700" kern="100" dirty="0">
+                          <a:effectLst/>
+                        </a:rPr>
+                        <a:t> </a:t>
+                      </a:r>
+                      <a:endParaRPr lang="en-IN" sz="900" kern="100" dirty="0">
+                        <a:effectLst/>
+                        <a:latin typeface="Calibri" panose="020F0502020204030204" pitchFamily="34" charset="0"/>
+                        <a:ea typeface="Calibri" panose="020F0502020204030204" pitchFamily="34" charset="0"/>
+                        <a:cs typeface="Times New Roman" panose="02020603050405020304" pitchFamily="18" charset="0"/>
+                      </a:endParaRPr>
+                    </a:p>
+                  </a:txBody>
+                  <a:tcPr marL="56848" marR="56848" marT="0" marB="0"/>
+                </a:tc>
+                <a:extLst>
+                  <a:ext uri="{0D108BD9-81ED-4DB2-BD59-A6C34878D82A}">
+                    <a16:rowId xmlns:a16="http://schemas.microsoft.com/office/drawing/2014/main" val="1129566659"/>
+                  </a:ext>
+                </a:extLst>
+              </a:tr>
+              <a:tr h="439272">
+                <a:tc>
+                  <a:txBody>
+                    <a:bodyPr/>
+                    <a:lstStyle/>
+                    <a:p>
+                      <a:pPr marL="0" lvl="0" indent="0" algn="l">
+                        <a:lnSpc>
+                          <a:spcPct val="107000"/>
+                        </a:lnSpc>
+                        <a:spcAft>
+                          <a:spcPts val="800"/>
+                        </a:spcAft>
+                        <a:buFont typeface="Arial" panose="020B0604020202020204" pitchFamily="34" charset="0"/>
+                        <a:buNone/>
+                      </a:pPr>
+                      <a:r>
+                        <a:rPr lang="en-IN" sz="1300" b="1" kern="100" dirty="0">
+                          <a:effectLst/>
+                          <a:latin typeface="Times New Roman" panose="02020603050405020304" pitchFamily="18" charset="0"/>
+                          <a:cs typeface="Times New Roman" panose="02020603050405020304" pitchFamily="18" charset="0"/>
+                        </a:rPr>
+                        <a:t>Claim Level provenance Scoring</a:t>
+                      </a:r>
+                      <a:endParaRPr lang="en-IN" sz="1300" b="1" kern="100" dirty="0">
+                        <a:effectLst/>
+                        <a:latin typeface="Times New Roman" panose="02020603050405020304" pitchFamily="18" charset="0"/>
+                        <a:ea typeface="Calibri" panose="020F0502020204030204" pitchFamily="34" charset="0"/>
+                        <a:cs typeface="Times New Roman" panose="02020603050405020304" pitchFamily="18" charset="0"/>
+                      </a:endParaRPr>
+                    </a:p>
+                  </a:txBody>
+                  <a:tcPr marL="56848" marR="56848" marT="0" marB="0" anchor="ctr"/>
+                </a:tc>
+                <a:tc>
+                  <a:txBody>
+                    <a:bodyPr/>
+                    <a:lstStyle/>
+                    <a:p>
+                      <a:pPr>
+                        <a:lnSpc>
+                          <a:spcPct val="107000"/>
+                        </a:lnSpc>
+                        <a:spcAft>
+                          <a:spcPts val="800"/>
+                        </a:spcAft>
+                        <a:buNone/>
+                      </a:pPr>
+                      <a:r>
+                        <a:rPr lang="en-IN" sz="700" kern="100">
+                          <a:effectLst/>
+                        </a:rPr>
+                        <a:t> </a:t>
+                      </a:r>
+                      <a:endParaRPr lang="en-IN" sz="900" kern="100">
+                        <a:effectLst/>
+                        <a:latin typeface="Calibri" panose="020F0502020204030204" pitchFamily="34" charset="0"/>
+                        <a:ea typeface="Calibri" panose="020F0502020204030204" pitchFamily="34" charset="0"/>
+                        <a:cs typeface="Times New Roman" panose="02020603050405020304" pitchFamily="18" charset="0"/>
+                      </a:endParaRPr>
+                    </a:p>
+                  </a:txBody>
+                  <a:tcPr marL="56848" marR="56848" marT="0" marB="0"/>
+                </a:tc>
+                <a:tc>
+                  <a:txBody>
+                    <a:bodyPr/>
+                    <a:lstStyle/>
+                    <a:p>
+                      <a:pPr>
+                        <a:lnSpc>
+                          <a:spcPct val="107000"/>
+                        </a:lnSpc>
+                        <a:spcAft>
+                          <a:spcPts val="800"/>
+                        </a:spcAft>
+                        <a:buNone/>
+                      </a:pPr>
+                      <a:r>
+                        <a:rPr lang="en-IN" sz="700" kern="100">
+                          <a:effectLst/>
+                        </a:rPr>
+                        <a:t> </a:t>
+                      </a:r>
+                      <a:endParaRPr lang="en-IN" sz="900" kern="100">
+                        <a:effectLst/>
+                        <a:latin typeface="Calibri" panose="020F0502020204030204" pitchFamily="34" charset="0"/>
+                        <a:ea typeface="Calibri" panose="020F0502020204030204" pitchFamily="34" charset="0"/>
+                        <a:cs typeface="Times New Roman" panose="02020603050405020304" pitchFamily="18" charset="0"/>
+                      </a:endParaRPr>
+                    </a:p>
+                  </a:txBody>
+                  <a:tcPr marL="56848" marR="56848" marT="0" marB="0"/>
+                </a:tc>
+                <a:tc>
+                  <a:txBody>
+                    <a:bodyPr/>
+                    <a:lstStyle/>
+                    <a:p>
+                      <a:pPr>
+                        <a:lnSpc>
+                          <a:spcPct val="107000"/>
+                        </a:lnSpc>
+                        <a:spcAft>
+                          <a:spcPts val="800"/>
+                        </a:spcAft>
+                        <a:buNone/>
+                      </a:pPr>
+                      <a:r>
+                        <a:rPr lang="en-IN" sz="700" kern="100">
+                          <a:effectLst/>
+                        </a:rPr>
+                        <a:t> </a:t>
+                      </a:r>
+                      <a:endParaRPr lang="en-IN" sz="900" kern="100">
+                        <a:effectLst/>
+                        <a:latin typeface="Calibri" panose="020F0502020204030204" pitchFamily="34" charset="0"/>
+                        <a:ea typeface="Calibri" panose="020F0502020204030204" pitchFamily="34" charset="0"/>
+                        <a:cs typeface="Times New Roman" panose="02020603050405020304" pitchFamily="18" charset="0"/>
+                      </a:endParaRPr>
+                    </a:p>
+                  </a:txBody>
+                  <a:tcPr marL="56848" marR="56848" marT="0" marB="0"/>
+                </a:tc>
+                <a:tc>
+                  <a:txBody>
+                    <a:bodyPr/>
+                    <a:lstStyle/>
+                    <a:p>
+                      <a:pPr>
+                        <a:lnSpc>
+                          <a:spcPct val="107000"/>
+                        </a:lnSpc>
+                        <a:spcAft>
+                          <a:spcPts val="800"/>
+                        </a:spcAft>
+                        <a:buNone/>
+                      </a:pPr>
+                      <a:r>
+                        <a:rPr lang="en-IN" sz="700" kern="100">
+                          <a:effectLst/>
+                        </a:rPr>
+                        <a:t> </a:t>
+                      </a:r>
+                      <a:endParaRPr lang="en-IN" sz="900" kern="100">
+                        <a:effectLst/>
+                        <a:latin typeface="Calibri" panose="020F0502020204030204" pitchFamily="34" charset="0"/>
+                        <a:ea typeface="Calibri" panose="020F0502020204030204" pitchFamily="34" charset="0"/>
+                        <a:cs typeface="Times New Roman" panose="02020603050405020304" pitchFamily="18" charset="0"/>
+                      </a:endParaRPr>
+                    </a:p>
+                  </a:txBody>
+                  <a:tcPr marL="56848" marR="56848" marT="0" marB="0"/>
+                </a:tc>
+                <a:tc>
+                  <a:txBody>
+                    <a:bodyPr/>
+                    <a:lstStyle/>
+                    <a:p>
+                      <a:pPr>
+                        <a:lnSpc>
+                          <a:spcPct val="107000"/>
+                        </a:lnSpc>
+                        <a:spcAft>
+                          <a:spcPts val="800"/>
+                        </a:spcAft>
+                        <a:buNone/>
+                      </a:pPr>
+                      <a:r>
+                        <a:rPr lang="en-IN" sz="700" kern="100">
+                          <a:effectLst/>
+                        </a:rPr>
+                        <a:t> </a:t>
+                      </a:r>
+                      <a:endParaRPr lang="en-IN" sz="900" kern="100">
+                        <a:effectLst/>
+                        <a:latin typeface="Calibri" panose="020F0502020204030204" pitchFamily="34" charset="0"/>
+                        <a:ea typeface="Calibri" panose="020F0502020204030204" pitchFamily="34" charset="0"/>
+                        <a:cs typeface="Times New Roman" panose="02020603050405020304" pitchFamily="18" charset="0"/>
+                      </a:endParaRPr>
+                    </a:p>
+                  </a:txBody>
+                  <a:tcPr marL="56848" marR="56848" marT="0" marB="0"/>
+                </a:tc>
+                <a:tc>
+                  <a:txBody>
+                    <a:bodyPr/>
+                    <a:lstStyle/>
+                    <a:p>
+                      <a:pPr>
+                        <a:lnSpc>
+                          <a:spcPct val="107000"/>
+                        </a:lnSpc>
+                        <a:spcAft>
+                          <a:spcPts val="800"/>
+                        </a:spcAft>
+                        <a:buNone/>
+                      </a:pPr>
+                      <a:r>
+                        <a:rPr lang="en-IN" sz="700" kern="100" dirty="0">
+                          <a:effectLst/>
+                        </a:rPr>
+                        <a:t> </a:t>
+                      </a:r>
+                      <a:endParaRPr lang="en-IN" sz="900" kern="100" dirty="0">
+                        <a:effectLst/>
+                        <a:latin typeface="Calibri" panose="020F0502020204030204" pitchFamily="34" charset="0"/>
+                        <a:ea typeface="Calibri" panose="020F0502020204030204" pitchFamily="34" charset="0"/>
+                        <a:cs typeface="Times New Roman" panose="02020603050405020304" pitchFamily="18" charset="0"/>
+                      </a:endParaRPr>
+                    </a:p>
+                  </a:txBody>
+                  <a:tcPr marL="56848" marR="56848" marT="0" marB="0">
+                    <a:solidFill>
+                      <a:schemeClr val="accent6">
+                        <a:lumMod val="75000"/>
+                      </a:schemeClr>
+                    </a:solidFill>
+                  </a:tcPr>
+                </a:tc>
+                <a:tc>
+                  <a:txBody>
+                    <a:bodyPr/>
+                    <a:lstStyle/>
+                    <a:p>
+                      <a:pPr>
+                        <a:lnSpc>
+                          <a:spcPct val="107000"/>
+                        </a:lnSpc>
+                        <a:spcAft>
+                          <a:spcPts val="800"/>
+                        </a:spcAft>
+                        <a:buNone/>
+                      </a:pPr>
+                      <a:r>
+                        <a:rPr lang="en-IN" sz="700" kern="100" dirty="0">
+                          <a:effectLst/>
+                        </a:rPr>
+                        <a:t> </a:t>
+                      </a:r>
+                      <a:endParaRPr lang="en-IN" sz="900" kern="100" dirty="0">
+                        <a:effectLst/>
+                        <a:latin typeface="Calibri" panose="020F0502020204030204" pitchFamily="34" charset="0"/>
+                        <a:ea typeface="Calibri" panose="020F0502020204030204" pitchFamily="34" charset="0"/>
+                        <a:cs typeface="Times New Roman" panose="02020603050405020304" pitchFamily="18" charset="0"/>
+                      </a:endParaRPr>
+                    </a:p>
+                  </a:txBody>
+                  <a:tcPr marL="56848" marR="56848" marT="0" marB="0">
+                    <a:solidFill>
+                      <a:schemeClr val="accent6">
+                        <a:lumMod val="75000"/>
+                      </a:schemeClr>
+                    </a:solidFill>
+                  </a:tcPr>
+                </a:tc>
+                <a:tc>
+                  <a:txBody>
+                    <a:bodyPr/>
+                    <a:lstStyle/>
+                    <a:p>
+                      <a:pPr>
+                        <a:lnSpc>
+                          <a:spcPct val="107000"/>
+                        </a:lnSpc>
+                        <a:spcAft>
+                          <a:spcPts val="800"/>
+                        </a:spcAft>
+                        <a:buNone/>
+                      </a:pPr>
+                      <a:r>
+                        <a:rPr lang="en-IN" sz="700" kern="100">
+                          <a:effectLst/>
+                        </a:rPr>
+                        <a:t> </a:t>
+                      </a:r>
+                      <a:endParaRPr lang="en-IN" sz="900" kern="100">
+                        <a:effectLst/>
+                        <a:latin typeface="Calibri" panose="020F0502020204030204" pitchFamily="34" charset="0"/>
+                        <a:ea typeface="Calibri" panose="020F0502020204030204" pitchFamily="34" charset="0"/>
+                        <a:cs typeface="Times New Roman" panose="02020603050405020304" pitchFamily="18" charset="0"/>
+                      </a:endParaRPr>
+                    </a:p>
+                  </a:txBody>
+                  <a:tcPr marL="56848" marR="56848" marT="0" marB="0"/>
+                </a:tc>
+                <a:tc>
+                  <a:txBody>
+                    <a:bodyPr/>
+                    <a:lstStyle/>
+                    <a:p>
+                      <a:pPr>
+                        <a:lnSpc>
+                          <a:spcPct val="107000"/>
+                        </a:lnSpc>
+                        <a:spcAft>
+                          <a:spcPts val="800"/>
+                        </a:spcAft>
+                        <a:buNone/>
+                      </a:pPr>
+                      <a:r>
+                        <a:rPr lang="en-IN" sz="700" kern="100">
+                          <a:effectLst/>
+                        </a:rPr>
+                        <a:t> </a:t>
+                      </a:r>
+                      <a:endParaRPr lang="en-IN" sz="900" kern="100">
+                        <a:effectLst/>
+                        <a:latin typeface="Calibri" panose="020F0502020204030204" pitchFamily="34" charset="0"/>
+                        <a:ea typeface="Calibri" panose="020F0502020204030204" pitchFamily="34" charset="0"/>
+                        <a:cs typeface="Times New Roman" panose="02020603050405020304" pitchFamily="18" charset="0"/>
+                      </a:endParaRPr>
+                    </a:p>
+                  </a:txBody>
+                  <a:tcPr marL="56848" marR="56848" marT="0" marB="0"/>
+                </a:tc>
+                <a:extLst>
+                  <a:ext uri="{0D108BD9-81ED-4DB2-BD59-A6C34878D82A}">
+                    <a16:rowId xmlns:a16="http://schemas.microsoft.com/office/drawing/2014/main" val="2367130296"/>
+                  </a:ext>
+                </a:extLst>
+              </a:tr>
+              <a:tr h="439272">
+                <a:tc>
+                  <a:txBody>
+                    <a:bodyPr/>
+                    <a:lstStyle/>
+                    <a:p>
+                      <a:pPr marL="0" lvl="0" indent="0" algn="l">
+                        <a:lnSpc>
+                          <a:spcPct val="107000"/>
+                        </a:lnSpc>
+                        <a:spcAft>
+                          <a:spcPts val="800"/>
+                        </a:spcAft>
+                        <a:buFont typeface="Arial" panose="020B0604020202020204" pitchFamily="34" charset="0"/>
+                        <a:buNone/>
+                      </a:pPr>
+                      <a:r>
+                        <a:rPr lang="en-US" sz="1300" b="1" kern="100" dirty="0">
+                          <a:effectLst/>
+                          <a:latin typeface="Times New Roman" panose="02020603050405020304" pitchFamily="18" charset="0"/>
+                          <a:ea typeface="Calibri" panose="020F0502020204030204" pitchFamily="34" charset="0"/>
+                          <a:cs typeface="Times New Roman" panose="02020603050405020304" pitchFamily="18" charset="0"/>
+                        </a:rPr>
+                        <a:t>Evaluation</a:t>
+                      </a:r>
+                      <a:endParaRPr lang="en-IN" sz="1300" b="1" kern="100" dirty="0">
+                        <a:effectLst/>
+                        <a:latin typeface="Times New Roman" panose="02020603050405020304" pitchFamily="18" charset="0"/>
+                        <a:ea typeface="Calibri" panose="020F0502020204030204" pitchFamily="34" charset="0"/>
+                        <a:cs typeface="Times New Roman" panose="02020603050405020304" pitchFamily="18" charset="0"/>
+                      </a:endParaRPr>
+                    </a:p>
+                  </a:txBody>
+                  <a:tcPr marL="56848" marR="56848" marT="0" marB="0" anchor="ctr"/>
+                </a:tc>
+                <a:tc>
+                  <a:txBody>
+                    <a:bodyPr/>
+                    <a:lstStyle/>
+                    <a:p>
+                      <a:pPr>
+                        <a:lnSpc>
+                          <a:spcPct val="107000"/>
+                        </a:lnSpc>
+                        <a:spcAft>
+                          <a:spcPts val="800"/>
+                        </a:spcAft>
+                        <a:buNone/>
+                      </a:pPr>
+                      <a:r>
+                        <a:rPr lang="en-IN" sz="700" kern="100">
+                          <a:effectLst/>
+                        </a:rPr>
+                        <a:t> </a:t>
+                      </a:r>
+                      <a:endParaRPr lang="en-IN" sz="900" kern="100">
+                        <a:effectLst/>
+                        <a:latin typeface="Calibri" panose="020F0502020204030204" pitchFamily="34" charset="0"/>
+                        <a:ea typeface="Calibri" panose="020F0502020204030204" pitchFamily="34" charset="0"/>
+                        <a:cs typeface="Times New Roman" panose="02020603050405020304" pitchFamily="18" charset="0"/>
+                      </a:endParaRPr>
+                    </a:p>
+                  </a:txBody>
+                  <a:tcPr marL="56848" marR="56848" marT="0" marB="0"/>
+                </a:tc>
+                <a:tc>
+                  <a:txBody>
+                    <a:bodyPr/>
+                    <a:lstStyle/>
+                    <a:p>
+                      <a:pPr>
+                        <a:lnSpc>
+                          <a:spcPct val="107000"/>
+                        </a:lnSpc>
+                        <a:spcAft>
+                          <a:spcPts val="800"/>
+                        </a:spcAft>
+                        <a:buNone/>
+                      </a:pPr>
+                      <a:r>
+                        <a:rPr lang="en-IN" sz="700" kern="100">
+                          <a:effectLst/>
+                        </a:rPr>
+                        <a:t> </a:t>
+                      </a:r>
+                      <a:endParaRPr lang="en-IN" sz="900" kern="100">
+                        <a:effectLst/>
+                        <a:latin typeface="Calibri" panose="020F0502020204030204" pitchFamily="34" charset="0"/>
+                        <a:ea typeface="Calibri" panose="020F0502020204030204" pitchFamily="34" charset="0"/>
+                        <a:cs typeface="Times New Roman" panose="02020603050405020304" pitchFamily="18" charset="0"/>
+                      </a:endParaRPr>
+                    </a:p>
+                  </a:txBody>
+                  <a:tcPr marL="56848" marR="56848" marT="0" marB="0"/>
+                </a:tc>
+                <a:tc>
+                  <a:txBody>
+                    <a:bodyPr/>
+                    <a:lstStyle/>
+                    <a:p>
+                      <a:pPr>
+                        <a:lnSpc>
+                          <a:spcPct val="107000"/>
+                        </a:lnSpc>
+                        <a:spcAft>
+                          <a:spcPts val="800"/>
+                        </a:spcAft>
+                        <a:buNone/>
+                      </a:pPr>
+                      <a:r>
+                        <a:rPr lang="en-IN" sz="700" kern="100">
+                          <a:effectLst/>
+                        </a:rPr>
+                        <a:t> </a:t>
+                      </a:r>
+                      <a:endParaRPr lang="en-IN" sz="900" kern="100">
+                        <a:effectLst/>
+                        <a:latin typeface="Calibri" panose="020F0502020204030204" pitchFamily="34" charset="0"/>
+                        <a:ea typeface="Calibri" panose="020F0502020204030204" pitchFamily="34" charset="0"/>
+                        <a:cs typeface="Times New Roman" panose="02020603050405020304" pitchFamily="18" charset="0"/>
+                      </a:endParaRPr>
+                    </a:p>
+                  </a:txBody>
+                  <a:tcPr marL="56848" marR="56848" marT="0" marB="0"/>
+                </a:tc>
+                <a:tc>
+                  <a:txBody>
+                    <a:bodyPr/>
+                    <a:lstStyle/>
+                    <a:p>
+                      <a:pPr>
+                        <a:lnSpc>
+                          <a:spcPct val="107000"/>
+                        </a:lnSpc>
+                        <a:spcAft>
+                          <a:spcPts val="800"/>
+                        </a:spcAft>
+                        <a:buNone/>
+                      </a:pPr>
+                      <a:r>
+                        <a:rPr lang="en-IN" sz="700" kern="100">
+                          <a:effectLst/>
+                        </a:rPr>
+                        <a:t> </a:t>
+                      </a:r>
+                      <a:endParaRPr lang="en-IN" sz="900" kern="100">
+                        <a:effectLst/>
+                        <a:latin typeface="Calibri" panose="020F0502020204030204" pitchFamily="34" charset="0"/>
+                        <a:ea typeface="Calibri" panose="020F0502020204030204" pitchFamily="34" charset="0"/>
+                        <a:cs typeface="Times New Roman" panose="02020603050405020304" pitchFamily="18" charset="0"/>
+                      </a:endParaRPr>
+                    </a:p>
+                  </a:txBody>
+                  <a:tcPr marL="56848" marR="56848" marT="0" marB="0"/>
+                </a:tc>
+                <a:tc>
+                  <a:txBody>
+                    <a:bodyPr/>
+                    <a:lstStyle/>
+                    <a:p>
+                      <a:pPr>
+                        <a:lnSpc>
+                          <a:spcPct val="107000"/>
+                        </a:lnSpc>
+                        <a:spcAft>
+                          <a:spcPts val="800"/>
+                        </a:spcAft>
+                        <a:buNone/>
+                      </a:pPr>
+                      <a:r>
+                        <a:rPr lang="en-IN" sz="700" kern="100">
+                          <a:effectLst/>
+                        </a:rPr>
+                        <a:t> </a:t>
+                      </a:r>
+                      <a:endParaRPr lang="en-IN" sz="900" kern="100">
+                        <a:effectLst/>
+                        <a:latin typeface="Calibri" panose="020F0502020204030204" pitchFamily="34" charset="0"/>
+                        <a:ea typeface="Calibri" panose="020F0502020204030204" pitchFamily="34" charset="0"/>
+                        <a:cs typeface="Times New Roman" panose="02020603050405020304" pitchFamily="18" charset="0"/>
+                      </a:endParaRPr>
+                    </a:p>
+                  </a:txBody>
+                  <a:tcPr marL="56848" marR="56848" marT="0" marB="0"/>
+                </a:tc>
+                <a:tc>
+                  <a:txBody>
+                    <a:bodyPr/>
+                    <a:lstStyle/>
+                    <a:p>
+                      <a:pPr>
+                        <a:lnSpc>
+                          <a:spcPct val="107000"/>
+                        </a:lnSpc>
+                        <a:spcAft>
+                          <a:spcPts val="800"/>
+                        </a:spcAft>
+                        <a:buNone/>
+                      </a:pPr>
+                      <a:r>
+                        <a:rPr lang="en-IN" sz="700" kern="100">
+                          <a:effectLst/>
+                        </a:rPr>
+                        <a:t> </a:t>
+                      </a:r>
+                      <a:endParaRPr lang="en-IN" sz="900" kern="100">
+                        <a:effectLst/>
+                        <a:latin typeface="Calibri" panose="020F0502020204030204" pitchFamily="34" charset="0"/>
+                        <a:ea typeface="Calibri" panose="020F0502020204030204" pitchFamily="34" charset="0"/>
+                        <a:cs typeface="Times New Roman" panose="02020603050405020304" pitchFamily="18" charset="0"/>
+                      </a:endParaRPr>
+                    </a:p>
+                  </a:txBody>
+                  <a:tcPr marL="56848" marR="56848" marT="0" marB="0"/>
+                </a:tc>
+                <a:tc>
+                  <a:txBody>
+                    <a:bodyPr/>
+                    <a:lstStyle/>
+                    <a:p>
+                      <a:pPr>
+                        <a:lnSpc>
+                          <a:spcPct val="107000"/>
+                        </a:lnSpc>
+                        <a:spcAft>
+                          <a:spcPts val="800"/>
+                        </a:spcAft>
+                        <a:buNone/>
+                      </a:pPr>
+                      <a:r>
+                        <a:rPr lang="en-IN" sz="700" kern="100" dirty="0">
+                          <a:effectLst/>
+                        </a:rPr>
+                        <a:t> </a:t>
+                      </a:r>
+                      <a:endParaRPr lang="en-IN" sz="900" kern="100" dirty="0">
+                        <a:effectLst/>
+                        <a:latin typeface="Calibri" panose="020F0502020204030204" pitchFamily="34" charset="0"/>
+                        <a:ea typeface="Calibri" panose="020F0502020204030204" pitchFamily="34" charset="0"/>
+                        <a:cs typeface="Times New Roman" panose="02020603050405020304" pitchFamily="18" charset="0"/>
+                      </a:endParaRPr>
+                    </a:p>
+                  </a:txBody>
+                  <a:tcPr marL="56848" marR="56848" marT="0" marB="0">
+                    <a:solidFill>
+                      <a:schemeClr val="accent6">
+                        <a:lumMod val="75000"/>
+                      </a:schemeClr>
+                    </a:solidFill>
+                  </a:tcPr>
+                </a:tc>
+                <a:tc>
+                  <a:txBody>
+                    <a:bodyPr/>
+                    <a:lstStyle/>
+                    <a:p>
+                      <a:pPr>
+                        <a:lnSpc>
+                          <a:spcPct val="107000"/>
+                        </a:lnSpc>
+                        <a:spcAft>
+                          <a:spcPts val="800"/>
+                        </a:spcAft>
+                        <a:buNone/>
+                      </a:pPr>
+                      <a:r>
+                        <a:rPr lang="en-IN" sz="700" kern="100" dirty="0">
+                          <a:effectLst/>
+                        </a:rPr>
+                        <a:t> </a:t>
+                      </a:r>
+                      <a:endParaRPr lang="en-IN" sz="900" kern="100" dirty="0">
+                        <a:effectLst/>
+                        <a:latin typeface="Calibri" panose="020F0502020204030204" pitchFamily="34" charset="0"/>
+                        <a:ea typeface="Calibri" panose="020F0502020204030204" pitchFamily="34" charset="0"/>
+                        <a:cs typeface="Times New Roman" panose="02020603050405020304" pitchFamily="18" charset="0"/>
+                      </a:endParaRPr>
+                    </a:p>
+                  </a:txBody>
+                  <a:tcPr marL="56848" marR="56848" marT="0" marB="0"/>
+                </a:tc>
+                <a:tc>
+                  <a:txBody>
+                    <a:bodyPr/>
+                    <a:lstStyle/>
+                    <a:p>
+                      <a:pPr>
+                        <a:lnSpc>
+                          <a:spcPct val="107000"/>
+                        </a:lnSpc>
+                        <a:spcAft>
+                          <a:spcPts val="800"/>
+                        </a:spcAft>
+                        <a:buNone/>
+                      </a:pPr>
+                      <a:r>
+                        <a:rPr lang="en-IN" sz="700" kern="100" dirty="0">
+                          <a:effectLst/>
+                        </a:rPr>
+                        <a:t> </a:t>
+                      </a:r>
+                      <a:endParaRPr lang="en-IN" sz="900" kern="100" dirty="0">
+                        <a:effectLst/>
+                        <a:latin typeface="Calibri" panose="020F0502020204030204" pitchFamily="34" charset="0"/>
+                        <a:ea typeface="Calibri" panose="020F0502020204030204" pitchFamily="34" charset="0"/>
+                        <a:cs typeface="Times New Roman" panose="02020603050405020304" pitchFamily="18" charset="0"/>
+                      </a:endParaRPr>
+                    </a:p>
+                  </a:txBody>
+                  <a:tcPr marL="56848" marR="56848" marT="0" marB="0"/>
+                </a:tc>
+                <a:extLst>
+                  <a:ext uri="{0D108BD9-81ED-4DB2-BD59-A6C34878D82A}">
+                    <a16:rowId xmlns:a16="http://schemas.microsoft.com/office/drawing/2014/main" val="1574918454"/>
+                  </a:ext>
+                </a:extLst>
+              </a:tr>
+              <a:tr h="439272">
+                <a:tc>
+                  <a:txBody>
+                    <a:bodyPr/>
+                    <a:lstStyle/>
+                    <a:p>
+                      <a:pPr marL="0" lvl="0" indent="0" algn="l">
+                        <a:lnSpc>
+                          <a:spcPct val="107000"/>
+                        </a:lnSpc>
+                        <a:spcAft>
+                          <a:spcPts val="800"/>
+                        </a:spcAft>
+                        <a:buFont typeface="Arial" panose="020B0604020202020204" pitchFamily="34" charset="0"/>
+                        <a:buNone/>
+                      </a:pPr>
+                      <a:r>
+                        <a:rPr lang="en-IN" sz="1300" b="1" kern="100" dirty="0">
+                          <a:effectLst/>
+                          <a:latin typeface="Times New Roman" panose="02020603050405020304" pitchFamily="18" charset="0"/>
+                          <a:cs typeface="Times New Roman" panose="02020603050405020304" pitchFamily="18" charset="0"/>
+                        </a:rPr>
+                        <a:t>Results consolidation</a:t>
+                      </a:r>
+                      <a:endParaRPr lang="en-IN" sz="1300" b="1" kern="100" dirty="0">
+                        <a:effectLst/>
+                        <a:latin typeface="Times New Roman" panose="02020603050405020304" pitchFamily="18" charset="0"/>
+                        <a:ea typeface="Calibri" panose="020F0502020204030204" pitchFamily="34" charset="0"/>
+                        <a:cs typeface="Times New Roman" panose="02020603050405020304" pitchFamily="18" charset="0"/>
+                      </a:endParaRPr>
+                    </a:p>
+                  </a:txBody>
+                  <a:tcPr marL="56848" marR="56848" marT="0" marB="0" anchor="ctr"/>
+                </a:tc>
+                <a:tc>
+                  <a:txBody>
+                    <a:bodyPr/>
+                    <a:lstStyle/>
+                    <a:p>
+                      <a:pPr>
+                        <a:lnSpc>
+                          <a:spcPct val="107000"/>
+                        </a:lnSpc>
+                        <a:spcAft>
+                          <a:spcPts val="800"/>
+                        </a:spcAft>
+                        <a:buNone/>
+                      </a:pPr>
+                      <a:r>
+                        <a:rPr lang="en-IN" sz="700" kern="100">
+                          <a:effectLst/>
+                        </a:rPr>
+                        <a:t> </a:t>
+                      </a:r>
+                      <a:endParaRPr lang="en-IN" sz="900" kern="100">
+                        <a:effectLst/>
+                        <a:latin typeface="Calibri" panose="020F0502020204030204" pitchFamily="34" charset="0"/>
+                        <a:ea typeface="Calibri" panose="020F0502020204030204" pitchFamily="34" charset="0"/>
+                        <a:cs typeface="Times New Roman" panose="02020603050405020304" pitchFamily="18" charset="0"/>
+                      </a:endParaRPr>
+                    </a:p>
+                  </a:txBody>
+                  <a:tcPr marL="56848" marR="56848" marT="0" marB="0"/>
+                </a:tc>
+                <a:tc>
+                  <a:txBody>
+                    <a:bodyPr/>
+                    <a:lstStyle/>
+                    <a:p>
+                      <a:pPr>
+                        <a:lnSpc>
+                          <a:spcPct val="107000"/>
+                        </a:lnSpc>
+                        <a:spcAft>
+                          <a:spcPts val="800"/>
+                        </a:spcAft>
+                        <a:buNone/>
+                      </a:pPr>
+                      <a:r>
+                        <a:rPr lang="en-IN" sz="700" kern="100">
+                          <a:effectLst/>
+                        </a:rPr>
+                        <a:t> </a:t>
+                      </a:r>
+                      <a:endParaRPr lang="en-IN" sz="900" kern="100">
+                        <a:effectLst/>
+                        <a:latin typeface="Calibri" panose="020F0502020204030204" pitchFamily="34" charset="0"/>
+                        <a:ea typeface="Calibri" panose="020F0502020204030204" pitchFamily="34" charset="0"/>
+                        <a:cs typeface="Times New Roman" panose="02020603050405020304" pitchFamily="18" charset="0"/>
+                      </a:endParaRPr>
+                    </a:p>
+                  </a:txBody>
+                  <a:tcPr marL="56848" marR="56848" marT="0" marB="0"/>
+                </a:tc>
+                <a:tc>
+                  <a:txBody>
+                    <a:bodyPr/>
+                    <a:lstStyle/>
+                    <a:p>
+                      <a:pPr>
+                        <a:lnSpc>
+                          <a:spcPct val="107000"/>
+                        </a:lnSpc>
+                        <a:spcAft>
+                          <a:spcPts val="800"/>
+                        </a:spcAft>
+                        <a:buNone/>
+                      </a:pPr>
+                      <a:r>
+                        <a:rPr lang="en-IN" sz="700" kern="100">
+                          <a:effectLst/>
+                        </a:rPr>
+                        <a:t> </a:t>
+                      </a:r>
+                      <a:endParaRPr lang="en-IN" sz="900" kern="100">
+                        <a:effectLst/>
+                        <a:latin typeface="Calibri" panose="020F0502020204030204" pitchFamily="34" charset="0"/>
+                        <a:ea typeface="Calibri" panose="020F0502020204030204" pitchFamily="34" charset="0"/>
+                        <a:cs typeface="Times New Roman" panose="02020603050405020304" pitchFamily="18" charset="0"/>
+                      </a:endParaRPr>
+                    </a:p>
+                  </a:txBody>
+                  <a:tcPr marL="56848" marR="56848" marT="0" marB="0"/>
+                </a:tc>
+                <a:tc>
+                  <a:txBody>
+                    <a:bodyPr/>
+                    <a:lstStyle/>
+                    <a:p>
+                      <a:pPr>
+                        <a:lnSpc>
+                          <a:spcPct val="107000"/>
+                        </a:lnSpc>
+                        <a:spcAft>
+                          <a:spcPts val="800"/>
+                        </a:spcAft>
+                        <a:buNone/>
+                      </a:pPr>
+                      <a:r>
+                        <a:rPr lang="en-IN" sz="700" kern="100">
+                          <a:effectLst/>
+                        </a:rPr>
+                        <a:t> </a:t>
+                      </a:r>
+                      <a:endParaRPr lang="en-IN" sz="900" kern="100">
+                        <a:effectLst/>
+                        <a:latin typeface="Calibri" panose="020F0502020204030204" pitchFamily="34" charset="0"/>
+                        <a:ea typeface="Calibri" panose="020F0502020204030204" pitchFamily="34" charset="0"/>
+                        <a:cs typeface="Times New Roman" panose="02020603050405020304" pitchFamily="18" charset="0"/>
+                      </a:endParaRPr>
+                    </a:p>
+                  </a:txBody>
+                  <a:tcPr marL="56848" marR="56848" marT="0" marB="0"/>
+                </a:tc>
+                <a:tc>
+                  <a:txBody>
+                    <a:bodyPr/>
+                    <a:lstStyle/>
+                    <a:p>
+                      <a:pPr>
+                        <a:lnSpc>
+                          <a:spcPct val="107000"/>
+                        </a:lnSpc>
+                        <a:spcAft>
+                          <a:spcPts val="800"/>
+                        </a:spcAft>
+                        <a:buNone/>
+                      </a:pPr>
+                      <a:r>
+                        <a:rPr lang="en-IN" sz="700" kern="100">
+                          <a:effectLst/>
+                        </a:rPr>
+                        <a:t> </a:t>
+                      </a:r>
+                      <a:endParaRPr lang="en-IN" sz="900" kern="100">
+                        <a:effectLst/>
+                        <a:latin typeface="Calibri" panose="020F0502020204030204" pitchFamily="34" charset="0"/>
+                        <a:ea typeface="Calibri" panose="020F0502020204030204" pitchFamily="34" charset="0"/>
+                        <a:cs typeface="Times New Roman" panose="02020603050405020304" pitchFamily="18" charset="0"/>
+                      </a:endParaRPr>
+                    </a:p>
+                  </a:txBody>
+                  <a:tcPr marL="56848" marR="56848" marT="0" marB="0"/>
+                </a:tc>
+                <a:tc>
+                  <a:txBody>
+                    <a:bodyPr/>
+                    <a:lstStyle/>
+                    <a:p>
+                      <a:pPr>
+                        <a:lnSpc>
+                          <a:spcPct val="107000"/>
+                        </a:lnSpc>
+                        <a:spcAft>
+                          <a:spcPts val="800"/>
+                        </a:spcAft>
+                        <a:buNone/>
+                      </a:pPr>
+                      <a:r>
+                        <a:rPr lang="en-IN" sz="700" kern="100">
+                          <a:effectLst/>
+                        </a:rPr>
+                        <a:t> </a:t>
+                      </a:r>
+                      <a:endParaRPr lang="en-IN" sz="900" kern="100">
+                        <a:effectLst/>
+                        <a:latin typeface="Calibri" panose="020F0502020204030204" pitchFamily="34" charset="0"/>
+                        <a:ea typeface="Calibri" panose="020F0502020204030204" pitchFamily="34" charset="0"/>
+                        <a:cs typeface="Times New Roman" panose="02020603050405020304" pitchFamily="18" charset="0"/>
+                      </a:endParaRPr>
+                    </a:p>
+                  </a:txBody>
+                  <a:tcPr marL="56848" marR="56848" marT="0" marB="0"/>
+                </a:tc>
+                <a:tc>
+                  <a:txBody>
+                    <a:bodyPr/>
+                    <a:lstStyle/>
+                    <a:p>
+                      <a:pPr>
+                        <a:lnSpc>
+                          <a:spcPct val="107000"/>
+                        </a:lnSpc>
+                        <a:spcAft>
+                          <a:spcPts val="800"/>
+                        </a:spcAft>
+                        <a:buNone/>
+                      </a:pPr>
+                      <a:r>
+                        <a:rPr lang="en-IN" sz="700" kern="100" dirty="0">
+                          <a:effectLst/>
+                        </a:rPr>
+                        <a:t> </a:t>
+                      </a:r>
+                      <a:endParaRPr lang="en-IN" sz="900" kern="100" dirty="0">
+                        <a:effectLst/>
+                        <a:latin typeface="Calibri" panose="020F0502020204030204" pitchFamily="34" charset="0"/>
+                        <a:ea typeface="Calibri" panose="020F0502020204030204" pitchFamily="34" charset="0"/>
+                        <a:cs typeface="Times New Roman" panose="02020603050405020304" pitchFamily="18" charset="0"/>
+                      </a:endParaRPr>
+                    </a:p>
+                  </a:txBody>
+                  <a:tcPr marL="56848" marR="56848" marT="0" marB="0"/>
+                </a:tc>
+                <a:tc>
+                  <a:txBody>
+                    <a:bodyPr/>
+                    <a:lstStyle/>
+                    <a:p>
+                      <a:pPr>
+                        <a:lnSpc>
+                          <a:spcPct val="107000"/>
+                        </a:lnSpc>
+                        <a:spcAft>
+                          <a:spcPts val="800"/>
+                        </a:spcAft>
+                        <a:buNone/>
+                      </a:pPr>
+                      <a:r>
+                        <a:rPr lang="en-IN" sz="700" kern="100" dirty="0">
+                          <a:effectLst/>
+                        </a:rPr>
+                        <a:t> </a:t>
+                      </a:r>
+                      <a:endParaRPr lang="en-IN" sz="900" kern="100" dirty="0">
+                        <a:effectLst/>
+                        <a:latin typeface="Calibri" panose="020F0502020204030204" pitchFamily="34" charset="0"/>
+                        <a:ea typeface="Calibri" panose="020F0502020204030204" pitchFamily="34" charset="0"/>
+                        <a:cs typeface="Times New Roman" panose="02020603050405020304" pitchFamily="18" charset="0"/>
+                      </a:endParaRPr>
+                    </a:p>
+                  </a:txBody>
+                  <a:tcPr marL="56848" marR="56848" marT="0" marB="0">
+                    <a:solidFill>
+                      <a:schemeClr val="accent6">
+                        <a:lumMod val="75000"/>
+                      </a:schemeClr>
+                    </a:solidFill>
+                  </a:tcPr>
+                </a:tc>
+                <a:tc>
+                  <a:txBody>
+                    <a:bodyPr/>
+                    <a:lstStyle/>
+                    <a:p>
+                      <a:pPr>
+                        <a:lnSpc>
+                          <a:spcPct val="107000"/>
+                        </a:lnSpc>
+                        <a:spcAft>
+                          <a:spcPts val="800"/>
+                        </a:spcAft>
+                        <a:buNone/>
+                      </a:pPr>
+                      <a:r>
+                        <a:rPr lang="en-IN" sz="700" kern="100" dirty="0">
+                          <a:effectLst/>
+                        </a:rPr>
+                        <a:t> </a:t>
+                      </a:r>
+                      <a:endParaRPr lang="en-IN" sz="900" kern="100" dirty="0">
+                        <a:effectLst/>
+                        <a:latin typeface="Calibri" panose="020F0502020204030204" pitchFamily="34" charset="0"/>
+                        <a:ea typeface="Calibri" panose="020F0502020204030204" pitchFamily="34" charset="0"/>
+                        <a:cs typeface="Times New Roman" panose="02020603050405020304" pitchFamily="18" charset="0"/>
+                      </a:endParaRPr>
+                    </a:p>
+                  </a:txBody>
+                  <a:tcPr marL="56848" marR="56848" marT="0" marB="0"/>
+                </a:tc>
+                <a:extLst>
+                  <a:ext uri="{0D108BD9-81ED-4DB2-BD59-A6C34878D82A}">
+                    <a16:rowId xmlns:a16="http://schemas.microsoft.com/office/drawing/2014/main" val="1031364092"/>
+                  </a:ext>
+                </a:extLst>
+              </a:tr>
+              <a:tr h="439272">
+                <a:tc>
+                  <a:txBody>
+                    <a:bodyPr/>
+                    <a:lstStyle/>
+                    <a:p>
+                      <a:pPr marL="0" lvl="0" indent="0" algn="l">
+                        <a:lnSpc>
+                          <a:spcPct val="107000"/>
+                        </a:lnSpc>
+                        <a:spcAft>
+                          <a:spcPts val="800"/>
+                        </a:spcAft>
+                        <a:buFont typeface="Arial" panose="020B0604020202020204" pitchFamily="34" charset="0"/>
+                        <a:buNone/>
+                      </a:pPr>
+                      <a:r>
+                        <a:rPr lang="en-IN" sz="1300" b="1" kern="100" dirty="0">
+                          <a:effectLst/>
+                          <a:latin typeface="Times New Roman" panose="02020603050405020304" pitchFamily="18" charset="0"/>
+                          <a:cs typeface="Times New Roman" panose="02020603050405020304" pitchFamily="18" charset="0"/>
+                        </a:rPr>
+                        <a:t>Final report + paper writing</a:t>
+                      </a:r>
+                      <a:endParaRPr lang="en-IN" sz="1300" b="1" kern="100" dirty="0">
+                        <a:effectLst/>
+                        <a:latin typeface="Times New Roman" panose="02020603050405020304" pitchFamily="18" charset="0"/>
+                        <a:ea typeface="Calibri" panose="020F0502020204030204" pitchFamily="34" charset="0"/>
+                        <a:cs typeface="Times New Roman" panose="02020603050405020304" pitchFamily="18" charset="0"/>
+                      </a:endParaRPr>
+                    </a:p>
+                  </a:txBody>
+                  <a:tcPr marL="56848" marR="56848" marT="0" marB="0" anchor="ctr">
+                    <a:lnB w="12700" cap="flat" cmpd="sng" algn="ctr">
+                      <a:solidFill>
+                        <a:schemeClr val="tx1"/>
+                      </a:solidFill>
+                      <a:prstDash val="solid"/>
+                      <a:round/>
+                      <a:headEnd type="none" w="med" len="med"/>
+                      <a:tailEnd type="none" w="med" len="med"/>
+                    </a:lnB>
+                  </a:tcPr>
+                </a:tc>
+                <a:tc>
+                  <a:txBody>
+                    <a:bodyPr/>
+                    <a:lstStyle/>
+                    <a:p>
+                      <a:pPr>
+                        <a:lnSpc>
+                          <a:spcPct val="107000"/>
+                        </a:lnSpc>
+                        <a:spcAft>
+                          <a:spcPts val="800"/>
+                        </a:spcAft>
+                        <a:buNone/>
+                      </a:pPr>
+                      <a:r>
+                        <a:rPr lang="en-IN" sz="700" kern="100">
+                          <a:effectLst/>
+                        </a:rPr>
+                        <a:t> </a:t>
+                      </a:r>
+                      <a:endParaRPr lang="en-IN" sz="900" kern="100">
+                        <a:effectLst/>
+                        <a:latin typeface="Calibri" panose="020F0502020204030204" pitchFamily="34" charset="0"/>
+                        <a:ea typeface="Calibri" panose="020F0502020204030204" pitchFamily="34" charset="0"/>
+                        <a:cs typeface="Times New Roman" panose="02020603050405020304" pitchFamily="18" charset="0"/>
+                      </a:endParaRPr>
+                    </a:p>
+                  </a:txBody>
+                  <a:tcPr marL="56848" marR="56848" marT="0" marB="0">
+                    <a:lnB w="12700" cap="flat" cmpd="sng" algn="ctr">
+                      <a:solidFill>
+                        <a:schemeClr val="tx1"/>
+                      </a:solidFill>
+                      <a:prstDash val="solid"/>
+                      <a:round/>
+                      <a:headEnd type="none" w="med" len="med"/>
+                      <a:tailEnd type="none" w="med" len="med"/>
+                    </a:lnB>
+                  </a:tcPr>
+                </a:tc>
+                <a:tc>
+                  <a:txBody>
+                    <a:bodyPr/>
+                    <a:lstStyle/>
+                    <a:p>
+                      <a:pPr>
+                        <a:lnSpc>
+                          <a:spcPct val="107000"/>
+                        </a:lnSpc>
+                        <a:spcAft>
+                          <a:spcPts val="800"/>
+                        </a:spcAft>
+                        <a:buNone/>
+                      </a:pPr>
+                      <a:r>
+                        <a:rPr lang="en-IN" sz="700" kern="100">
+                          <a:effectLst/>
+                        </a:rPr>
+                        <a:t> </a:t>
+                      </a:r>
+                      <a:endParaRPr lang="en-IN" sz="900" kern="100">
+                        <a:effectLst/>
+                        <a:latin typeface="Calibri" panose="020F0502020204030204" pitchFamily="34" charset="0"/>
+                        <a:ea typeface="Calibri" panose="020F0502020204030204" pitchFamily="34" charset="0"/>
+                        <a:cs typeface="Times New Roman" panose="02020603050405020304" pitchFamily="18" charset="0"/>
+                      </a:endParaRPr>
+                    </a:p>
+                  </a:txBody>
+                  <a:tcPr marL="56848" marR="56848" marT="0" marB="0">
+                    <a:lnB w="12700" cap="flat" cmpd="sng" algn="ctr">
+                      <a:solidFill>
+                        <a:schemeClr val="tx1"/>
+                      </a:solidFill>
+                      <a:prstDash val="solid"/>
+                      <a:round/>
+                      <a:headEnd type="none" w="med" len="med"/>
+                      <a:tailEnd type="none" w="med" len="med"/>
+                    </a:lnB>
+                  </a:tcPr>
+                </a:tc>
+                <a:tc>
+                  <a:txBody>
+                    <a:bodyPr/>
+                    <a:lstStyle/>
+                    <a:p>
+                      <a:pPr>
+                        <a:lnSpc>
+                          <a:spcPct val="107000"/>
+                        </a:lnSpc>
+                        <a:spcAft>
+                          <a:spcPts val="800"/>
+                        </a:spcAft>
+                        <a:buNone/>
+                      </a:pPr>
+                      <a:r>
+                        <a:rPr lang="en-IN" sz="700" kern="100">
+                          <a:effectLst/>
+                        </a:rPr>
+                        <a:t> </a:t>
+                      </a:r>
+                      <a:endParaRPr lang="en-IN" sz="900" kern="100">
+                        <a:effectLst/>
+                        <a:latin typeface="Calibri" panose="020F0502020204030204" pitchFamily="34" charset="0"/>
+                        <a:ea typeface="Calibri" panose="020F0502020204030204" pitchFamily="34" charset="0"/>
+                        <a:cs typeface="Times New Roman" panose="02020603050405020304" pitchFamily="18" charset="0"/>
+                      </a:endParaRPr>
+                    </a:p>
+                  </a:txBody>
+                  <a:tcPr marL="56848" marR="56848" marT="0" marB="0">
+                    <a:lnB w="12700" cap="flat" cmpd="sng" algn="ctr">
+                      <a:solidFill>
+                        <a:schemeClr val="tx1"/>
+                      </a:solidFill>
+                      <a:prstDash val="solid"/>
+                      <a:round/>
+                      <a:headEnd type="none" w="med" len="med"/>
+                      <a:tailEnd type="none" w="med" len="med"/>
+                    </a:lnB>
+                  </a:tcPr>
+                </a:tc>
+                <a:tc>
+                  <a:txBody>
+                    <a:bodyPr/>
+                    <a:lstStyle/>
+                    <a:p>
+                      <a:pPr>
+                        <a:lnSpc>
+                          <a:spcPct val="107000"/>
+                        </a:lnSpc>
+                        <a:spcAft>
+                          <a:spcPts val="800"/>
+                        </a:spcAft>
+                        <a:buNone/>
+                      </a:pPr>
+                      <a:r>
+                        <a:rPr lang="en-IN" sz="700" kern="100">
+                          <a:effectLst/>
+                        </a:rPr>
+                        <a:t> </a:t>
+                      </a:r>
+                      <a:endParaRPr lang="en-IN" sz="900" kern="100">
+                        <a:effectLst/>
+                        <a:latin typeface="Calibri" panose="020F0502020204030204" pitchFamily="34" charset="0"/>
+                        <a:ea typeface="Calibri" panose="020F0502020204030204" pitchFamily="34" charset="0"/>
+                        <a:cs typeface="Times New Roman" panose="02020603050405020304" pitchFamily="18" charset="0"/>
+                      </a:endParaRPr>
+                    </a:p>
+                  </a:txBody>
+                  <a:tcPr marL="56848" marR="56848" marT="0" marB="0">
+                    <a:lnB w="12700" cap="flat" cmpd="sng" algn="ctr">
+                      <a:solidFill>
+                        <a:schemeClr val="tx1"/>
+                      </a:solidFill>
+                      <a:prstDash val="solid"/>
+                      <a:round/>
+                      <a:headEnd type="none" w="med" len="med"/>
+                      <a:tailEnd type="none" w="med" len="med"/>
+                    </a:lnB>
+                  </a:tcPr>
+                </a:tc>
+                <a:tc>
+                  <a:txBody>
+                    <a:bodyPr/>
+                    <a:lstStyle/>
+                    <a:p>
+                      <a:pPr>
+                        <a:lnSpc>
+                          <a:spcPct val="107000"/>
+                        </a:lnSpc>
+                        <a:spcAft>
+                          <a:spcPts val="800"/>
+                        </a:spcAft>
+                        <a:buNone/>
+                      </a:pPr>
+                      <a:r>
+                        <a:rPr lang="en-IN" sz="700" kern="100">
+                          <a:effectLst/>
+                        </a:rPr>
+                        <a:t> </a:t>
+                      </a:r>
+                      <a:endParaRPr lang="en-IN" sz="900" kern="100">
+                        <a:effectLst/>
+                        <a:latin typeface="Calibri" panose="020F0502020204030204" pitchFamily="34" charset="0"/>
+                        <a:ea typeface="Calibri" panose="020F0502020204030204" pitchFamily="34" charset="0"/>
+                        <a:cs typeface="Times New Roman" panose="02020603050405020304" pitchFamily="18" charset="0"/>
+                      </a:endParaRPr>
+                    </a:p>
+                  </a:txBody>
+                  <a:tcPr marL="56848" marR="56848" marT="0" marB="0">
+                    <a:lnB w="12700" cap="flat" cmpd="sng" algn="ctr">
+                      <a:solidFill>
+                        <a:schemeClr val="tx1"/>
+                      </a:solidFill>
+                      <a:prstDash val="solid"/>
+                      <a:round/>
+                      <a:headEnd type="none" w="med" len="med"/>
+                      <a:tailEnd type="none" w="med" len="med"/>
+                    </a:lnB>
+                  </a:tcPr>
+                </a:tc>
+                <a:tc>
+                  <a:txBody>
+                    <a:bodyPr/>
+                    <a:lstStyle/>
+                    <a:p>
+                      <a:pPr>
+                        <a:lnSpc>
+                          <a:spcPct val="107000"/>
+                        </a:lnSpc>
+                        <a:spcAft>
+                          <a:spcPts val="800"/>
+                        </a:spcAft>
+                        <a:buNone/>
+                      </a:pPr>
+                      <a:r>
+                        <a:rPr lang="en-IN" sz="700" kern="100">
+                          <a:effectLst/>
+                        </a:rPr>
+                        <a:t> </a:t>
+                      </a:r>
+                      <a:endParaRPr lang="en-IN" sz="900" kern="100">
+                        <a:effectLst/>
+                        <a:latin typeface="Calibri" panose="020F0502020204030204" pitchFamily="34" charset="0"/>
+                        <a:ea typeface="Calibri" panose="020F0502020204030204" pitchFamily="34" charset="0"/>
+                        <a:cs typeface="Times New Roman" panose="02020603050405020304" pitchFamily="18" charset="0"/>
+                      </a:endParaRPr>
+                    </a:p>
+                  </a:txBody>
+                  <a:tcPr marL="56848" marR="56848" marT="0" marB="0">
+                    <a:lnB w="12700" cap="flat" cmpd="sng" algn="ctr">
+                      <a:solidFill>
+                        <a:schemeClr val="tx1"/>
+                      </a:solidFill>
+                      <a:prstDash val="solid"/>
+                      <a:round/>
+                      <a:headEnd type="none" w="med" len="med"/>
+                      <a:tailEnd type="none" w="med" len="med"/>
+                    </a:lnB>
+                  </a:tcPr>
+                </a:tc>
+                <a:tc>
+                  <a:txBody>
+                    <a:bodyPr/>
+                    <a:lstStyle/>
+                    <a:p>
+                      <a:pPr>
+                        <a:lnSpc>
+                          <a:spcPct val="107000"/>
+                        </a:lnSpc>
+                        <a:spcAft>
+                          <a:spcPts val="800"/>
+                        </a:spcAft>
+                        <a:buNone/>
+                      </a:pPr>
+                      <a:r>
+                        <a:rPr lang="en-IN" sz="700" kern="100">
+                          <a:effectLst/>
+                        </a:rPr>
+                        <a:t> </a:t>
+                      </a:r>
+                      <a:endParaRPr lang="en-IN" sz="900" kern="100">
+                        <a:effectLst/>
+                        <a:latin typeface="Calibri" panose="020F0502020204030204" pitchFamily="34" charset="0"/>
+                        <a:ea typeface="Calibri" panose="020F0502020204030204" pitchFamily="34" charset="0"/>
+                        <a:cs typeface="Times New Roman" panose="02020603050405020304" pitchFamily="18" charset="0"/>
+                      </a:endParaRPr>
+                    </a:p>
+                  </a:txBody>
+                  <a:tcPr marL="56848" marR="56848" marT="0" marB="0">
+                    <a:lnB w="12700" cap="flat" cmpd="sng" algn="ctr">
+                      <a:solidFill>
+                        <a:schemeClr val="tx1"/>
+                      </a:solidFill>
+                      <a:prstDash val="solid"/>
+                      <a:round/>
+                      <a:headEnd type="none" w="med" len="med"/>
+                      <a:tailEnd type="none" w="med" len="med"/>
+                    </a:lnB>
+                  </a:tcPr>
+                </a:tc>
+                <a:tc>
+                  <a:txBody>
+                    <a:bodyPr/>
+                    <a:lstStyle/>
+                    <a:p>
+                      <a:pPr>
+                        <a:lnSpc>
+                          <a:spcPct val="107000"/>
+                        </a:lnSpc>
+                        <a:spcAft>
+                          <a:spcPts val="800"/>
+                        </a:spcAft>
+                        <a:buNone/>
+                      </a:pPr>
+                      <a:r>
+                        <a:rPr lang="en-IN" sz="700" kern="100">
+                          <a:effectLst/>
+                        </a:rPr>
+                        <a:t> </a:t>
+                      </a:r>
+                      <a:endParaRPr lang="en-IN" sz="900" kern="100">
+                        <a:effectLst/>
+                        <a:latin typeface="Calibri" panose="020F0502020204030204" pitchFamily="34" charset="0"/>
+                        <a:ea typeface="Calibri" panose="020F0502020204030204" pitchFamily="34" charset="0"/>
+                        <a:cs typeface="Times New Roman" panose="02020603050405020304" pitchFamily="18" charset="0"/>
+                      </a:endParaRPr>
+                    </a:p>
+                  </a:txBody>
+                  <a:tcPr marL="56848" marR="56848" marT="0" marB="0">
+                    <a:lnB w="12700" cap="flat" cmpd="sng" algn="ctr">
+                      <a:solidFill>
+                        <a:schemeClr val="tx1"/>
+                      </a:solidFill>
+                      <a:prstDash val="solid"/>
+                      <a:round/>
+                      <a:headEnd type="none" w="med" len="med"/>
+                      <a:tailEnd type="none" w="med" len="med"/>
+                    </a:lnB>
+                  </a:tcPr>
+                </a:tc>
+                <a:tc>
+                  <a:txBody>
+                    <a:bodyPr/>
+                    <a:lstStyle/>
+                    <a:p>
+                      <a:pPr>
+                        <a:lnSpc>
+                          <a:spcPct val="107000"/>
+                        </a:lnSpc>
+                        <a:spcAft>
+                          <a:spcPts val="800"/>
+                        </a:spcAft>
+                        <a:buNone/>
+                      </a:pPr>
+                      <a:r>
+                        <a:rPr lang="en-IN" sz="700" kern="100" dirty="0">
+                          <a:effectLst/>
+                        </a:rPr>
+                        <a:t> </a:t>
+                      </a:r>
+                      <a:endParaRPr lang="en-IN" sz="900" kern="100" dirty="0">
+                        <a:effectLst/>
+                        <a:latin typeface="Calibri" panose="020F0502020204030204" pitchFamily="34" charset="0"/>
+                        <a:ea typeface="Calibri" panose="020F0502020204030204" pitchFamily="34" charset="0"/>
+                        <a:cs typeface="Times New Roman" panose="02020603050405020304" pitchFamily="18" charset="0"/>
+                      </a:endParaRPr>
+                    </a:p>
+                  </a:txBody>
+                  <a:tcPr marL="56848" marR="56848" marT="0" marB="0">
+                    <a:lnB w="12700" cap="flat" cmpd="sng" algn="ctr">
+                      <a:solidFill>
+                        <a:schemeClr val="tx1"/>
+                      </a:solidFill>
+                      <a:prstDash val="solid"/>
+                      <a:round/>
+                      <a:headEnd type="none" w="med" len="med"/>
+                      <a:tailEnd type="none" w="med" len="med"/>
+                    </a:lnB>
+                    <a:solidFill>
+                      <a:schemeClr val="accent6">
+                        <a:lumMod val="75000"/>
+                      </a:schemeClr>
+                    </a:solidFill>
+                  </a:tcPr>
+                </a:tc>
+                <a:extLst>
+                  <a:ext uri="{0D108BD9-81ED-4DB2-BD59-A6C34878D82A}">
+                    <a16:rowId xmlns:a16="http://schemas.microsoft.com/office/drawing/2014/main" val="2415201320"/>
+                  </a:ext>
+                </a:extLst>
+              </a:tr>
+            </a:tbl>
+          </a:graphicData>
+        </a:graphic>
+      </p:graphicFrame>
     </p:spTree>
   </p:cSld>
   <p:clrMapOvr>
@@ -3664,38 +8854,11 @@
           <a:p>
             <a:pPr algn="l"/>
             <a:r>
-              <a:rPr sz="2700" b="1"/>
+              <a:rPr sz="2700" b="1" dirty="0">
+                <a:latin typeface="Times New Roman" panose="02020603050405020304" pitchFamily="18" charset="0"/>
+                <a:cs typeface="Times New Roman" panose="02020603050405020304" pitchFamily="18" charset="0"/>
+              </a:rPr>
               <a:t>12 | Project Contribution &amp; Current Achievement</a:t>
-            </a:r>
-          </a:p>
-        </p:txBody>
-      </p:sp>
-      <p:sp>
-        <p:nvSpPr>
-          <p:cNvPr id="4" name="TextBox 3"/>
-          <p:cNvSpPr txBox="1"/>
-          <p:nvPr/>
-        </p:nvSpPr>
-        <p:spPr>
-          <a:xfrm>
-            <a:off x="502920" y="6446520"/>
-            <a:ext cx="10972800" cy="201168"/>
-          </a:xfrm>
-          <a:prstGeom prst="rect">
-            <a:avLst/>
-          </a:prstGeom>
-          <a:noFill/>
-        </p:spPr>
-        <p:txBody>
-          <a:bodyPr wrap="square">
-            <a:spAutoFit/>
-          </a:bodyPr>
-          <a:lstStyle/>
-          <a:p>
-            <a:pPr algn="l"/>
-            <a:r>
-              <a:rPr sz="900" b="0"/>
-              <a:t>FIRST REVIEW • SAMPLE FORMAT • Slide 13</a:t>
             </a:r>
           </a:p>
         </p:txBody>
@@ -3733,7 +8896,7 @@
         </p:nvSpPr>
         <p:spPr>
           <a:xfrm>
-            <a:off x="502920" y="228600"/>
+            <a:off x="457200" y="228600"/>
             <a:ext cx="11064240" cy="502920"/>
           </a:xfrm>
           <a:prstGeom prst="rect">
@@ -3749,42 +8912,320 @@
           <a:p>
             <a:pPr algn="l"/>
             <a:r>
-              <a:rPr sz="2700" b="1"/>
+              <a:rPr sz="2700" b="1" dirty="0">
+                <a:latin typeface="Times New Roman" panose="02020603050405020304" pitchFamily="18" charset="0"/>
+                <a:cs typeface="Times New Roman" panose="02020603050405020304" pitchFamily="18" charset="0"/>
+              </a:rPr>
               <a:t>13 | Team Contribution &amp; Responsibility</a:t>
             </a:r>
           </a:p>
         </p:txBody>
       </p:sp>
-      <p:sp>
-        <p:nvSpPr>
-          <p:cNvPr id="4" name="TextBox 3"/>
-          <p:cNvSpPr txBox="1"/>
-          <p:nvPr/>
-        </p:nvSpPr>
-        <p:spPr>
-          <a:xfrm>
-            <a:off x="502920" y="6446520"/>
-            <a:ext cx="10972800" cy="201168"/>
-          </a:xfrm>
-          <a:prstGeom prst="rect">
-            <a:avLst/>
-          </a:prstGeom>
-          <a:noFill/>
-        </p:spPr>
-        <p:txBody>
-          <a:bodyPr wrap="square">
-            <a:spAutoFit/>
-          </a:bodyPr>
-          <a:lstStyle/>
-          <a:p>
-            <a:pPr algn="l"/>
-            <a:r>
-              <a:rPr sz="900" b="0"/>
-              <a:t>FIRST REVIEW • SAMPLE FORMAT • Slide 14</a:t>
-            </a:r>
-          </a:p>
-        </p:txBody>
-      </p:sp>
+      <p:graphicFrame>
+        <p:nvGraphicFramePr>
+          <p:cNvPr id="3" name="Content Placeholder 4">
+            <a:extLst>
+              <a:ext uri="{FF2B5EF4-FFF2-40B4-BE49-F238E27FC236}">
+                <a16:creationId xmlns:a16="http://schemas.microsoft.com/office/drawing/2014/main" id="{F5D51525-19AB-7CD7-25FD-29117403C63A}"/>
+              </a:ext>
+            </a:extLst>
+          </p:cNvPr>
+          <p:cNvGraphicFramePr>
+            <a:graphicFrameLocks/>
+          </p:cNvGraphicFramePr>
+          <p:nvPr>
+            <p:extLst>
+              <p:ext uri="{D42A27DB-BD31-4B8C-83A1-F6EECF244321}">
+                <p14:modId xmlns:p14="http://schemas.microsoft.com/office/powerpoint/2010/main" val="1341067467"/>
+              </p:ext>
+            </p:extLst>
+          </p:nvPr>
+        </p:nvGraphicFramePr>
+        <p:xfrm>
+          <a:off x="457200" y="1600200"/>
+          <a:ext cx="8229600" cy="4028440"/>
+        </p:xfrm>
+        <a:graphic>
+          <a:graphicData uri="http://schemas.openxmlformats.org/drawingml/2006/table">
+            <a:tbl>
+              <a:tblPr firstRow="1" bandRow="1">
+                <a:tableStyleId>{5940675A-B579-460E-94D1-54222C63F5DA}</a:tableStyleId>
+              </a:tblPr>
+              <a:tblGrid>
+                <a:gridCol w="4114800">
+                  <a:extLst>
+                    <a:ext uri="{9D8B030D-6E8A-4147-A177-3AD203B41FA5}">
+                      <a16:colId xmlns:a16="http://schemas.microsoft.com/office/drawing/2014/main" val="2800629995"/>
+                    </a:ext>
+                  </a:extLst>
+                </a:gridCol>
+                <a:gridCol w="4114800">
+                  <a:extLst>
+                    <a:ext uri="{9D8B030D-6E8A-4147-A177-3AD203B41FA5}">
+                      <a16:colId xmlns:a16="http://schemas.microsoft.com/office/drawing/2014/main" val="3218801457"/>
+                    </a:ext>
+                  </a:extLst>
+                </a:gridCol>
+              </a:tblGrid>
+              <a:tr h="370840">
+                <a:tc>
+                  <a:txBody>
+                    <a:bodyPr/>
+                    <a:lstStyle/>
+                    <a:p>
+                      <a:pPr algn="just">
+                        <a:buNone/>
+                      </a:pPr>
+                      <a:r>
+                        <a:rPr lang="en-GB" b="1" dirty="0">
+                          <a:latin typeface="Times New Roman" panose="02020603050405020304" pitchFamily="18" charset="0"/>
+                          <a:cs typeface="Times New Roman" panose="02020603050405020304" pitchFamily="18" charset="0"/>
+                        </a:rPr>
+                        <a:t>Member</a:t>
+                      </a:r>
+                    </a:p>
+                  </a:txBody>
+                  <a:tcPr anchor="ctr"/>
+                </a:tc>
+                <a:tc>
+                  <a:txBody>
+                    <a:bodyPr/>
+                    <a:lstStyle/>
+                    <a:p>
+                      <a:pPr algn="just">
+                        <a:buNone/>
+                      </a:pPr>
+                      <a:r>
+                        <a:rPr lang="en-GB" b="1" dirty="0">
+                          <a:latin typeface="Times New Roman" panose="02020603050405020304" pitchFamily="18" charset="0"/>
+                          <a:cs typeface="Times New Roman" panose="02020603050405020304" pitchFamily="18" charset="0"/>
+                        </a:rPr>
+                        <a:t>Role</a:t>
+                      </a:r>
+                    </a:p>
+                  </a:txBody>
+                  <a:tcPr anchor="ctr"/>
+                </a:tc>
+                <a:extLst>
+                  <a:ext uri="{0D108BD9-81ED-4DB2-BD59-A6C34878D82A}">
+                    <a16:rowId xmlns:a16="http://schemas.microsoft.com/office/drawing/2014/main" val="3215668190"/>
+                  </a:ext>
+                </a:extLst>
+              </a:tr>
+              <a:tr h="370840">
+                <a:tc>
+                  <a:txBody>
+                    <a:bodyPr/>
+                    <a:lstStyle/>
+                    <a:p>
+                      <a:pPr algn="just">
+                        <a:buNone/>
+                      </a:pPr>
+                      <a:r>
+                        <a:rPr lang="en-GB" b="1" dirty="0">
+                          <a:latin typeface="Times New Roman" panose="02020603050405020304" pitchFamily="18" charset="0"/>
+                          <a:cs typeface="Times New Roman" panose="02020603050405020304" pitchFamily="18" charset="0"/>
+                        </a:rPr>
+                        <a:t>I Charuhas</a:t>
+                      </a:r>
+                      <a:endParaRPr lang="en-GB" dirty="0">
+                        <a:latin typeface="Times New Roman" panose="02020603050405020304" pitchFamily="18" charset="0"/>
+                        <a:cs typeface="Times New Roman" panose="02020603050405020304" pitchFamily="18" charset="0"/>
+                      </a:endParaRPr>
+                    </a:p>
+                  </a:txBody>
+                  <a:tcPr anchor="ctr"/>
+                </a:tc>
+                <a:tc>
+                  <a:txBody>
+                    <a:bodyPr/>
+                    <a:lstStyle/>
+                    <a:p>
+                      <a:pPr algn="just">
+                        <a:buNone/>
+                      </a:pPr>
+                      <a:r>
+                        <a:rPr lang="en-GB">
+                          <a:latin typeface="Times New Roman" panose="02020603050405020304" pitchFamily="18" charset="0"/>
+                          <a:cs typeface="Times New Roman" panose="02020603050405020304" pitchFamily="18" charset="0"/>
+                        </a:rPr>
+                        <a:t>Data &amp; Knowledge Graph — FinReflectKG ingestion, Neo4j setup, graph pattern mining</a:t>
+                      </a:r>
+                    </a:p>
+                  </a:txBody>
+                  <a:tcPr anchor="ctr"/>
+                </a:tc>
+                <a:extLst>
+                  <a:ext uri="{0D108BD9-81ED-4DB2-BD59-A6C34878D82A}">
+                    <a16:rowId xmlns:a16="http://schemas.microsoft.com/office/drawing/2014/main" val="1812202355"/>
+                  </a:ext>
+                </a:extLst>
+              </a:tr>
+              <a:tr h="370840">
+                <a:tc>
+                  <a:txBody>
+                    <a:bodyPr/>
+                    <a:lstStyle/>
+                    <a:p>
+                      <a:pPr algn="just">
+                        <a:buNone/>
+                      </a:pPr>
+                      <a:r>
+                        <a:rPr lang="en-GB" b="1" dirty="0">
+                          <a:latin typeface="Times New Roman" panose="02020603050405020304" pitchFamily="18" charset="0"/>
+                          <a:cs typeface="Times New Roman" panose="02020603050405020304" pitchFamily="18" charset="0"/>
+                        </a:rPr>
+                        <a:t>CB Harsha Vardhan</a:t>
+                      </a:r>
+                      <a:endParaRPr lang="en-GB" dirty="0">
+                        <a:latin typeface="Times New Roman" panose="02020603050405020304" pitchFamily="18" charset="0"/>
+                        <a:cs typeface="Times New Roman" panose="02020603050405020304" pitchFamily="18" charset="0"/>
+                      </a:endParaRPr>
+                    </a:p>
+                  </a:txBody>
+                  <a:tcPr anchor="ctr"/>
+                </a:tc>
+                <a:tc>
+                  <a:txBody>
+                    <a:bodyPr/>
+                    <a:lstStyle/>
+                    <a:p>
+                      <a:pPr algn="just">
+                        <a:buNone/>
+                      </a:pPr>
+                      <a:r>
+                        <a:rPr lang="en-GB">
+                          <a:latin typeface="Times New Roman" panose="02020603050405020304" pitchFamily="18" charset="0"/>
+                          <a:cs typeface="Times New Roman" panose="02020603050405020304" pitchFamily="18" charset="0"/>
+                        </a:rPr>
+                        <a:t>Agentic Retrieval Core — vector search, graph traversal, symbolic computation tools, agent orchestration</a:t>
+                      </a:r>
+                    </a:p>
+                  </a:txBody>
+                  <a:tcPr anchor="ctr"/>
+                </a:tc>
+                <a:extLst>
+                  <a:ext uri="{0D108BD9-81ED-4DB2-BD59-A6C34878D82A}">
+                    <a16:rowId xmlns:a16="http://schemas.microsoft.com/office/drawing/2014/main" val="232664083"/>
+                  </a:ext>
+                </a:extLst>
+              </a:tr>
+              <a:tr h="370840">
+                <a:tc>
+                  <a:txBody>
+                    <a:bodyPr/>
+                    <a:lstStyle/>
+                    <a:p>
+                      <a:pPr algn="just">
+                        <a:buNone/>
+                      </a:pPr>
+                      <a:r>
+                        <a:rPr lang="en-GB" b="1" dirty="0">
+                          <a:latin typeface="Times New Roman" panose="02020603050405020304" pitchFamily="18" charset="0"/>
+                          <a:cs typeface="Times New Roman" panose="02020603050405020304" pitchFamily="18" charset="0"/>
+                        </a:rPr>
+                        <a:t>C Vishnuvardhan</a:t>
+                      </a:r>
+                      <a:endParaRPr lang="en-GB" dirty="0">
+                        <a:latin typeface="Times New Roman" panose="02020603050405020304" pitchFamily="18" charset="0"/>
+                        <a:cs typeface="Times New Roman" panose="02020603050405020304" pitchFamily="18" charset="0"/>
+                      </a:endParaRPr>
+                    </a:p>
+                  </a:txBody>
+                  <a:tcPr anchor="ctr"/>
+                </a:tc>
+                <a:tc>
+                  <a:txBody>
+                    <a:bodyPr/>
+                    <a:lstStyle/>
+                    <a:p>
+                      <a:pPr algn="just">
+                        <a:buNone/>
+                      </a:pPr>
+                      <a:r>
+                        <a:rPr lang="en-GB">
+                          <a:latin typeface="Times New Roman" panose="02020603050405020304" pitchFamily="18" charset="0"/>
+                          <a:cs typeface="Times New Roman" panose="02020603050405020304" pitchFamily="18" charset="0"/>
+                        </a:rPr>
+                        <a:t>Adaptive Routing &amp; Evidence Formatting — complexity estimator, routing controller, structured formatting fix</a:t>
+                      </a:r>
+                    </a:p>
+                  </a:txBody>
+                  <a:tcPr anchor="ctr"/>
+                </a:tc>
+                <a:extLst>
+                  <a:ext uri="{0D108BD9-81ED-4DB2-BD59-A6C34878D82A}">
+                    <a16:rowId xmlns:a16="http://schemas.microsoft.com/office/drawing/2014/main" val="1727434517"/>
+                  </a:ext>
+                </a:extLst>
+              </a:tr>
+              <a:tr h="370840">
+                <a:tc>
+                  <a:txBody>
+                    <a:bodyPr/>
+                    <a:lstStyle/>
+                    <a:p>
+                      <a:pPr algn="just">
+                        <a:buNone/>
+                      </a:pPr>
+                      <a:r>
+                        <a:rPr lang="en-GB" b="1" dirty="0">
+                          <a:latin typeface="Times New Roman" panose="02020603050405020304" pitchFamily="18" charset="0"/>
+                          <a:cs typeface="Times New Roman" panose="02020603050405020304" pitchFamily="18" charset="0"/>
+                        </a:rPr>
+                        <a:t>Y </a:t>
+                      </a:r>
+                      <a:r>
+                        <a:rPr lang="en-GB" b="1" dirty="0" err="1">
+                          <a:latin typeface="Times New Roman" panose="02020603050405020304" pitchFamily="18" charset="0"/>
+                          <a:cs typeface="Times New Roman" panose="02020603050405020304" pitchFamily="18" charset="0"/>
+                        </a:rPr>
+                        <a:t>Bhasith</a:t>
+                      </a:r>
+                      <a:r>
+                        <a:rPr lang="en-GB" b="1" dirty="0">
+                          <a:latin typeface="Times New Roman" panose="02020603050405020304" pitchFamily="18" charset="0"/>
+                          <a:cs typeface="Times New Roman" panose="02020603050405020304" pitchFamily="18" charset="0"/>
+                        </a:rPr>
+                        <a:t> Sai</a:t>
+                      </a:r>
+                      <a:endParaRPr lang="en-GB" dirty="0">
+                        <a:latin typeface="Times New Roman" panose="02020603050405020304" pitchFamily="18" charset="0"/>
+                        <a:cs typeface="Times New Roman" panose="02020603050405020304" pitchFamily="18" charset="0"/>
+                      </a:endParaRPr>
+                    </a:p>
+                  </a:txBody>
+                  <a:tcPr anchor="ctr"/>
+                </a:tc>
+                <a:tc>
+                  <a:txBody>
+                    <a:bodyPr/>
+                    <a:lstStyle/>
+                    <a:p>
+                      <a:pPr algn="just">
+                        <a:buNone/>
+                      </a:pPr>
+                      <a:r>
+                        <a:rPr lang="en-GB" dirty="0">
+                          <a:latin typeface="Times New Roman" panose="02020603050405020304" pitchFamily="18" charset="0"/>
+                          <a:cs typeface="Times New Roman" panose="02020603050405020304" pitchFamily="18" charset="0"/>
+                        </a:rPr>
+                        <a:t>Evaluation &amp; Provenance — claim-level verification, accuracy analysis, latency/cost benchmarking</a:t>
+                      </a:r>
+                    </a:p>
+                  </a:txBody>
+                  <a:tcPr anchor="ctr"/>
+                </a:tc>
+                <a:extLst>
+                  <a:ext uri="{0D108BD9-81ED-4DB2-BD59-A6C34878D82A}">
+                    <a16:rowId xmlns:a16="http://schemas.microsoft.com/office/drawing/2014/main" val="2773774956"/>
+                  </a:ext>
+                </a:extLst>
+              </a:tr>
+            </a:tbl>
+          </a:graphicData>
+        </a:graphic>
+      </p:graphicFrame>
     </p:spTree>
   </p:cSld>
   <p:clrMapOvr>
@@ -3834,7 +9275,10 @@
           <a:p>
             <a:pPr algn="l"/>
             <a:r>
-              <a:rPr sz="2700" b="1"/>
+              <a:rPr sz="2700" b="1" dirty="0">
+                <a:latin typeface="Times New Roman" panose="02020603050405020304" pitchFamily="18" charset="0"/>
+                <a:cs typeface="Times New Roman" panose="02020603050405020304" pitchFamily="18" charset="0"/>
+              </a:rPr>
               <a:t>14 | References</a:t>
             </a:r>
           </a:p>
@@ -3842,31 +9286,378 @@
       </p:sp>
       <p:sp>
         <p:nvSpPr>
-          <p:cNvPr id="4" name="TextBox 3"/>
-          <p:cNvSpPr txBox="1"/>
+          <p:cNvPr id="3" name="Content Placeholder 2">
+            <a:extLst>
+              <a:ext uri="{FF2B5EF4-FFF2-40B4-BE49-F238E27FC236}">
+                <a16:creationId xmlns:a16="http://schemas.microsoft.com/office/drawing/2014/main" id="{9E1C85F0-1D28-6D4E-100A-CBA1F6E85B4A}"/>
+              </a:ext>
+            </a:extLst>
+          </p:cNvPr>
+          <p:cNvSpPr txBox="1">
+            <a:spLocks/>
+          </p:cNvSpPr>
           <p:nvPr/>
         </p:nvSpPr>
         <p:spPr>
           <a:xfrm>
-            <a:off x="502920" y="6446520"/>
-            <a:ext cx="10972800" cy="201168"/>
+            <a:off x="502920" y="1186962"/>
+            <a:ext cx="8229600" cy="4756638"/>
           </a:xfrm>
           <a:prstGeom prst="rect">
             <a:avLst/>
           </a:prstGeom>
-          <a:noFill/>
         </p:spPr>
         <p:txBody>
-          <a:bodyPr wrap="square">
-            <a:spAutoFit/>
+          <a:bodyPr>
+            <a:normAutofit lnSpcReduction="10000"/>
           </a:bodyPr>
-          <a:lstStyle/>
-          <a:p>
-            <a:pPr algn="l"/>
-            <a:r>
-              <a:rPr sz="900" b="0"/>
-              <a:t>FIRST REVIEW • SAMPLE FORMAT • Slide 15</a:t>
-            </a:r>
+          <a:lstStyle>
+            <a:lvl1pPr marL="342900" indent="-342900" algn="l" defTabSz="457200" rtl="0" eaLnBrk="1" latinLnBrk="0" hangingPunct="1">
+              <a:spcBef>
+                <a:spcPct val="20000"/>
+              </a:spcBef>
+              <a:buFont typeface="Arial"/>
+              <a:buChar char="•"/>
+              <a:defRPr sz="3200" kern="1200">
+                <a:solidFill>
+                  <a:schemeClr val="tx1"/>
+                </a:solidFill>
+                <a:latin typeface="+mn-lt"/>
+                <a:ea typeface="+mn-ea"/>
+                <a:cs typeface="+mn-cs"/>
+              </a:defRPr>
+            </a:lvl1pPr>
+            <a:lvl2pPr marL="742950" indent="-285750" algn="l" defTabSz="457200" rtl="0" eaLnBrk="1" latinLnBrk="0" hangingPunct="1">
+              <a:spcBef>
+                <a:spcPct val="20000"/>
+              </a:spcBef>
+              <a:buFont typeface="Arial"/>
+              <a:buChar char="–"/>
+              <a:defRPr sz="2800" kern="1200">
+                <a:solidFill>
+                  <a:schemeClr val="tx1"/>
+                </a:solidFill>
+                <a:latin typeface="+mn-lt"/>
+                <a:ea typeface="+mn-ea"/>
+                <a:cs typeface="+mn-cs"/>
+              </a:defRPr>
+            </a:lvl2pPr>
+            <a:lvl3pPr marL="1143000" indent="-228600" algn="l" defTabSz="457200" rtl="0" eaLnBrk="1" latinLnBrk="0" hangingPunct="1">
+              <a:spcBef>
+                <a:spcPct val="20000"/>
+              </a:spcBef>
+              <a:buFont typeface="Arial"/>
+              <a:buChar char="•"/>
+              <a:defRPr sz="2400" kern="1200">
+                <a:solidFill>
+                  <a:schemeClr val="tx1"/>
+                </a:solidFill>
+                <a:latin typeface="+mn-lt"/>
+                <a:ea typeface="+mn-ea"/>
+                <a:cs typeface="+mn-cs"/>
+              </a:defRPr>
+            </a:lvl3pPr>
+            <a:lvl4pPr marL="1600200" indent="-228600" algn="l" defTabSz="457200" rtl="0" eaLnBrk="1" latinLnBrk="0" hangingPunct="1">
+              <a:spcBef>
+                <a:spcPct val="20000"/>
+              </a:spcBef>
+              <a:buFont typeface="Arial"/>
+              <a:buChar char="–"/>
+              <a:defRPr sz="2000" kern="1200">
+                <a:solidFill>
+                  <a:schemeClr val="tx1"/>
+                </a:solidFill>
+                <a:latin typeface="+mn-lt"/>
+                <a:ea typeface="+mn-ea"/>
+                <a:cs typeface="+mn-cs"/>
+              </a:defRPr>
+            </a:lvl4pPr>
+            <a:lvl5pPr marL="2057400" indent="-228600" algn="l" defTabSz="457200" rtl="0" eaLnBrk="1" latinLnBrk="0" hangingPunct="1">
+              <a:spcBef>
+                <a:spcPct val="20000"/>
+              </a:spcBef>
+              <a:buFont typeface="Arial"/>
+              <a:buChar char="»"/>
+              <a:defRPr sz="2000" kern="1200">
+                <a:solidFill>
+                  <a:schemeClr val="tx1"/>
+                </a:solidFill>
+                <a:latin typeface="+mn-lt"/>
+                <a:ea typeface="+mn-ea"/>
+                <a:cs typeface="+mn-cs"/>
+              </a:defRPr>
+            </a:lvl5pPr>
+            <a:lvl6pPr marL="2514600" indent="-228600" algn="l" defTabSz="457200" rtl="0" eaLnBrk="1" latinLnBrk="0" hangingPunct="1">
+              <a:spcBef>
+                <a:spcPct val="20000"/>
+              </a:spcBef>
+              <a:buFont typeface="Arial"/>
+              <a:buChar char="•"/>
+              <a:defRPr sz="2000" kern="1200">
+                <a:solidFill>
+                  <a:schemeClr val="tx1"/>
+                </a:solidFill>
+                <a:latin typeface="+mn-lt"/>
+                <a:ea typeface="+mn-ea"/>
+                <a:cs typeface="+mn-cs"/>
+              </a:defRPr>
+            </a:lvl6pPr>
+            <a:lvl7pPr marL="2971800" indent="-228600" algn="l" defTabSz="457200" rtl="0" eaLnBrk="1" latinLnBrk="0" hangingPunct="1">
+              <a:spcBef>
+                <a:spcPct val="20000"/>
+              </a:spcBef>
+              <a:buFont typeface="Arial"/>
+              <a:buChar char="•"/>
+              <a:defRPr sz="2000" kern="1200">
+                <a:solidFill>
+                  <a:schemeClr val="tx1"/>
+                </a:solidFill>
+                <a:latin typeface="+mn-lt"/>
+                <a:ea typeface="+mn-ea"/>
+                <a:cs typeface="+mn-cs"/>
+              </a:defRPr>
+            </a:lvl7pPr>
+            <a:lvl8pPr marL="3429000" indent="-228600" algn="l" defTabSz="457200" rtl="0" eaLnBrk="1" latinLnBrk="0" hangingPunct="1">
+              <a:spcBef>
+                <a:spcPct val="20000"/>
+              </a:spcBef>
+              <a:buFont typeface="Arial"/>
+              <a:buChar char="•"/>
+              <a:defRPr sz="2000" kern="1200">
+                <a:solidFill>
+                  <a:schemeClr val="tx1"/>
+                </a:solidFill>
+                <a:latin typeface="+mn-lt"/>
+                <a:ea typeface="+mn-ea"/>
+                <a:cs typeface="+mn-cs"/>
+              </a:defRPr>
+            </a:lvl8pPr>
+            <a:lvl9pPr marL="3886200" indent="-228600" algn="l" defTabSz="457200" rtl="0" eaLnBrk="1" latinLnBrk="0" hangingPunct="1">
+              <a:spcBef>
+                <a:spcPct val="20000"/>
+              </a:spcBef>
+              <a:buFont typeface="Arial"/>
+              <a:buChar char="•"/>
+              <a:defRPr sz="2000" kern="1200">
+                <a:solidFill>
+                  <a:schemeClr val="tx1"/>
+                </a:solidFill>
+                <a:latin typeface="+mn-lt"/>
+                <a:ea typeface="+mn-ea"/>
+                <a:cs typeface="+mn-cs"/>
+              </a:defRPr>
+            </a:lvl9pPr>
+          </a:lstStyle>
+          <a:p>
+            <a:pPr marL="0" indent="0" algn="just">
+              <a:buFont typeface="Arial"/>
+              <a:buNone/>
+            </a:pPr>
+            <a:r>
+              <a:rPr lang="en-GB" sz="1600" b="1">
+                <a:latin typeface="Times New Roman" panose="02020603050405020304" pitchFamily="18" charset="0"/>
+                <a:cs typeface="Times New Roman" panose="02020603050405020304" pitchFamily="18" charset="0"/>
+              </a:rPr>
+              <a:t>[1]</a:t>
+            </a:r>
+            <a:r>
+              <a:rPr lang="en-GB" sz="1600">
+                <a:latin typeface="Times New Roman" panose="02020603050405020304" pitchFamily="18" charset="0"/>
+                <a:cs typeface="Times New Roman" panose="02020603050405020304" pitchFamily="18" charset="0"/>
+              </a:rPr>
+              <a:t> D. Edge et al., </a:t>
+            </a:r>
+            <a:r>
+              <a:rPr lang="en-GB" sz="1600" i="1">
+                <a:latin typeface="Times New Roman" panose="02020603050405020304" pitchFamily="18" charset="0"/>
+                <a:cs typeface="Times New Roman" panose="02020603050405020304" pitchFamily="18" charset="0"/>
+              </a:rPr>
+              <a:t>"From Local to Global: A Graph RAG Approach to Query-Focused Summarization,"</a:t>
+            </a:r>
+            <a:r>
+              <a:rPr lang="en-GB" sz="1600">
+                <a:latin typeface="Times New Roman" panose="02020603050405020304" pitchFamily="18" charset="0"/>
+                <a:cs typeface="Times New Roman" panose="02020603050405020304" pitchFamily="18" charset="0"/>
+              </a:rPr>
+              <a:t> arXiv preprint arXiv:2404.16130, Apr. 2024. </a:t>
+            </a:r>
+          </a:p>
+          <a:p>
+            <a:pPr marL="0" indent="0" algn="just">
+              <a:buFont typeface="Arial"/>
+              <a:buNone/>
+            </a:pPr>
+            <a:endParaRPr lang="en-GB" sz="1600">
+              <a:latin typeface="Times New Roman" panose="02020603050405020304" pitchFamily="18" charset="0"/>
+              <a:cs typeface="Times New Roman" panose="02020603050405020304" pitchFamily="18" charset="0"/>
+            </a:endParaRPr>
+          </a:p>
+          <a:p>
+            <a:pPr marL="0" indent="0" algn="just">
+              <a:buFont typeface="Arial"/>
+              <a:buNone/>
+            </a:pPr>
+            <a:r>
+              <a:rPr lang="en-GB" sz="1600" b="1">
+                <a:latin typeface="Times New Roman" panose="02020603050405020304" pitchFamily="18" charset="0"/>
+                <a:cs typeface="Times New Roman" panose="02020603050405020304" pitchFamily="18" charset="0"/>
+              </a:rPr>
+              <a:t>[2]</a:t>
+            </a:r>
+            <a:r>
+              <a:rPr lang="en-GB" sz="1600">
+                <a:latin typeface="Times New Roman" panose="02020603050405020304" pitchFamily="18" charset="0"/>
+                <a:cs typeface="Times New Roman" panose="02020603050405020304" pitchFamily="18" charset="0"/>
+              </a:rPr>
+              <a:t> J. Sun et al., </a:t>
+            </a:r>
+            <a:r>
+              <a:rPr lang="en-GB" sz="1600" i="1">
+                <a:latin typeface="Times New Roman" panose="02020603050405020304" pitchFamily="18" charset="0"/>
+                <a:cs typeface="Times New Roman" panose="02020603050405020304" pitchFamily="18" charset="0"/>
+              </a:rPr>
+              <a:t>"Think-on-Graph: Deep and Responsible Reasoning of Large Language Model on Knowledge Graph,"</a:t>
+            </a:r>
+            <a:r>
+              <a:rPr lang="en-GB" sz="1600">
+                <a:latin typeface="Times New Roman" panose="02020603050405020304" pitchFamily="18" charset="0"/>
+                <a:cs typeface="Times New Roman" panose="02020603050405020304" pitchFamily="18" charset="0"/>
+              </a:rPr>
+              <a:t> in Proc. International Conference on Learning Representations (ICLR), 2024. </a:t>
+            </a:r>
+          </a:p>
+          <a:p>
+            <a:pPr marL="0" indent="0" algn="just">
+              <a:buFont typeface="Arial"/>
+              <a:buNone/>
+            </a:pPr>
+            <a:endParaRPr lang="en-GB" sz="1600">
+              <a:latin typeface="Times New Roman" panose="02020603050405020304" pitchFamily="18" charset="0"/>
+              <a:cs typeface="Times New Roman" panose="02020603050405020304" pitchFamily="18" charset="0"/>
+            </a:endParaRPr>
+          </a:p>
+          <a:p>
+            <a:pPr marL="0" indent="0" algn="just">
+              <a:buFont typeface="Arial"/>
+              <a:buNone/>
+            </a:pPr>
+            <a:r>
+              <a:rPr lang="en-GB" sz="1600" b="1">
+                <a:latin typeface="Times New Roman" panose="02020603050405020304" pitchFamily="18" charset="0"/>
+                <a:cs typeface="Times New Roman" panose="02020603050405020304" pitchFamily="18" charset="0"/>
+              </a:rPr>
+              <a:t>[3]</a:t>
+            </a:r>
+            <a:r>
+              <a:rPr lang="en-GB" sz="1600">
+                <a:latin typeface="Times New Roman" panose="02020603050405020304" pitchFamily="18" charset="0"/>
+                <a:cs typeface="Times New Roman" panose="02020603050405020304" pitchFamily="18" charset="0"/>
+              </a:rPr>
+              <a:t> B. Sarmah, B. Hall, R. Rao, S. Patel, S. Pasquali, and D. Mehta, </a:t>
+            </a:r>
+            <a:r>
+              <a:rPr lang="en-GB" sz="1600" i="1">
+                <a:latin typeface="Times New Roman" panose="02020603050405020304" pitchFamily="18" charset="0"/>
+                <a:cs typeface="Times New Roman" panose="02020603050405020304" pitchFamily="18" charset="0"/>
+              </a:rPr>
+              <a:t>"HybridRAG: Integrating Knowledge Graphs and Vector Retrieval Augmented Generation for Efficient Information Extraction,"</a:t>
+            </a:r>
+            <a:r>
+              <a:rPr lang="en-GB" sz="1600">
+                <a:latin typeface="Times New Roman" panose="02020603050405020304" pitchFamily="18" charset="0"/>
+                <a:cs typeface="Times New Roman" panose="02020603050405020304" pitchFamily="18" charset="0"/>
+              </a:rPr>
+              <a:t> in Proc. International Conference on AI in Finance (ICAIF), 2024. </a:t>
+            </a:r>
+          </a:p>
+          <a:p>
+            <a:pPr marL="0" indent="0" algn="just">
+              <a:buFont typeface="Arial"/>
+              <a:buNone/>
+            </a:pPr>
+            <a:endParaRPr lang="en-GB" sz="1600"/>
+          </a:p>
+          <a:p>
+            <a:pPr marL="0" indent="0" algn="just">
+              <a:buFont typeface="Arial"/>
+              <a:buNone/>
+            </a:pPr>
+            <a:r>
+              <a:rPr lang="en-GB" sz="1600" b="1">
+                <a:latin typeface="Times New Roman" panose="02020603050405020304" pitchFamily="18" charset="0"/>
+                <a:cs typeface="Times New Roman" panose="02020603050405020304" pitchFamily="18" charset="0"/>
+              </a:rPr>
+              <a:t>[4] </a:t>
+            </a:r>
+            <a:r>
+              <a:rPr lang="en-GB" sz="1600">
+                <a:latin typeface="Times New Roman" panose="02020603050405020304" pitchFamily="18" charset="0"/>
+                <a:cs typeface="Times New Roman" panose="02020603050405020304" pitchFamily="18" charset="0"/>
+              </a:rPr>
+              <a:t>S. Jeong, J. Baek, S. Cho, S. J. Hwang, and J. C. Park, </a:t>
+            </a:r>
+            <a:r>
+              <a:rPr lang="en-GB" sz="1600" i="1">
+                <a:latin typeface="Times New Roman" panose="02020603050405020304" pitchFamily="18" charset="0"/>
+                <a:cs typeface="Times New Roman" panose="02020603050405020304" pitchFamily="18" charset="0"/>
+              </a:rPr>
+              <a:t>"Adaptive-RAG: Learning to Adapt Retrieval-Augmented Large Language Models through Question Complexity," </a:t>
+            </a:r>
+            <a:r>
+              <a:rPr lang="en-GB" sz="1600">
+                <a:latin typeface="Times New Roman" panose="02020603050405020304" pitchFamily="18" charset="0"/>
+                <a:cs typeface="Times New Roman" panose="02020603050405020304" pitchFamily="18" charset="0"/>
+              </a:rPr>
+              <a:t>in Proc. Conference of the North American Chapter of the Association for Computational Linguistics: Human Language Technologies (NAACL-HLT), 2024.</a:t>
+            </a:r>
+          </a:p>
+          <a:p>
+            <a:pPr marL="0" indent="0" algn="just">
+              <a:buFont typeface="Arial"/>
+              <a:buNone/>
+            </a:pPr>
+            <a:endParaRPr lang="en-GB" sz="1600">
+              <a:latin typeface="Times New Roman" panose="02020603050405020304" pitchFamily="18" charset="0"/>
+              <a:cs typeface="Times New Roman" panose="02020603050405020304" pitchFamily="18" charset="0"/>
+            </a:endParaRPr>
+          </a:p>
+          <a:p>
+            <a:pPr marL="0" indent="0" algn="just">
+              <a:buFont typeface="Arial"/>
+              <a:buNone/>
+            </a:pPr>
+            <a:r>
+              <a:rPr lang="en-GB" sz="1600" b="1">
+                <a:latin typeface="Times New Roman" panose="02020603050405020304" pitchFamily="18" charset="0"/>
+                <a:cs typeface="Times New Roman" panose="02020603050405020304" pitchFamily="18" charset="0"/>
+              </a:rPr>
+              <a:t>[5]</a:t>
+            </a:r>
+            <a:r>
+              <a:rPr lang="en-GB" sz="1600">
+                <a:latin typeface="Times New Roman" panose="02020603050405020304" pitchFamily="18" charset="0"/>
+                <a:cs typeface="Times New Roman" panose="02020603050405020304" pitchFamily="18" charset="0"/>
+              </a:rPr>
+              <a:t> A. Arun, R. R. Harsh, B. Sarmah, and S. Pasquali, </a:t>
+            </a:r>
+            <a:r>
+              <a:rPr lang="en-GB" sz="1600" i="1">
+                <a:latin typeface="Times New Roman" panose="02020603050405020304" pitchFamily="18" charset="0"/>
+                <a:cs typeface="Times New Roman" panose="02020603050405020304" pitchFamily="18" charset="0"/>
+              </a:rPr>
+              <a:t>"FinReflectKG-MultiHop: Financial QA Benchmark for Reasoning with Knowledge Graph Evidence,"</a:t>
+            </a:r>
+            <a:r>
+              <a:rPr lang="en-GB" sz="1600">
+                <a:latin typeface="Times New Roman" panose="02020603050405020304" pitchFamily="18" charset="0"/>
+                <a:cs typeface="Times New Roman" panose="02020603050405020304" pitchFamily="18" charset="0"/>
+              </a:rPr>
+              <a:t> arXiv preprint arXiv:2510.02906, 2025.</a:t>
+            </a:r>
+            <a:endParaRPr lang="en-GB" sz="1600" dirty="0">
+              <a:latin typeface="Times New Roman" panose="02020603050405020304" pitchFamily="18" charset="0"/>
+              <a:cs typeface="Times New Roman" panose="02020603050405020304" pitchFamily="18" charset="0"/>
+            </a:endParaRPr>
           </a:p>
         </p:txBody>
       </p:sp>
@@ -3903,7 +9694,7 @@
         </p:nvSpPr>
         <p:spPr>
           <a:xfrm>
-            <a:off x="502920" y="228600"/>
+            <a:off x="685800" y="490611"/>
             <a:ext cx="11064240" cy="502920"/>
           </a:xfrm>
           <a:prstGeom prst="rect">
@@ -3919,7 +9710,10 @@
           <a:p>
             <a:pPr algn="l"/>
             <a:r>
-              <a:rPr sz="2700" b="1"/>
+              <a:rPr sz="2700" b="1" dirty="0">
+                <a:latin typeface="Times New Roman" panose="02020603050405020304" pitchFamily="18" charset="0"/>
+                <a:cs typeface="Times New Roman" panose="02020603050405020304" pitchFamily="18" charset="0"/>
+              </a:rPr>
               <a:t>01 | Project Progress Since Zeroth Review</a:t>
             </a:r>
           </a:p>
@@ -3933,8 +9727,8 @@
         </p:nvSpPr>
         <p:spPr>
           <a:xfrm>
-            <a:off x="685800" y="1143000"/>
-            <a:ext cx="8147304" cy="2816156"/>
+            <a:off x="685800" y="1433146"/>
+            <a:ext cx="8147304" cy="5028556"/>
           </a:xfrm>
           <a:prstGeom prst="rect">
             <a:avLst/>
@@ -3947,82 +9741,127 @@
           </a:bodyPr>
           <a:lstStyle/>
           <a:p>
-            <a:pPr>
-              <a:spcAft>
-                <a:spcPts val="1000"/>
-              </a:spcAft>
-              <a:defRPr sz="1900"/>
+            <a:pPr lvl="0" algn="just">
+              <a:lnSpc>
+                <a:spcPct val="150000"/>
+              </a:lnSpc>
             </a:pPr>
             <a:r>
-              <a:rPr dirty="0"/>
-              <a:t>Core message of First Review: show what has been DONE, IMPLEMENTED and VALIDATED since the Zeroth Review.</a:t>
-            </a:r>
-          </a:p>
-          <a:p>
-            <a:pPr>
-              <a:spcAft>
-                <a:spcPts val="1000"/>
-              </a:spcAft>
-              <a:defRPr sz="1900"/>
+              <a:rPr lang="en-GB" b="1" dirty="0">
+                <a:latin typeface="Times New Roman" panose="02020603050405020304" pitchFamily="18" charset="0"/>
+                <a:cs typeface="Times New Roman" panose="02020603050405020304" pitchFamily="18" charset="0"/>
+              </a:rPr>
+              <a:t>Oracle Reasoning Experiment:</a:t>
+            </a:r>
+            <a:r>
+              <a:rPr lang="en-GB" dirty="0">
+                <a:latin typeface="Times New Roman" panose="02020603050405020304" pitchFamily="18" charset="0"/>
+                <a:cs typeface="Times New Roman" panose="02020603050405020304" pitchFamily="18" charset="0"/>
+              </a:rPr>
+              <a:t> Tested </a:t>
+            </a:r>
+            <a:r>
+              <a:rPr lang="en-GB" dirty="0" err="1">
+                <a:latin typeface="Times New Roman" panose="02020603050405020304" pitchFamily="18" charset="0"/>
+                <a:cs typeface="Times New Roman" panose="02020603050405020304" pitchFamily="18" charset="0"/>
+              </a:rPr>
+              <a:t>FinQA</a:t>
+            </a:r>
+            <a:r>
+              <a:rPr lang="en-GB" dirty="0">
+                <a:latin typeface="Times New Roman" panose="02020603050405020304" pitchFamily="18" charset="0"/>
+                <a:cs typeface="Times New Roman" panose="02020603050405020304" pitchFamily="18" charset="0"/>
+              </a:rPr>
+              <a:t> benchmark with 100% gold retrieval, proving that LLM reasoning accuracy sharply drops from 100% (3-step) to 20% (4-step) across 5 distinct failure modes</a:t>
+            </a:r>
+          </a:p>
+          <a:p>
+            <a:pPr lvl="0" algn="just">
+              <a:lnSpc>
+                <a:spcPct val="150000"/>
+              </a:lnSpc>
             </a:pPr>
             <a:r>
-              <a:rPr dirty="0"/>
-              <a:t>Problem → Gap → Objective → Methodology → Implementation → Experiment → Result.</a:t>
-            </a:r>
-          </a:p>
-          <a:p>
-            <a:pPr>
-              <a:spcAft>
-                <a:spcPts val="1000"/>
-              </a:spcAft>
-              <a:defRPr sz="1900"/>
+              <a:rPr lang="en-GB" b="1" dirty="0">
+                <a:latin typeface="Times New Roman" panose="02020603050405020304" pitchFamily="18" charset="0"/>
+                <a:cs typeface="Times New Roman" panose="02020603050405020304" pitchFamily="18" charset="0"/>
+              </a:rPr>
+              <a:t>Hybrid Adaptive Query Router Built:</a:t>
+            </a:r>
+            <a:r>
+              <a:rPr lang="en-GB" dirty="0">
+                <a:latin typeface="Times New Roman" panose="02020603050405020304" pitchFamily="18" charset="0"/>
+                <a:cs typeface="Times New Roman" panose="02020603050405020304" pitchFamily="18" charset="0"/>
+              </a:rPr>
+              <a:t> Implemented a 4-route controller (Vector, Graph, Symbolic, Hybrid) combining entity extraction, topology density and PPR ranking with 100% routing accuracy</a:t>
+            </a:r>
+          </a:p>
+          <a:p>
+            <a:pPr lvl="0" algn="just">
+              <a:lnSpc>
+                <a:spcPct val="150000"/>
+              </a:lnSpc>
             </a:pPr>
             <a:r>
-              <a:rPr dirty="0"/>
-              <a:t>Highlight completed modules and measurable progress rather than repeating the proposal.</a:t>
-            </a:r>
-          </a:p>
-          <a:p>
-            <a:pPr>
-              <a:spcAft>
-                <a:spcPts val="1000"/>
-              </a:spcAft>
-              <a:defRPr sz="1900"/>
+              <a:rPr lang="en-GB" b="1" dirty="0">
+                <a:latin typeface="Times New Roman" panose="02020603050405020304" pitchFamily="18" charset="0"/>
+                <a:cs typeface="Times New Roman" panose="02020603050405020304" pitchFamily="18" charset="0"/>
+              </a:rPr>
+              <a:t>Structured Evidence Formatter Developed:</a:t>
+            </a:r>
+            <a:r>
+              <a:rPr lang="en-GB" dirty="0">
+                <a:latin typeface="Times New Roman" panose="02020603050405020304" pitchFamily="18" charset="0"/>
+                <a:cs typeface="Times New Roman" panose="02020603050405020304" pitchFamily="18" charset="0"/>
+              </a:rPr>
+              <a:t> Typed Markdown table formatting improving distractor resistance from 66.7% → 100% on complex entity classification queries</a:t>
+            </a:r>
+          </a:p>
+          <a:p>
+            <a:pPr lvl="0" algn="just">
+              <a:lnSpc>
+                <a:spcPct val="150000"/>
+              </a:lnSpc>
             </a:pPr>
             <a:r>
-              <a:rPr dirty="0"/>
-              <a:t>Use evidence: architecture, implementation screenshots, prototype/demo, test cases and results.</a:t>
-            </a:r>
-          </a:p>
-        </p:txBody>
-      </p:sp>
-      <p:sp>
-        <p:nvSpPr>
-          <p:cNvPr id="4" name="TextBox 3"/>
-          <p:cNvSpPr txBox="1"/>
-          <p:nvPr/>
-        </p:nvSpPr>
-        <p:spPr>
-          <a:xfrm>
-            <a:off x="502920" y="6446520"/>
-            <a:ext cx="10972800" cy="201168"/>
-          </a:xfrm>
-          <a:prstGeom prst="rect">
-            <a:avLst/>
-          </a:prstGeom>
-          <a:noFill/>
-        </p:spPr>
-        <p:txBody>
-          <a:bodyPr wrap="square">
-            <a:spAutoFit/>
-          </a:bodyPr>
-          <a:lstStyle/>
-          <a:p>
-            <a:pPr algn="l"/>
-            <a:r>
-              <a:rPr sz="900" b="0"/>
-              <a:t>FIRST REVIEW • SAMPLE FORMAT • Slide 2</a:t>
-            </a:r>
+              <a:rPr lang="en-GB" b="1" dirty="0">
+                <a:latin typeface="Times New Roman" panose="02020603050405020304" pitchFamily="18" charset="0"/>
+                <a:cs typeface="Times New Roman" panose="02020603050405020304" pitchFamily="18" charset="0"/>
+              </a:rPr>
+              <a:t>Parallel Hybrid Retrieval:</a:t>
+            </a:r>
+            <a:r>
+              <a:rPr lang="en-GB" dirty="0">
+                <a:latin typeface="Times New Roman" panose="02020603050405020304" pitchFamily="18" charset="0"/>
+                <a:cs typeface="Times New Roman" panose="02020603050405020304" pitchFamily="18" charset="0"/>
+              </a:rPr>
+              <a:t> Concurrent </a:t>
+            </a:r>
+            <a:r>
+              <a:rPr lang="en-GB" dirty="0" err="1">
+                <a:latin typeface="Times New Roman" panose="02020603050405020304" pitchFamily="18" charset="0"/>
+                <a:cs typeface="Times New Roman" panose="02020603050405020304" pitchFamily="18" charset="0"/>
+              </a:rPr>
+              <a:t>ThreadPool</a:t>
+            </a:r>
+            <a:r>
+              <a:rPr lang="en-GB" dirty="0">
+                <a:latin typeface="Times New Roman" panose="02020603050405020304" pitchFamily="18" charset="0"/>
+                <a:cs typeface="Times New Roman" panose="02020603050405020304" pitchFamily="18" charset="0"/>
+              </a:rPr>
+              <a:t> retrieval merging vector text passages with PPR-ranked graph triples for multi-faceted financial queries</a:t>
+            </a:r>
+          </a:p>
+          <a:p>
+            <a:pPr lvl="0" algn="just">
+              <a:lnSpc>
+                <a:spcPct val="150000"/>
+              </a:lnSpc>
+            </a:pPr>
+            <a:endParaRPr lang="en-GB" dirty="0">
+              <a:latin typeface="Times New Roman" panose="02020603050405020304" pitchFamily="18" charset="0"/>
+              <a:cs typeface="Times New Roman" panose="02020603050405020304" pitchFamily="18" charset="0"/>
+            </a:endParaRPr>
           </a:p>
         </p:txBody>
       </p:sp>
@@ -4075,7 +9914,10 @@
           <a:p>
             <a:pPr algn="l"/>
             <a:r>
-              <a:rPr sz="2700" b="1"/>
+              <a:rPr sz="2700" b="1" dirty="0">
+                <a:latin typeface="Times New Roman" panose="02020603050405020304" pitchFamily="18" charset="0"/>
+                <a:cs typeface="Times New Roman" panose="02020603050405020304" pitchFamily="18" charset="0"/>
+              </a:rPr>
               <a:t>02 | Motivation &amp; Problem Statement</a:t>
             </a:r>
           </a:p>
@@ -4089,8 +9931,8 @@
         </p:nvSpPr>
         <p:spPr>
           <a:xfrm>
-            <a:off x="685800" y="1143000"/>
-            <a:ext cx="7982712" cy="2487861"/>
+            <a:off x="502920" y="924951"/>
+            <a:ext cx="7702062" cy="5138971"/>
           </a:xfrm>
           <a:prstGeom prst="rect">
             <a:avLst/>
@@ -4103,107 +9945,175 @@
           </a:bodyPr>
           <a:lstStyle/>
           <a:p>
-            <a:pPr>
+            <a:pPr algn="just">
+              <a:lnSpc>
+                <a:spcPct val="150000"/>
+              </a:lnSpc>
               <a:spcAft>
                 <a:spcPts val="1000"/>
               </a:spcAft>
               <a:defRPr sz="1900"/>
             </a:pPr>
-            <a:endParaRPr lang="en-IN" dirty="0"/>
-          </a:p>
-          <a:p>
-            <a:pPr>
+            <a:r>
+              <a:rPr sz="1700" b="1" dirty="0">
+                <a:latin typeface="Times New Roman" panose="02020603050405020304" pitchFamily="18" charset="0"/>
+                <a:cs typeface="Times New Roman" panose="02020603050405020304" pitchFamily="18" charset="0"/>
+              </a:rPr>
+              <a:t>Problem:</a:t>
+            </a:r>
+            <a:r>
+              <a:rPr lang="en-GB" sz="1700" b="1" dirty="0">
+                <a:latin typeface="Times New Roman" panose="02020603050405020304" pitchFamily="18" charset="0"/>
+                <a:cs typeface="Times New Roman" panose="02020603050405020304" pitchFamily="18" charset="0"/>
+              </a:rPr>
+              <a:t> </a:t>
+            </a:r>
+            <a:r>
+              <a:rPr lang="en-GB" sz="1700" dirty="0">
+                <a:latin typeface="Times New Roman" panose="02020603050405020304" pitchFamily="18" charset="0"/>
+                <a:cs typeface="Times New Roman" panose="02020603050405020304" pitchFamily="18" charset="0"/>
+              </a:rPr>
+              <a:t>Corporate financial reports contain interconnected textual and numerical information spread across multiple sections and fiscal years. Existing RAG systems struggle with multi-hop financial reasoning, treat all queries with identical retrieval strategies, and provide limited evidence traceability.</a:t>
+            </a:r>
+            <a:r>
+              <a:rPr sz="1700" dirty="0">
+                <a:latin typeface="Times New Roman" panose="02020603050405020304" pitchFamily="18" charset="0"/>
+                <a:cs typeface="Times New Roman" panose="02020603050405020304" pitchFamily="18" charset="0"/>
+              </a:rPr>
+              <a:t> </a:t>
+            </a:r>
+            <a:endParaRPr lang="en-IN" sz="1700" dirty="0">
+              <a:latin typeface="Times New Roman" panose="02020603050405020304" pitchFamily="18" charset="0"/>
+              <a:cs typeface="Times New Roman" panose="02020603050405020304" pitchFamily="18" charset="0"/>
+            </a:endParaRPr>
+          </a:p>
+          <a:p>
+            <a:pPr marL="285750" indent="-285750" algn="just">
+              <a:lnSpc>
+                <a:spcPct val="150000"/>
+              </a:lnSpc>
               <a:spcAft>
                 <a:spcPts val="1000"/>
               </a:spcAft>
+              <a:buFont typeface="Arial" panose="020B0604020202020204" pitchFamily="34" charset="0"/>
+              <a:buChar char="•"/>
               <a:defRPr sz="1900"/>
             </a:pPr>
             <a:r>
-              <a:rPr dirty="0"/>
-              <a:t>Problem: </a:t>
-            </a:r>
-            <a:endParaRPr lang="en-IN" dirty="0"/>
-          </a:p>
-          <a:p>
-            <a:pPr>
+              <a:rPr sz="1700" b="1" dirty="0">
+                <a:latin typeface="Times New Roman" panose="02020603050405020304" pitchFamily="18" charset="0"/>
+                <a:cs typeface="Times New Roman" panose="02020603050405020304" pitchFamily="18" charset="0"/>
+              </a:rPr>
+              <a:t>Objective 1</a:t>
+            </a:r>
+            <a:r>
+              <a:rPr sz="1700" dirty="0">
+                <a:latin typeface="Times New Roman" panose="02020603050405020304" pitchFamily="18" charset="0"/>
+                <a:cs typeface="Times New Roman" panose="02020603050405020304" pitchFamily="18" charset="0"/>
+              </a:rPr>
+              <a:t>: </a:t>
+            </a:r>
+            <a:r>
+              <a:rPr lang="en-GB" sz="1700" dirty="0">
+                <a:latin typeface="Times New Roman" panose="02020603050405020304" pitchFamily="18" charset="0"/>
+                <a:cs typeface="Times New Roman" panose="02020603050405020304" pitchFamily="18" charset="0"/>
+              </a:rPr>
+              <a:t>Develop an agentic retrieval system combining graph traversal, hybrid passage search, and symbolic computation for multi-hop financial question answering over </a:t>
+            </a:r>
+            <a:r>
+              <a:rPr lang="en-GB" sz="1700" dirty="0" err="1">
+                <a:latin typeface="Times New Roman" panose="02020603050405020304" pitchFamily="18" charset="0"/>
+                <a:cs typeface="Times New Roman" panose="02020603050405020304" pitchFamily="18" charset="0"/>
+              </a:rPr>
+              <a:t>FinReflectKG</a:t>
+            </a:r>
+            <a:r>
+              <a:rPr lang="en-GB" sz="1700" dirty="0">
+                <a:latin typeface="Times New Roman" panose="02020603050405020304" pitchFamily="18" charset="0"/>
+                <a:cs typeface="Times New Roman" panose="02020603050405020304" pitchFamily="18" charset="0"/>
+              </a:rPr>
+              <a:t>.</a:t>
+            </a:r>
+            <a:endParaRPr lang="en-IN" sz="1700" dirty="0">
+              <a:latin typeface="Times New Roman" panose="02020603050405020304" pitchFamily="18" charset="0"/>
+              <a:cs typeface="Times New Roman" panose="02020603050405020304" pitchFamily="18" charset="0"/>
+            </a:endParaRPr>
+          </a:p>
+          <a:p>
+            <a:pPr marL="285750" indent="-285750" algn="just">
+              <a:lnSpc>
+                <a:spcPct val="150000"/>
+              </a:lnSpc>
               <a:spcAft>
                 <a:spcPts val="1000"/>
               </a:spcAft>
+              <a:buFont typeface="Arial" panose="020B0604020202020204" pitchFamily="34" charset="0"/>
+              <a:buChar char="•"/>
               <a:defRPr sz="1900"/>
             </a:pPr>
             <a:r>
-              <a:rPr dirty="0"/>
-              <a:t>Scope:</a:t>
-            </a:r>
-            <a:endParaRPr lang="en-IN" dirty="0"/>
-          </a:p>
-          <a:p>
-            <a:pPr>
+              <a:rPr sz="1700" b="1" dirty="0">
+                <a:latin typeface="Times New Roman" panose="02020603050405020304" pitchFamily="18" charset="0"/>
+                <a:cs typeface="Times New Roman" panose="02020603050405020304" pitchFamily="18" charset="0"/>
+              </a:rPr>
+              <a:t>Objective 2</a:t>
+            </a:r>
+            <a:r>
+              <a:rPr sz="1700" dirty="0">
+                <a:latin typeface="Times New Roman" panose="02020603050405020304" pitchFamily="18" charset="0"/>
+                <a:cs typeface="Times New Roman" panose="02020603050405020304" pitchFamily="18" charset="0"/>
+              </a:rPr>
+              <a:t>: </a:t>
+            </a:r>
+            <a:r>
+              <a:rPr lang="en-GB" sz="1700" dirty="0">
+                <a:latin typeface="Times New Roman" panose="02020603050405020304" pitchFamily="18" charset="0"/>
+                <a:cs typeface="Times New Roman" panose="02020603050405020304" pitchFamily="18" charset="0"/>
+              </a:rPr>
+              <a:t>Design a query-adaptive routing controller that dispatches queries to lightweight or comprehensive retrieval paths based on estimated complexity — not one uniform strategy</a:t>
+            </a:r>
+            <a:endParaRPr lang="en-IN" sz="1700" dirty="0">
+              <a:latin typeface="Times New Roman" panose="02020603050405020304" pitchFamily="18" charset="0"/>
+              <a:cs typeface="Times New Roman" panose="02020603050405020304" pitchFamily="18" charset="0"/>
+            </a:endParaRPr>
+          </a:p>
+          <a:p>
+            <a:pPr marL="285750" indent="-285750" algn="just">
+              <a:lnSpc>
+                <a:spcPct val="150000"/>
+              </a:lnSpc>
               <a:spcAft>
                 <a:spcPts val="1000"/>
               </a:spcAft>
+              <a:buFont typeface="Arial" panose="020B0604020202020204" pitchFamily="34" charset="0"/>
+              <a:buChar char="•"/>
               <a:defRPr sz="1900"/>
             </a:pPr>
             <a:r>
-              <a:rPr dirty="0"/>
-              <a:t>Objective 1: </a:t>
-            </a:r>
-            <a:endParaRPr lang="en-IN" dirty="0"/>
-          </a:p>
-          <a:p>
-            <a:pPr>
-              <a:spcAft>
-                <a:spcPts val="1000"/>
-              </a:spcAft>
-              <a:defRPr sz="1900"/>
-            </a:pPr>
-            <a:r>
-              <a:rPr dirty="0"/>
-              <a:t>Objective 2: </a:t>
-            </a:r>
-            <a:endParaRPr lang="en-IN" dirty="0"/>
-          </a:p>
-          <a:p>
-            <a:pPr>
-              <a:spcAft>
-                <a:spcPts val="1000"/>
-              </a:spcAft>
-              <a:defRPr sz="1900"/>
-            </a:pPr>
-            <a:r>
-              <a:rPr dirty="0"/>
-              <a:t>Objective 3:</a:t>
-            </a:r>
-          </a:p>
-        </p:txBody>
-      </p:sp>
-      <p:sp>
-        <p:nvSpPr>
-          <p:cNvPr id="4" name="TextBox 3"/>
-          <p:cNvSpPr txBox="1"/>
-          <p:nvPr/>
-        </p:nvSpPr>
-        <p:spPr>
-          <a:xfrm>
-            <a:off x="502920" y="6446520"/>
-            <a:ext cx="10972800" cy="201168"/>
-          </a:xfrm>
-          <a:prstGeom prst="rect">
-            <a:avLst/>
-          </a:prstGeom>
-          <a:noFill/>
-        </p:spPr>
-        <p:txBody>
-          <a:bodyPr wrap="square">
-            <a:spAutoFit/>
-          </a:bodyPr>
-          <a:lstStyle/>
-          <a:p>
-            <a:pPr algn="l"/>
-            <a:r>
-              <a:rPr sz="900" b="0"/>
-              <a:t>FIRST REVIEW • SAMPLE FORMAT • Slide 3</a:t>
-            </a:r>
+              <a:rPr sz="1700" b="1" dirty="0">
+                <a:latin typeface="Times New Roman" panose="02020603050405020304" pitchFamily="18" charset="0"/>
+                <a:cs typeface="Times New Roman" panose="02020603050405020304" pitchFamily="18" charset="0"/>
+              </a:rPr>
+              <a:t>Objective 3</a:t>
+            </a:r>
+            <a:r>
+              <a:rPr sz="1700" dirty="0">
+                <a:latin typeface="Times New Roman" panose="02020603050405020304" pitchFamily="18" charset="0"/>
+                <a:cs typeface="Times New Roman" panose="02020603050405020304" pitchFamily="18" charset="0"/>
+              </a:rPr>
+              <a:t>:</a:t>
+            </a:r>
+            <a:r>
+              <a:rPr lang="en-GB" sz="1700" dirty="0">
+                <a:latin typeface="Times New Roman" panose="02020603050405020304" pitchFamily="18" charset="0"/>
+                <a:cs typeface="Times New Roman" panose="02020603050405020304" pitchFamily="18" charset="0"/>
+              </a:rPr>
+              <a:t>Identify and mitigate the retrieval-vs-reasoning gap through structured evidence formatting, and measure answer traceability via claim-level provenance</a:t>
+            </a:r>
+            <a:endParaRPr sz="1700" dirty="0">
+              <a:latin typeface="Times New Roman" panose="02020603050405020304" pitchFamily="18" charset="0"/>
+              <a:cs typeface="Times New Roman" panose="02020603050405020304" pitchFamily="18" charset="0"/>
+            </a:endParaRPr>
           </a:p>
         </p:txBody>
       </p:sp>
@@ -4256,58 +10166,629 @@
           <a:p>
             <a:pPr algn="l"/>
             <a:r>
-              <a:rPr sz="2700" b="1" dirty="0"/>
+              <a:rPr sz="2700" b="1" dirty="0">
+                <a:latin typeface="Times New Roman" panose="02020603050405020304" pitchFamily="18" charset="0"/>
+                <a:cs typeface="Times New Roman" panose="02020603050405020304" pitchFamily="18" charset="0"/>
+              </a:rPr>
               <a:t>03 | </a:t>
             </a:r>
             <a:r>
-              <a:rPr lang="en-IN" sz="2700" b="1" dirty="0"/>
+              <a:rPr lang="en-IN" sz="2700" b="1" dirty="0">
+                <a:latin typeface="Times New Roman" panose="02020603050405020304" pitchFamily="18" charset="0"/>
+                <a:cs typeface="Times New Roman" panose="02020603050405020304" pitchFamily="18" charset="0"/>
+              </a:rPr>
               <a:t>Consolidated </a:t>
             </a:r>
             <a:r>
-              <a:rPr sz="2700" b="1" dirty="0"/>
+              <a:rPr sz="2700" b="1" dirty="0">
+                <a:latin typeface="Times New Roman" panose="02020603050405020304" pitchFamily="18" charset="0"/>
+                <a:cs typeface="Times New Roman" panose="02020603050405020304" pitchFamily="18" charset="0"/>
+              </a:rPr>
               <a:t>Literature Review &amp; </a:t>
             </a:r>
             <a:r>
-              <a:rPr lang="en-IN" sz="2700" b="1" dirty="0"/>
+              <a:rPr lang="en-IN" sz="2700" b="1" dirty="0">
+                <a:latin typeface="Times New Roman" panose="02020603050405020304" pitchFamily="18" charset="0"/>
+                <a:cs typeface="Times New Roman" panose="02020603050405020304" pitchFamily="18" charset="0"/>
+              </a:rPr>
               <a:t>Research</a:t>
             </a:r>
             <a:r>
-              <a:rPr sz="2700" b="1" dirty="0"/>
+              <a:rPr sz="2700" b="1" dirty="0">
+                <a:latin typeface="Times New Roman" panose="02020603050405020304" pitchFamily="18" charset="0"/>
+                <a:cs typeface="Times New Roman" panose="02020603050405020304" pitchFamily="18" charset="0"/>
+              </a:rPr>
               <a:t> Gap</a:t>
             </a:r>
           </a:p>
         </p:txBody>
       </p:sp>
-      <p:sp>
-        <p:nvSpPr>
-          <p:cNvPr id="4" name="TextBox 3"/>
-          <p:cNvSpPr txBox="1"/>
-          <p:nvPr/>
-        </p:nvSpPr>
-        <p:spPr>
-          <a:xfrm>
-            <a:off x="502920" y="6446520"/>
-            <a:ext cx="10972800" cy="201168"/>
-          </a:xfrm>
-          <a:prstGeom prst="rect">
-            <a:avLst/>
-          </a:prstGeom>
-          <a:noFill/>
-        </p:spPr>
-        <p:txBody>
-          <a:bodyPr wrap="square">
-            <a:spAutoFit/>
-          </a:bodyPr>
-          <a:lstStyle/>
-          <a:p>
-            <a:pPr algn="l"/>
-            <a:r>
-              <a:rPr sz="900" b="0"/>
-              <a:t>FIRST REVIEW • SAMPLE FORMAT • Slide 4</a:t>
-            </a:r>
-          </a:p>
-        </p:txBody>
-      </p:sp>
+      <p:graphicFrame>
+        <p:nvGraphicFramePr>
+          <p:cNvPr id="3" name="Table 2">
+            <a:extLst>
+              <a:ext uri="{FF2B5EF4-FFF2-40B4-BE49-F238E27FC236}">
+                <a16:creationId xmlns:a16="http://schemas.microsoft.com/office/drawing/2014/main" id="{8197760A-16B7-0CA3-3E96-B8B7C8B5DECE}"/>
+              </a:ext>
+            </a:extLst>
+          </p:cNvPr>
+          <p:cNvGraphicFramePr>
+            <a:graphicFrameLocks noGrp="1"/>
+          </p:cNvGraphicFramePr>
+          <p:nvPr>
+            <p:extLst>
+              <p:ext uri="{D42A27DB-BD31-4B8C-83A1-F6EECF244321}">
+                <p14:modId xmlns:p14="http://schemas.microsoft.com/office/powerpoint/2010/main" val="2906352539"/>
+              </p:ext>
+            </p:extLst>
+          </p:nvPr>
+        </p:nvGraphicFramePr>
+        <p:xfrm>
+          <a:off x="502919" y="1011115"/>
+          <a:ext cx="8210256" cy="5372101"/>
+        </p:xfrm>
+        <a:graphic>
+          <a:graphicData uri="http://schemas.openxmlformats.org/drawingml/2006/table">
+            <a:tbl>
+              <a:tblPr>
+                <a:tableStyleId>{616DA210-FB5B-4158-B5E0-FEB733F419BA}</a:tableStyleId>
+              </a:tblPr>
+              <a:tblGrid>
+                <a:gridCol w="2052564">
+                  <a:extLst>
+                    <a:ext uri="{9D8B030D-6E8A-4147-A177-3AD203B41FA5}">
+                      <a16:colId xmlns:a16="http://schemas.microsoft.com/office/drawing/2014/main" val="4139831832"/>
+                    </a:ext>
+                  </a:extLst>
+                </a:gridCol>
+                <a:gridCol w="2052564">
+                  <a:extLst>
+                    <a:ext uri="{9D8B030D-6E8A-4147-A177-3AD203B41FA5}">
+                      <a16:colId xmlns:a16="http://schemas.microsoft.com/office/drawing/2014/main" val="3303125121"/>
+                    </a:ext>
+                  </a:extLst>
+                </a:gridCol>
+                <a:gridCol w="2052564">
+                  <a:extLst>
+                    <a:ext uri="{9D8B030D-6E8A-4147-A177-3AD203B41FA5}">
+                      <a16:colId xmlns:a16="http://schemas.microsoft.com/office/drawing/2014/main" val="881098287"/>
+                    </a:ext>
+                  </a:extLst>
+                </a:gridCol>
+                <a:gridCol w="2052564">
+                  <a:extLst>
+                    <a:ext uri="{9D8B030D-6E8A-4147-A177-3AD203B41FA5}">
+                      <a16:colId xmlns:a16="http://schemas.microsoft.com/office/drawing/2014/main" val="4123419327"/>
+                    </a:ext>
+                  </a:extLst>
+                </a:gridCol>
+              </a:tblGrid>
+              <a:tr h="375726">
+                <a:tc>
+                  <a:txBody>
+                    <a:bodyPr/>
+                    <a:lstStyle/>
+                    <a:p>
+                      <a:pPr>
+                        <a:buNone/>
+                      </a:pPr>
+                      <a:r>
+                        <a:rPr lang="en-GB" sz="1600" b="1"/>
+                        <a:t>Paper</a:t>
+                      </a:r>
+                      <a:endParaRPr lang="en-GB" sz="1600" b="1">
+                        <a:latin typeface="Times New Roman" panose="02020603050405020304" pitchFamily="18" charset="0"/>
+                        <a:cs typeface="Times New Roman" panose="02020603050405020304" pitchFamily="18" charset="0"/>
+                      </a:endParaRPr>
+                    </a:p>
+                  </a:txBody>
+                  <a:tcPr marL="79403" marR="79403" marT="39701" marB="39701" anchor="ctr"/>
+                </a:tc>
+                <a:tc>
+                  <a:txBody>
+                    <a:bodyPr/>
+                    <a:lstStyle/>
+                    <a:p>
+                      <a:pPr>
+                        <a:buNone/>
+                      </a:pPr>
+                      <a:r>
+                        <a:rPr lang="en-GB" sz="1600" b="1"/>
+                        <a:t>Core Approach</a:t>
+                      </a:r>
+                      <a:endParaRPr lang="en-GB" sz="1600" b="1">
+                        <a:latin typeface="Times New Roman" panose="02020603050405020304" pitchFamily="18" charset="0"/>
+                        <a:cs typeface="Times New Roman" panose="02020603050405020304" pitchFamily="18" charset="0"/>
+                      </a:endParaRPr>
+                    </a:p>
+                  </a:txBody>
+                  <a:tcPr marL="79403" marR="79403" marT="39701" marB="39701" anchor="ctr"/>
+                </a:tc>
+                <a:tc>
+                  <a:txBody>
+                    <a:bodyPr/>
+                    <a:lstStyle/>
+                    <a:p>
+                      <a:pPr>
+                        <a:buNone/>
+                      </a:pPr>
+                      <a:r>
+                        <a:rPr lang="en-GB" sz="1600" b="1"/>
+                        <a:t>Key Result</a:t>
+                      </a:r>
+                      <a:endParaRPr lang="en-GB" sz="1600" b="1">
+                        <a:latin typeface="Times New Roman" panose="02020603050405020304" pitchFamily="18" charset="0"/>
+                        <a:cs typeface="Times New Roman" panose="02020603050405020304" pitchFamily="18" charset="0"/>
+                      </a:endParaRPr>
+                    </a:p>
+                  </a:txBody>
+                  <a:tcPr marL="79403" marR="79403" marT="39701" marB="39701" anchor="ctr"/>
+                </a:tc>
+                <a:tc>
+                  <a:txBody>
+                    <a:bodyPr/>
+                    <a:lstStyle/>
+                    <a:p>
+                      <a:pPr>
+                        <a:buNone/>
+                      </a:pPr>
+                      <a:r>
+                        <a:rPr lang="en-GB" sz="1600" b="1" dirty="0"/>
+                        <a:t>Gap</a:t>
+                      </a:r>
+                      <a:endParaRPr lang="en-GB" sz="1600" b="1" dirty="0">
+                        <a:latin typeface="Times New Roman" panose="02020603050405020304" pitchFamily="18" charset="0"/>
+                        <a:cs typeface="Times New Roman" panose="02020603050405020304" pitchFamily="18" charset="0"/>
+                      </a:endParaRPr>
+                    </a:p>
+                  </a:txBody>
+                  <a:tcPr marL="79403" marR="79403" marT="39701" marB="39701" anchor="ctr"/>
+                </a:tc>
+                <a:extLst>
+                  <a:ext uri="{0D108BD9-81ED-4DB2-BD59-A6C34878D82A}">
+                    <a16:rowId xmlns:a16="http://schemas.microsoft.com/office/drawing/2014/main" val="3204367669"/>
+                  </a:ext>
+                </a:extLst>
+              </a:tr>
+              <a:tr h="942589">
+                <a:tc>
+                  <a:txBody>
+                    <a:bodyPr/>
+                    <a:lstStyle/>
+                    <a:p>
+                      <a:pPr>
+                        <a:buNone/>
+                      </a:pPr>
+                      <a:r>
+                        <a:rPr lang="en-GB" sz="1600"/>
+                        <a:t>GraphRAG (Edge et al., 2024)</a:t>
+                      </a:r>
+                      <a:endParaRPr lang="en-GB" sz="1600">
+                        <a:latin typeface="Times New Roman" panose="02020603050405020304" pitchFamily="18" charset="0"/>
+                        <a:cs typeface="Times New Roman" panose="02020603050405020304" pitchFamily="18" charset="0"/>
+                      </a:endParaRPr>
+                    </a:p>
+                  </a:txBody>
+                  <a:tcPr marL="79403" marR="79403" marT="39701" marB="39701" anchor="ctr"/>
+                </a:tc>
+                <a:tc>
+                  <a:txBody>
+                    <a:bodyPr/>
+                    <a:lstStyle/>
+                    <a:p>
+                      <a:pPr>
+                        <a:buNone/>
+                      </a:pPr>
+                      <a:r>
+                        <a:rPr lang="en-GB" sz="1600" dirty="0"/>
+                        <a:t>LLM-generated KG + community summarization</a:t>
+                      </a:r>
+                      <a:endParaRPr lang="en-GB" sz="1600" dirty="0">
+                        <a:latin typeface="Times New Roman" panose="02020603050405020304" pitchFamily="18" charset="0"/>
+                        <a:cs typeface="Times New Roman" panose="02020603050405020304" pitchFamily="18" charset="0"/>
+                      </a:endParaRPr>
+                    </a:p>
+                  </a:txBody>
+                  <a:tcPr marL="79403" marR="79403" marT="39701" marB="39701" anchor="ctr"/>
+                </a:tc>
+                <a:tc>
+                  <a:txBody>
+                    <a:bodyPr/>
+                    <a:lstStyle/>
+                    <a:p>
+                      <a:pPr>
+                        <a:buNone/>
+                      </a:pPr>
+                      <a:r>
+                        <a:rPr lang="en-GB" sz="1600"/>
+                        <a:t>Better comprehensiveness than vanilla RAG</a:t>
+                      </a:r>
+                      <a:endParaRPr lang="en-GB" sz="1600">
+                        <a:latin typeface="Times New Roman" panose="02020603050405020304" pitchFamily="18" charset="0"/>
+                        <a:cs typeface="Times New Roman" panose="02020603050405020304" pitchFamily="18" charset="0"/>
+                      </a:endParaRPr>
+                    </a:p>
+                  </a:txBody>
+                  <a:tcPr marL="79403" marR="79403" marT="39701" marB="39701" anchor="ctr"/>
+                </a:tc>
+                <a:tc>
+                  <a:txBody>
+                    <a:bodyPr/>
+                    <a:lstStyle/>
+                    <a:p>
+                      <a:pPr>
+                        <a:buNone/>
+                      </a:pPr>
+                      <a:r>
+                        <a:rPr lang="en-GB" sz="1600"/>
+                        <a:t>No financial QA; expensive graph construction</a:t>
+                      </a:r>
+                      <a:endParaRPr lang="en-GB" sz="1600">
+                        <a:latin typeface="Times New Roman" panose="02020603050405020304" pitchFamily="18" charset="0"/>
+                        <a:cs typeface="Times New Roman" panose="02020603050405020304" pitchFamily="18" charset="0"/>
+                      </a:endParaRPr>
+                    </a:p>
+                  </a:txBody>
+                  <a:tcPr marL="79403" marR="79403" marT="39701" marB="39701" anchor="ctr"/>
+                </a:tc>
+                <a:extLst>
+                  <a:ext uri="{0D108BD9-81ED-4DB2-BD59-A6C34878D82A}">
+                    <a16:rowId xmlns:a16="http://schemas.microsoft.com/office/drawing/2014/main" val="1935526420"/>
+                  </a:ext>
+                </a:extLst>
+              </a:tr>
+              <a:tr h="942589">
+                <a:tc>
+                  <a:txBody>
+                    <a:bodyPr/>
+                    <a:lstStyle/>
+                    <a:p>
+                      <a:pPr>
+                        <a:buNone/>
+                      </a:pPr>
+                      <a:r>
+                        <a:rPr lang="en-GB" sz="1600"/>
+                        <a:t>Think-on-Graph (Sun et al., 2023)</a:t>
+                      </a:r>
+                      <a:endParaRPr lang="en-GB" sz="1600">
+                        <a:latin typeface="Times New Roman" panose="02020603050405020304" pitchFamily="18" charset="0"/>
+                        <a:cs typeface="Times New Roman" panose="02020603050405020304" pitchFamily="18" charset="0"/>
+                      </a:endParaRPr>
+                    </a:p>
+                  </a:txBody>
+                  <a:tcPr marL="79403" marR="79403" marT="39701" marB="39701" anchor="ctr"/>
+                </a:tc>
+                <a:tc>
+                  <a:txBody>
+                    <a:bodyPr/>
+                    <a:lstStyle/>
+                    <a:p>
+                      <a:pPr>
+                        <a:buNone/>
+                      </a:pPr>
+                      <a:r>
+                        <a:rPr lang="en-GB" sz="1600"/>
+                        <a:t>LLM as graph-traversal agent via beam search</a:t>
+                      </a:r>
+                      <a:endParaRPr lang="en-GB" sz="1600">
+                        <a:latin typeface="Times New Roman" panose="02020603050405020304" pitchFamily="18" charset="0"/>
+                        <a:cs typeface="Times New Roman" panose="02020603050405020304" pitchFamily="18" charset="0"/>
+                      </a:endParaRPr>
+                    </a:p>
+                  </a:txBody>
+                  <a:tcPr marL="79403" marR="79403" marT="39701" marB="39701" anchor="ctr"/>
+                </a:tc>
+                <a:tc>
+                  <a:txBody>
+                    <a:bodyPr/>
+                    <a:lstStyle/>
+                    <a:p>
+                      <a:pPr>
+                        <a:buNone/>
+                      </a:pPr>
+                      <a:r>
+                        <a:rPr lang="en-GB" sz="1600"/>
+                        <a:t>Higher multi-hop accuracy with interpretable paths</a:t>
+                      </a:r>
+                      <a:endParaRPr lang="en-GB" sz="1600">
+                        <a:latin typeface="Times New Roman" panose="02020603050405020304" pitchFamily="18" charset="0"/>
+                        <a:cs typeface="Times New Roman" panose="02020603050405020304" pitchFamily="18" charset="0"/>
+                      </a:endParaRPr>
+                    </a:p>
+                  </a:txBody>
+                  <a:tcPr marL="79403" marR="79403" marT="39701" marB="39701" anchor="ctr"/>
+                </a:tc>
+                <a:tc>
+                  <a:txBody>
+                    <a:bodyPr/>
+                    <a:lstStyle/>
+                    <a:p>
+                      <a:pPr>
+                        <a:buNone/>
+                      </a:pPr>
+                      <a:r>
+                        <a:rPr lang="en-GB" sz="1600"/>
+                        <a:t>Not evaluated on financial documents</a:t>
+                      </a:r>
+                      <a:endParaRPr lang="en-GB" sz="1600">
+                        <a:latin typeface="Times New Roman" panose="02020603050405020304" pitchFamily="18" charset="0"/>
+                        <a:cs typeface="Times New Roman" panose="02020603050405020304" pitchFamily="18" charset="0"/>
+                      </a:endParaRPr>
+                    </a:p>
+                  </a:txBody>
+                  <a:tcPr marL="79403" marR="79403" marT="39701" marB="39701" anchor="ctr"/>
+                </a:tc>
+                <a:extLst>
+                  <a:ext uri="{0D108BD9-81ED-4DB2-BD59-A6C34878D82A}">
+                    <a16:rowId xmlns:a16="http://schemas.microsoft.com/office/drawing/2014/main" val="3723108809"/>
+                  </a:ext>
+                </a:extLst>
+              </a:tr>
+              <a:tr h="1226019">
+                <a:tc>
+                  <a:txBody>
+                    <a:bodyPr/>
+                    <a:lstStyle/>
+                    <a:p>
+                      <a:pPr>
+                        <a:buNone/>
+                      </a:pPr>
+                      <a:r>
+                        <a:rPr lang="en-GB" sz="1600"/>
+                        <a:t>HybridRAG (Sarmah et al., 2024)</a:t>
+                      </a:r>
+                      <a:endParaRPr lang="en-GB" sz="1600">
+                        <a:latin typeface="Times New Roman" panose="02020603050405020304" pitchFamily="18" charset="0"/>
+                        <a:cs typeface="Times New Roman" panose="02020603050405020304" pitchFamily="18" charset="0"/>
+                      </a:endParaRPr>
+                    </a:p>
+                  </a:txBody>
+                  <a:tcPr marL="79403" marR="79403" marT="39701" marB="39701" anchor="ctr"/>
+                </a:tc>
+                <a:tc>
+                  <a:txBody>
+                    <a:bodyPr/>
+                    <a:lstStyle/>
+                    <a:p>
+                      <a:pPr>
+                        <a:buNone/>
+                      </a:pPr>
+                      <a:r>
+                        <a:rPr lang="en-GB" sz="1600"/>
+                        <a:t>Vector + KG retrieval fused before generation</a:t>
+                      </a:r>
+                      <a:endParaRPr lang="en-GB" sz="1600">
+                        <a:latin typeface="Times New Roman" panose="02020603050405020304" pitchFamily="18" charset="0"/>
+                        <a:cs typeface="Times New Roman" panose="02020603050405020304" pitchFamily="18" charset="0"/>
+                      </a:endParaRPr>
+                    </a:p>
+                  </a:txBody>
+                  <a:tcPr marL="79403" marR="79403" marT="39701" marB="39701" anchor="ctr"/>
+                </a:tc>
+                <a:tc>
+                  <a:txBody>
+                    <a:bodyPr/>
+                    <a:lstStyle/>
+                    <a:p>
+                      <a:pPr>
+                        <a:buNone/>
+                      </a:pPr>
+                      <a:r>
+                        <a:rPr lang="en-GB" sz="1600"/>
+                        <a:t>Outperforms standalone Vector/Graph RAG in financial QA</a:t>
+                      </a:r>
+                      <a:endParaRPr lang="en-GB" sz="1600">
+                        <a:latin typeface="Times New Roman" panose="02020603050405020304" pitchFamily="18" charset="0"/>
+                        <a:cs typeface="Times New Roman" panose="02020603050405020304" pitchFamily="18" charset="0"/>
+                      </a:endParaRPr>
+                    </a:p>
+                  </a:txBody>
+                  <a:tcPr marL="79403" marR="79403" marT="39701" marB="39701" anchor="ctr"/>
+                </a:tc>
+                <a:tc>
+                  <a:txBody>
+                    <a:bodyPr/>
+                    <a:lstStyle/>
+                    <a:p>
+                      <a:pPr>
+                        <a:buNone/>
+                      </a:pPr>
+                      <a:r>
+                        <a:rPr lang="en-GB" sz="1600"/>
+                        <a:t>Fixed pipeline, no adaptive routing</a:t>
+                      </a:r>
+                      <a:endParaRPr lang="en-GB" sz="1600">
+                        <a:latin typeface="Times New Roman" panose="02020603050405020304" pitchFamily="18" charset="0"/>
+                        <a:cs typeface="Times New Roman" panose="02020603050405020304" pitchFamily="18" charset="0"/>
+                      </a:endParaRPr>
+                    </a:p>
+                  </a:txBody>
+                  <a:tcPr marL="79403" marR="79403" marT="39701" marB="39701" anchor="ctr"/>
+                </a:tc>
+                <a:extLst>
+                  <a:ext uri="{0D108BD9-81ED-4DB2-BD59-A6C34878D82A}">
+                    <a16:rowId xmlns:a16="http://schemas.microsoft.com/office/drawing/2014/main" val="144009424"/>
+                  </a:ext>
+                </a:extLst>
+              </a:tr>
+              <a:tr h="942589">
+                <a:tc>
+                  <a:txBody>
+                    <a:bodyPr/>
+                    <a:lstStyle/>
+                    <a:p>
+                      <a:pPr>
+                        <a:buNone/>
+                      </a:pPr>
+                      <a:r>
+                        <a:rPr lang="en-GB" sz="1600"/>
+                        <a:t>Adaptive-RAG (Jeong et al., 2024)</a:t>
+                      </a:r>
+                      <a:endParaRPr lang="en-GB" sz="1600">
+                        <a:latin typeface="Times New Roman" panose="02020603050405020304" pitchFamily="18" charset="0"/>
+                        <a:cs typeface="Times New Roman" panose="02020603050405020304" pitchFamily="18" charset="0"/>
+                      </a:endParaRPr>
+                    </a:p>
+                  </a:txBody>
+                  <a:tcPr marL="79403" marR="79403" marT="39701" marB="39701" anchor="ctr"/>
+                </a:tc>
+                <a:tc>
+                  <a:txBody>
+                    <a:bodyPr/>
+                    <a:lstStyle/>
+                    <a:p>
+                      <a:pPr>
+                        <a:buNone/>
+                      </a:pPr>
+                      <a:r>
+                        <a:rPr lang="en-GB" sz="1600"/>
+                        <a:t>Lightweight classifier routes by query complexity</a:t>
+                      </a:r>
+                      <a:endParaRPr lang="en-GB" sz="1600">
+                        <a:latin typeface="Times New Roman" panose="02020603050405020304" pitchFamily="18" charset="0"/>
+                        <a:cs typeface="Times New Roman" panose="02020603050405020304" pitchFamily="18" charset="0"/>
+                      </a:endParaRPr>
+                    </a:p>
+                  </a:txBody>
+                  <a:tcPr marL="79403" marR="79403" marT="39701" marB="39701" anchor="ctr"/>
+                </a:tc>
+                <a:tc>
+                  <a:txBody>
+                    <a:bodyPr/>
+                    <a:lstStyle/>
+                    <a:p>
+                      <a:pPr>
+                        <a:buNone/>
+                      </a:pPr>
+                      <a:r>
+                        <a:rPr lang="en-GB" sz="1600"/>
+                        <a:t>Matches expensive multi-step at 1.03 avg steps</a:t>
+                      </a:r>
+                      <a:endParaRPr lang="en-GB" sz="1600">
+                        <a:latin typeface="Times New Roman" panose="02020603050405020304" pitchFamily="18" charset="0"/>
+                        <a:cs typeface="Times New Roman" panose="02020603050405020304" pitchFamily="18" charset="0"/>
+                      </a:endParaRPr>
+                    </a:p>
+                  </a:txBody>
+                  <a:tcPr marL="79403" marR="79403" marT="39701" marB="39701" anchor="ctr"/>
+                </a:tc>
+                <a:tc>
+                  <a:txBody>
+                    <a:bodyPr/>
+                    <a:lstStyle/>
+                    <a:p>
+                      <a:pPr>
+                        <a:buNone/>
+                      </a:pPr>
+                      <a:r>
+                        <a:rPr lang="en-GB" sz="1600"/>
+                        <a:t>General QA only, no graph evidence or financial domain</a:t>
+                      </a:r>
+                      <a:endParaRPr lang="en-GB" sz="1600">
+                        <a:latin typeface="Times New Roman" panose="02020603050405020304" pitchFamily="18" charset="0"/>
+                        <a:cs typeface="Times New Roman" panose="02020603050405020304" pitchFamily="18" charset="0"/>
+                      </a:endParaRPr>
+                    </a:p>
+                  </a:txBody>
+                  <a:tcPr marL="79403" marR="79403" marT="39701" marB="39701" anchor="ctr"/>
+                </a:tc>
+                <a:extLst>
+                  <a:ext uri="{0D108BD9-81ED-4DB2-BD59-A6C34878D82A}">
+                    <a16:rowId xmlns:a16="http://schemas.microsoft.com/office/drawing/2014/main" val="2329247162"/>
+                  </a:ext>
+                </a:extLst>
+              </a:tr>
+              <a:tr h="942589">
+                <a:tc>
+                  <a:txBody>
+                    <a:bodyPr/>
+                    <a:lstStyle/>
+                    <a:p>
+                      <a:pPr>
+                        <a:buNone/>
+                      </a:pPr>
+                      <a:r>
+                        <a:rPr lang="en-GB" sz="1600"/>
+                        <a:t>FinReflectKG-MultiHop (Arun et al., 2025)</a:t>
+                      </a:r>
+                      <a:endParaRPr lang="en-GB" sz="1600">
+                        <a:latin typeface="Times New Roman" panose="02020603050405020304" pitchFamily="18" charset="0"/>
+                        <a:cs typeface="Times New Roman" panose="02020603050405020304" pitchFamily="18" charset="0"/>
+                      </a:endParaRPr>
+                    </a:p>
+                  </a:txBody>
+                  <a:tcPr marL="79403" marR="79403" marT="39701" marB="39701" anchor="ctr"/>
+                </a:tc>
+                <a:tc>
+                  <a:txBody>
+                    <a:bodyPr/>
+                    <a:lstStyle/>
+                    <a:p>
+                      <a:pPr>
+                        <a:buNone/>
+                      </a:pPr>
+                      <a:r>
+                        <a:rPr lang="en-GB" sz="1600"/>
+                        <a:t>Multi-hop subgraph mining from FinReflectKG</a:t>
+                      </a:r>
+                      <a:endParaRPr lang="en-GB" sz="1600">
+                        <a:latin typeface="Times New Roman" panose="02020603050405020304" pitchFamily="18" charset="0"/>
+                        <a:cs typeface="Times New Roman" panose="02020603050405020304" pitchFamily="18" charset="0"/>
+                      </a:endParaRPr>
+                    </a:p>
+                  </a:txBody>
+                  <a:tcPr marL="79403" marR="79403" marT="39701" marB="39701" anchor="ctr"/>
+                </a:tc>
+                <a:tc>
+                  <a:txBody>
+                    <a:bodyPr/>
+                    <a:lstStyle/>
+                    <a:p>
+                      <a:pPr>
+                        <a:buNone/>
+                      </a:pPr>
+                      <a:r>
+                        <a:rPr lang="en-GB" sz="1600"/>
+                        <a:t>KG retrieval +24% accuracy, -84.5% token cost</a:t>
+                      </a:r>
+                      <a:endParaRPr lang="en-GB" sz="1600">
+                        <a:latin typeface="Times New Roman" panose="02020603050405020304" pitchFamily="18" charset="0"/>
+                        <a:cs typeface="Times New Roman" panose="02020603050405020304" pitchFamily="18" charset="0"/>
+                      </a:endParaRPr>
+                    </a:p>
+                  </a:txBody>
+                  <a:tcPr marL="79403" marR="79403" marT="39701" marB="39701" anchor="ctr"/>
+                </a:tc>
+                <a:tc>
+                  <a:txBody>
+                    <a:bodyPr/>
+                    <a:lstStyle/>
+                    <a:p>
+                      <a:pPr>
+                        <a:buNone/>
+                      </a:pPr>
+                      <a:r>
+                        <a:rPr lang="en-GB" sz="1600" dirty="0"/>
+                        <a:t>Benchmark only — no agentic QA system built</a:t>
+                      </a:r>
+                      <a:endParaRPr lang="en-GB" sz="1600" dirty="0">
+                        <a:latin typeface="Times New Roman" panose="02020603050405020304" pitchFamily="18" charset="0"/>
+                        <a:cs typeface="Times New Roman" panose="02020603050405020304" pitchFamily="18" charset="0"/>
+                      </a:endParaRPr>
+                    </a:p>
+                  </a:txBody>
+                  <a:tcPr marL="79403" marR="79403" marT="39701" marB="39701" anchor="ctr"/>
+                </a:tc>
+                <a:extLst>
+                  <a:ext uri="{0D108BD9-81ED-4DB2-BD59-A6C34878D82A}">
+                    <a16:rowId xmlns:a16="http://schemas.microsoft.com/office/drawing/2014/main" val="546022733"/>
+                  </a:ext>
+                </a:extLst>
+              </a:tr>
+            </a:tbl>
+          </a:graphicData>
+        </a:graphic>
+      </p:graphicFrame>
     </p:spTree>
   </p:cSld>
   <p:clrMapOvr>
@@ -4341,7 +10822,7 @@
         </p:nvSpPr>
         <p:spPr>
           <a:xfrm>
-            <a:off x="502920" y="228600"/>
+            <a:off x="256736" y="228600"/>
             <a:ext cx="11064240" cy="502920"/>
           </a:xfrm>
           <a:prstGeom prst="rect">
@@ -4357,42 +10838,148 @@
           <a:p>
             <a:pPr algn="l"/>
             <a:r>
-              <a:rPr sz="2700" b="1"/>
+              <a:rPr sz="2700" b="1" dirty="0">
+                <a:latin typeface="Times New Roman" panose="02020603050405020304" pitchFamily="18" charset="0"/>
+                <a:cs typeface="Times New Roman" panose="02020603050405020304" pitchFamily="18" charset="0"/>
+              </a:rPr>
               <a:t>04 | Finalized System Architecture &amp; Methodology</a:t>
             </a:r>
           </a:p>
         </p:txBody>
       </p:sp>
-      <p:sp>
-        <p:nvSpPr>
-          <p:cNvPr id="4" name="TextBox 3"/>
-          <p:cNvSpPr txBox="1"/>
+      <mc:AlternateContent xmlns:mc="http://schemas.openxmlformats.org/markup-compatibility/2006" xmlns:p14="http://schemas.microsoft.com/office/powerpoint/2010/main">
+        <mc:Choice Requires="p14">
+          <p:contentPart p14:bwMode="auto" r:id="rId2">
+            <p14:nvContentPartPr>
+              <p14:cNvPr id="6" name="Ink 5">
+                <a:extLst>
+                  <a:ext uri="{FF2B5EF4-FFF2-40B4-BE49-F238E27FC236}">
+                    <a16:creationId xmlns:a16="http://schemas.microsoft.com/office/drawing/2014/main" id="{D4980DDA-2C52-F565-63F1-53630378017A}"/>
+                  </a:ext>
+                </a:extLst>
+              </p14:cNvPr>
+              <p14:cNvContentPartPr/>
+              <p14:nvPr/>
+            </p14:nvContentPartPr>
+            <p14:xfrm>
+              <a:off x="1443822" y="910980"/>
+              <a:ext cx="4937760" cy="1152000"/>
+            </p14:xfrm>
+          </p:contentPart>
+        </mc:Choice>
+        <mc:Fallback xmlns="">
+          <p:pic>
+            <p:nvPicPr>
+              <p:cNvPr id="6" name="Ink 5">
+                <a:extLst>
+                  <a:ext uri="{FF2B5EF4-FFF2-40B4-BE49-F238E27FC236}">
+                    <a16:creationId xmlns:a16="http://schemas.microsoft.com/office/drawing/2014/main" id="{D4980DDA-2C52-F565-63F1-53630378017A}"/>
+                  </a:ext>
+                </a:extLst>
+              </p:cNvPr>
+              <p:cNvPicPr/>
+              <p:nvPr/>
+            </p:nvPicPr>
+            <p:blipFill>
+              <a:blip r:embed="rId3"/>
+              <a:stretch>
+                <a:fillRect/>
+              </a:stretch>
+            </p:blipFill>
+            <p:spPr>
+              <a:xfrm>
+                <a:off x="1380822" y="847980"/>
+                <a:ext cx="5063400" cy="1277640"/>
+              </a:xfrm>
+              <a:prstGeom prst="rect">
+                <a:avLst/>
+              </a:prstGeom>
+            </p:spPr>
+          </p:pic>
+        </mc:Fallback>
+      </mc:AlternateContent>
+      <mc:AlternateContent xmlns:mc="http://schemas.openxmlformats.org/markup-compatibility/2006" xmlns:p14="http://schemas.microsoft.com/office/powerpoint/2010/main">
+        <mc:Choice Requires="p14">
+          <p:contentPart p14:bwMode="auto" r:id="rId4">
+            <p14:nvContentPartPr>
+              <p14:cNvPr id="8" name="Ink 7">
+                <a:extLst>
+                  <a:ext uri="{FF2B5EF4-FFF2-40B4-BE49-F238E27FC236}">
+                    <a16:creationId xmlns:a16="http://schemas.microsoft.com/office/drawing/2014/main" id="{37D06F77-7EA3-06B3-7199-1082217C7310}"/>
+                  </a:ext>
+                </a:extLst>
+              </p14:cNvPr>
+              <p14:cNvContentPartPr/>
+              <p14:nvPr/>
+            </p14:nvContentPartPr>
+            <p14:xfrm>
+              <a:off x="5890542" y="2421900"/>
+              <a:ext cx="978840" cy="455760"/>
+            </p14:xfrm>
+          </p:contentPart>
+        </mc:Choice>
+        <mc:Fallback xmlns="">
+          <p:pic>
+            <p:nvPicPr>
+              <p:cNvPr id="8" name="Ink 7">
+                <a:extLst>
+                  <a:ext uri="{FF2B5EF4-FFF2-40B4-BE49-F238E27FC236}">
+                    <a16:creationId xmlns:a16="http://schemas.microsoft.com/office/drawing/2014/main" id="{37D06F77-7EA3-06B3-7199-1082217C7310}"/>
+                  </a:ext>
+                </a:extLst>
+              </p:cNvPr>
+              <p:cNvPicPr/>
+              <p:nvPr/>
+            </p:nvPicPr>
+            <p:blipFill>
+              <a:blip r:embed="rId5"/>
+              <a:stretch>
+                <a:fillRect/>
+              </a:stretch>
+            </p:blipFill>
+            <p:spPr>
+              <a:xfrm>
+                <a:off x="5827902" y="2359260"/>
+                <a:ext cx="1104480" cy="581400"/>
+              </a:xfrm>
+              <a:prstGeom prst="rect">
+                <a:avLst/>
+              </a:prstGeom>
+            </p:spPr>
+          </p:pic>
+        </mc:Fallback>
+      </mc:AlternateContent>
+      <p:pic>
+        <p:nvPicPr>
+          <p:cNvPr id="9" name="Content Placeholder 12">
+            <a:extLst>
+              <a:ext uri="{FF2B5EF4-FFF2-40B4-BE49-F238E27FC236}">
+                <a16:creationId xmlns:a16="http://schemas.microsoft.com/office/drawing/2014/main" id="{9B94CDEA-6AFE-4B85-8602-A709D6D58843}"/>
+              </a:ext>
+            </a:extLst>
+          </p:cNvPr>
+          <p:cNvPicPr>
+            <a:picLocks noChangeAspect="1"/>
+          </p:cNvPicPr>
           <p:nvPr/>
-        </p:nvSpPr>
+        </p:nvPicPr>
+        <p:blipFill>
+          <a:blip r:embed="rId6"/>
+          <a:srcRect l="2896"/>
+          <a:stretch>
+            <a:fillRect/>
+          </a:stretch>
+        </p:blipFill>
         <p:spPr>
           <a:xfrm>
-            <a:off x="502920" y="6446520"/>
-            <a:ext cx="10972800" cy="201168"/>
+            <a:off x="175491" y="818750"/>
+            <a:ext cx="8968509" cy="5557982"/>
           </a:xfrm>
           <a:prstGeom prst="rect">
             <a:avLst/>
           </a:prstGeom>
-          <a:noFill/>
         </p:spPr>
-        <p:txBody>
-          <a:bodyPr wrap="square">
-            <a:spAutoFit/>
-          </a:bodyPr>
-          <a:lstStyle/>
-          <a:p>
-            <a:pPr algn="l"/>
-            <a:r>
-              <a:rPr sz="900" b="0"/>
-              <a:t>FIRST REVIEW • SAMPLE FORMAT • Slide 5</a:t>
-            </a:r>
-          </a:p>
-        </p:txBody>
-      </p:sp>
+      </p:pic>
     </p:spTree>
   </p:cSld>
   <p:clrMapOvr>
@@ -4426,7 +11013,7 @@
         </p:nvSpPr>
         <p:spPr>
           <a:xfrm>
-            <a:off x="502920" y="228600"/>
+            <a:off x="371035" y="239151"/>
             <a:ext cx="11064240" cy="502920"/>
           </a:xfrm>
           <a:prstGeom prst="rect">
@@ -4442,7 +11029,10 @@
           <a:p>
             <a:pPr algn="l"/>
             <a:r>
-              <a:rPr sz="2700" b="1"/>
+              <a:rPr sz="2700" b="1" dirty="0">
+                <a:latin typeface="Times New Roman" panose="02020603050405020304" pitchFamily="18" charset="0"/>
+                <a:cs typeface="Times New Roman" panose="02020603050405020304" pitchFamily="18" charset="0"/>
+              </a:rPr>
               <a:t>05 | Implementation Status – Prototype / Proof-of-Concept</a:t>
             </a:r>
           </a:p>
@@ -4450,14 +11040,20 @@
       </p:sp>
       <p:sp>
         <p:nvSpPr>
-          <p:cNvPr id="4" name="TextBox 3"/>
+          <p:cNvPr id="3" name="TextBox 2">
+            <a:extLst>
+              <a:ext uri="{FF2B5EF4-FFF2-40B4-BE49-F238E27FC236}">
+                <a16:creationId xmlns:a16="http://schemas.microsoft.com/office/drawing/2014/main" id="{0CE1C1FE-206D-1D85-F979-2802DFEEDA26}"/>
+              </a:ext>
+            </a:extLst>
+          </p:cNvPr>
           <p:cNvSpPr txBox="1"/>
           <p:nvPr/>
         </p:nvSpPr>
         <p:spPr>
           <a:xfrm>
-            <a:off x="502920" y="6446520"/>
-            <a:ext cx="10972800" cy="201168"/>
+            <a:off x="371035" y="1371600"/>
+            <a:ext cx="8641079" cy="5028556"/>
           </a:xfrm>
           <a:prstGeom prst="rect">
             <a:avLst/>
@@ -4465,16 +11061,162 @@
           <a:noFill/>
         </p:spPr>
         <p:txBody>
-          <a:bodyPr wrap="square">
+          <a:bodyPr wrap="square" rtlCol="0">
             <a:spAutoFit/>
           </a:bodyPr>
           <a:lstStyle/>
           <a:p>
-            <a:pPr algn="l"/>
-            <a:r>
-              <a:rPr sz="900" b="0"/>
-              <a:t>FIRST REVIEW • SAMPLE FORMAT • Slide 6</a:t>
-            </a:r>
+            <a:pPr marL="285750" lvl="0" indent="-285750" algn="just">
+              <a:lnSpc>
+                <a:spcPct val="150000"/>
+              </a:lnSpc>
+              <a:buFont typeface="Arial" panose="020B0604020202020204" pitchFamily="34" charset="0"/>
+              <a:buChar char="•"/>
+            </a:pPr>
+            <a:r>
+              <a:rPr lang="en-GB" b="1" dirty="0">
+                <a:latin typeface="Times New Roman" panose="02020603050405020304" pitchFamily="18" charset="0"/>
+                <a:cs typeface="Times New Roman" panose="02020603050405020304" pitchFamily="18" charset="0"/>
+              </a:rPr>
+              <a:t>Tier 0–3 Multi-Tier Pipeline:</a:t>
+            </a:r>
+            <a:r>
+              <a:rPr lang="en-GB" dirty="0">
+                <a:latin typeface="Times New Roman" panose="02020603050405020304" pitchFamily="18" charset="0"/>
+                <a:cs typeface="Times New Roman" panose="02020603050405020304" pitchFamily="18" charset="0"/>
+              </a:rPr>
+              <a:t> Fully implemented and benchmarked, progressing from zero-context parametric baseline to full Agentic </a:t>
+            </a:r>
+            <a:r>
+              <a:rPr lang="en-GB" dirty="0" err="1">
+                <a:latin typeface="Times New Roman" panose="02020603050405020304" pitchFamily="18" charset="0"/>
+                <a:cs typeface="Times New Roman" panose="02020603050405020304" pitchFamily="18" charset="0"/>
+              </a:rPr>
+              <a:t>GraphRAG</a:t>
+            </a:r>
+            <a:endParaRPr lang="en-GB" dirty="0">
+              <a:latin typeface="Times New Roman" panose="02020603050405020304" pitchFamily="18" charset="0"/>
+              <a:cs typeface="Times New Roman" panose="02020603050405020304" pitchFamily="18" charset="0"/>
+            </a:endParaRPr>
+          </a:p>
+          <a:p>
+            <a:pPr marL="285750" lvl="0" indent="-285750" algn="just">
+              <a:lnSpc>
+                <a:spcPct val="150000"/>
+              </a:lnSpc>
+              <a:buFont typeface="Arial" panose="020B0604020202020204" pitchFamily="34" charset="0"/>
+              <a:buChar char="•"/>
+            </a:pPr>
+            <a:endParaRPr lang="en-GB" dirty="0">
+              <a:latin typeface="Times New Roman" panose="02020603050405020304" pitchFamily="18" charset="0"/>
+              <a:cs typeface="Times New Roman" panose="02020603050405020304" pitchFamily="18" charset="0"/>
+            </a:endParaRPr>
+          </a:p>
+          <a:p>
+            <a:pPr marL="285750" lvl="0" indent="-285750" algn="just">
+              <a:lnSpc>
+                <a:spcPct val="150000"/>
+              </a:lnSpc>
+              <a:buFont typeface="Arial" panose="020B0604020202020204" pitchFamily="34" charset="0"/>
+              <a:buChar char="•"/>
+            </a:pPr>
+            <a:r>
+              <a:rPr lang="en-GB" b="1" dirty="0">
+                <a:latin typeface="Times New Roman" panose="02020603050405020304" pitchFamily="18" charset="0"/>
+                <a:cs typeface="Times New Roman" panose="02020603050405020304" pitchFamily="18" charset="0"/>
+              </a:rPr>
+              <a:t>Adaptive Query Router: </a:t>
+            </a:r>
+            <a:r>
+              <a:rPr lang="en-GB" dirty="0">
+                <a:latin typeface="Times New Roman" panose="02020603050405020304" pitchFamily="18" charset="0"/>
+                <a:cs typeface="Times New Roman" panose="02020603050405020304" pitchFamily="18" charset="0"/>
+              </a:rPr>
+              <a:t>Fast-path regex + LLM fallback with topology density scoring and sub-0.4s routing decision</a:t>
+            </a:r>
+          </a:p>
+          <a:p>
+            <a:pPr marL="285750" lvl="0" indent="-285750" algn="just">
+              <a:lnSpc>
+                <a:spcPct val="150000"/>
+              </a:lnSpc>
+              <a:buFont typeface="Arial" panose="020B0604020202020204" pitchFamily="34" charset="0"/>
+              <a:buChar char="•"/>
+            </a:pPr>
+            <a:endParaRPr lang="en-GB" dirty="0">
+              <a:latin typeface="Times New Roman" panose="02020603050405020304" pitchFamily="18" charset="0"/>
+              <a:cs typeface="Times New Roman" panose="02020603050405020304" pitchFamily="18" charset="0"/>
+            </a:endParaRPr>
+          </a:p>
+          <a:p>
+            <a:pPr marL="285750" lvl="0" indent="-285750" algn="just">
+              <a:lnSpc>
+                <a:spcPct val="150000"/>
+              </a:lnSpc>
+              <a:buFont typeface="Arial" panose="020B0604020202020204" pitchFamily="34" charset="0"/>
+              <a:buChar char="•"/>
+            </a:pPr>
+            <a:r>
+              <a:rPr lang="en-GB" b="1" dirty="0">
+                <a:latin typeface="Times New Roman" panose="02020603050405020304" pitchFamily="18" charset="0"/>
+                <a:cs typeface="Times New Roman" panose="02020603050405020304" pitchFamily="18" charset="0"/>
+              </a:rPr>
+              <a:t>Structured Evidence Formatter: </a:t>
+            </a:r>
+            <a:r>
+              <a:rPr lang="en-GB" dirty="0">
+                <a:latin typeface="Times New Roman" panose="02020603050405020304" pitchFamily="18" charset="0"/>
+                <a:cs typeface="Times New Roman" panose="02020603050405020304" pitchFamily="18" charset="0"/>
+              </a:rPr>
+              <a:t>Dynamic Markdown table generator grouping metrics, risks, and market conditions with 0% fact-dropping guarantee</a:t>
+            </a:r>
+          </a:p>
+          <a:p>
+            <a:pPr marL="285750" lvl="0" indent="-285750" algn="just">
+              <a:lnSpc>
+                <a:spcPct val="150000"/>
+              </a:lnSpc>
+              <a:buFont typeface="Arial" panose="020B0604020202020204" pitchFamily="34" charset="0"/>
+              <a:buChar char="•"/>
+            </a:pPr>
+            <a:endParaRPr lang="en-GB" dirty="0">
+              <a:latin typeface="Times New Roman" panose="02020603050405020304" pitchFamily="18" charset="0"/>
+              <a:cs typeface="Times New Roman" panose="02020603050405020304" pitchFamily="18" charset="0"/>
+            </a:endParaRPr>
+          </a:p>
+          <a:p>
+            <a:pPr marL="285750" lvl="0" indent="-285750" algn="just">
+              <a:lnSpc>
+                <a:spcPct val="150000"/>
+              </a:lnSpc>
+              <a:buFont typeface="Arial" panose="020B0604020202020204" pitchFamily="34" charset="0"/>
+              <a:buChar char="•"/>
+            </a:pPr>
+            <a:r>
+              <a:rPr lang="en-GB" b="1" dirty="0">
+                <a:latin typeface="Times New Roman" panose="02020603050405020304" pitchFamily="18" charset="0"/>
+                <a:cs typeface="Times New Roman" panose="02020603050405020304" pitchFamily="18" charset="0"/>
+              </a:rPr>
+              <a:t>Parallel Hybrid &amp; Symbolic Engines:</a:t>
+            </a:r>
+            <a:r>
+              <a:rPr lang="en-GB" dirty="0">
+                <a:latin typeface="Times New Roman" panose="02020603050405020304" pitchFamily="18" charset="0"/>
+                <a:cs typeface="Times New Roman" panose="02020603050405020304" pitchFamily="18" charset="0"/>
+              </a:rPr>
+              <a:t> Concurrent retrieval merging vector text with graph triples, alongside deterministic Python arithmetic for multi-year YoY growth</a:t>
+            </a:r>
+          </a:p>
+          <a:p>
+            <a:pPr algn="just">
+              <a:lnSpc>
+                <a:spcPct val="150000"/>
+              </a:lnSpc>
+            </a:pPr>
+            <a:endParaRPr lang="en-GB" dirty="0">
+              <a:latin typeface="Times New Roman" panose="02020603050405020304" pitchFamily="18" charset="0"/>
+              <a:cs typeface="Times New Roman" panose="02020603050405020304" pitchFamily="18" charset="0"/>
+            </a:endParaRPr>
           </a:p>
         </p:txBody>
       </p:sp>
@@ -4527,7 +11269,10 @@
           <a:p>
             <a:pPr algn="l"/>
             <a:r>
-              <a:rPr sz="2700" b="1"/>
+              <a:rPr sz="2700" b="1" dirty="0">
+                <a:latin typeface="Times New Roman" panose="02020603050405020304" pitchFamily="18" charset="0"/>
+                <a:cs typeface="Times New Roman" panose="02020603050405020304" pitchFamily="18" charset="0"/>
+              </a:rPr>
               <a:t>06 | Experimental Setup &amp; Test Cases</a:t>
             </a:r>
           </a:p>
@@ -4535,14 +11280,20 @@
       </p:sp>
       <p:sp>
         <p:nvSpPr>
-          <p:cNvPr id="4" name="TextBox 3"/>
+          <p:cNvPr id="3" name="TextBox 2">
+            <a:extLst>
+              <a:ext uri="{FF2B5EF4-FFF2-40B4-BE49-F238E27FC236}">
+                <a16:creationId xmlns:a16="http://schemas.microsoft.com/office/drawing/2014/main" id="{002AEDB0-3AF5-7801-2F0E-1F7AA3CF3C8A}"/>
+              </a:ext>
+            </a:extLst>
+          </p:cNvPr>
           <p:cNvSpPr txBox="1"/>
           <p:nvPr/>
         </p:nvSpPr>
         <p:spPr>
           <a:xfrm>
-            <a:off x="502920" y="6446520"/>
-            <a:ext cx="10972800" cy="201168"/>
+            <a:off x="764931" y="1257300"/>
+            <a:ext cx="8062546" cy="5444054"/>
           </a:xfrm>
           <a:prstGeom prst="rect">
             <a:avLst/>
@@ -4550,16 +11301,193 @@
           <a:noFill/>
         </p:spPr>
         <p:txBody>
-          <a:bodyPr wrap="square">
+          <a:bodyPr wrap="square" rtlCol="0">
             <a:spAutoFit/>
           </a:bodyPr>
           <a:lstStyle/>
           <a:p>
-            <a:pPr algn="l"/>
-            <a:r>
-              <a:rPr sz="900" b="0"/>
-              <a:t>FIRST REVIEW • SAMPLE FORMAT • Slide 7</a:t>
-            </a:r>
+            <a:pPr marL="285750" lvl="0" indent="-285750" algn="just">
+              <a:lnSpc>
+                <a:spcPct val="150000"/>
+              </a:lnSpc>
+              <a:buFont typeface="Arial" panose="020B0604020202020204" pitchFamily="34" charset="0"/>
+              <a:buChar char="•"/>
+            </a:pPr>
+            <a:r>
+              <a:rPr lang="en-GB" b="1" dirty="0">
+                <a:latin typeface="Times New Roman" panose="02020603050405020304" pitchFamily="18" charset="0"/>
+                <a:cs typeface="Times New Roman" panose="02020603050405020304" pitchFamily="18" charset="0"/>
+              </a:rPr>
+              <a:t>Dataset Scope:</a:t>
+            </a:r>
+            <a:r>
+              <a:rPr lang="en-GB" dirty="0">
+                <a:latin typeface="Times New Roman" panose="02020603050405020304" pitchFamily="18" charset="0"/>
+                <a:cs typeface="Times New Roman" panose="02020603050405020304" pitchFamily="18" charset="0"/>
+              </a:rPr>
+              <a:t> 51,927 triplets from SEC 10-K filings dataset + 20 stratified </a:t>
+            </a:r>
+            <a:r>
+              <a:rPr lang="en-GB" dirty="0" err="1">
+                <a:latin typeface="Times New Roman" panose="02020603050405020304" pitchFamily="18" charset="0"/>
+                <a:cs typeface="Times New Roman" panose="02020603050405020304" pitchFamily="18" charset="0"/>
+              </a:rPr>
+              <a:t>FinQA</a:t>
+            </a:r>
+            <a:r>
+              <a:rPr lang="en-GB" dirty="0">
+                <a:latin typeface="Times New Roman" panose="02020603050405020304" pitchFamily="18" charset="0"/>
+                <a:cs typeface="Times New Roman" panose="02020603050405020304" pitchFamily="18" charset="0"/>
+              </a:rPr>
+              <a:t> benchmark questions</a:t>
+            </a:r>
+          </a:p>
+          <a:p>
+            <a:pPr marL="285750" lvl="0" indent="-285750" algn="just">
+              <a:lnSpc>
+                <a:spcPct val="150000"/>
+              </a:lnSpc>
+              <a:buFont typeface="Arial" panose="020B0604020202020204" pitchFamily="34" charset="0"/>
+              <a:buChar char="•"/>
+            </a:pPr>
+            <a:endParaRPr lang="en-GB" dirty="0">
+              <a:latin typeface="Times New Roman" panose="02020603050405020304" pitchFamily="18" charset="0"/>
+              <a:cs typeface="Times New Roman" panose="02020603050405020304" pitchFamily="18" charset="0"/>
+            </a:endParaRPr>
+          </a:p>
+          <a:p>
+            <a:pPr marL="285750" lvl="0" indent="-285750" algn="just">
+              <a:lnSpc>
+                <a:spcPct val="150000"/>
+              </a:lnSpc>
+              <a:buFont typeface="Arial" panose="020B0604020202020204" pitchFamily="34" charset="0"/>
+              <a:buChar char="•"/>
+            </a:pPr>
+            <a:r>
+              <a:rPr lang="en-GB" b="1" dirty="0">
+                <a:latin typeface="Times New Roman" panose="02020603050405020304" pitchFamily="18" charset="0"/>
+                <a:cs typeface="Times New Roman" panose="02020603050405020304" pitchFamily="18" charset="0"/>
+              </a:rPr>
+              <a:t>Inference Stack:</a:t>
+            </a:r>
+            <a:r>
+              <a:rPr lang="en-GB" dirty="0">
+                <a:latin typeface="Times New Roman" panose="02020603050405020304" pitchFamily="18" charset="0"/>
+                <a:cs typeface="Times New Roman" panose="02020603050405020304" pitchFamily="18" charset="0"/>
+              </a:rPr>
+              <a:t> BAAI/bge-small-en-v1.5 embeddings (384-dim), Neo4j </a:t>
+            </a:r>
+            <a:r>
+              <a:rPr lang="en-GB" dirty="0" err="1">
+                <a:latin typeface="Times New Roman" panose="02020603050405020304" pitchFamily="18" charset="0"/>
+                <a:cs typeface="Times New Roman" panose="02020603050405020304" pitchFamily="18" charset="0"/>
+              </a:rPr>
+              <a:t>AuraDB</a:t>
+            </a:r>
+            <a:r>
+              <a:rPr lang="en-GB" dirty="0">
+                <a:latin typeface="Times New Roman" panose="02020603050405020304" pitchFamily="18" charset="0"/>
+                <a:cs typeface="Times New Roman" panose="02020603050405020304" pitchFamily="18" charset="0"/>
+              </a:rPr>
+              <a:t> + </a:t>
+            </a:r>
+            <a:r>
+              <a:rPr lang="en-GB" dirty="0" err="1">
+                <a:latin typeface="Times New Roman" panose="02020603050405020304" pitchFamily="18" charset="0"/>
+                <a:cs typeface="Times New Roman" panose="02020603050405020304" pitchFamily="18" charset="0"/>
+              </a:rPr>
+              <a:t>NetworkX</a:t>
+            </a:r>
+            <a:r>
+              <a:rPr lang="en-GB" dirty="0">
+                <a:latin typeface="Times New Roman" panose="02020603050405020304" pitchFamily="18" charset="0"/>
+                <a:cs typeface="Times New Roman" panose="02020603050405020304" pitchFamily="18" charset="0"/>
+              </a:rPr>
+              <a:t> graph snapshot, Qwen 3.8-27B LLM.</a:t>
+            </a:r>
+          </a:p>
+          <a:p>
+            <a:pPr marL="285750" lvl="0" indent="-285750" algn="just">
+              <a:lnSpc>
+                <a:spcPct val="150000"/>
+              </a:lnSpc>
+              <a:buFont typeface="Arial" panose="020B0604020202020204" pitchFamily="34" charset="0"/>
+              <a:buChar char="•"/>
+            </a:pPr>
+            <a:endParaRPr lang="en-GB" dirty="0">
+              <a:latin typeface="Times New Roman" panose="02020603050405020304" pitchFamily="18" charset="0"/>
+              <a:cs typeface="Times New Roman" panose="02020603050405020304" pitchFamily="18" charset="0"/>
+            </a:endParaRPr>
+          </a:p>
+          <a:p>
+            <a:pPr marL="285750" lvl="0" indent="-285750" algn="just">
+              <a:lnSpc>
+                <a:spcPct val="150000"/>
+              </a:lnSpc>
+              <a:buFont typeface="Arial" panose="020B0604020202020204" pitchFamily="34" charset="0"/>
+              <a:buChar char="•"/>
+            </a:pPr>
+            <a:r>
+              <a:rPr lang="en-GB" b="1" dirty="0">
+                <a:latin typeface="Times New Roman" panose="02020603050405020304" pitchFamily="18" charset="0"/>
+                <a:cs typeface="Times New Roman" panose="02020603050405020304" pitchFamily="18" charset="0"/>
+              </a:rPr>
+              <a:t>Evaluation Scenarios:</a:t>
+            </a:r>
+            <a:r>
+              <a:rPr lang="en-GB" dirty="0">
+                <a:latin typeface="Times New Roman" panose="02020603050405020304" pitchFamily="18" charset="0"/>
+                <a:cs typeface="Times New Roman" panose="02020603050405020304" pitchFamily="18" charset="0"/>
+              </a:rPr>
+              <a:t> Oracle Reasoning Test (isolating reasoning from retrieval), Adaptive Routing Ablation (A1–A6), Formatting Ablation, and 3-Way Hybrid Retrieval Evaluation</a:t>
+            </a:r>
+          </a:p>
+          <a:p>
+            <a:pPr marL="285750" lvl="0" indent="-285750" algn="just">
+              <a:lnSpc>
+                <a:spcPct val="150000"/>
+              </a:lnSpc>
+              <a:buFont typeface="Arial" panose="020B0604020202020204" pitchFamily="34" charset="0"/>
+              <a:buChar char="•"/>
+            </a:pPr>
+            <a:endParaRPr lang="en-GB" dirty="0">
+              <a:latin typeface="Times New Roman" panose="02020603050405020304" pitchFamily="18" charset="0"/>
+              <a:cs typeface="Times New Roman" panose="02020603050405020304" pitchFamily="18" charset="0"/>
+            </a:endParaRPr>
+          </a:p>
+          <a:p>
+            <a:pPr marL="285750" lvl="0" indent="-285750" algn="just">
+              <a:lnSpc>
+                <a:spcPct val="150000"/>
+              </a:lnSpc>
+              <a:buFont typeface="Arial" panose="020B0604020202020204" pitchFamily="34" charset="0"/>
+              <a:buChar char="•"/>
+            </a:pPr>
+            <a:r>
+              <a:rPr lang="en-GB" b="1" dirty="0">
+                <a:latin typeface="Times New Roman" panose="02020603050405020304" pitchFamily="18" charset="0"/>
+                <a:cs typeface="Times New Roman" panose="02020603050405020304" pitchFamily="18" charset="0"/>
+              </a:rPr>
+              <a:t>Key Metrics:</a:t>
+            </a:r>
+            <a:r>
+              <a:rPr lang="en-GB" dirty="0">
+                <a:latin typeface="Times New Roman" panose="02020603050405020304" pitchFamily="18" charset="0"/>
+                <a:cs typeface="Times New Roman" panose="02020603050405020304" pitchFamily="18" charset="0"/>
+              </a:rPr>
+              <a:t> Routing Accuracy (%), Distractor Resistance (%), Latency Reduction (%), YoY Math Exact Match (%), End-to-End Latency (s)</a:t>
+            </a:r>
+          </a:p>
+          <a:p>
+            <a:pPr algn="just">
+              <a:lnSpc>
+                <a:spcPct val="150000"/>
+              </a:lnSpc>
+            </a:pPr>
+            <a:endParaRPr lang="en-GB" dirty="0">
+              <a:latin typeface="Times New Roman" panose="02020603050405020304" pitchFamily="18" charset="0"/>
+              <a:cs typeface="Times New Roman" panose="02020603050405020304" pitchFamily="18" charset="0"/>
+            </a:endParaRPr>
           </a:p>
         </p:txBody>
       </p:sp>
@@ -4612,7 +11540,10 @@
           <a:p>
             <a:pPr algn="l"/>
             <a:r>
-              <a:rPr sz="2700" b="1"/>
+              <a:rPr sz="2700" b="1" dirty="0">
+                <a:latin typeface="Times New Roman" panose="02020603050405020304" pitchFamily="18" charset="0"/>
+                <a:cs typeface="Times New Roman" panose="02020603050405020304" pitchFamily="18" charset="0"/>
+              </a:rPr>
               <a:t>07 | Results – Quantitative Performance</a:t>
             </a:r>
           </a:p>
@@ -4620,14 +11551,20 @@
       </p:sp>
       <p:sp>
         <p:nvSpPr>
-          <p:cNvPr id="4" name="TextBox 3"/>
+          <p:cNvPr id="3" name="TextBox 2">
+            <a:extLst>
+              <a:ext uri="{FF2B5EF4-FFF2-40B4-BE49-F238E27FC236}">
+                <a16:creationId xmlns:a16="http://schemas.microsoft.com/office/drawing/2014/main" id="{D8774C56-17C8-BECE-900F-CF6F43A79EFF}"/>
+              </a:ext>
+            </a:extLst>
+          </p:cNvPr>
           <p:cNvSpPr txBox="1"/>
           <p:nvPr/>
         </p:nvSpPr>
         <p:spPr>
           <a:xfrm>
-            <a:off x="502920" y="6446520"/>
-            <a:ext cx="10972800" cy="201168"/>
+            <a:off x="502920" y="998447"/>
+            <a:ext cx="7507224" cy="5859553"/>
           </a:xfrm>
           <a:prstGeom prst="rect">
             <a:avLst/>
@@ -4635,16 +11572,151 @@
           <a:noFill/>
         </p:spPr>
         <p:txBody>
-          <a:bodyPr wrap="square">
+          <a:bodyPr wrap="square" rtlCol="0">
             <a:spAutoFit/>
           </a:bodyPr>
           <a:lstStyle/>
           <a:p>
-            <a:pPr algn="l"/>
-            <a:r>
-              <a:rPr sz="900" b="0"/>
-              <a:t>FIRST REVIEW • SAMPLE FORMAT • Slide 8</a:t>
-            </a:r>
+            <a:pPr marL="285750" lvl="0" indent="-285750" algn="just">
+              <a:lnSpc>
+                <a:spcPct val="150000"/>
+              </a:lnSpc>
+              <a:buFont typeface="Arial" panose="020B0604020202020204" pitchFamily="34" charset="0"/>
+              <a:buChar char="•"/>
+            </a:pPr>
+            <a:r>
+              <a:rPr lang="en-GB" b="1" dirty="0">
+                <a:latin typeface="Times New Roman" panose="02020603050405020304" pitchFamily="18" charset="0"/>
+                <a:cs typeface="Times New Roman" panose="02020603050405020304" pitchFamily="18" charset="0"/>
+              </a:rPr>
+              <a:t>Oracle Reasoning Degradation:</a:t>
+            </a:r>
+            <a:r>
+              <a:rPr lang="en-GB" dirty="0">
+                <a:latin typeface="Times New Roman" panose="02020603050405020304" pitchFamily="18" charset="0"/>
+                <a:cs typeface="Times New Roman" panose="02020603050405020304" pitchFamily="18" charset="0"/>
+              </a:rPr>
+              <a:t> 100% accuracy on 3-step reasoning drops to 20% on 4-step reasoning (60% overall), validating the necessity of structured evidence formatting</a:t>
+            </a:r>
+          </a:p>
+          <a:p>
+            <a:pPr marL="285750" lvl="0" indent="-285750" algn="just">
+              <a:lnSpc>
+                <a:spcPct val="150000"/>
+              </a:lnSpc>
+              <a:buFont typeface="Arial" panose="020B0604020202020204" pitchFamily="34" charset="0"/>
+              <a:buChar char="•"/>
+            </a:pPr>
+            <a:endParaRPr lang="en-GB" dirty="0">
+              <a:latin typeface="Times New Roman" panose="02020603050405020304" pitchFamily="18" charset="0"/>
+              <a:cs typeface="Times New Roman" panose="02020603050405020304" pitchFamily="18" charset="0"/>
+            </a:endParaRPr>
+          </a:p>
+          <a:p>
+            <a:pPr marL="285750" lvl="0" indent="-285750" algn="just">
+              <a:lnSpc>
+                <a:spcPct val="150000"/>
+              </a:lnSpc>
+              <a:buFont typeface="Arial" panose="020B0604020202020204" pitchFamily="34" charset="0"/>
+              <a:buChar char="•"/>
+            </a:pPr>
+            <a:r>
+              <a:rPr lang="en-GB" b="1" dirty="0">
+                <a:latin typeface="Times New Roman" panose="02020603050405020304" pitchFamily="18" charset="0"/>
+                <a:cs typeface="Times New Roman" panose="02020603050405020304" pitchFamily="18" charset="0"/>
+              </a:rPr>
+              <a:t>Adaptive Routing Efficiency:</a:t>
+            </a:r>
+            <a:r>
+              <a:rPr lang="en-GB" dirty="0">
+                <a:latin typeface="Times New Roman" panose="02020603050405020304" pitchFamily="18" charset="0"/>
+                <a:cs typeface="Times New Roman" panose="02020603050405020304" pitchFamily="18" charset="0"/>
+              </a:rPr>
+              <a:t> 6/6 (100%) routing accuracy, achieving 64% – 83% latency reduction on descriptive queries by avoiding heavy graph traversals</a:t>
+            </a:r>
+          </a:p>
+          <a:p>
+            <a:pPr marL="285750" lvl="0" indent="-285750" algn="just">
+              <a:lnSpc>
+                <a:spcPct val="150000"/>
+              </a:lnSpc>
+              <a:buFont typeface="Arial" panose="020B0604020202020204" pitchFamily="34" charset="0"/>
+              <a:buChar char="•"/>
+            </a:pPr>
+            <a:endParaRPr lang="en-GB" dirty="0">
+              <a:latin typeface="Times New Roman" panose="02020603050405020304" pitchFamily="18" charset="0"/>
+              <a:cs typeface="Times New Roman" panose="02020603050405020304" pitchFamily="18" charset="0"/>
+            </a:endParaRPr>
+          </a:p>
+          <a:p>
+            <a:pPr marL="285750" lvl="0" indent="-285750" algn="just">
+              <a:lnSpc>
+                <a:spcPct val="150000"/>
+              </a:lnSpc>
+              <a:buFont typeface="Arial" panose="020B0604020202020204" pitchFamily="34" charset="0"/>
+              <a:buChar char="•"/>
+            </a:pPr>
+            <a:r>
+              <a:rPr lang="en-GB" b="1" dirty="0">
+                <a:latin typeface="Times New Roman" panose="02020603050405020304" pitchFamily="18" charset="0"/>
+                <a:cs typeface="Times New Roman" panose="02020603050405020304" pitchFamily="18" charset="0"/>
+              </a:rPr>
+              <a:t>Distractor Resistance:</a:t>
+            </a:r>
+            <a:r>
+              <a:rPr lang="en-GB" dirty="0">
+                <a:latin typeface="Times New Roman" panose="02020603050405020304" pitchFamily="18" charset="0"/>
+                <a:cs typeface="Times New Roman" panose="02020603050405020304" pitchFamily="18" charset="0"/>
+              </a:rPr>
+              <a:t> Structured Markdown tables improved factual focus from 66.7% (raw triples) → 100% on complex entity classification queries</a:t>
+            </a:r>
+          </a:p>
+          <a:p>
+            <a:pPr marL="285750" lvl="0" indent="-285750" algn="just">
+              <a:lnSpc>
+                <a:spcPct val="150000"/>
+              </a:lnSpc>
+              <a:buFont typeface="Arial" panose="020B0604020202020204" pitchFamily="34" charset="0"/>
+              <a:buChar char="•"/>
+            </a:pPr>
+            <a:endParaRPr lang="en-GB" dirty="0">
+              <a:latin typeface="Times New Roman" panose="02020603050405020304" pitchFamily="18" charset="0"/>
+              <a:cs typeface="Times New Roman" panose="02020603050405020304" pitchFamily="18" charset="0"/>
+            </a:endParaRPr>
+          </a:p>
+          <a:p>
+            <a:pPr marL="285750" lvl="0" indent="-285750" algn="just">
+              <a:lnSpc>
+                <a:spcPct val="150000"/>
+              </a:lnSpc>
+              <a:buFont typeface="Arial" panose="020B0604020202020204" pitchFamily="34" charset="0"/>
+              <a:buChar char="•"/>
+            </a:pPr>
+            <a:r>
+              <a:rPr lang="en-GB" b="1" dirty="0">
+                <a:latin typeface="Times New Roman" panose="02020603050405020304" pitchFamily="18" charset="0"/>
+                <a:cs typeface="Times New Roman" panose="02020603050405020304" pitchFamily="18" charset="0"/>
+              </a:rPr>
+              <a:t>Symbolic Math Precision:</a:t>
+            </a:r>
+            <a:r>
+              <a:rPr lang="en-GB" dirty="0">
+                <a:latin typeface="Times New Roman" panose="02020603050405020304" pitchFamily="18" charset="0"/>
+                <a:cs typeface="Times New Roman" panose="02020603050405020304" pitchFamily="18" charset="0"/>
+              </a:rPr>
+              <a:t> 100% exact numerical match on multi-year financial growth queries, eliminating arithmetic hallucinations.</a:t>
+            </a:r>
+          </a:p>
+          <a:p>
+            <a:pPr algn="just">
+              <a:lnSpc>
+                <a:spcPct val="150000"/>
+              </a:lnSpc>
+            </a:pPr>
+            <a:endParaRPr lang="en-GB" dirty="0">
+              <a:latin typeface="Times New Roman" panose="02020603050405020304" pitchFamily="18" charset="0"/>
+              <a:cs typeface="Times New Roman" panose="02020603050405020304" pitchFamily="18" charset="0"/>
+            </a:endParaRPr>
           </a:p>
         </p:txBody>
       </p:sp>
@@ -4697,7 +11769,10 @@
           <a:p>
             <a:pPr algn="l"/>
             <a:r>
-              <a:rPr sz="2700" b="1"/>
+              <a:rPr sz="2700" b="1" dirty="0">
+                <a:latin typeface="Times New Roman" panose="02020603050405020304" pitchFamily="18" charset="0"/>
+                <a:cs typeface="Times New Roman" panose="02020603050405020304" pitchFamily="18" charset="0"/>
+              </a:rPr>
               <a:t>08 | Results Analysis &amp; Interpretation</a:t>
             </a:r>
           </a:p>
@@ -4705,14 +11780,20 @@
       </p:sp>
       <p:sp>
         <p:nvSpPr>
-          <p:cNvPr id="4" name="TextBox 3"/>
+          <p:cNvPr id="3" name="TextBox 2">
+            <a:extLst>
+              <a:ext uri="{FF2B5EF4-FFF2-40B4-BE49-F238E27FC236}">
+                <a16:creationId xmlns:a16="http://schemas.microsoft.com/office/drawing/2014/main" id="{657807C9-34F1-B375-54CE-534349CFA2E2}"/>
+              </a:ext>
+            </a:extLst>
+          </p:cNvPr>
           <p:cNvSpPr txBox="1"/>
           <p:nvPr/>
         </p:nvSpPr>
         <p:spPr>
           <a:xfrm>
-            <a:off x="502920" y="6446520"/>
-            <a:ext cx="10972800" cy="201168"/>
+            <a:off x="729762" y="1185346"/>
+            <a:ext cx="7335246" cy="5444054"/>
           </a:xfrm>
           <a:prstGeom prst="rect">
             <a:avLst/>
@@ -4720,16 +11801,112 @@
           <a:noFill/>
         </p:spPr>
         <p:txBody>
-          <a:bodyPr wrap="square">
+          <a:bodyPr wrap="square" rtlCol="0">
             <a:spAutoFit/>
           </a:bodyPr>
           <a:lstStyle/>
           <a:p>
-            <a:pPr algn="l"/>
-            <a:r>
-              <a:rPr sz="900" b="0"/>
-              <a:t>FIRST REVIEW • SAMPLE FORMAT • Slide 9</a:t>
-            </a:r>
+            <a:pPr marL="285750" lvl="0" indent="-285750" algn="just">
+              <a:lnSpc>
+                <a:spcPct val="150000"/>
+              </a:lnSpc>
+              <a:buFont typeface="Arial" panose="020B0604020202020204" pitchFamily="34" charset="0"/>
+              <a:buChar char="•"/>
+            </a:pPr>
+            <a:r>
+              <a:rPr lang="en-GB" b="1" dirty="0">
+                <a:latin typeface="Times New Roman" panose="02020603050405020304" pitchFamily="18" charset="0"/>
+                <a:cs typeface="Times New Roman" panose="02020603050405020304" pitchFamily="18" charset="0"/>
+              </a:rPr>
+              <a:t>The Retrieval-vs-Reasoning Gap Confirmed:</a:t>
+            </a:r>
+            <a:r>
+              <a:rPr lang="en-GB" dirty="0">
+                <a:latin typeface="Times New Roman" panose="02020603050405020304" pitchFamily="18" charset="0"/>
+                <a:cs typeface="Times New Roman" panose="02020603050405020304" pitchFamily="18" charset="0"/>
+              </a:rPr>
+              <a:t> High retrieval recall alone does not guarantee correct answers, raw triple dumps overload LLMs, leading to goal substitution and dropped terms</a:t>
+            </a:r>
+          </a:p>
+          <a:p>
+            <a:pPr marL="285750" lvl="0" indent="-285750" algn="just">
+              <a:lnSpc>
+                <a:spcPct val="150000"/>
+              </a:lnSpc>
+              <a:buFont typeface="Arial" panose="020B0604020202020204" pitchFamily="34" charset="0"/>
+              <a:buChar char="•"/>
+            </a:pPr>
+            <a:r>
+              <a:rPr lang="en-GB" b="1" dirty="0">
+                <a:latin typeface="Times New Roman" panose="02020603050405020304" pitchFamily="18" charset="0"/>
+                <a:cs typeface="Times New Roman" panose="02020603050405020304" pitchFamily="18" charset="0"/>
+              </a:rPr>
+              <a:t>Why Formatting Solves Entity-Type Blindness:</a:t>
+            </a:r>
+            <a:r>
+              <a:rPr lang="en-GB" dirty="0">
+                <a:latin typeface="Times New Roman" panose="02020603050405020304" pitchFamily="18" charset="0"/>
+                <a:cs typeface="Times New Roman" panose="02020603050405020304" pitchFamily="18" charset="0"/>
+              </a:rPr>
+              <a:t> Flat triples cause models to confuse risk factors with financial metrics; categorized tables with PRIMARY MATCH anchors restore semantic focus</a:t>
+            </a:r>
+          </a:p>
+          <a:p>
+            <a:pPr marL="285750" lvl="0" indent="-285750" algn="just">
+              <a:lnSpc>
+                <a:spcPct val="150000"/>
+              </a:lnSpc>
+              <a:buFont typeface="Arial" panose="020B0604020202020204" pitchFamily="34" charset="0"/>
+              <a:buChar char="•"/>
+            </a:pPr>
+            <a:r>
+              <a:rPr lang="en-GB" b="1" dirty="0">
+                <a:latin typeface="Times New Roman" panose="02020603050405020304" pitchFamily="18" charset="0"/>
+                <a:cs typeface="Times New Roman" panose="02020603050405020304" pitchFamily="18" charset="0"/>
+              </a:rPr>
+              <a:t>Why Vector RAG Fails in Finance:</a:t>
+            </a:r>
+            <a:r>
+              <a:rPr lang="en-GB" dirty="0">
+                <a:latin typeface="Times New Roman" panose="02020603050405020304" pitchFamily="18" charset="0"/>
+                <a:cs typeface="Times New Roman" panose="02020603050405020304" pitchFamily="18" charset="0"/>
+              </a:rPr>
+              <a:t> Dense embeddings capture broad topical keywords but cannot resolve 2-hop regulatory or litigation relationships across corporate entities</a:t>
+            </a:r>
+          </a:p>
+          <a:p>
+            <a:pPr marL="285750" lvl="0" indent="-285750" algn="just">
+              <a:lnSpc>
+                <a:spcPct val="150000"/>
+              </a:lnSpc>
+              <a:buFont typeface="Arial" panose="020B0604020202020204" pitchFamily="34" charset="0"/>
+              <a:buChar char="•"/>
+            </a:pPr>
+            <a:r>
+              <a:rPr lang="en-GB" b="1" dirty="0">
+                <a:latin typeface="Times New Roman" panose="02020603050405020304" pitchFamily="18" charset="0"/>
+                <a:cs typeface="Times New Roman" panose="02020603050405020304" pitchFamily="18" charset="0"/>
+              </a:rPr>
+              <a:t>Compute Optimization via Routing:</a:t>
+            </a:r>
+            <a:r>
+              <a:rPr lang="en-GB" dirty="0">
+                <a:latin typeface="Times New Roman" panose="02020603050405020304" pitchFamily="18" charset="0"/>
+                <a:cs typeface="Times New Roman" panose="02020603050405020304" pitchFamily="18" charset="0"/>
+              </a:rPr>
+              <a:t> Running full graph traversal on every query wastes 50–80% of compute; adaptive routing preserves accuracy with speed on simple queries</a:t>
+            </a:r>
+          </a:p>
+          <a:p>
+            <a:pPr algn="just">
+              <a:lnSpc>
+                <a:spcPct val="150000"/>
+              </a:lnSpc>
+            </a:pPr>
+            <a:endParaRPr lang="en-GB" dirty="0">
+              <a:latin typeface="Times New Roman" panose="02020603050405020304" pitchFamily="18" charset="0"/>
+              <a:cs typeface="Times New Roman" panose="02020603050405020304" pitchFamily="18" charset="0"/>
+            </a:endParaRPr>
           </a:p>
         </p:txBody>
       </p:sp>
